--- a/01-slides/W06-Domain-Modeling.pptx
+++ b/01-slides/W06-Domain-Modeling.pptx
@@ -5,7 +5,7 @@
     <p:sldMasterId id="2147483648" r:id="rId0"/>
   </p:sldMasterIdLst>
   <p:notesMasterIdLst>
-    <p:notesMasterId r:id="rId39"/>
+    <p:notesMasterId r:id="rId40"/>
   </p:notesMasterIdLst>
   <p:sldIdLst>
     <p:sldId id="256" r:id="rId1"/>
@@ -46,6 +46,7 @@
     <p:sldId id="291" r:id="rId36"/>
     <p:sldId id="292" r:id="rId37"/>
     <p:sldId id="293" r:id="rId38"/>
+    <p:sldId id="294" r:id="rId39"/>
   </p:sldIdLst>
   <p:sldSz cx="12192000" cy="6858000"/>
   <p:notesSz cx="6858000" cy="12192000"/>
@@ -999,7 +1000,7 @@
   <p:cSld>
     <p:spTree>
       <p:nvGrpSpPr>
-        <p:cNvPr id="15" name="" descr="&lt;Slide style={{ background: '#FFFFFF', padding: 0 }}&gt;&#10;  &lt;Box style={{ height: 72, background: '#1E4FA8', padding: '0 40px', flexDirection: 'row', alignItems: 'center', justifyContent: 'space-between' }}&gt;&#10;    &lt;Text style={{ fontSize: 15, color: '#B9CDF0', letterSpacing: 1 }}&gt;ISAD · INFORMATION SYSTEMS ANALYSIS &amp;amp; DESIGN&lt;/Text&gt;&#10;    &lt;Text style={{ fontSize: 15, color: '#B9CDF0' }}&gt;W06 · CONCEPTUAL VS. DESIGN&lt;/Text&gt;&#10;  &lt;/Box&gt;&#10;  &lt;Box style={{ padding: '13px 40px 0 40px', flexDirection: 'row', alignItems: 'center', justifyContent: 'space-between' }}&gt;&#10;    &lt;Text style={{ fontSize: 29, fontWeight: 'bold', color: '#0E3F8C' }}&gt;Three Wrong Reasons to Add a Class&lt;/Text&gt;&#10;    &lt;Text style={{ fontSize: 14, color: '#1E4FA8', fontWeight: 'bold' }}&gt;10 / 38&lt;/Text&gt;&#10;  &lt;/Box&gt;&#10;  &lt;Box style={{ flex: 1, padding: '10px 40px 0 40px' }}&gt;&#10;    &lt;Table&#10;      style={{ width: '100%', height: '100%' }}&#10;      defaultTextStyle={{ fontSize: 13.5, textAlign: 'left', color: '#1A2230' }}&#10;      defaultCellStyle={{&#10;        border: {&#10;          left: { width: 1, color: '#E5E7EB' },&#10;          right: { width: 1, color: '#E5E7EB' },&#10;          top: { width: 1, color: '#E5E7EB' },&#10;          bottom: { width: 1, color: '#E5E7EB' },&#10;        },&#10;      }}&#10;      cells={[&#10;        [&#10;          { text: 'The reason given', textStyle: { bold: true, color: '#FFFFFF', fontSize: 15 }, cellStyle: { background: { color: '#0E3F8C' } } },&#10;          { text: 'What it produces', textStyle: { bold: true, color: '#FFFFFF', fontSize: 15 }, cellStyle: { background: { color: '#8B3230' } } },&#10;          { text: 'What actually decides it', textStyle: { bold: true, color: '#FFFFFF', fontSize: 15 }, cellStyle: { background: { color: '#2B5793' } } },&#10;        ],&#10;        [&#10;          { text: '“We will need a class for that.”', textStyle: { bold: true, color: '#0E3F8C' }, cellStyle: { background: { color: '#F7F9FC' } } },&#10;          { text: 'OrderHelper, OrderUtils, OrderDTO, OrderInfo — four classes that all mean “Order”.', textStyle: { color: '#4A5568' }, cellStyle: { background: { color: '#F7F9FC' } } },&#10;          { text: 'Does it have identity and a sentence in a specification?', textStyle: { color: '#4A5568' }, cellStyle: { background: { color: '#F7F9FC' } } },&#10;        ],&#10;        [&#10;          { text: '“The database needs a table for it.”', textStyle: { bold: true, color: '#0E3F8C' } },&#10;          { text: 'Classes that exist only because a table exists. Relational and object models are not the same thing.', textStyle: { color: '#4A5568' } },&#10;          { text: 'Only whether the client cares about it as a thing.', textStyle: { color: '#4A5568' } },&#10;        ],&#10;        [&#10;          { text: '“Ten classes looks more professional.”', textStyle: { bold: true, color: '#0E3F8C' }, cellStyle: { background: { color: '#F7F9FC' } } },&#10;          { text: 'Padding. Nobody has ever been impressed by a class with no specification sentence.', textStyle: { color: '#4A5568' }, cellStyle: { background: { color: '#F7F9FC' } } },&#10;          { text: 'Nothing. This reason is not valid at any point in the project.', textStyle: { color: '#4A5568' }, cellStyle: { background: { color: '#F7F9FC' } } },&#10;        ],&#10;        [&#10;          { text: '“It needs behaviour, so it must be a class.”', textStyle: { bold: true, color: '#0E3F8C' } },&#10;          { text: 'Behaviour on a thing that has no identity — a “DiscountStrategy” born on page 4.', textStyle: { color: '#4A5568' } },&#10;          { text: 'Does the client name it? Can we point at one of them?', textStyle: { color: '#4A5568' } },&#10;        ],&#10;      ]}&#10;    /&gt;&#10;  &lt;/Box&gt;&#10;  &lt;Box style={{ height: 46, background: '#0E3F8C', padding: '0 40px', flexDirection: 'row', alignItems: 'center', justifyContent: 'center' }}&gt;&#10;    &lt;Text style={{ fontSize: 16.5, color: '#FFFFFF', fontWeight: '600' }}&gt;Every one of these three reasons is really the same reason: “it felt safer to add a box than to leave one out”.&lt;/Text&gt;&#10;  &lt;/Box&gt;&#10;&lt;/Slide&gt;&#10;"/>
+        <p:cNvPr id="15" name="" descr="&lt;Slide style={{ background: '#FFFFFF', padding: 0 }}&gt;&#10;  &lt;Box style={{ height: 72, background: '#1E4FA8', padding: '0 40px', flexDirection: 'row', alignItems: 'center', justifyContent: 'space-between' }}&gt;&#10;    &lt;Text style={{ fontSize: 15, color: '#B9CDF0', letterSpacing: 1 }}&gt;ISAD · INFORMATION SYSTEMS ANALYSIS &amp;amp; DESIGN&lt;/Text&gt;&#10;    &lt;Text style={{ fontSize: 15, color: '#B9CDF0' }}&gt;W06 · CONCEPTUAL VS. DESIGN&lt;/Text&gt;&#10;  &lt;/Box&gt;&#10;  &lt;Box style={{ padding: '13px 40px 0 40px', flexDirection: 'row', alignItems: 'center', justifyContent: 'space-between' }}&gt;&#10;    &lt;Text style={{ fontSize: 29, fontWeight: 'bold', color: '#0E3F8C' }}&gt;Three Wrong Reasons to Add a Class&lt;/Text&gt;&#10;    &lt;Text style={{ fontSize: 14, color: '#1E4FA8', fontWeight: 'bold' }}&gt;10 / 39&lt;/Text&gt;&#10;  &lt;/Box&gt;&#10;  &lt;Box style={{ flex: 1, padding: '10px 40px 0 40px' }}&gt;&#10;    &lt;Table&#10;      style={{ width: '100%', height: '100%' }}&#10;      defaultTextStyle={{ fontSize: 13.5, textAlign: 'left', color: '#1A2230' }}&#10;      defaultCellStyle={{&#10;        border: {&#10;          left: { width: 1, color: '#E5E7EB' },&#10;          right: { width: 1, color: '#E5E7EB' },&#10;          top: { width: 1, color: '#E5E7EB' },&#10;          bottom: { width: 1, color: '#E5E7EB' },&#10;        },&#10;      }}&#10;      cells={[&#10;        [&#10;          { text: 'The reason given', textStyle: { bold: true, color: '#FFFFFF', fontSize: 15 }, cellStyle: { background: { color: '#0E3F8C' } } },&#10;          { text: 'What it produces', textStyle: { bold: true, color: '#FFFFFF', fontSize: 15 }, cellStyle: { background: { color: '#8B3230' } } },&#10;          { text: 'What actually decides it', textStyle: { bold: true, color: '#FFFFFF', fontSize: 15 }, cellStyle: { background: { color: '#2B5793' } } },&#10;        ],&#10;        [&#10;          { text: '“We will need a class for that.”', textStyle: { bold: true, color: '#0E3F8C' }, cellStyle: { background: { color: '#F7F9FC' } } },&#10;          { text: 'OrderHelper, OrderUtils, OrderDTO, OrderInfo — four classes that all mean “Order”.', textStyle: { color: '#4A5568' }, cellStyle: { background: { color: '#F7F9FC' } } },&#10;          { text: 'Does it have identity and a sentence in a specification?', textStyle: { color: '#4A5568' }, cellStyle: { background: { color: '#F7F9FC' } } },&#10;        ],&#10;        [&#10;          { text: '“The database needs a table for it.”', textStyle: { bold: true, color: '#0E3F8C' } },&#10;          { text: 'Classes that exist only because a table exists. Relational and object models are not the same thing.', textStyle: { color: '#4A5568' } },&#10;          { text: 'Only whether the client cares about it as a thing.', textStyle: { color: '#4A5568' } },&#10;        ],&#10;        [&#10;          { text: '“Ten classes looks more professional.”', textStyle: { bold: true, color: '#0E3F8C' }, cellStyle: { background: { color: '#F7F9FC' } } },&#10;          { text: 'Padding. Nobody has ever been impressed by a class with no specification sentence.', textStyle: { color: '#4A5568' }, cellStyle: { background: { color: '#F7F9FC' } } },&#10;          { text: 'Nothing. This reason is not valid at any point in the project.', textStyle: { color: '#4A5568' }, cellStyle: { background: { color: '#F7F9FC' } } },&#10;        ],&#10;        [&#10;          { text: '“It needs behaviour, so it must be a class.”', textStyle: { bold: true, color: '#0E3F8C' } },&#10;          { text: 'Behaviour on a thing that has no identity — a “DiscountStrategy” born on page 4.', textStyle: { color: '#4A5568' } },&#10;          { text: 'Does the client name it? Can we point at one of them?', textStyle: { color: '#4A5568' } },&#10;        ],&#10;      ]}&#10;    /&gt;&#10;  &lt;/Box&gt;&#10;  &lt;Box style={{ height: 46, background: '#0E3F8C', padding: '0 40px', flexDirection: 'row', alignItems: 'center', justifyContent: 'center' }}&gt;&#10;    &lt;Text style={{ fontSize: 16.5, color: '#FFFFFF', fontWeight: '600' }}&gt;Every one of these three reasons is really the same reason: “it felt safer to add a box than to leave one out”.&lt;/Text&gt;&#10;  &lt;/Box&gt;&#10;&lt;/Slide&gt;&#10;"/>
         <p:cNvGrpSpPr/>
         <p:nvPr/>
       </p:nvGrpSpPr>
@@ -1193,7 +1194,7 @@
                 <a:latin typeface="Microsoft YaHei"/>
                 <a:ea typeface="Microsoft YaHei"/>
               </a:rPr>
-              <a:t>10 / 38</a:t>
+              <a:t>10 / 39</a:t>
             </a:r>
             <a:endParaRPr/>
           </a:p>
@@ -1955,7 +1956,7 @@
   <p:cSld>
     <p:spTree>
       <p:nvGrpSpPr>
-        <p:cNvPr id="25" name="" descr="&lt;Slide style={{ background: '#FFFFFF', padding: 0 }}&gt;&#10;  &lt;Box style={{ height: 72, background: '#1E4FA8', padding: '0 40px', flexDirection: 'row', alignItems: 'center', justifyContent: 'space-between' }}&gt;&#10;    &lt;Text style={{ fontSize: 15, color: '#B9CDF0', letterSpacing: 1 }}&gt;ISAD · INFORMATION SYSTEMS ANALYSIS &amp;amp; DESIGN&lt;/Text&gt;&#10;    &lt;Text style={{ fontSize: 15, color: '#B9CDF0' }}&gt;W06 · CONCEPTUAL VS. DESIGN&lt;/Text&gt;&#10;  &lt;/Box&gt;&#10;  &lt;Box style={{ padding: '13px 40px 0 40px', flexDirection: 'row', alignItems: 'center', justifyContent: 'space-between' }}&gt;&#10;    &lt;Text style={{ fontSize: 29, fontWeight: 'bold', color: '#0E3F8C' }}&gt;The Class Name Test&lt;/Text&gt;&#10;    &lt;Text style={{ fontSize: 14, color: '#1E4FA8', fontWeight: 'bold' }}&gt;11 / 38&lt;/Text&gt;&#10;  &lt;/Box&gt;&#10;  &lt;Box style={{ flex: 1, padding: '10px 40px 0 40px', flexDirection: 'row', gap: 26 }}&gt;&#10;    &lt;Box style={{ width: 480, justifyContent: 'center' }}&gt;&#10;      &lt;Box style={{ padding: '18px 20px', background: '#F7F9FC', borderRadius: 10, border: '1px solid #E5E7EB' }}&gt;&#10;        &lt;Text style={{ fontSize: 13, color: '#8B97A8', letterSpacing: 1, marginBottom: 14 }}&gt;FOUR THINGS EVERY NAME SATISFIES&lt;/Text&gt;&#10;        {[&#10;          ['A noun', 'from the requirements, not invented'],&#10;          ['Singular', 'Order, not Orders — collections are a multiplicity'],&#10;          ['Capitalised', 'as every class name is'],&#10;          ['No suffix', 'no Service, no Manager, no DTO, no Entity'],&#10;        ].map((r) =&gt; (&#10;          &lt;Box key={r[0]} style={{ flexDirection: 'row', gap: 12, marginBottom: 11 }}&gt;&#10;            &lt;Box style={{ width: 22, height: 22, borderRadius: 11, background: '#2B7A3D', justifyContent: 'center', alignItems: 'center' }}&gt;&#10;              &lt;Text style={{ fontSize: 12, fontWeight: 'bold', color: '#FFFFFF' }}&gt;✓&lt;/Text&gt;&#10;            &lt;/Box&gt;&#10;            &lt;Box style={{ flex: 1 }}&gt;&#10;              &lt;Text style={{ fontSize: 14.5, fontWeight: 'bold', color: '#0E3F8C' }}&gt;{r[0]}&lt;/Text&gt;&#10;              &lt;Text style={{ fontSize: 12.5, color: '#4A5568', marginTop: 2 }}&gt;{r[1]}&lt;/Text&gt;&#10;            &lt;/Box&gt;&#10;          &lt;/Box&gt;&#10;        ))}&#10;      &lt;/Box&gt;&#10;    &lt;/Box&gt;&#10;    &lt;Box style={{ flex: 1, flexDirection: 'column', justifyContent: 'center', gap: 13 }}&gt;&#10;      &lt;Box style={{ padding: '15px 17px', background: '#FDF3F3', borderRadius: 9, borderLeft: '4px solid #D9534F' }}&gt;&#10;        &lt;Text style={{ fontSize: 16, fontWeight: 'bold', color: '#D9534F' }}&gt;Four names that fail&lt;/Text&gt;&#10;        &lt;Text style={{ fontSize: 13, color: '#4A5568', lineHeight: 1.7, marginTop: 5 }}&gt;&#10;          &lt;Text style={{ fontFamily: 'Menlo, monospace' }}&gt;OrderService&lt;/Text&gt; — a design name, W10&lt;br /&gt;&#10;          &lt;Text style={{ fontFamily: 'Menlo, monospace' }}&gt;OrderData&lt;/Text&gt; — a column, not a concept&lt;br /&gt;&#10;          &lt;Text style={{ fontFamily: 'Menlo, monospace' }}&gt;OrderManager&lt;/Text&gt; — usually a god object&lt;br /&gt;&#10;          &lt;Text style={{ fontFamily: 'Menlo, monospace' }}&gt;OrderEntity&lt;/Text&gt; — a persistence label&#10;        &lt;/Text&gt;&#10;      &lt;/Box&gt;&#10;      &lt;Box style={{ padding: '15px 17px', background: '#EAF6EC', borderRadius: 9, borderLeft: '4px solid #2B7A3D' }}&gt;&#10;        &lt;Text style={{ fontSize: 16, fontWeight: 'bold', color: '#2B7A3D' }}&gt;Rename test&lt;/Text&gt;&#10;        &lt;Text style={{ fontSize: 13, color: '#4A5568', lineHeight: 1.6, marginTop: 5 }}&gt;&#10;          Say the class name out loud to the client. “This is the Order.” If that sentence needs a word of explanation, the name is wrong.&#10;        &lt;/Text&gt;&#10;      &lt;/Box&gt;&#10;      &lt;Box style={{ padding: '15px 17px', background: '#FFFFFF', borderRadius: 9, border: '1px solid #D6DCE5' }}&gt;&#10;        &lt;Text style={{ fontSize: 16, fontWeight: 'bold', color: '#0E3F8C' }}&gt;Singular does not mean “only one”&lt;/Text&gt;&#10;        &lt;Text style={{ fontSize: 13, color: '#4A5568', lineHeight: 1.6, marginTop: 5 }}&gt;&#10;          “How many orders?” is answered with a multiplicity next week — not with a plural class name.&#10;        &lt;/Text&gt;&#10;      &lt;/Box&gt;&#10;      &lt;Box style={{ padding: '12px 16px', background: '#F7F9FC', borderRadius: 8, border: '1px dashed #D6DCE5' }}&gt;&#10;        &lt;Text style={{ fontSize: 12.5, color: '#8B97A8', lineHeight: 1.55 }}&gt;&#10;          One more to watch: “Item” is too vague. MenuItem says which catalogue it came from, and that difference will matter.&#10;        &lt;/Text&gt;&#10;      &lt;/Box&gt;&#10;    &lt;/Box&gt;&#10;  &lt;/Box&gt;&#10;  &lt;Box style={{ height: 34, padding: '0 40px', flexDirection: 'row', alignItems: 'center', justifyContent: 'space-between' }}&gt;&#10;    &lt;Text style={{ fontSize: 13, color: '#8B97A8' }}&gt;ISAD · Fall 2026 · Say the name to the client. If it needs explaining, it is a design name that arrived too early&lt;/Text&gt;&#10;    &lt;Text style={{ fontSize: 14, color: '#1E4FA8', fontWeight: 'bold' }}&gt;11 / 38&lt;/Text&gt;&#10;  &lt;/Box&gt;&#10;&lt;/Slide&gt;&#10;"/>
+        <p:cNvPr id="25" name="" descr="&lt;Slide style={{ background: '#FFFFFF', padding: 0 }}&gt;&#10;  &lt;Box style={{ height: 72, background: '#1E4FA8', padding: '0 40px', flexDirection: 'row', alignItems: 'center', justifyContent: 'space-between' }}&gt;&#10;    &lt;Text style={{ fontSize: 15, color: '#B9CDF0', letterSpacing: 1 }}&gt;ISAD · INFORMATION SYSTEMS ANALYSIS &amp;amp; DESIGN&lt;/Text&gt;&#10;    &lt;Text style={{ fontSize: 15, color: '#B9CDF0' }}&gt;W06 · CONCEPTUAL VS. DESIGN&lt;/Text&gt;&#10;  &lt;/Box&gt;&#10;  &lt;Box style={{ padding: '13px 40px 0 40px', flexDirection: 'row', alignItems: 'center', justifyContent: 'space-between' }}&gt;&#10;    &lt;Text style={{ fontSize: 29, fontWeight: 'bold', color: '#0E3F8C' }}&gt;The Class Name Test&lt;/Text&gt;&#10;    &lt;Text style={{ fontSize: 14, color: '#1E4FA8', fontWeight: 'bold' }}&gt;11 / 39&lt;/Text&gt;&#10;  &lt;/Box&gt;&#10;  &lt;Box style={{ flex: 1, padding: '10px 40px 0 40px', flexDirection: 'row', gap: 26 }}&gt;&#10;    &lt;Box style={{ width: 480, justifyContent: 'center' }}&gt;&#10;      &lt;Box style={{ padding: '18px 20px', background: '#F7F9FC', borderRadius: 10, border: '1px solid #E5E7EB' }}&gt;&#10;        &lt;Text style={{ fontSize: 13, color: '#8B97A8', letterSpacing: 1, marginBottom: 14 }}&gt;FOUR THINGS EVERY NAME SATISFIES&lt;/Text&gt;&#10;        {[&#10;          ['A noun', 'from the requirements, not invented'],&#10;          ['Singular', 'Order, not Orders — collections are a multiplicity'],&#10;          ['Capitalised', 'as every class name is'],&#10;          ['No suffix', 'no Service, no Manager, no DTO, no Entity'],&#10;        ].map((r) =&gt; (&#10;          &lt;Box key={r[0]} style={{ flexDirection: 'row', gap: 12, marginBottom: 11 }}&gt;&#10;            &lt;Box style={{ width: 22, height: 22, borderRadius: 11, background: '#2B7A3D', justifyContent: 'center', alignItems: 'center' }}&gt;&#10;              &lt;Text style={{ fontSize: 12, fontWeight: 'bold', color: '#FFFFFF' }}&gt;✓&lt;/Text&gt;&#10;            &lt;/Box&gt;&#10;            &lt;Box style={{ flex: 1 }}&gt;&#10;              &lt;Text style={{ fontSize: 14.5, fontWeight: 'bold', color: '#0E3F8C' }}&gt;{r[0]}&lt;/Text&gt;&#10;              &lt;Text style={{ fontSize: 12.5, color: '#4A5568', marginTop: 2 }}&gt;{r[1]}&lt;/Text&gt;&#10;            &lt;/Box&gt;&#10;          &lt;/Box&gt;&#10;        ))}&#10;      &lt;/Box&gt;&#10;    &lt;/Box&gt;&#10;    &lt;Box style={{ flex: 1, flexDirection: 'column', justifyContent: 'center', gap: 13 }}&gt;&#10;      &lt;Box style={{ padding: '15px 17px', background: '#FDF3F3', borderRadius: 9, borderLeft: '4px solid #D9534F' }}&gt;&#10;        &lt;Text style={{ fontSize: 16, fontWeight: 'bold', color: '#D9534F' }}&gt;Four names that fail&lt;/Text&gt;&#10;        &lt;Text style={{ fontSize: 13, color: '#4A5568', lineHeight: 1.7, marginTop: 5 }}&gt;&#10;          &lt;Text style={{ fontFamily: 'Menlo, monospace' }}&gt;OrderService&lt;/Text&gt; — a design name, W10&lt;br /&gt;&#10;          &lt;Text style={{ fontFamily: 'Menlo, monospace' }}&gt;OrderData&lt;/Text&gt; — a column, not a concept&lt;br /&gt;&#10;          &lt;Text style={{ fontFamily: 'Menlo, monospace' }}&gt;OrderManager&lt;/Text&gt; — usually a god object&lt;br /&gt;&#10;          &lt;Text style={{ fontFamily: 'Menlo, monospace' }}&gt;OrderEntity&lt;/Text&gt; — a persistence label&#10;        &lt;/Text&gt;&#10;      &lt;/Box&gt;&#10;      &lt;Box style={{ padding: '15px 17px', background: '#EAF6EC', borderRadius: 9, borderLeft: '4px solid #2B7A3D' }}&gt;&#10;        &lt;Text style={{ fontSize: 16, fontWeight: 'bold', color: '#2B7A3D' }}&gt;Rename test&lt;/Text&gt;&#10;        &lt;Text style={{ fontSize: 13, color: '#4A5568', lineHeight: 1.6, marginTop: 5 }}&gt;&#10;          Say the class name out loud to the client. “This is the Order.” If that sentence needs a word of explanation, the name is wrong.&#10;        &lt;/Text&gt;&#10;      &lt;/Box&gt;&#10;      &lt;Box style={{ padding: '15px 17px', background: '#FFFFFF', borderRadius: 9, border: '1px solid #D6DCE5' }}&gt;&#10;        &lt;Text style={{ fontSize: 16, fontWeight: 'bold', color: '#0E3F8C' }}&gt;Singular does not mean “only one”&lt;/Text&gt;&#10;        &lt;Text style={{ fontSize: 13, color: '#4A5568', lineHeight: 1.6, marginTop: 5 }}&gt;&#10;          “How many orders?” is answered with a multiplicity next week — not with a plural class name.&#10;        &lt;/Text&gt;&#10;      &lt;/Box&gt;&#10;      &lt;Box style={{ padding: '12px 16px', background: '#F7F9FC', borderRadius: 8, border: '1px dashed #D6DCE5' }}&gt;&#10;        &lt;Text style={{ fontSize: 12.5, color: '#8B97A8', lineHeight: 1.55 }}&gt;&#10;          One more to watch: “Item” is too vague. MenuItem says which catalogue it came from, and that difference will matter.&#10;        &lt;/Text&gt;&#10;      &lt;/Box&gt;&#10;    &lt;/Box&gt;&#10;  &lt;/Box&gt;&#10;  &lt;Box style={{ height: 34, padding: '0 40px', flexDirection: 'row', alignItems: 'center', justifyContent: 'space-between' }}&gt;&#10;    &lt;Text style={{ fontSize: 13, color: '#8B97A8' }}&gt;ISAD · Fall 2026 · Say the name to the client. If it needs explaining, it is a design name that arrived too early&lt;/Text&gt;&#10;    &lt;Text style={{ fontSize: 14, color: '#1E4FA8', fontWeight: 'bold' }}&gt;11 / 39&lt;/Text&gt;&#10;  &lt;/Box&gt;&#10;&lt;/Slide&gt;&#10;"/>
         <p:cNvGrpSpPr/>
         <p:nvPr/>
       </p:nvGrpSpPr>
@@ -2149,7 +2150,7 @@
                 <a:latin typeface="Microsoft YaHei"/>
                 <a:ea typeface="Microsoft YaHei"/>
               </a:rPr>
-              <a:t>11 / 38</a:t>
+              <a:t>11 / 39</a:t>
             </a:r>
             <a:endParaRPr/>
           </a:p>
@@ -3378,7 +3379,7 @@
                 <a:latin typeface="Microsoft YaHei"/>
                 <a:ea typeface="Microsoft YaHei"/>
               </a:rPr>
-              <a:t>11 / 38</a:t>
+              <a:t>11 / 39</a:t>
             </a:r>
             <a:endParaRPr/>
           </a:p>
@@ -3394,7 +3395,7 @@
   <p:cSld>
     <p:spTree>
       <p:nvGrpSpPr>
-        <p:cNvPr id="65" name="" descr="&lt;Slide style={{ background: '#FFFFFF', padding: 0 }}&gt;&#10;  &lt;Box style={{ height: 72, background: '#1E4FA8', padding: '0 40px', flexDirection: 'row', alignItems: 'center', justifyContent: 'space-between' }}&gt;&#10;    &lt;Text style={{ fontSize: 15, color: '#B9CDF0', letterSpacing: 1 }}&gt;ISAD · INFORMATION SYSTEMS ANALYSIS &amp;amp; DESIGN&lt;/Text&gt;&#10;    &lt;Text style={{ fontSize: 15, color: '#B9CDF0' }}&gt;W06 · CONCEPTUAL VS. DESIGN&lt;/Text&gt;&#10;  &lt;/Box&gt;&#10;  &lt;Box style={{ padding: '13px 40px 0 40px', flexDirection: 'row', alignItems: 'center', justifyContent: 'space-between' }}&gt;&#10;    &lt;Text style={{ fontSize: 29, fontWeight: 'bold', color: '#0E3F8C' }}&gt;Entity, Boundary, Control&lt;/Text&gt;&#10;    &lt;Text style={{ fontSize: 14, color: '#1E4FA8', fontWeight: 'bold' }}&gt;12 / 38&lt;/Text&gt;&#10;  &lt;/Box&gt;&#10;  &lt;Box style={{ flex: 1, padding: '6px 40px 0 40px', justifyContent: 'center', alignItems: 'center' }}&gt;&#10;    &lt;svg width={1180} height={392} viewBox='0 0 1180 392'&gt;&#10;      &lt;text x='10' y='16' fill='#8B97A8' fontSize='13'&gt;Every conceptual class is one of three kinds. The kind tells you what kind of responsibility it carries.&lt;/text&gt;&#10;&#10;      &lt;g transform='translate(0,34)'&gt;&#10;        &lt;rect x='0' y='0' width='376' height='300' rx='10' fill='#EAF6EC' stroke='#2B7A3D' strokeWidth='2.2' /&gt;&#10;        &lt;circle cx='44' cy='44' r='24' fill='#2B7A3D' /&gt;&#10;        &lt;text x='44' y='51' textAnchor='middle' fill='#FFFFFF' fontSize='19' fontWeight='bold'&gt;E&lt;/text&gt;&#10;        &lt;text x='80' y='50' fill='#2B7A3D' fontSize='19' fontWeight='bold'&gt;Entity class&lt;/text&gt;&#10;        &lt;text x='20' y='84' fill='#4A5568' fontSize='12.5'&gt;Stores the information the business&lt;/text&gt;&#10;        &lt;text x='20' y='102' fill='#4A5568' fontSize='12.5'&gt;needs to keep. Stable over time.&lt;/text&gt;&#10;        &lt;line x1='20' y1='120' x2='356' y2='120' stroke='#C9E0CD' strokeWidth='1' /&gt;&#10;        &lt;text x='20' y='146' fill='#2B7A3D' fontSize='12.5' fontWeight='bold'&gt;Ask:&lt;/text&gt;&#10;        &lt;text x='20' y='167' fill='#4A5568' fontSize='12'&gt;Would the client still care about&lt;/text&gt;&#10;        &lt;text x='20' y='184' fill='#4A5568' fontSize='12'&gt;this in a year, with no UI?&lt;/text&gt;&#10;        &lt;text x='20' y='214' fill='#2B7A3D' fontSize='12' fontWeight='bold'&gt;CampusBites:&lt;/text&gt;&#10;        &lt;text x='20' y='234' fill='#4A5568' fontSize='12'&gt;Order · OrderLine · MenuItem&lt;/text&gt;&#10;        &lt;text x='20' y='252' fill='#4A5568' fontSize='12'&gt;Restaurant · Courier · Payment&lt;/text&gt;&#10;        &lt;rect x='20' y='266' width='336' height='24' rx='5' fill='#FFFFFF' /&gt;&#10;        &lt;text x='32' y='283' fill='#2B7A3D' fontSize='11.5'&gt;Most of your model lives here — 7 of 14&lt;/text&gt;&#10;      &lt;/g&gt;&#10;&#10;      &lt;g transform='translate(402,34)'&gt;&#10;        &lt;rect x='0' y='0' width='376' height='300' rx='10' fill='#FFF6E0' stroke='#FFC107' strokeWidth='2.2' /&gt;&#10;        &lt;circle cx='44' cy='44' r='24' fill='#996F00' /&gt;&#10;        &lt;text x='44' y='51' textAnchor='middle' fill='#FFFFFF' fontSize='19' fontWeight='bold'&gt;B&lt;/text&gt;&#10;        &lt;text x='80' y='50' fill='#996F00' fontSize='19' fontWeight='bold'&gt;Boundary class&lt;/text&gt;&#10;        &lt;text x='20' y='84' fill='#4A5568' fontSize='12.5'&gt;Sits at the edge. Talks to actors&lt;/text&gt;&#10;        &lt;text x='20' y='102' fill='#4A5568' fontSize='12.5'&gt;and translates their requests.&lt;/text&gt;&#10;        &lt;line x1='20' y1='120' x2='356' y2='120' stroke='#E8D9A8' strokeWidth='1' /&gt;&#10;        &lt;text x='20' y='146' fill='#996F00' fontSize='12.5' fontWeight='bold'&gt;Ask:&lt;/text&gt;&#10;        &lt;text x='20' y='167' fill='#4A5568' fontSize='12'&gt;Is someone outside the system&lt;/text&gt;&#10;        &lt;text x='20' y='184' fill='#4A5568' fontSize='12'&gt;doing something to the data?&lt;/text&gt;&#10;        &lt;text x='20' y='214' fill='#996F00' fontSize='12' fontWeight='bold'&gt;CampusBites:&lt;/text&gt;&#10;        &lt;text x='20' y='234' fill='#4A5568' fontSize='12'&gt;StudentApp · KitchenDisplay&lt;/text&gt;&#10;        &lt;text x='20' y='252' fill='#4A5568' fontSize='12'&gt;CourierApp · RestaurantConsole&lt;/text&gt;&#10;        &lt;rect x='20' y='266' width='336' height='24' rx='5' fill='#FFFFFF' /&gt;&#10;        &lt;text x='32' y='283' fill='#996F00' fontSize='11.5'&gt;These are where your UI specs belong&lt;/text&gt;&#10;      &lt;/g&gt;&#10;&#10;      &lt;g transform='translate(804,34)'&gt;&#10;        &lt;rect x='0' y='0' width='376' height='300' rx='10' fill='#F0F5FC' stroke='#1E4FA8' strokeWidth='2.2' /&gt;&#10;        &lt;circle cx='44' cy='44' r='24' fill='#1E4FA8' /&gt;&#10;        &lt;text x='44' y='51' textAnchor='middle' fill='#FFFFFF' fontSize='19' fontWeight='bold'&gt;C&lt;/text&gt;&#10;        &lt;text x='80' y='50' fill='#0E3F8C' fontSize='19' fontWeight='bold'&gt;Control class&lt;/text&gt;&#10;        &lt;text x='20' y='84' fill='#4A5568' fontSize='12.5'&gt;Coordinates one use case from start&lt;/text&gt;&#10;        &lt;text x='20' y='102' fill='#4A5568' fontSize='12.5'&gt;to finish. Logic, not storage.&lt;/text&gt;&#10;        &lt;line x1='20' y1='120' x2='356' y2='120' stroke='#D6DCE5' strokeWidth='1' /&gt;&#10;        &lt;text x='20' y='146' fill='#0E3F8C' fontSize='12.5' fontWeight='bold'&gt;Ask:&lt;/text&gt;&#10;        &lt;text x='20' y='167' fill='#4A5568' fontSize='12'&gt;Does one use case need a sequence&lt;/text&gt;&#10;        &lt;text x='20' y='184' fill='#4A5568' fontSize='12'&gt;of decisions that no single entity owns?&lt;/text&gt;&#10;        &lt;text x='20' y='214' fill='#0E3F8C' fontSize='12' fontWeight='bold'&gt;CampusBites:&lt;/text&gt;&#10;        &lt;text x='20' y='234' fill='#4A5568' fontSize='12'&gt;PlaceOrderController&lt;/text&gt;&#10;        &lt;text x='20' y='252' fill='#4A5568' fontSize='12'&gt;PayController&lt;/text&gt;&#10;        &lt;rect x='20' y='266' width='336' height='24' rx='5' fill='#FFFFFF' /&gt;&#10;        &lt;text x='32' y='283' fill='#0E3F8C' fontSize='11.5'&gt;One per use case — so keep it small&lt;/text&gt;&#10;      &lt;/g&gt;&#10;&#10;      &lt;text x='10' y='368' fill='#8B97A8' fontSize='12'&gt;Classifying a noun into one of these three takes thirty seconds and saves the whole model from turning into a pile of undifferentiated boxes.&lt;/text&gt;&#10;    &lt;/svg&gt;&#10;  &lt;/Box&gt;&#10;  &lt;Box style={{ height: 34, padding: '0 40px', flexDirection: 'row', alignItems: 'center', justifyContent: 'space-between' }}&gt;&#10;    &lt;Text style={{ fontSize: 13, color: '#8B97A8' }}&gt;ISAD · Fall 2026 · Every class is Entity, Boundary or Control. A box you cannot classify is a box whose responsibility nobody has agreed on&lt;/Text&gt;&#10;    &lt;Text style={{ fontSize: 14, color: '#1E4FA8', fontWeight: 'bold' }}&gt;12 / 38&lt;/Text&gt;&#10;  &lt;/Box&gt;&#10;&lt;/Slide&gt;&#10;"/>
+        <p:cNvPr id="65" name="" descr="&lt;Slide style={{ background: '#FFFFFF', padding: 0 }}&gt;&#10;  &lt;Box style={{ height: 72, background: '#1E4FA8', padding: '0 40px', flexDirection: 'row', alignItems: 'center', justifyContent: 'space-between' }}&gt;&#10;    &lt;Text style={{ fontSize: 15, color: '#B9CDF0', letterSpacing: 1 }}&gt;ISAD · INFORMATION SYSTEMS ANALYSIS &amp;amp; DESIGN&lt;/Text&gt;&#10;    &lt;Text style={{ fontSize: 15, color: '#B9CDF0' }}&gt;W06 · CONCEPTUAL VS. DESIGN&lt;/Text&gt;&#10;  &lt;/Box&gt;&#10;  &lt;Box style={{ padding: '13px 40px 0 40px', flexDirection: 'row', alignItems: 'center', justifyContent: 'space-between' }}&gt;&#10;    &lt;Text style={{ fontSize: 29, fontWeight: 'bold', color: '#0E3F8C' }}&gt;Entity, Boundary, Control&lt;/Text&gt;&#10;    &lt;Text style={{ fontSize: 14, color: '#1E4FA8', fontWeight: 'bold' }}&gt;12 / 39&lt;/Text&gt;&#10;  &lt;/Box&gt;&#10;  &lt;Box style={{ flex: 1, padding: '6px 40px 0 40px', justifyContent: 'center', alignItems: 'center' }}&gt;&#10;    &lt;svg width={1180} height={392} viewBox='0 0 1180 392'&gt;&#10;      &lt;text x='10' y='16' fill='#8B97A8' fontSize='13'&gt;Every conceptual class is one of three kinds. The kind tells you what kind of responsibility it carries.&lt;/text&gt;&#10;&#10;      &lt;g transform='translate(0,34)'&gt;&#10;        &lt;rect x='0' y='0' width='376' height='300' rx='10' fill='#EAF6EC' stroke='#2B7A3D' strokeWidth='2.2' /&gt;&#10;        &lt;circle cx='44' cy='44' r='24' fill='#2B7A3D' /&gt;&#10;        &lt;text x='44' y='51' textAnchor='middle' fill='#FFFFFF' fontSize='19' fontWeight='bold'&gt;E&lt;/text&gt;&#10;        &lt;text x='80' y='50' fill='#2B7A3D' fontSize='19' fontWeight='bold'&gt;Entity class&lt;/text&gt;&#10;        &lt;text x='20' y='84' fill='#4A5568' fontSize='12.5'&gt;Stores the information the business&lt;/text&gt;&#10;        &lt;text x='20' y='102' fill='#4A5568' fontSize='12.5'&gt;needs to keep. Stable over time.&lt;/text&gt;&#10;        &lt;line x1='20' y1='120' x2='356' y2='120' stroke='#C9E0CD' strokeWidth='1' /&gt;&#10;        &lt;text x='20' y='146' fill='#2B7A3D' fontSize='12.5' fontWeight='bold'&gt;Ask:&lt;/text&gt;&#10;        &lt;text x='20' y='167' fill='#4A5568' fontSize='12'&gt;Would the client still care about&lt;/text&gt;&#10;        &lt;text x='20' y='184' fill='#4A5568' fontSize='12'&gt;this in a year, with no UI?&lt;/text&gt;&#10;        &lt;text x='20' y='214' fill='#2B7A3D' fontSize='12' fontWeight='bold'&gt;Worked example:&lt;/text&gt;&#10;        &lt;text x='20' y='234' fill='#4A5568' fontSize='12'&gt;Order · OrderLine · MenuItem&lt;/text&gt;&#10;        &lt;text x='20' y='252' fill='#4A5568' fontSize='12'&gt;Restaurant · Courier · Payment&lt;/text&gt;&#10;        &lt;rect x='20' y='266' width='336' height='24' rx='5' fill='#FFFFFF' /&gt;&#10;        &lt;text x='32' y='283' fill='#2B7A3D' fontSize='11.5'&gt;Most of your model lives here — 7 of 14&lt;/text&gt;&#10;      &lt;/g&gt;&#10;&#10;      &lt;g transform='translate(402,34)'&gt;&#10;        &lt;rect x='0' y='0' width='376' height='300' rx='10' fill='#FFF6E0' stroke='#FFC107' strokeWidth='2.2' /&gt;&#10;        &lt;circle cx='44' cy='44' r='24' fill='#996F00' /&gt;&#10;        &lt;text x='44' y='51' textAnchor='middle' fill='#FFFFFF' fontSize='19' fontWeight='bold'&gt;B&lt;/text&gt;&#10;        &lt;text x='80' y='50' fill='#996F00' fontSize='19' fontWeight='bold'&gt;Boundary class&lt;/text&gt;&#10;        &lt;text x='20' y='84' fill='#4A5568' fontSize='12.5'&gt;Sits at the edge. Talks to actors&lt;/text&gt;&#10;        &lt;text x='20' y='102' fill='#4A5568' fontSize='12.5'&gt;and translates their requests.&lt;/text&gt;&#10;        &lt;line x1='20' y1='120' x2='356' y2='120' stroke='#E8D9A8' strokeWidth='1' /&gt;&#10;        &lt;text x='20' y='146' fill='#996F00' fontSize='12.5' fontWeight='bold'&gt;Ask:&lt;/text&gt;&#10;        &lt;text x='20' y='167' fill='#4A5568' fontSize='12'&gt;Is someone outside the system&lt;/text&gt;&#10;        &lt;text x='20' y='184' fill='#4A5568' fontSize='12'&gt;doing something to the data?&lt;/text&gt;&#10;        &lt;text x='20' y='214' fill='#996F00' fontSize='12' fontWeight='bold'&gt;Worked example:&lt;/text&gt;&#10;        &lt;text x='20' y='234' fill='#4A5568' fontSize='12'&gt;StudentApp · KitchenDisplay&lt;/text&gt;&#10;        &lt;text x='20' y='252' fill='#4A5568' fontSize='12'&gt;CourierApp · RestaurantConsole&lt;/text&gt;&#10;        &lt;rect x='20' y='266' width='336' height='24' rx='5' fill='#FFFFFF' /&gt;&#10;        &lt;text x='32' y='283' fill='#996F00' fontSize='11.5'&gt;These are where your UI specs belong&lt;/text&gt;&#10;      &lt;/g&gt;&#10;&#10;      &lt;g transform='translate(804,34)'&gt;&#10;        &lt;rect x='0' y='0' width='376' height='300' rx='10' fill='#F0F5FC' stroke='#1E4FA8' strokeWidth='2.2' /&gt;&#10;        &lt;circle cx='44' cy='44' r='24' fill='#1E4FA8' /&gt;&#10;        &lt;text x='44' y='51' textAnchor='middle' fill='#FFFFFF' fontSize='19' fontWeight='bold'&gt;C&lt;/text&gt;&#10;        &lt;text x='80' y='50' fill='#0E3F8C' fontSize='19' fontWeight='bold'&gt;Control class&lt;/text&gt;&#10;        &lt;text x='20' y='84' fill='#4A5568' fontSize='12.5'&gt;Coordinates one use case from start&lt;/text&gt;&#10;        &lt;text x='20' y='102' fill='#4A5568' fontSize='12.5'&gt;to finish. Logic, not storage.&lt;/text&gt;&#10;        &lt;line x1='20' y1='120' x2='356' y2='120' stroke='#D6DCE5' strokeWidth='1' /&gt;&#10;        &lt;text x='20' y='146' fill='#0E3F8C' fontSize='12.5' fontWeight='bold'&gt;Ask:&lt;/text&gt;&#10;        &lt;text x='20' y='167' fill='#4A5568' fontSize='12'&gt;Does one use case need a sequence&lt;/text&gt;&#10;        &lt;text x='20' y='184' fill='#4A5568' fontSize='12'&gt;of decisions that no single entity owns?&lt;/text&gt;&#10;        &lt;text x='20' y='214' fill='#0E3F8C' fontSize='12' fontWeight='bold'&gt;Worked example:&lt;/text&gt;&#10;        &lt;text x='20' y='234' fill='#4A5568' fontSize='12'&gt;PlaceOrderController&lt;/text&gt;&#10;        &lt;text x='20' y='252' fill='#4A5568' fontSize='12'&gt;PayController&lt;/text&gt;&#10;        &lt;rect x='20' y='266' width='336' height='24' rx='5' fill='#FFFFFF' /&gt;&#10;        &lt;text x='32' y='283' fill='#0E3F8C' fontSize='11.5'&gt;One per use case — so keep it small&lt;/text&gt;&#10;      &lt;/g&gt;&#10;&#10;      &lt;text x='10' y='368' fill='#8B97A8' fontSize='12'&gt;Classifying a noun into one of these three takes thirty seconds and saves the whole model from turning into a pile of undifferentiated boxes.&lt;/text&gt;&#10;    &lt;/svg&gt;&#10;  &lt;/Box&gt;&#10;  &lt;Box style={{ height: 34, padding: '0 40px', flexDirection: 'row', alignItems: 'center', justifyContent: 'space-between' }}&gt;&#10;    &lt;Text style={{ fontSize: 13, color: '#8B97A8' }}&gt;ISAD · Fall 2026 · Every class is Entity, Boundary or Control. A box you cannot classify is a box whose responsibility nobody has agreed on&lt;/Text&gt;&#10;    &lt;Text style={{ fontSize: 14, color: '#1E4FA8', fontWeight: 'bold' }}&gt;12 / 39&lt;/Text&gt;&#10;  &lt;/Box&gt;&#10;&lt;/Slide&gt;&#10;"/>
         <p:cNvGrpSpPr/>
         <p:nvPr/>
       </p:nvGrpSpPr>
@@ -3588,7 +3589,7 @@
                 <a:latin typeface="Microsoft YaHei"/>
                 <a:ea typeface="Microsoft YaHei"/>
               </a:rPr>
-              <a:t>12 / 38</a:t>
+              <a:t>12 / 39</a:t>
             </a:r>
             <a:endParaRPr/>
           </a:p>
@@ -3689,7 +3690,7 @@
                 <a:latin typeface="Microsoft YaHei"/>
                 <a:ea typeface="Microsoft YaHei"/>
               </a:rPr>
-              <a:t>12 / 38</a:t>
+              <a:t>12 / 39</a:t>
             </a:r>
             <a:endParaRPr/>
           </a:p>
@@ -3705,7 +3706,7 @@
   <p:cSld>
     <p:spTree>
       <p:nvGrpSpPr>
-        <p:cNvPr id="75" name="" descr="&lt;Slide style={{ background: '#FFFFFF', padding: 0 }}&gt;&#10;  &lt;Box style={{ height: 72, background: '#1E4FA8', padding: '0 40px', flexDirection: 'row', alignItems: 'center', justifyContent: 'space-between' }}&gt;&#10;    &lt;Text style={{ fontSize: 15, color: '#B9CDF0', letterSpacing: 1 }}&gt;ISAD · INFORMATION SYSTEMS ANALYSIS &amp;amp; DESIGN&lt;/Text&gt;&#10;    &lt;Text style={{ fontSize: 15, color: '#B9CDF0' }}&gt;W06 · CONCEPTUAL VS. DESIGN&lt;/Text&gt;&#10;  &lt;/Box&gt;&#10;  &lt;Box style={{ padding: '13px 40px 0 40px', flexDirection: 'row', alignItems: 'center', justifyContent: 'space-between' }}&gt;&#10;    &lt;Text style={{ fontSize: 29, fontWeight: 'bold', color: '#0E3F8C' }}&gt;Why the Boundary Is Drawn&lt;/Text&gt;&#10;    &lt;Text style={{ fontSize: 14, color: '#1E4FA8', fontWeight: 'bold' }}&gt;13 / 38&lt;/Text&gt;&#10;  &lt;/Box&gt;&#10;  &lt;Box style={{ flex: 1, padding: '10px 40px 0 40px' }}&gt;&#10;    &lt;Table&#10;      style={{ width: '100%', height: '100%' }}&#10;      defaultTextStyle={{ fontSize: 13.5, textAlign: 'left', color: '#1A2230' }}&#10;      defaultCellStyle={{&#10;        border: {&#10;          left: { width: 1, color: '#E5E7EB' },&#10;          right: { width: 1, color: '#E5E7EB' },&#10;          top: { width: 1, color: '#E5E7EB' },&#10;          bottom: { width: 1, color: '#E5E7EB' },&#10;        },&#10;      }}&#10;      cells={[&#10;        [&#10;          { text: '', textStyle: { bold: true }, cellStyle: { background: { color: '#0E3F8C' } } },&#10;          { text: 'Entity class', textStyle: { bold: true, color: '#FFFFFF', fontSize: 15 }, cellStyle: { background: { color: '#2B7A3D' } } },&#10;          { text: 'Boundary class', textStyle: { bold: true, color: '#FFFFFF', fontSize: 15 }, cellStyle: { background: { color: '#996F00' } } },&#10;          { text: 'Control class', textStyle: { bold: true, color: '#FFFFFF', fontSize: 15 }, cellStyle: { background: { color: '#1E4FA8' } } },&#10;        ],&#10;        [&#10;          { text: 'Carries', textStyle: { bold: true, color: '#0E3F8C' }, cellStyle: { background: { color: '#F7F9FC' } } },&#10;          { text: 'Information the business keeps.', textStyle: { color: '#4A5568' }, cellStyle: { background: { color: '#F7F9FC' } } },&#10;          { text: 'Requests coming in, answers going out.', textStyle: { color: '#4A5568' }, cellStyle: { background: { color: '#F7F9FC' } } },&#10;          { text: 'The order of the steps.', textStyle: { color: '#4A5568' }, cellStyle: { background: { color: '#F7F9FC' } } },&#10;        ],&#10;        [&#10;          { text: 'Knows about', textStyle: { bold: true, color: '#0E3F8C' } },&#10;          { text: 'Other entities. Never actors.', textStyle: { color: '#4A5568' } },&#10;          { text: 'The entities it presents. Not the steps.', textStyle: { color: '#4A5568' } },&#10;          { text: 'All of them — that is its job.', textStyle: { color: '#4A5568' } },&#10;        ],&#10;        [&#10;          { text: 'Changes when', textStyle: { bold: true, color: '#0E3F8C' }, cellStyle: { background: { color: '#F7F9FC' } } },&#10;          { text: 'The business changes its mind about data.', textStyle: { color: '#4A5568' }, cellStyle: { background: { color: '#F7F9FC' } } },&#10;          { text: 'The interface changes — W10, not today.', textStyle: { color: '#4A5568' }, cellStyle: { background: { color: '#F7F9FC' } } },&#10;          { text: 'The use case gains or loses a step.', textStyle: { color: '#4A5568' }, cellStyle: { background: { color: '#F7F9FC' } } },&#10;        ],&#10;        [&#10;          { text: 'CampusBites', textStyle: { bold: true, color: '#0E3F8C' } },&#10;          { text: 'Order, MenuItem, Courier, Payment', textStyle: { color: '#4A5568' } },&#10;          { text: 'StudentApp, KitchenDisplay, CourierApp', textStyle: { color: '#4A5568' } },&#10;          { text: 'PlaceOrderController, PayController', textStyle: { color: '#4A5568' } },&#10;        ],&#10;        [&#10;          { text: 'The trap', textStyle: { bold: true, color: '#0E3F8C' }, cellStyle: { background: { color: '#F7F9FC' } } },&#10;          { text: 'An entity with a method called printTicket() is doing a boundary’s job.', textStyle: { color: '#4A5568' }, cellStyle: { background: { color: '#F7F9FC' } } },&#10;          { text: 'A boundary containing business rules hides them from review.', textStyle: { color: '#4A5568' }, cellStyle: { background: { color: '#F7F9FC' } } },&#10;          { text: 'A control class that owns data is a god object with a good name.', textStyle: { color: '#4A5568' }, cellStyle: { background: { color: '#F7F9FC' } } },&#10;        ],&#10;      ]}&#10;    /&gt;&#10;  &lt;/Box&gt;&#10;  &lt;Box style={{ height: 46, background: '#0E3F8C', padding: '0 40px', flexDirection: 'row', alignItems: 'center', justifyContent: 'center' }}&gt;&#10;    &lt;Text style={{ fontSize: 16.5, color: '#FFFFFF', fontWeight: '600' }}&gt;The three kinds are a division of responsibility, not a folder structure. Keep them in one diagram.&lt;/Text&gt;&#10;  &lt;/Box&gt;&#10;&lt;/Slide&gt;&#10;"/>
+        <p:cNvPr id="75" name="" descr="&lt;Slide style={{ background: '#FFFFFF', padding: 0 }}&gt;&#10;  &lt;Box style={{ height: 72, background: '#1E4FA8', padding: '0 40px', flexDirection: 'row', alignItems: 'center', justifyContent: 'space-between' }}&gt;&#10;    &lt;Text style={{ fontSize: 15, color: '#B9CDF0', letterSpacing: 1 }}&gt;ISAD · INFORMATION SYSTEMS ANALYSIS &amp;amp; DESIGN&lt;/Text&gt;&#10;    &lt;Text style={{ fontSize: 15, color: '#B9CDF0' }}&gt;W06 · CONCEPTUAL VS. DESIGN&lt;/Text&gt;&#10;  &lt;/Box&gt;&#10;  &lt;Box style={{ padding: '13px 40px 0 40px', flexDirection: 'row', alignItems: 'center', justifyContent: 'space-between' }}&gt;&#10;    &lt;Text style={{ fontSize: 29, fontWeight: 'bold', color: '#0E3F8C' }}&gt;Why the Boundary Is Drawn&lt;/Text&gt;&#10;    &lt;Text style={{ fontSize: 14, color: '#1E4FA8', fontWeight: 'bold' }}&gt;13 / 39&lt;/Text&gt;&#10;  &lt;/Box&gt;&#10;  &lt;Box style={{ flex: 1, padding: '10px 40px 0 40px' }}&gt;&#10;    &lt;Table&#10;      style={{ width: '100%', height: '100%' }}&#10;      defaultTextStyle={{ fontSize: 13.5, textAlign: 'left', color: '#1A2230' }}&#10;      defaultCellStyle={{&#10;        border: {&#10;          left: { width: 1, color: '#E5E7EB' },&#10;          right: { width: 1, color: '#E5E7EB' },&#10;          top: { width: 1, color: '#E5E7EB' },&#10;          bottom: { width: 1, color: '#E5E7EB' },&#10;        },&#10;      }}&#10;      cells={[&#10;        [&#10;          { text: '', textStyle: { bold: true }, cellStyle: { background: { color: '#0E3F8C' } } },&#10;          { text: 'Entity class', textStyle: { bold: true, color: '#FFFFFF', fontSize: 15 }, cellStyle: { background: { color: '#2B7A3D' } } },&#10;          { text: 'Boundary class', textStyle: { bold: true, color: '#FFFFFF', fontSize: 15 }, cellStyle: { background: { color: '#996F00' } } },&#10;          { text: 'Control class', textStyle: { bold: true, color: '#FFFFFF', fontSize: 15 }, cellStyle: { background: { color: '#1E4FA8' } } },&#10;        ],&#10;        [&#10;          { text: 'Carries', textStyle: { bold: true, color: '#0E3F8C' }, cellStyle: { background: { color: '#F7F9FC' } } },&#10;          { text: 'Information the business keeps.', textStyle: { color: '#4A5568' }, cellStyle: { background: { color: '#F7F9FC' } } },&#10;          { text: 'Requests coming in, answers going out.', textStyle: { color: '#4A5568' }, cellStyle: { background: { color: '#F7F9FC' } } },&#10;          { text: 'The order of the steps.', textStyle: { color: '#4A5568' }, cellStyle: { background: { color: '#F7F9FC' } } },&#10;        ],&#10;        [&#10;          { text: 'Knows about', textStyle: { bold: true, color: '#0E3F8C' } },&#10;          { text: 'Other entities. Never actors.', textStyle: { color: '#4A5568' } },&#10;          { text: 'The entities it presents. Not the steps.', textStyle: { color: '#4A5568' } },&#10;          { text: 'All of them — that is its job.', textStyle: { color: '#4A5568' } },&#10;        ],&#10;        [&#10;          { text: 'Changes when', textStyle: { bold: true, color: '#0E3F8C' }, cellStyle: { background: { color: '#F7F9FC' } } },&#10;          { text: 'The business changes its mind about data.', textStyle: { color: '#4A5568' }, cellStyle: { background: { color: '#F7F9FC' } } },&#10;          { text: 'The interface changes — W10, not today.', textStyle: { color: '#4A5568' }, cellStyle: { background: { color: '#F7F9FC' } } },&#10;          { text: 'The use case gains or loses a step.', textStyle: { color: '#4A5568' }, cellStyle: { background: { color: '#F7F9FC' } } },&#10;        ],&#10;        [&#10;          { text: 'Worked example', textStyle: { bold: true, color: '#0E3F8C' } },&#10;          { text: 'Order, MenuItem, Courier, Payment', textStyle: { color: '#4A5568' } },&#10;          { text: 'StudentApp, KitchenDisplay, CourierApp', textStyle: { color: '#4A5568' } },&#10;          { text: 'PlaceOrderController, PayController', textStyle: { color: '#4A5568' } },&#10;        ],&#10;        [&#10;          { text: 'The trap', textStyle: { bold: true, color: '#0E3F8C' }, cellStyle: { background: { color: '#F7F9FC' } } },&#10;          { text: 'An entity with a method called printTicket() is doing a boundary’s job.', textStyle: { color: '#4A5568' }, cellStyle: { background: { color: '#F7F9FC' } } },&#10;          { text: 'A boundary containing business rules hides them from review.', textStyle: { color: '#4A5568' }, cellStyle: { background: { color: '#F7F9FC' } } },&#10;          { text: 'A control class that owns data is a god object with a good name.', textStyle: { color: '#4A5568' }, cellStyle: { background: { color: '#F7F9FC' } } },&#10;        ],&#10;      ]}&#10;    /&gt;&#10;  &lt;/Box&gt;&#10;  &lt;Box style={{ height: 46, background: '#0E3F8C', padding: '0 40px', flexDirection: 'row', alignItems: 'center', justifyContent: 'center' }}&gt;&#10;    &lt;Text style={{ fontSize: 16.5, color: '#FFFFFF', fontWeight: '600' }}&gt;The three kinds are a division of responsibility, not a folder structure. Keep them in one diagram.&lt;/Text&gt;&#10;  &lt;/Box&gt;&#10;&lt;/Slide&gt;&#10;"/>
         <p:cNvGrpSpPr/>
         <p:nvPr/>
       </p:nvGrpSpPr>
@@ -3899,7 +3900,7 @@
                 <a:latin typeface="Microsoft YaHei"/>
                 <a:ea typeface="Microsoft YaHei"/>
               </a:rPr>
-              <a:t>13 / 38</a:t>
+              <a:t>13 / 39</a:t>
             </a:r>
             <a:endParaRPr/>
           </a:p>
@@ -3919,28 +3920,28 @@
           <a:graphicData uri="http://schemas.openxmlformats.org/drawingml/2006/table">
             <a:tbl>
               <a:tblGrid>
-                <a:gridCol w="927469">
+                <a:gridCol w="1023426">
                   <a:extLst>
                     <a:ext uri="{9D8B030D-6E8A-4147-A177-3AD203B41FA5}">
                       <a16:colId val="1"/>
                     </a:ext>
                   </a:extLst>
                 </a:gridCol>
-                <a:gridCol w="3694066">
+                <a:gridCol w="3660315">
                   <a:extLst>
                     <a:ext uri="{9D8B030D-6E8A-4147-A177-3AD203B41FA5}">
                       <a16:colId val="2"/>
                     </a:ext>
                   </a:extLst>
                 </a:gridCol>
-                <a:gridCol w="3342752">
+                <a:gridCol w="3312211">
                   <a:extLst>
                     <a:ext uri="{9D8B030D-6E8A-4147-A177-3AD203B41FA5}">
                       <a16:colId val="3"/>
                     </a:ext>
                   </a:extLst>
                 </a:gridCol>
-                <a:gridCol w="3465712">
+                <a:gridCol w="3434048">
                   <a:extLst>
                     <a:ext uri="{9D8B030D-6E8A-4147-A177-3AD203B41FA5}">
                       <a16:colId val="4"/>
@@ -4451,7 +4452,7 @@
                   </a:ext>
                 </a:extLst>
               </a:tr>
-              <a:tr h="1157288">
+              <a:tr h="704850">
                 <a:tc>
                   <a:txBody>
                     <a:bodyPr wrap="square" lIns="0" tIns="0" rIns="0" bIns="0" anchor="ctr">
@@ -4626,7 +4627,7 @@
                   </a:ext>
                 </a:extLst>
               </a:tr>
-              <a:tr h="704850">
+              <a:tr h="1157288">
                 <a:tc>
                   <a:txBody>
                     <a:bodyPr wrap="square" lIns="0" tIns="0" rIns="0" bIns="0" anchor="ctr">
@@ -4646,7 +4647,7 @@
                           <a:latin typeface="Microsoft YaHei"/>
                           <a:ea typeface="Microsoft YaHei"/>
                         </a:rPr>
-                        <a:t>CampusBites</a:t>
+                        <a:t>Worked example</a:t>
                       </a:r>
                       <a:endParaRPr/>
                     </a:p>
@@ -5477,7 +5478,7 @@
   <p:cSld>
     <p:spTree>
       <p:nvGrpSpPr>
-        <p:cNvPr id="99" name="" descr="&lt;Slide style={{ background: '#FFFFFF', padding: 0 }}&gt;&#10;  &lt;Box style={{ height: 72, background: '#1E4FA8', padding: '0 40px', flexDirection: 'row', alignItems: 'center', justifyContent: 'space-between' }}&gt;&#10;    &lt;Text style={{ fontSize: 15, color: '#B9CDF0', letterSpacing: 1 }}&gt;ISAD · INFORMATION SYSTEMS ANALYSIS &amp;amp; DESIGN&lt;/Text&gt;&#10;    &lt;Text style={{ fontSize: 15, color: '#B9CDF0' }}&gt;W06 · ENTITY, BOUNDARY, CONTROL&lt;/Text&gt;&#10;  &lt;/Box&gt;&#10;  &lt;Box style={{ padding: '13px 40px 0 40px', flexDirection: 'row', alignItems: 'center', justifyContent: 'space-between' }}&gt;&#10;    &lt;Text style={{ fontSize: 29, fontWeight: 'bold', color: '#0E3F8C' }}&gt;The Three Rooms Model&lt;/Text&gt;&#10;    &lt;Text style={{ fontSize: 14, color: '#1E4FA8', fontWeight: 'bold' }}&gt;15 / 38&lt;/Text&gt;&#10;  &lt;/Box&gt;&#10;  &lt;Box style={{ flex: 1, padding: '6px 40px 0 40px', justifyContent: 'center', alignItems: 'center' }}&gt;&#10;    &lt;svg width={1180} height={392} viewBox='0 0 1180 392'&gt;&#10;      &lt;text x='10' y='16' fill='#8B97A8' fontSize='13'&gt;One use case, three rooms. An actor never walks into the entity room — something translates for them.&lt;/text&gt;&#10;&#10;      &lt;rect x='0' y='32' width='240' height='250' rx='10' fill='#FFF6E0' stroke='#FFC107' strokeWidth='2' /&gt;&#10;      &lt;text x='120' y='60' textAnchor='middle' fill='#996F00' fontSize='16' fontWeight='bold'&gt;Boundary room&lt;/text&gt;&#10;      &lt;text x='120' y='80' textAnchor='middle' fill='#8B97A8' fontSize='11'&gt;StudentApp&lt;/text&gt;&#10;      &lt;rect x='30' y='98' width='180' height='42' rx='6' fill='#FFFFFF' stroke='#FFC107' strokeWidth='1.4' /&gt;&#10;      &lt;text x='120' y='124' textAnchor='middle' fill='#4A5568' fontSize='12.5'&gt;translates the request&lt;/text&gt;&#10;      &lt;rect x='30' y='156' width='180' height='42' rx='6' fill='#FFFFFF' stroke='#FFC107' strokeWidth='1.4' /&gt;&#10;      &lt;text x='120' y='182' textAnchor='middle' fill='#4A5568' fontSize='12.5'&gt;presents the answer&lt;/text&gt;&#10;      &lt;text x='120' y='232' textAnchor='middle' fill='#996F00' fontSize='11.5'&gt;knows actors + entities&lt;/text&gt;&#10;      &lt;text x='120' y='252' textAnchor='middle' fill='#996F00' fontSize='11.5'&gt;never the step order&lt;/text&gt;&#10;&#10;      &lt;rect x='470' y='32' width='240' height='250' rx='10' fill='#F0F5FC' stroke='#1E4FA8' strokeWidth='2' /&gt;&#10;      &lt;text x='590' y='60' textAnchor='middle' fill='#0E3F8C' fontSize='16' fontWeight='bold'&gt;Control room&lt;/text&gt;&#10;      &lt;text x='590' y='80' textAnchor='middle' fill='#8B97A8' fontSize='11'&gt;PlaceOrderController&lt;/text&gt;&#10;      &lt;rect x='500' y='98' width='180' height='42' rx='6' fill='#FFFFFF' stroke='#1E4FA8' strokeWidth='1.4' /&gt;&#10;      &lt;text x='590' y='124' textAnchor='middle' fill='#4A5568' fontSize='12.5'&gt;decides the sequence&lt;/text&gt;&#10;      &lt;rect x='500' y='156' width='180' height='42' rx='6' fill='#FFFFFF' stroke='#1E4FA8' strokeWidth='1.4' /&gt;&#10;      &lt;text x='590' y='182' textAnchor='middle' fill='#4A5568' fontSize='12.5'&gt;handles 4a 4b 4c&lt;/text&gt;&#10;      &lt;text x='590' y='232' textAnchor='middle' fill='#0E3F8C' fontSize='11.5'&gt;knows everyone&lt;/text&gt;&#10;      &lt;text x='590' y='252' textAnchor='middle' fill='#0E3F8C' fontSize='11.5'&gt;stores nothing&lt;/text&gt;&#10;&#10;      &lt;rect x='940' y='32' width='240' height='250' rx='10' fill='#EAF6EC' stroke='#2B7A3D' strokeWidth='2' /&gt;&#10;      &lt;text x='1060' y='60' textAnchor='middle' fill='#2B7A3D' fontSize='16' fontWeight='bold'&gt;Entity room&lt;/text&gt;&#10;      &lt;text x='1060' y='80' textAnchor='middle' fill='#8B97A8' fontSize='11'&gt;Order, Payment, MenuItem&lt;/text&gt;&#10;      &lt;rect x='970' y='98' width='180' height='42' rx='6' fill='#FFFFFF' stroke='#2B7A3D' strokeWidth='1.4' /&gt;&#10;      &lt;text x='1060' y='124' textAnchor='middle' fill='#4A5568' fontSize='12.5'&gt;keeps the information&lt;/text&gt;&#10;      &lt;rect x='970' y='156' width='180' height='42' rx='6' fill='#FFFFFF' stroke='#2B7A3D' strokeWidth='1.4' /&gt;&#10;      &lt;text x='1060' y='182' textAnchor='middle' fill='#4A5568' fontSize='12.5'&gt;applies the business rules&lt;/text&gt;&#10;      &lt;text x='1060' y='232' textAnchor='middle' fill='#2B7A3D' fontSize='11.5'&gt;knows only entities&lt;/text&gt;&#10;      &lt;text x='1060' y='252' textAnchor='middle' fill='#2B7A3D' fontSize='11.5'&gt;never an actor&lt;/text&gt;&#10;&#10;      &lt;line x1='240' y1='140' x2='470' y2='140' stroke='#1E4FA8' strokeWidth='2' markerEnd='url(#a6)' /&gt;&#10;      &lt;text x='355' y='128' textAnchor='middle' fill='#0E3F8C' fontSize='11.5'&gt;request&lt;/text&gt;&#10;      &lt;line x1='710' y1='170' x2='940' y2='170' stroke='#1E4FA8' strokeWidth='2' markerEnd='url(#a6)' /&gt;&#10;      &lt;text x='825' y='158' textAnchor='middle' fill='#0E3F8C' fontSize='11.5'&gt;ask the entities&lt;/text&gt;&#10;      &lt;line x1='470' y1='240' x2='240' y2='240' stroke='#2B7A3D' strokeWidth='2' strokeDasharray='6 4' markerEnd='url(#a7)' /&gt;&#10;      &lt;text x='355' y='268' textAnchor='middle' fill='#2B7A3D' fontSize='11.5'&gt;the answer, back out&lt;/text&gt;&#10;&#10;      &lt;g transform='translate(20,300)'&gt;&#10;        &lt;circle cx='14' cy='14' r='11' fill='none' stroke='#0E3F8C' strokeWidth='2' /&gt;&#10;        &lt;line x1='14' y1='25' x2='14' y2='46' stroke='#0E3F8C' strokeWidth='2' /&gt;&#10;        &lt;text x='34' y='22' fill='#0E3F8C' fontSize='12.5' fontWeight='bold'&gt;Student&lt;/text&gt;&#10;        &lt;text x='34' y='40' fill='#8B97A8' fontSize='11.5'&gt;an actor, not a class in this model&lt;/text&gt;&#10;        &lt;line x1='34' y1='58' x2='210' y2='58' stroke='#D9534F' strokeWidth='2' strokeDasharray='5 4' /&gt;&#10;        &lt;text x='34' y='76' fill='#D9534F' fontSize='11.5'&gt;no direct line to the entity room&lt;/text&gt;&#10;      &lt;/g&gt;&#10;&#10;      &lt;defs&gt;&#10;        &lt;marker id='a6' markerWidth='9' markerHeight='9' refX='8' refY='4.5' orient='auto'&gt;&#10;          &lt;path d='M0 0 L9 4.5 L0 9 z' fill='#1E4FA8' /&gt;&#10;        &lt;/marker&gt;&#10;        &lt;marker id='a7' markerWidth='9' markerHeight='9' refX='8' refY='4.5' orient='auto'&gt;&#10;          &lt;path d='M0 0 L9 4.5 L0 9 z' fill='#2B7A3D' /&gt;&#10;        &lt;/marker&gt;&#10;      &lt;/defs&gt;&#10;    &lt;/svg&gt;&#10;  &lt;/Box&gt;&#10;  &lt;Box style={{ height: 34, padding: '0 40px', flexDirection: 'row', alignItems: 'center', justifyContent: 'space-between' }}&gt;&#10;    &lt;Text style={{ fontSize: 13, color: '#8B97A8' }}&gt;ISAD · Fall 2026 · The red dashed line is the whole point. An actor talks to a boundary, never to an entity&lt;/Text&gt;&#10;    &lt;Text style={{ fontSize: 14, color: '#1E4FA8', fontWeight: 'bold' }}&gt;15 / 38&lt;/Text&gt;&#10;  &lt;/Box&gt;&#10;&lt;/Slide&gt;&#10;"/>
+        <p:cNvPr id="99" name="" descr="&lt;Slide style={{ background: '#FFFFFF', padding: 0 }}&gt;&#10;  &lt;Box style={{ height: 72, background: '#1E4FA8', padding: '0 40px', flexDirection: 'row', alignItems: 'center', justifyContent: 'space-between' }}&gt;&#10;    &lt;Text style={{ fontSize: 15, color: '#B9CDF0', letterSpacing: 1 }}&gt;ISAD · INFORMATION SYSTEMS ANALYSIS &amp;amp; DESIGN&lt;/Text&gt;&#10;    &lt;Text style={{ fontSize: 15, color: '#B9CDF0' }}&gt;W06 · ENTITY, BOUNDARY, CONTROL&lt;/Text&gt;&#10;  &lt;/Box&gt;&#10;  &lt;Box style={{ padding: '13px 40px 0 40px', flexDirection: 'row', alignItems: 'center', justifyContent: 'space-between' }}&gt;&#10;    &lt;Text style={{ fontSize: 29, fontWeight: 'bold', color: '#0E3F8C' }}&gt;The Three Rooms Model&lt;/Text&gt;&#10;    &lt;Text style={{ fontSize: 14, color: '#1E4FA8', fontWeight: 'bold' }}&gt;15 / 39&lt;/Text&gt;&#10;  &lt;/Box&gt;&#10;  &lt;Box style={{ flex: 1, padding: '6px 40px 0 40px', justifyContent: 'center', alignItems: 'center' }}&gt;&#10;    &lt;svg width={1180} height={392} viewBox='0 0 1180 392'&gt;&#10;      &lt;text x='10' y='16' fill='#8B97A8' fontSize='13'&gt;One use case, three rooms. An actor never walks into the entity room — something translates for them.&lt;/text&gt;&#10;&#10;      &lt;rect x='0' y='32' width='240' height='250' rx='10' fill='#FFF6E0' stroke='#FFC107' strokeWidth='2' /&gt;&#10;      &lt;text x='120' y='60' textAnchor='middle' fill='#996F00' fontSize='16' fontWeight='bold'&gt;Boundary room&lt;/text&gt;&#10;      &lt;text x='120' y='80' textAnchor='middle' fill='#8B97A8' fontSize='11'&gt;StudentApp&lt;/text&gt;&#10;      &lt;rect x='30' y='98' width='180' height='42' rx='6' fill='#FFFFFF' stroke='#FFC107' strokeWidth='1.4' /&gt;&#10;      &lt;text x='120' y='124' textAnchor='middle' fill='#4A5568' fontSize='12.5'&gt;translates the request&lt;/text&gt;&#10;      &lt;rect x='30' y='156' width='180' height='42' rx='6' fill='#FFFFFF' stroke='#FFC107' strokeWidth='1.4' /&gt;&#10;      &lt;text x='120' y='182' textAnchor='middle' fill='#4A5568' fontSize='12.5'&gt;presents the answer&lt;/text&gt;&#10;      &lt;text x='120' y='232' textAnchor='middle' fill='#996F00' fontSize='11.5'&gt;knows actors + entities&lt;/text&gt;&#10;      &lt;text x='120' y='252' textAnchor='middle' fill='#996F00' fontSize='11.5'&gt;never the step order&lt;/text&gt;&#10;&#10;      &lt;rect x='470' y='32' width='240' height='250' rx='10' fill='#F0F5FC' stroke='#1E4FA8' strokeWidth='2' /&gt;&#10;      &lt;text x='590' y='60' textAnchor='middle' fill='#0E3F8C' fontSize='16' fontWeight='bold'&gt;Control room&lt;/text&gt;&#10;      &lt;text x='590' y='80' textAnchor='middle' fill='#8B97A8' fontSize='11'&gt;PlaceOrderController&lt;/text&gt;&#10;      &lt;rect x='500' y='98' width='180' height='42' rx='6' fill='#FFFFFF' stroke='#1E4FA8' strokeWidth='1.4' /&gt;&#10;      &lt;text x='590' y='124' textAnchor='middle' fill='#4A5568' fontSize='12.5'&gt;decides the sequence&lt;/text&gt;&#10;      &lt;rect x='500' y='156' width='180' height='42' rx='6' fill='#FFFFFF' stroke='#1E4FA8' strokeWidth='1.4' /&gt;&#10;      &lt;text x='590' y='182' textAnchor='middle' fill='#4A5568' fontSize='12.5'&gt;handles 4a 4b 4c&lt;/text&gt;&#10;      &lt;text x='590' y='232' textAnchor='middle' fill='#0E3F8C' fontSize='11.5'&gt;knows everyone&lt;/text&gt;&#10;      &lt;text x='590' y='252' textAnchor='middle' fill='#0E3F8C' fontSize='11.5'&gt;stores nothing&lt;/text&gt;&#10;&#10;      &lt;rect x='940' y='32' width='240' height='250' rx='10' fill='#EAF6EC' stroke='#2B7A3D' strokeWidth='2' /&gt;&#10;      &lt;text x='1060' y='60' textAnchor='middle' fill='#2B7A3D' fontSize='16' fontWeight='bold'&gt;Entity room&lt;/text&gt;&#10;      &lt;text x='1060' y='80' textAnchor='middle' fill='#8B97A8' fontSize='11'&gt;Order, Payment, MenuItem&lt;/text&gt;&#10;      &lt;rect x='970' y='98' width='180' height='42' rx='6' fill='#FFFFFF' stroke='#2B7A3D' strokeWidth='1.4' /&gt;&#10;      &lt;text x='1060' y='124' textAnchor='middle' fill='#4A5568' fontSize='12.5'&gt;keeps the information&lt;/text&gt;&#10;      &lt;rect x='970' y='156' width='180' height='42' rx='6' fill='#FFFFFF' stroke='#2B7A3D' strokeWidth='1.4' /&gt;&#10;      &lt;text x='1060' y='182' textAnchor='middle' fill='#4A5568' fontSize='12.5'&gt;applies the business rules&lt;/text&gt;&#10;      &lt;text x='1060' y='232' textAnchor='middle' fill='#2B7A3D' fontSize='11.5'&gt;knows only entities&lt;/text&gt;&#10;      &lt;text x='1060' y='252' textAnchor='middle' fill='#2B7A3D' fontSize='11.5'&gt;never an actor&lt;/text&gt;&#10;&#10;      &lt;line x1='240' y1='140' x2='470' y2='140' stroke='#1E4FA8' strokeWidth='2' markerEnd='url(#a6)' /&gt;&#10;      &lt;text x='355' y='128' textAnchor='middle' fill='#0E3F8C' fontSize='11.5'&gt;request&lt;/text&gt;&#10;      &lt;line x1='710' y1='170' x2='940' y2='170' stroke='#1E4FA8' strokeWidth='2' markerEnd='url(#a6)' /&gt;&#10;      &lt;text x='825' y='158' textAnchor='middle' fill='#0E3F8C' fontSize='11.5'&gt;ask the entities&lt;/text&gt;&#10;      &lt;line x1='470' y1='240' x2='240' y2='240' stroke='#2B7A3D' strokeWidth='2' strokeDasharray='6 4' markerEnd='url(#a7)' /&gt;&#10;      &lt;text x='355' y='268' textAnchor='middle' fill='#2B7A3D' fontSize='11.5'&gt;the answer, back out&lt;/text&gt;&#10;&#10;      &lt;g transform='translate(20,300)'&gt;&#10;        &lt;circle cx='14' cy='14' r='11' fill='none' stroke='#0E3F8C' strokeWidth='2' /&gt;&#10;        &lt;line x1='14' y1='25' x2='14' y2='46' stroke='#0E3F8C' strokeWidth='2' /&gt;&#10;        &lt;text x='34' y='22' fill='#0E3F8C' fontSize='12.5' fontWeight='bold'&gt;Student&lt;/text&gt;&#10;        &lt;text x='34' y='40' fill='#8B97A8' fontSize='11.5'&gt;an actor, not a class in this model&lt;/text&gt;&#10;        &lt;line x1='34' y1='58' x2='210' y2='58' stroke='#D9534F' strokeWidth='2' strokeDasharray='5 4' /&gt;&#10;        &lt;text x='34' y='76' fill='#D9534F' fontSize='11.5'&gt;no direct line to the entity room&lt;/text&gt;&#10;      &lt;/g&gt;&#10;&#10;      &lt;defs&gt;&#10;        &lt;marker id='a6' markerWidth='9' markerHeight='9' refX='8' refY='4.5' orient='auto'&gt;&#10;          &lt;path d='M0 0 L9 4.5 L0 9 z' fill='#1E4FA8' /&gt;&#10;        &lt;/marker&gt;&#10;        &lt;marker id='a7' markerWidth='9' markerHeight='9' refX='8' refY='4.5' orient='auto'&gt;&#10;          &lt;path d='M0 0 L9 4.5 L0 9 z' fill='#2B7A3D' /&gt;&#10;        &lt;/marker&gt;&#10;      &lt;/defs&gt;&#10;    &lt;/svg&gt;&#10;  &lt;/Box&gt;&#10;  &lt;Box style={{ height: 34, padding: '0 40px', flexDirection: 'row', alignItems: 'center', justifyContent: 'space-between' }}&gt;&#10;    &lt;Text style={{ fontSize: 13, color: '#8B97A8' }}&gt;ISAD · Fall 2026 · The red dashed line is the whole point. An actor talks to a boundary, never to an entity&lt;/Text&gt;&#10;    &lt;Text style={{ fontSize: 14, color: '#1E4FA8', fontWeight: 'bold' }}&gt;15 / 39&lt;/Text&gt;&#10;  &lt;/Box&gt;&#10;&lt;/Slide&gt;&#10;"/>
         <p:cNvGrpSpPr/>
         <p:nvPr/>
       </p:nvGrpSpPr>
@@ -5671,7 +5672,7 @@
                 <a:latin typeface="Microsoft YaHei"/>
                 <a:ea typeface="Microsoft YaHei"/>
               </a:rPr>
-              <a:t>15 / 38</a:t>
+              <a:t>15 / 39</a:t>
             </a:r>
             <a:endParaRPr/>
           </a:p>
@@ -5772,7 +5773,7 @@
                 <a:latin typeface="Microsoft YaHei"/>
                 <a:ea typeface="Microsoft YaHei"/>
               </a:rPr>
-              <a:t>15 / 38</a:t>
+              <a:t>15 / 39</a:t>
             </a:r>
             <a:endParaRPr/>
           </a:p>
@@ -5788,7 +5789,7 @@
   <p:cSld>
     <p:spTree>
       <p:nvGrpSpPr>
-        <p:cNvPr id="109" name="" descr="&lt;Slide style={{ background: '#FFFFFF', padding: 0 }}&gt;&#10;  &lt;Box style={{ height: 72, background: '#1E4FA8', padding: '0 40px', flexDirection: 'row', alignItems: 'center', justifyContent: 'space-between' }}&gt;&#10;    &lt;Text style={{ fontSize: 15, color: '#B9CDF0', letterSpacing: 1 }}&gt;ISAD · INFORMATION SYSTEMS ANALYSIS &amp;amp; DESIGN&lt;/Text&gt;&#10;    &lt;Text style={{ fontSize: 15, color: '#B9CDF0' }}&gt;W06 · ENTITY, BOUNDARY, CONTROL&lt;/Text&gt;&#10;  &lt;/Box&gt;&#10;  &lt;Box style={{ padding: '13px 40px 0 40px', flexDirection: 'row', alignItems: 'center', justifyContent: 'space-between' }}&gt;&#10;    &lt;Text style={{ fontSize: 29, fontWeight: 'bold', color: '#0E3F8C' }}&gt;Finding Entity Classes&lt;/Text&gt;&#10;    &lt;Text style={{ fontSize: 14, color: '#1E4FA8', fontWeight: 'bold' }}&gt;16 / 38&lt;/Text&gt;&#10;  &lt;/Box&gt;&#10;  &lt;Box style={{ flex: 1, padding: '10px 40px 0 40px' }}&gt;&#10;    &lt;Table&#10;      style={{ width: '100%', height: '100%' }}&#10;      defaultTextStyle={{ fontSize: 13.5, textAlign: 'left', color: '#1A2230' }}&#10;      defaultCellStyle={{&#10;        border: {&#10;          left: { width: 1, color: '#E5E7EB' },&#10;          right: { width: 1, color: '#E5E7EB' },&#10;          top: { width: 1, color: '#E5E7EB' },&#10;          bottom: { width: 1, color: '#E5E7EB' },&#10;        },&#10;      }}&#10;      cells={[&#10;        [&#10;          { text: 'Test', textStyle: { bold: true, color: '#FFFFFF', fontSize: 15 }, cellStyle: { background: { color: '#0E3F8C' } } },&#10;          { text: 'Passing example', textStyle: { bold: true, color: '#FFFFFF', fontSize: 15 }, cellStyle: { background: { color: '#2B7A3D' } } },&#10;          { text: 'Failing example', textStyle: { bold: true, color: '#FFFFFF', fontSize: 15 }, cellStyle: { background: { color: '#8B3230' } } },&#10;        ],&#10;        [&#10;          { text: 'Can you point at one?', textStyle: { bold: true, color: '#0E3F8C' }, cellStyle: { background: { color: '#F7F9FC' } } },&#10;          { text: 'That order — CB-20419, placed Tuesday, state Accepted.', textStyle: { color: '#4A5568' }, cellStyle: { background: { color: '#F7F9FC' } } },&#10;          { text: 'That delivery time — you can only read it off an order.', textStyle: { color: '#4A5568' }, cellStyle: { background: { color: '#F7F9FC' } } },&#10;        ],&#10;        [&#10;          { text: 'Does the business keep it?', textStyle: { bold: true, color: '#0E3F8C' } },&#10;          { text: 'Yes — tomorrow’s kitchen needs to know about it without a screen.', textStyle: { color: '#4A5568' } },&#10;          { text: 'No — it lives for one request and is thrown away.', textStyle: { color: '#4A5568' } },&#10;        ],&#10;        [&#10;          { text: 'Is it a noun in your specs?', textStyle: { bold: true, color: '#0E3F8C' }, cellStyle: { background: { color: '#F7F9FC' } } },&#10;          { text: '“the order”, “the coupon”, “the delivery window”.', textStyle: { color: '#4A5568' }, cellStyle: { background: { color: '#F7F9FC' } } },&#10;          { text: '“the calculation”, “the validation” — gerunds are usually operations.', textStyle: { color: '#4A5568' }, cellStyle: { background: { color: '#F7F9FC' } } },&#10;        ],&#10;        [&#10;          { text: 'Six for CampusBites', textStyle: { bold: true, color: '#0E3F8C' } },&#10;          { text: 'Order · OrderLine · MenuItem · Restaurant · Courier · Payment', textStyle: { color: '#2B7A3D', fontWeight: 'bold' } },&#10;          { text: 'Two more arrive on page 19: Coupon and DeliveryWindow.', textStyle: { color: '#4A5568' } },&#10;        ],&#10;        [&#10;          { text: 'The gerund warning', textStyle: { bold: true, color: '#0E3F8C' }, cellStyle: { background: { color: '#F7F9FC' } } },&#10;          { text: 'If a noun ends in -ing or -tion, ask whether someone would point at it. Usually not.', textStyle: { color: '#4A5568' }, cellStyle: { background: { color: '#F7F9FC' } } },&#10;          { text: 'Exception: “the reservation” and “the cancellation” are real nouns with identity.', textStyle: { color: '#4A5568' }, cellStyle: { background: { color: '#F7F9FC' } } },&#10;        ],&#10;      ]}&#10;    /&gt;&#10;  &lt;/Box&gt;&#10;  &lt;Box style={{ height: 46, background: '#0E3F8C', padding: '0 40px', flexDirection: 'row', alignItems: 'center', justifyContent: 'center' }}&gt;&#10;    &lt;Text style={{ fontSize: 16.5, color: '#FFFFFF', fontWeight: '600' }}&gt;An entity is something the business would still care about with the whole interface switched off.&lt;/Text&gt;&#10;  &lt;/Box&gt;&#10;&lt;/Slide&gt;&#10;"/>
+        <p:cNvPr id="109" name="" descr="&lt;Slide style={{ background: '#FFFFFF', padding: 0 }}&gt;&#10;  &lt;Box style={{ height: 72, background: '#1E4FA8', padding: '0 40px', flexDirection: 'row', alignItems: 'center', justifyContent: 'space-between' }}&gt;&#10;    &lt;Text style={{ fontSize: 15, color: '#B9CDF0', letterSpacing: 1 }}&gt;ISAD · INFORMATION SYSTEMS ANALYSIS &amp;amp; DESIGN&lt;/Text&gt;&#10;    &lt;Text style={{ fontSize: 15, color: '#B9CDF0' }}&gt;W06 · ENTITY, BOUNDARY, CONTROL&lt;/Text&gt;&#10;  &lt;/Box&gt;&#10;  &lt;Box style={{ padding: '13px 40px 0 40px', flexDirection: 'row', alignItems: 'center', justifyContent: 'space-between' }}&gt;&#10;    &lt;Text style={{ fontSize: 29, fontWeight: 'bold', color: '#0E3F8C' }}&gt;Finding Entity Classes&lt;/Text&gt;&#10;    &lt;Text style={{ fontSize: 14, color: '#1E4FA8', fontWeight: 'bold' }}&gt;16 / 39&lt;/Text&gt;&#10;  &lt;/Box&gt;&#10;  &lt;Box style={{ flex: 1, padding: '10px 40px 0 40px' }}&gt;&#10;    &lt;Table&#10;      style={{ width: '100%', height: '100%' }}&#10;      defaultTextStyle={{ fontSize: 13.5, textAlign: 'left', color: '#1A2230' }}&#10;      defaultCellStyle={{&#10;        border: {&#10;          left: { width: 1, color: '#E5E7EB' },&#10;          right: { width: 1, color: '#E5E7EB' },&#10;          top: { width: 1, color: '#E5E7EB' },&#10;          bottom: { width: 1, color: '#E5E7EB' },&#10;        },&#10;      }}&#10;      cells={[&#10;        [&#10;          { text: 'Test', textStyle: { bold: true, color: '#FFFFFF', fontSize: 15 }, cellStyle: { background: { color: '#0E3F8C' } } },&#10;          { text: 'Passing example', textStyle: { bold: true, color: '#FFFFFF', fontSize: 15 }, cellStyle: { background: { color: '#2B7A3D' } } },&#10;          { text: 'Failing example', textStyle: { bold: true, color: '#FFFFFF', fontSize: 15 }, cellStyle: { background: { color: '#8B3230' } } },&#10;        ],&#10;        [&#10;          { text: 'Can you point at one?', textStyle: { bold: true, color: '#0E3F8C' }, cellStyle: { background: { color: '#F7F9FC' } } },&#10;          { text: 'That order — CB-20419, placed Tuesday, state Accepted.', textStyle: { color: '#4A5568' }, cellStyle: { background: { color: '#F7F9FC' } } },&#10;          { text: 'That delivery time — you can only read it off an order.', textStyle: { color: '#4A5568' }, cellStyle: { background: { color: '#F7F9FC' } } },&#10;        ],&#10;        [&#10;          { text: 'Does the business keep it?', textStyle: { bold: true, color: '#0E3F8C' } },&#10;          { text: 'Yes — tomorrow’s kitchen needs to know about it without a screen.', textStyle: { color: '#4A5568' } },&#10;          { text: 'No — it lives for one request and is thrown away.', textStyle: { color: '#4A5568' } },&#10;        ],&#10;        [&#10;          { text: 'Is it a noun in your specs?', textStyle: { bold: true, color: '#0E3F8C' }, cellStyle: { background: { color: '#F7F9FC' } } },&#10;          { text: '“the order”, “the coupon”, “the delivery window”.', textStyle: { color: '#4A5568' }, cellStyle: { background: { color: '#F7F9FC' } } },&#10;          { text: '“the calculation”, “the validation” — gerunds are usually operations.', textStyle: { color: '#4A5568' }, cellStyle: { background: { color: '#F7F9FC' } } },&#10;        ],&#10;        [&#10;          { text: 'Six for Worked example', textStyle: { bold: true, color: '#0E3F8C' } },&#10;          { text: 'Order · OrderLine · MenuItem · Restaurant · Courier · Payment', textStyle: { color: '#2B7A3D', fontWeight: 'bold' } },&#10;          { text: 'Two more arrive on page 19: Coupon and DeliveryWindow.', textStyle: { color: '#4A5568' } },&#10;        ],&#10;        [&#10;          { text: 'The gerund warning', textStyle: { bold: true, color: '#0E3F8C' }, cellStyle: { background: { color: '#F7F9FC' } } },&#10;          { text: 'If a noun ends in -ing or -tion, ask whether someone would point at it. Usually not.', textStyle: { color: '#4A5568' }, cellStyle: { background: { color: '#F7F9FC' } } },&#10;          { text: 'Exception: “the reservation” and “the cancellation” are real nouns with identity.', textStyle: { color: '#4A5568' }, cellStyle: { background: { color: '#F7F9FC' } } },&#10;        ],&#10;      ]}&#10;    /&gt;&#10;  &lt;/Box&gt;&#10;  &lt;Box style={{ height: 46, background: '#0E3F8C', padding: '0 40px', flexDirection: 'row', alignItems: 'center', justifyContent: 'center' }}&gt;&#10;    &lt;Text style={{ fontSize: 16.5, color: '#FFFFFF', fontWeight: '600' }}&gt;An entity is something the business would still care about with the whole interface switched off.&lt;/Text&gt;&#10;  &lt;/Box&gt;&#10;&lt;/Slide&gt;&#10;"/>
         <p:cNvGrpSpPr/>
         <p:nvPr/>
       </p:nvGrpSpPr>
@@ -5982,7 +5983,7 @@
                 <a:latin typeface="Microsoft YaHei"/>
                 <a:ea typeface="Microsoft YaHei"/>
               </a:rPr>
-              <a:t>16 / 38</a:t>
+              <a:t>16 / 39</a:t>
             </a:r>
             <a:endParaRPr/>
           </a:p>
@@ -6567,7 +6568,7 @@
                           <a:latin typeface="Microsoft YaHei"/>
                           <a:ea typeface="Microsoft YaHei"/>
                         </a:rPr>
-                        <a:t>Six for CampusBites</a:t>
+                        <a:t>Six for Worked example</a:t>
                       </a:r>
                       <a:endParaRPr/>
                     </a:p>
@@ -6877,7 +6878,7 @@
   <p:cSld>
     <p:spTree>
       <p:nvGrpSpPr>
-        <p:cNvPr id="119" name="" descr="&lt;Slide style={{ background: '#FFFFFF', padding: 0 }}&gt;&#10;  &lt;Box style={{ height: 72, background: '#1E4FA8', padding: '0 40px', flexDirection: 'row', alignItems: 'center', justifyContent: 'space-between' }}&gt;&#10;    &lt;Text style={{ fontSize: 15, color: '#B9CDF0', letterSpacing: 1 }}&gt;ISAD · INFORMATION SYSTEMS ANALYSIS &amp;amp; DESIGN&lt;/Text&gt;&#10;    &lt;Text style={{ fontSize: 15, color: '#B9CDF0' }}&gt;W06 · ENTITY, BOUNDARY, CONTROL&lt;/Text&gt;&#10;  &lt;/Box&gt;&#10;  &lt;Box style={{ padding: '13px 40px 0 40px', flexDirection: 'row', alignItems: 'center', justifyContent: 'space-between' }}&gt;&#10;    &lt;Text style={{ fontSize: 29, fontWeight: 'bold', color: '#0E3F8C' }}&gt;Finding Boundary Classes&lt;/Text&gt;&#10;    &lt;Text style={{ fontSize: 14, color: '#1E4FA8', fontWeight: 'bold' }}&gt;17 / 38&lt;/Text&gt;&#10;  &lt;/Box&gt;&#10;  &lt;Box style={{ flex: 1, padding: '10px 40px 0 40px', flexDirection: 'row', gap: 26 }}&gt;&#10;    &lt;Box style={{ width: 500, justifyContent: 'center' }}&gt;&#10;      &lt;svg width={500} height={340} viewBox='0 0 500 340'&gt;&#10;        &lt;text x='4' y='14' fill='#8B97A8' fontSize='12'&gt;One boundary class per way the outside world talks in.&lt;/text&gt;&#10;        &lt;g transform='translate(10,28)'&gt;&#10;          &lt;g&gt;&#10;            &lt;rect x='0' y='0' width='170' height='58' rx='7' fill='#F7F9FC' stroke='#D6DCE5' strokeWidth='1.4' /&gt;&#10;            &lt;text x='85' y='24' textAnchor='middle' fill='#0E3F8C' fontSize='13' fontWeight='bold'&gt;Student&lt;/text&gt;&#10;            &lt;text x='85' y='44' textAnchor='middle' fill='#8B97A8' fontSize='11'&gt;phone · laptop&lt;/text&gt;&#10;            &lt;line x1='170' y1='29' x2='228' y2='29' stroke='#996F00' strokeWidth='2' /&gt;&#10;            &lt;rect x='228' y='0' width='240' height='58' rx='7' fill='#FFF6E0' stroke='#FFC107' strokeWidth='1.8' /&gt;&#10;            &lt;text x='348' y='24' textAnchor='middle' fill='#996F00' fontSize='13' fontWeight='bold'&gt;StudentApp&lt;/text&gt;&#10;            &lt;text x='348' y='44' textAnchor='middle' fill='#8B97A8' fontSize='11'&gt;one boundary&lt;/text&gt;&#10;          &lt;/g&gt;&#10;          &lt;g transform='translate(0,74)'&gt;&#10;            &lt;rect x='0' y='0' width='170' height='58' rx='7' fill='#F7F9FC' stroke='#D6DCE5' strokeWidth='1.4' /&gt;&#10;            &lt;text x='85' y='24' textAnchor='middle' fill='#0E3F8C' fontSize='13' fontWeight='bold'&gt;Kitchen staff&lt;/text&gt;&#10;            &lt;text x='85' y='44' textAnchor='middle' fill='#8B97A8' fontSize='11'&gt;wall tablet&lt;/text&gt;&#10;            &lt;line x1='170' y1='29' x2='228' y2='29' stroke='#996F00' strokeWidth='2' /&gt;&#10;            &lt;rect x='228' y='0' width='240' height='58' rx='7' fill='#FFF6E0' stroke='#FFC107' strokeWidth='1.8' /&gt;&#10;            &lt;text x='348' y='24' textAnchor='middle' fill='#996F00' fontSize='13' fontWeight='bold'&gt;KitchenDisplay&lt;/text&gt;&#10;            &lt;text x='348' y='44' textAnchor='middle' fill='#8B97A8' fontSize='11'&gt;different job entirely&lt;/text&gt;&#10;          &lt;/g&gt;&#10;          &lt;g transform='translate(0,148)'&gt;&#10;            &lt;rect x='0' y='0' width='170' height='58' rx='7' fill='#F7F9FC' stroke='#D6DCE5' strokeWidth='1.4' /&gt;&#10;            &lt;text x='85' y='24' textAnchor='middle' fill='#0E3F8C' fontSize='13' fontWeight='bold'&gt;Courier&lt;/text&gt;&#10;            &lt;text x='85' y='44' textAnchor='middle' fill='#8B97A8' fontSize='11'&gt;own phone&lt;/text&gt;&#10;            &lt;line x1='170' y1='29' x2='228' y2='29' stroke='#996F00' strokeWidth='2' /&gt;&#10;            &lt;rect x='228' y='0' width='240' height='58' rx='7' fill='#FFF6E0' stroke='#FFC107' strokeWidth='1.8' /&gt;&#10;            &lt;text x='348' y='24' textAnchor='middle' fill='#996F00' fontSize='13' fontWeight='bold'&gt;CourierApp&lt;/text&gt;&#10;            &lt;text x='348' y='44' textAnchor='middle' fill='#8B97A8' fontSize='11'&gt;accepts and delivers&lt;/text&gt;&#10;          &lt;/g&gt;&#10;          &lt;g transform='translate(0,222)'&gt;&#10;            &lt;rect x='0' y='0' width='170' height='58' rx='7' fill='#F7F9FC' stroke='#D6DCE5' strokeWidth='1.4' /&gt;&#10;            &lt;text x='85' y='24' textAnchor='middle' fill='#0E3F8C' fontSize='13' fontWeight='bold'&gt;Manager&lt;/text&gt;&#10;            &lt;text x='85' y='44' textAnchor='middle' fill='#8B97A8' fontSize='11'&gt;back office&lt;/text&gt;&#10;            &lt;line x1='170' y1='29' x2='228' y2='29' stroke='#996F00' strokeWidth='2' /&gt;&#10;            &lt;rect x='228' y='0' width='240' height='58' rx='7' fill='#FFF6E0' stroke='#FFC107' strokeWidth='1.8' /&gt;&#10;            &lt;text x='348' y='24' textAnchor='middle' fill='#996F00' fontSize='13' fontWeight='bold'&gt;RestaurantConsole&lt;/text&gt;&#10;            &lt;text x='348' y='44' textAnchor='middle' fill='#8B97A8' fontSize='11'&gt;marks items sold out&lt;/text&gt;&#10;          &lt;/g&gt;&#10;        &lt;/g&gt;&#10;      &lt;/svg&gt;&#10;    &lt;/Box&gt;&#10;    &lt;Box style={{ flex: 1, flexDirection: 'column', justifyContent: 'center', gap: 13 }}&gt;&#10;      &lt;Box style={{ padding: '15px 17px', background: '#F0F5FC', borderRadius: 9, borderLeft: '4px solid #1E4FA8' }}&gt;&#10;        &lt;Text style={{ fontSize: 16, fontWeight: 'bold', color: '#0E3F8C' }}&gt;One actor, one boundary class&lt;/Text&gt;&#10;        &lt;Text style={{ fontSize: 13, color: '#4A5568', lineHeight: 1.6, marginTop: 5 }}&gt;&#10;          Not one per screen, and not one per actor role. The student uses StudentApp whether they are ordering or tracking.&#10;        &lt;/Text&gt;&#10;      &lt;/Box&gt;&#10;      &lt;Box style={{ padding: '15px 17px', background: '#FFFFFF', borderRadius: 9, border: '1px solid #D6DCE5' }}&gt;&#10;        &lt;Text style={{ fontSize: 16, fontWeight: 'bold', color: '#0E3F8C' }}&gt;The question to ask&lt;/Text&gt;&#10;        &lt;Text style={{ fontSize: 13, color: '#4A5568', lineHeight: 1.6, marginTop: 5 }}&gt;&#10;          If this actor needed a completely different application tomorrow, would it still be this class? No → new boundary class.&#10;        &lt;/Text&gt;&#10;      &lt;/Box&gt;&#10;      &lt;Box style={{ padding: '15px 17px', background: '#FDF3F3', borderRadius: 9, borderLeft: '4px solid #D9534F' }}&gt;&#10;        &lt;Text style={{ fontSize: 16, fontWeight: 'bold', color: '#D9534F' }}&gt;The trap for this course&lt;/Text&gt;&#10;        &lt;Text style={{ fontSize: 13, color: '#4A5568', lineHeight: 1.6, marginTop: 5 }}&gt;&#10;          You wrote “the student clicks Pay” in W04 and corrected it in W05. Boundary classes are where that UI detail belongs — not before W10.&#10;        &lt;/Text&gt;&#10;      &lt;/Box&gt;&#10;      &lt;Box style={{ padding: '12px 16px', background: '#F7F9FC', borderRadius: 8, border: '1px dashed #D6DCE5' }}&gt;&#10;        &lt;Text style={{ fontSize: 12.5, color: '#8B97A8', lineHeight: 1.55 }}&gt;&#10;          Four boundary classes for CampusBites. Note that none of them is named after a page.&#10;        &lt;/Text&gt;&#10;      &lt;/Box&gt;&#10;    &lt;/Box&gt;&#10;  &lt;/Box&gt;&#10;  &lt;Box style={{ height: 34, padding: '0 40px', flexDirection: 'row', alignItems: 'center', justifyContent: 'space-between' }}&gt;&#10;    &lt;Text style={{ fontSize: 13, color: '#8B97A8' }}&gt;ISAD · Fall 2026 · A boundary class is named after who uses it, not after what it shows&lt;/Text&gt;&#10;    &lt;Text style={{ fontSize: 14, color: '#1E4FA8', fontWeight: 'bold' }}&gt;17 / 38&lt;/Text&gt;&#10;  &lt;/Box&gt;&#10;&lt;/Slide&gt;&#10;"/>
+        <p:cNvPr id="119" name="" descr="&lt;Slide style={{ background: '#FFFFFF', padding: 0 }}&gt;&#10;  &lt;Box style={{ height: 72, background: '#1E4FA8', padding: '0 40px', flexDirection: 'row', alignItems: 'center', justifyContent: 'space-between' }}&gt;&#10;    &lt;Text style={{ fontSize: 15, color: '#B9CDF0', letterSpacing: 1 }}&gt;ISAD · INFORMATION SYSTEMS ANALYSIS &amp;amp; DESIGN&lt;/Text&gt;&#10;    &lt;Text style={{ fontSize: 15, color: '#B9CDF0' }}&gt;W06 · ENTITY, BOUNDARY, CONTROL&lt;/Text&gt;&#10;  &lt;/Box&gt;&#10;  &lt;Box style={{ padding: '13px 40px 0 40px', flexDirection: 'row', alignItems: 'center', justifyContent: 'space-between' }}&gt;&#10;    &lt;Text style={{ fontSize: 29, fontWeight: 'bold', color: '#0E3F8C' }}&gt;Finding Boundary Classes&lt;/Text&gt;&#10;    &lt;Text style={{ fontSize: 14, color: '#1E4FA8', fontWeight: 'bold' }}&gt;17 / 39&lt;/Text&gt;&#10;  &lt;/Box&gt;&#10;  &lt;Box style={{ flex: 1, padding: '10px 40px 0 40px', flexDirection: 'row', gap: 26 }}&gt;&#10;    &lt;Box style={{ width: 500, justifyContent: 'center' }}&gt;&#10;      &lt;svg width={500} height={340} viewBox='0 0 500 340'&gt;&#10;        &lt;text x='4' y='14' fill='#8B97A8' fontSize='12'&gt;One boundary class per way the outside world talks in.&lt;/text&gt;&#10;        &lt;g transform='translate(10,28)'&gt;&#10;          &lt;g&gt;&#10;            &lt;rect x='0' y='0' width='170' height='58' rx='7' fill='#F7F9FC' stroke='#D6DCE5' strokeWidth='1.4' /&gt;&#10;            &lt;text x='85' y='24' textAnchor='middle' fill='#0E3F8C' fontSize='13' fontWeight='bold'&gt;Student&lt;/text&gt;&#10;            &lt;text x='85' y='44' textAnchor='middle' fill='#8B97A8' fontSize='11'&gt;phone · laptop&lt;/text&gt;&#10;            &lt;line x1='170' y1='29' x2='228' y2='29' stroke='#996F00' strokeWidth='2' /&gt;&#10;            &lt;rect x='228' y='0' width='240' height='58' rx='7' fill='#FFF6E0' stroke='#FFC107' strokeWidth='1.8' /&gt;&#10;            &lt;text x='348' y='24' textAnchor='middle' fill='#996F00' fontSize='13' fontWeight='bold'&gt;StudentApp&lt;/text&gt;&#10;            &lt;text x='348' y='44' textAnchor='middle' fill='#8B97A8' fontSize='11'&gt;one boundary&lt;/text&gt;&#10;          &lt;/g&gt;&#10;          &lt;g transform='translate(0,74)'&gt;&#10;            &lt;rect x='0' y='0' width='170' height='58' rx='7' fill='#F7F9FC' stroke='#D6DCE5' strokeWidth='1.4' /&gt;&#10;            &lt;text x='85' y='24' textAnchor='middle' fill='#0E3F8C' fontSize='13' fontWeight='bold'&gt;Kitchen staff&lt;/text&gt;&#10;            &lt;text x='85' y='44' textAnchor='middle' fill='#8B97A8' fontSize='11'&gt;wall tablet&lt;/text&gt;&#10;            &lt;line x1='170' y1='29' x2='228' y2='29' stroke='#996F00' strokeWidth='2' /&gt;&#10;            &lt;rect x='228' y='0' width='240' height='58' rx='7' fill='#FFF6E0' stroke='#FFC107' strokeWidth='1.8' /&gt;&#10;            &lt;text x='348' y='24' textAnchor='middle' fill='#996F00' fontSize='13' fontWeight='bold'&gt;KitchenDisplay&lt;/text&gt;&#10;            &lt;text x='348' y='44' textAnchor='middle' fill='#8B97A8' fontSize='11'&gt;different job entirely&lt;/text&gt;&#10;          &lt;/g&gt;&#10;          &lt;g transform='translate(0,148)'&gt;&#10;            &lt;rect x='0' y='0' width='170' height='58' rx='7' fill='#F7F9FC' stroke='#D6DCE5' strokeWidth='1.4' /&gt;&#10;            &lt;text x='85' y='24' textAnchor='middle' fill='#0E3F8C' fontSize='13' fontWeight='bold'&gt;Courier&lt;/text&gt;&#10;            &lt;text x='85' y='44' textAnchor='middle' fill='#8B97A8' fontSize='11'&gt;own phone&lt;/text&gt;&#10;            &lt;line x1='170' y1='29' x2='228' y2='29' stroke='#996F00' strokeWidth='2' /&gt;&#10;            &lt;rect x='228' y='0' width='240' height='58' rx='7' fill='#FFF6E0' stroke='#FFC107' strokeWidth='1.8' /&gt;&#10;            &lt;text x='348' y='24' textAnchor='middle' fill='#996F00' fontSize='13' fontWeight='bold'&gt;CourierApp&lt;/text&gt;&#10;            &lt;text x='348' y='44' textAnchor='middle' fill='#8B97A8' fontSize='11'&gt;accepts and delivers&lt;/text&gt;&#10;          &lt;/g&gt;&#10;          &lt;g transform='translate(0,222)'&gt;&#10;            &lt;rect x='0' y='0' width='170' height='58' rx='7' fill='#F7F9FC' stroke='#D6DCE5' strokeWidth='1.4' /&gt;&#10;            &lt;text x='85' y='24' textAnchor='middle' fill='#0E3F8C' fontSize='13' fontWeight='bold'&gt;Manager&lt;/text&gt;&#10;            &lt;text x='85' y='44' textAnchor='middle' fill='#8B97A8' fontSize='11'&gt;back office&lt;/text&gt;&#10;            &lt;line x1='170' y1='29' x2='228' y2='29' stroke='#996F00' strokeWidth='2' /&gt;&#10;            &lt;rect x='228' y='0' width='240' height='58' rx='7' fill='#FFF6E0' stroke='#FFC107' strokeWidth='1.8' /&gt;&#10;            &lt;text x='348' y='24' textAnchor='middle' fill='#996F00' fontSize='13' fontWeight='bold'&gt;RestaurantConsole&lt;/text&gt;&#10;            &lt;text x='348' y='44' textAnchor='middle' fill='#8B97A8' fontSize='11'&gt;marks items sold out&lt;/text&gt;&#10;          &lt;/g&gt;&#10;        &lt;/g&gt;&#10;      &lt;/svg&gt;&#10;    &lt;/Box&gt;&#10;    &lt;Box style={{ flex: 1, flexDirection: 'column', justifyContent: 'center', gap: 13 }}&gt;&#10;      &lt;Box style={{ padding: '15px 17px', background: '#F0F5FC', borderRadius: 9, borderLeft: '4px solid #1E4FA8' }}&gt;&#10;        &lt;Text style={{ fontSize: 16, fontWeight: 'bold', color: '#0E3F8C' }}&gt;One actor, one boundary class&lt;/Text&gt;&#10;        &lt;Text style={{ fontSize: 13, color: '#4A5568', lineHeight: 1.6, marginTop: 5 }}&gt;&#10;          Not one per screen, and not one per actor role. The student uses StudentApp whether they are ordering or tracking.&#10;        &lt;/Text&gt;&#10;      &lt;/Box&gt;&#10;      &lt;Box style={{ padding: '15px 17px', background: '#FFFFFF', borderRadius: 9, border: '1px solid #D6DCE5' }}&gt;&#10;        &lt;Text style={{ fontSize: 16, fontWeight: 'bold', color: '#0E3F8C' }}&gt;The question to ask&lt;/Text&gt;&#10;        &lt;Text style={{ fontSize: 13, color: '#4A5568', lineHeight: 1.6, marginTop: 5 }}&gt;&#10;          If this actor needed a completely different application tomorrow, would it still be this class? No → new boundary class.&#10;        &lt;/Text&gt;&#10;      &lt;/Box&gt;&#10;      &lt;Box style={{ padding: '15px 17px', background: '#FDF3F3', borderRadius: 9, borderLeft: '4px solid #D9534F' }}&gt;&#10;        &lt;Text style={{ fontSize: 16, fontWeight: 'bold', color: '#D9534F' }}&gt;The trap for this course&lt;/Text&gt;&#10;        &lt;Text style={{ fontSize: 13, color: '#4A5568', lineHeight: 1.6, marginTop: 5 }}&gt;&#10;          You wrote “the student clicks Pay” in W04 and corrected it in W05. Boundary classes are where that UI detail belongs — not before W10.&#10;        &lt;/Text&gt;&#10;      &lt;/Box&gt;&#10;      &lt;Box style={{ padding: '12px 16px', background: '#F7F9FC', borderRadius: 8, border: '1px dashed #D6DCE5' }}&gt;&#10;        &lt;Text style={{ fontSize: 12.5, color: '#8B97A8', lineHeight: 1.55 }}&gt;&#10;          Four boundary classes in the worked example. Note that none of them is named after a page.&#10;        &lt;/Text&gt;&#10;      &lt;/Box&gt;&#10;    &lt;/Box&gt;&#10;  &lt;/Box&gt;&#10;  &lt;Box style={{ height: 34, padding: '0 40px', flexDirection: 'row', alignItems: 'center', justifyContent: 'space-between' }}&gt;&#10;    &lt;Text style={{ fontSize: 13, color: '#8B97A8' }}&gt;ISAD · Fall 2026 · A boundary class is named after who uses it, not after what it shows&lt;/Text&gt;&#10;    &lt;Text style={{ fontSize: 14, color: '#1E4FA8', fontWeight: 'bold' }}&gt;17 / 39&lt;/Text&gt;&#10;  &lt;/Box&gt;&#10;&lt;/Slide&gt;&#10;"/>
         <p:cNvGrpSpPr/>
         <p:nvPr/>
       </p:nvGrpSpPr>
@@ -7071,7 +7072,7 @@
                 <a:latin typeface="Microsoft YaHei"/>
                 <a:ea typeface="Microsoft YaHei"/>
               </a:rPr>
-              <a:t>17 / 38</a:t>
+              <a:t>17 / 39</a:t>
             </a:r>
             <a:endParaRPr/>
           </a:p>
@@ -7581,7 +7582,7 @@
                 <a:latin typeface="Microsoft YaHei"/>
                 <a:ea typeface="Microsoft YaHei"/>
               </a:rPr>
-              <a:t>Four boundary classes for CampusBites. Note that none of them is named after a page.</a:t>
+              <a:t>Four boundary classes in the worked example. Note that none of them is named after a page.</a:t>
             </a:r>
             <a:endParaRPr/>
           </a:p>
@@ -7651,7 +7652,7 @@
                 <a:latin typeface="Microsoft YaHei"/>
                 <a:ea typeface="Microsoft YaHei"/>
               </a:rPr>
-              <a:t>17 / 38</a:t>
+              <a:t>17 / 39</a:t>
             </a:r>
             <a:endParaRPr/>
           </a:p>
@@ -7667,7 +7668,7 @@
   <p:cSld>
     <p:spTree>
       <p:nvGrpSpPr>
-        <p:cNvPr id="142" name="" descr="&lt;Slide style={{ background: '#FFFFFF', padding: 0 }}&gt;&#10;  &lt;Box style={{ height: 72, background: '#1E4FA8', padding: '0 40px', flexDirection: 'row', alignItems: 'center', justifyContent: 'space-between' }}&gt;&#10;    &lt;Text style={{ fontSize: 15, color: '#B9CDF0', letterSpacing: 1 }}&gt;ISAD · INFORMATION SYSTEMS ANALYSIS &amp;amp; DESIGN&lt;/Text&gt;&#10;    &lt;Text style={{ fontSize: 15, color: '#B9CDF0' }}&gt;W06 · ENTITY, BOUNDARY, CONTROL&lt;/Text&gt;&#10;  &lt;/Box&gt;&#10;  &lt;Box style={{ padding: '13px 40px 0 40px', flexDirection: 'row', alignItems: 'center', justifyContent: 'space-between' }}&gt;&#10;    &lt;Text style={{ fontSize: 29, fontWeight: 'bold', color: '#0E3F8C' }}&gt;Finding Control Classes&lt;/Text&gt;&#10;    &lt;Text style={{ fontSize: 14, color: '#1E4FA8', fontWeight: 'bold' }}&gt;18 / 38&lt;/Text&gt;&#10;  &lt;/Box&gt;&#10;  &lt;Box style={{ flex: 1, padding: '10px 40px 0 40px' }}&gt;&#10;    &lt;Table&#10;      style={{ width: '100%', height: '100%' }}&#10;      defaultTextStyle={{ fontSize: 13.5, textAlign: 'left', color: '#1A2230' }}&#10;      defaultCellStyle={{&#10;        border: {&#10;          left: { width: 1, color: '#E5E7EB' },&#10;          right: { width: 1, color: '#E5E7EB' },&#10;          top: { width: 1, color: '#E5E7EB' },&#10;          bottom: { width: 1, color: '#E5E7EB' },&#10;        },&#10;      }}&#10;      cells={[&#10;        [&#10;          { text: '', textStyle: { bold: true }, cellStyle: { background: { color: '#0E3F8C' } } },&#10;          { text: 'A control class', textStyle: { bold: true, color: '#FFFFFF', fontSize: 15 }, cellStyle: { background: { color: '#1E4FA8' } } },&#10;          { text: 'Not a control class', textStyle: { bold: true, color: '#FFFFFF', fontSize: 15 }, cellStyle: { background: { color: '#8B3230' } } },&#10;        ],&#10;        [&#10;          { text: 'One per use case', textStyle: { bold: true, color: '#0E3F8C' }, cellStyle: { background: { color: '#F7F9FC' } } },&#10;          { text: 'PlaceOrderController exists because “Place Order” is a use case.', textStyle: { color: '#4A5568' }, cellStyle: { background: { color: '#F7F9FC' } } },&#10;          { text: 'One per actor, or one per table — that is not a use case at all.', textStyle: { color: '#4A5568' }, cellStyle: { background: { color: '#F7F9FC' } } },&#10;        ],&#10;        [&#10;          { text: 'Holds the sequence', textStyle: { bold: true, color: '#0E3F8C' } },&#10;          { text: 'It knows step 3 happens before step 4, and that 4c ends the use case.', textStyle: { color: '#4A5568' } },&#10;          { text: '“The order knows its steps” — entities do not know the order of steps.', textStyle: { color: '#4A5568' } },&#10;        ],&#10;        [&#10;          { text: 'Stores nothing', textStyle: { bold: true, color: '#0E3F8C' }, cellStyle: { background: { color: '#F7F9FC' } } },&#10;          { text: 'It asks the entities to record things and forgets about them.', textStyle: { color: '#4A5568' }, cellStyle: { background: { color: '#F7F9FC' } } },&#10;          { text: 'PlaceOrderController with its own orderList field is a god object in waiting.', textStyle: { color: '#4A5568' }, cellStyle: { background: { color: '#F7F9FC' } } },&#10;        ],&#10;        [&#10;          { text: 'CampusBites set', textStyle: { bold: true, color: '#0E3F8C' } },&#10;          { text: 'PlaceOrderController · PayController · DispatchController · CancelOrderController', textStyle: { color: '#1E4FA8', fontWeight: 'bold' } },&#10;          { text: 'OrderService · OrderHelper — those are W10 design names, and they hide the use cases.', textStyle: { color: '#4A5568' } },&#10;        ],&#10;        [&#10;          { text: 'The honest answer', textStyle: { bold: true, color: '#0E3F8C' }, cellStyle: { background: { color: '#F7F9FC' } } },&#10;          { text: 'Control classes are the least stable part of an analysis model. Expect to reshape them in W10.', textStyle: { color: '#4A5568' }, cellStyle: { background: { color: '#F7F9FC' } } },&#10;          { text: 'That is not a design failure. It means you modelled honestly instead of guessing early.', textStyle: { color: '#4A5568' }, cellStyle: { background: { color: '#F7F9FC' } } },&#10;        ],&#10;      ]}&#10;    /&gt;&#10;  &lt;/Box&gt;&#10;  &lt;Box style={{ height: 46, background: '#0E3F8C', padding: '0 40px', flexDirection: 'row', alignItems: 'center', justifyContent: 'center' }}&gt;&#10;    &lt;Text style={{ fontSize: 16.5, color: '#FFFFFF', fontWeight: '600' }}&gt;One control class per use case, holding no data. If yours is huge, the use case is probably two.&lt;/Text&gt;&#10;  &lt;/Box&gt;&#10;&lt;/Slide&gt;&#10;"/>
+        <p:cNvPr id="142" name="" descr="&lt;Slide style={{ background: '#FFFFFF', padding: 0 }}&gt;&#10;  &lt;Box style={{ height: 72, background: '#1E4FA8', padding: '0 40px', flexDirection: 'row', alignItems: 'center', justifyContent: 'space-between' }}&gt;&#10;    &lt;Text style={{ fontSize: 15, color: '#B9CDF0', letterSpacing: 1 }}&gt;ISAD · INFORMATION SYSTEMS ANALYSIS &amp;amp; DESIGN&lt;/Text&gt;&#10;    &lt;Text style={{ fontSize: 15, color: '#B9CDF0' }}&gt;W06 · ENTITY, BOUNDARY, CONTROL&lt;/Text&gt;&#10;  &lt;/Box&gt;&#10;  &lt;Box style={{ padding: '13px 40px 0 40px', flexDirection: 'row', alignItems: 'center', justifyContent: 'space-between' }}&gt;&#10;    &lt;Text style={{ fontSize: 29, fontWeight: 'bold', color: '#0E3F8C' }}&gt;Finding Control Classes&lt;/Text&gt;&#10;    &lt;Text style={{ fontSize: 14, color: '#1E4FA8', fontWeight: 'bold' }}&gt;18 / 39&lt;/Text&gt;&#10;  &lt;/Box&gt;&#10;  &lt;Box style={{ flex: 1, padding: '10px 40px 0 40px' }}&gt;&#10;    &lt;Table&#10;      style={{ width: '100%', height: '100%' }}&#10;      defaultTextStyle={{ fontSize: 13.5, textAlign: 'left', color: '#1A2230' }}&#10;      defaultCellStyle={{&#10;        border: {&#10;          left: { width: 1, color: '#E5E7EB' },&#10;          right: { width: 1, color: '#E5E7EB' },&#10;          top: { width: 1, color: '#E5E7EB' },&#10;          bottom: { width: 1, color: '#E5E7EB' },&#10;        },&#10;      }}&#10;      cells={[&#10;        [&#10;          { text: '', textStyle: { bold: true }, cellStyle: { background: { color: '#0E3F8C' } } },&#10;          { text: 'A control class', textStyle: { bold: true, color: '#FFFFFF', fontSize: 15 }, cellStyle: { background: { color: '#1E4FA8' } } },&#10;          { text: 'Not a control class', textStyle: { bold: true, color: '#FFFFFF', fontSize: 15 }, cellStyle: { background: { color: '#8B3230' } } },&#10;        ],&#10;        [&#10;          { text: 'One per use case', textStyle: { bold: true, color: '#0E3F8C' }, cellStyle: { background: { color: '#F7F9FC' } } },&#10;          { text: 'PlaceOrderController exists because “Place Order” is a use case.', textStyle: { color: '#4A5568' }, cellStyle: { background: { color: '#F7F9FC' } } },&#10;          { text: 'One per actor, or one per table — that is not a use case at all.', textStyle: { color: '#4A5568' }, cellStyle: { background: { color: '#F7F9FC' } } },&#10;        ],&#10;        [&#10;          { text: 'Holds the sequence', textStyle: { bold: true, color: '#0E3F8C' } },&#10;          { text: 'It knows step 3 happens before step 4, and that 4c ends the use case.', textStyle: { color: '#4A5568' } },&#10;          { text: '“The order knows its steps” — entities do not know the order of steps.', textStyle: { color: '#4A5568' } },&#10;        ],&#10;        [&#10;          { text: 'Stores nothing', textStyle: { bold: true, color: '#0E3F8C' }, cellStyle: { background: { color: '#F7F9FC' } } },&#10;          { text: 'It asks the entities to record things and forgets about them.', textStyle: { color: '#4A5568' }, cellStyle: { background: { color: '#F7F9FC' } } },&#10;          { text: 'PlaceOrderController with its own orderList field is a god object in waiting.', textStyle: { color: '#4A5568' }, cellStyle: { background: { color: '#F7F9FC' } } },&#10;        ],&#10;        [&#10;          { text: 'Worked example set', textStyle: { bold: true, color: '#0E3F8C' } },&#10;          { text: 'PlaceOrderController · PayController · DispatchController · CancelOrderController', textStyle: { color: '#1E4FA8', fontWeight: 'bold' } },&#10;          { text: 'OrderService · OrderHelper — those are W10 design names, and they hide the use cases.', textStyle: { color: '#4A5568' } },&#10;        ],&#10;        [&#10;          { text: 'The honest answer', textStyle: { bold: true, color: '#0E3F8C' }, cellStyle: { background: { color: '#F7F9FC' } } },&#10;          { text: 'Control classes are the least stable part of an analysis model. Expect to reshape them in W10.', textStyle: { color: '#4A5568' }, cellStyle: { background: { color: '#F7F9FC' } } },&#10;          { text: 'That is not a design failure. It means you modelled honestly instead of guessing early.', textStyle: { color: '#4A5568' }, cellStyle: { background: { color: '#F7F9FC' } } },&#10;        ],&#10;      ]}&#10;    /&gt;&#10;  &lt;/Box&gt;&#10;  &lt;Box style={{ height: 46, background: '#0E3F8C', padding: '0 40px', flexDirection: 'row', alignItems: 'center', justifyContent: 'center' }}&gt;&#10;    &lt;Text style={{ fontSize: 16.5, color: '#FFFFFF', fontWeight: '600' }}&gt;One control class per use case, holding no data. If yours is huge, the use case is probably two.&lt;/Text&gt;&#10;  &lt;/Box&gt;&#10;&lt;/Slide&gt;&#10;"/>
         <p:cNvGrpSpPr/>
         <p:nvPr/>
       </p:nvGrpSpPr>
@@ -7861,7 +7862,7 @@
                 <a:latin typeface="Microsoft YaHei"/>
                 <a:ea typeface="Microsoft YaHei"/>
               </a:rPr>
-              <a:t>18 / 38</a:t>
+              <a:t>18 / 39</a:t>
             </a:r>
             <a:endParaRPr/>
           </a:p>
@@ -7881,21 +7882,21 @@
           <a:graphicData uri="http://schemas.openxmlformats.org/drawingml/2006/table">
             <a:tbl>
               <a:tblGrid>
-                <a:gridCol w="1245461">
+                <a:gridCol w="1269599">
                   <a:extLst>
                     <a:ext uri="{9D8B030D-6E8A-4147-A177-3AD203B41FA5}">
                       <a16:colId val="1"/>
                     </a:ext>
                   </a:extLst>
                 </a:gridCol>
-                <a:gridCol w="5191834">
+                <a:gridCol w="5179529">
                   <a:extLst>
                     <a:ext uri="{9D8B030D-6E8A-4147-A177-3AD203B41FA5}">
                       <a16:colId val="2"/>
                     </a:ext>
                   </a:extLst>
                 </a:gridCol>
-                <a:gridCol w="4992705">
+                <a:gridCol w="4980872">
                   <a:extLst>
                     <a:ext uri="{9D8B030D-6E8A-4147-A177-3AD203B41FA5}">
                       <a16:colId val="3"/>
@@ -8436,7 +8437,7 @@
                           <a:latin typeface="Microsoft YaHei"/>
                           <a:ea typeface="Microsoft YaHei"/>
                         </a:rPr>
-                        <a:t>CampusBites set</a:t>
+                        <a:t>Worked example set</a:t>
                       </a:r>
                       <a:endParaRPr/>
                     </a:p>
@@ -8746,7 +8747,7 @@
   <p:cSld>
     <p:spTree>
       <p:nvGrpSpPr>
-        <p:cNvPr id="152" name="" descr="&lt;Slide style={{ background: '#FFFFFF', padding: 0 }}&gt;&#10;  &lt;Box style={{ height: 72, background: '#1E4FA8', padding: '0 40px', flexDirection: 'row', alignItems: 'center', justifyContent: 'space-between' }}&gt;&#10;    &lt;Text style={{ fontSize: 15, color: '#B9CDF0', letterSpacing: 1 }}&gt;ISAD · INFORMATION SYSTEMS ANALYSIS &amp;amp; DESIGN&lt;/Text&gt;&#10;    &lt;Text style={{ fontSize: 15, color: '#B9CDF0' }}&gt;W06 · ENTITY, BOUNDARY, CONTROL&lt;/Text&gt;&#10;  &lt;/Box&gt;&#10;  &lt;Box style={{ padding: '13px 40px 0 40px', flexDirection: 'row', alignItems: 'center', justifyContent: 'space-between' }}&gt;&#10;    &lt;Text style={{ fontSize: 29, fontWeight: 'bold', color: '#0E3F8C' }}&gt;The Category Game&lt;/Text&gt;&#10;    &lt;Text style={{ fontSize: 14, color: '#1E4FA8', fontWeight: 'bold' }}&gt;19 / 38&lt;/Text&gt;&#10;  &lt;/Box&gt;&#10;  &lt;Box style={{ flex: 1, padding: '10px 40px 0 40px', flexDirection: 'column', gap: 10 }}&gt;&#10;    {[&#10;      { n: 'Order', c: 'Entity', k: 'E', col: '#2B7A3D' },&#10;      { n: 'OrderLine', c: 'Entity', k: 'E', col: '#2B7A3D' },&#10;      { n: 'MenuItem', c: 'Entity', k: 'E', col: '#2B7A3D' },&#10;      { n: 'Restaurant', c: 'Entity', k: 'E', col: '#2B7A3D' },&#10;      { n: 'Courier', c: 'Entity', k: 'E', col: '#2B7A3D' },&#10;      { n: 'Payment', c: 'Entity', k: 'E', col: '#2B7A3D' },&#10;      { n: 'Coupon', c: 'Entity', k: 'E', col: '#2B7A3D' },&#10;      { n: 'DeliveryWindow', c: 'Entity', k: 'E', col: '#2B7A3D' },&#10;      { n: 'StudentApp', c: 'Boundary', k: 'B', col: '#996F00' },&#10;      { n: 'KitchenDisplay', c: 'Boundary', k: 'B', col: '#996F00' },&#10;      { n: 'CourierApp', c: 'Boundary', k: 'B', col: '#996F00' },&#10;      { n: 'RestaurantConsole', c: 'Boundary', k: 'B', col: '#996F00' },&#10;      { n: 'PlaceOrderController', c: 'Control', k: 'C', col: '#1E4FA8' },&#10;      { n: 'PayController', c: 'Control', k: 'C', col: '#1E4FA8' },&#10;    ].map((c) =&gt; (&#10;      &lt;Box key={c.n} style={{ flex: 1, flexDirection: 'row', alignItems: 'center', padding: '7px 16px', background: '#F7F9FC', borderRadius: 8, border: '1px solid #E5E7EB' }}&gt;&#10;        &lt;Box style={{ width: 26, height: 26, borderRadius: 5, background: c.col, justifyContent: 'center', alignItems: 'center' }}&gt;&#10;          &lt;Text style={{ fontSize: 13, fontWeight: 'bold', color: '#FFFFFF' }}&gt;{c.k}&lt;/Text&gt;&#10;        &lt;/Box&gt;&#10;        &lt;Text style={{ width: 280, fontSize: 14.5, fontWeight: 'bold', color: '#0E3F8C', marginLeft: 12 }}&gt;{c.n}&lt;/Text&gt;&#10;        &lt;Text style={{ fontSize: 13, color: c.col, fontWeight: 'bold' }}&gt;{c.c}&lt;/Text&gt;&#10;      &lt;/Box&gt;&#10;    ))}&#10;  &lt;/Box&gt;&#10;  &lt;Box style={{ height: 46, background: '#0E3F8C', padding: '0 40px', flexDirection: 'row', alignItems: 'center', justifyContent: 'center' }}&gt;&#10;    &lt;Text style={{ fontSize: 16.5, color: '#FFFFFF', fontWeight: '600' }}&gt;Eight entities, four boundaries, two controls. Fourteen classes — and the model still only covers four use cases.&lt;/Text&gt;&#10;  &lt;/Box&gt;&#10;&lt;/Slide&gt;&#10;"/>
+        <p:cNvPr id="152" name="" descr="&lt;Slide style={{ background: '#FFFFFF', padding: 0 }}&gt;&#10;  &lt;Box style={{ height: 72, background: '#1E4FA8', padding: '0 40px', flexDirection: 'row', alignItems: 'center', justifyContent: 'space-between' }}&gt;&#10;    &lt;Text style={{ fontSize: 15, color: '#B9CDF0', letterSpacing: 1 }}&gt;ISAD · INFORMATION SYSTEMS ANALYSIS &amp;amp; DESIGN&lt;/Text&gt;&#10;    &lt;Text style={{ fontSize: 15, color: '#B9CDF0' }}&gt;W06 · ENTITY, BOUNDARY, CONTROL&lt;/Text&gt;&#10;  &lt;/Box&gt;&#10;  &lt;Box style={{ padding: '13px 40px 0 40px', flexDirection: 'row', alignItems: 'center', justifyContent: 'space-between' }}&gt;&#10;    &lt;Text style={{ fontSize: 29, fontWeight: 'bold', color: '#0E3F8C' }}&gt;The Category Game&lt;/Text&gt;&#10;    &lt;Text style={{ fontSize: 14, color: '#1E4FA8', fontWeight: 'bold' }}&gt;19 / 39&lt;/Text&gt;&#10;  &lt;/Box&gt;&#10;  &lt;Box style={{ flex: 1, padding: '10px 40px 0 40px', flexDirection: 'column', gap: 10 }}&gt;&#10;    {[&#10;      { n: 'Order', c: 'Entity', k: 'E', col: '#2B7A3D' },&#10;      { n: 'OrderLine', c: 'Entity', k: 'E', col: '#2B7A3D' },&#10;      { n: 'MenuItem', c: 'Entity', k: 'E', col: '#2B7A3D' },&#10;      { n: 'Restaurant', c: 'Entity', k: 'E', col: '#2B7A3D' },&#10;      { n: 'Courier', c: 'Entity', k: 'E', col: '#2B7A3D' },&#10;      { n: 'Payment', c: 'Entity', k: 'E', col: '#2B7A3D' },&#10;      { n: 'Coupon', c: 'Entity', k: 'E', col: '#2B7A3D' },&#10;      { n: 'DeliveryWindow', c: 'Entity', k: 'E', col: '#2B7A3D' },&#10;      { n: 'StudentApp', c: 'Boundary', k: 'B', col: '#996F00' },&#10;      { n: 'KitchenDisplay', c: 'Boundary', k: 'B', col: '#996F00' },&#10;      { n: 'CourierApp', c: 'Boundary', k: 'B', col: '#996F00' },&#10;      { n: 'RestaurantConsole', c: 'Boundary', k: 'B', col: '#996F00' },&#10;      { n: 'PlaceOrderController', c: 'Control', k: 'C', col: '#1E4FA8' },&#10;      { n: 'PayController', c: 'Control', k: 'C', col: '#1E4FA8' },&#10;    ].map((c) =&gt; (&#10;      &lt;Box key={c.n} style={{ flex: 1, flexDirection: 'row', alignItems: 'center', padding: '7px 16px', background: '#F7F9FC', borderRadius: 8, border: '1px solid #E5E7EB' }}&gt;&#10;        &lt;Box style={{ width: 26, height: 26, borderRadius: 5, background: c.col, justifyContent: 'center', alignItems: 'center' }}&gt;&#10;          &lt;Text style={{ fontSize: 13, fontWeight: 'bold', color: '#FFFFFF' }}&gt;{c.k}&lt;/Text&gt;&#10;        &lt;/Box&gt;&#10;        &lt;Text style={{ width: 280, fontSize: 14.5, fontWeight: 'bold', color: '#0E3F8C', marginLeft: 12 }}&gt;{c.n}&lt;/Text&gt;&#10;        &lt;Text style={{ fontSize: 13, color: c.col, fontWeight: 'bold' }}&gt;{c.c}&lt;/Text&gt;&#10;      &lt;/Box&gt;&#10;    ))}&#10;  &lt;/Box&gt;&#10;  &lt;Box style={{ height: 46, background: '#0E3F8C', padding: '0 40px', flexDirection: 'row', alignItems: 'center', justifyContent: 'center' }}&gt;&#10;    &lt;Text style={{ fontSize: 16.5, color: '#FFFFFF', fontWeight: '600' }}&gt;Eight entities, four boundaries, two controls. Fourteen classes — and the model still only covers four use cases.&lt;/Text&gt;&#10;  &lt;/Box&gt;&#10;&lt;/Slide&gt;&#10;"/>
         <p:cNvGrpSpPr/>
         <p:nvPr/>
       </p:nvGrpSpPr>
@@ -8940,7 +8941,7 @@
                 <a:latin typeface="Microsoft YaHei"/>
                 <a:ea typeface="Microsoft YaHei"/>
               </a:rPr>
-              <a:t>19 / 38</a:t>
+              <a:t>19 / 39</a:t>
             </a:r>
             <a:endParaRPr/>
           </a:p>
@@ -12912,7 +12913,7 @@
   <p:cSld>
     <p:spTree>
       <p:nvGrpSpPr>
-        <p:cNvPr id="282" name="" descr="&lt;Slide style={{ background: '#FFFFFF', padding: 0 }}&gt;&#10;  &lt;Box style={{ height: 72, background: '#1E4FA8', padding: '0 40px', flexDirection: 'row', alignItems: 'center', justifyContent: 'space-between' }}&gt;&#10;    &lt;Text style={{ fontSize: 15, color: '#B9CDF0', letterSpacing: 1 }}&gt;ISAD · INFORMATION SYSTEMS ANALYSIS &amp;amp; DESIGN&lt;/Text&gt;&#10;    &lt;Text style={{ fontSize: 15, color: '#B9CDF0' }}&gt;W06 · ATTRIBUTES AND OPERATIONS&lt;/Text&gt;&#10;  &lt;/Box&gt;&#10;  &lt;Box style={{ padding: '13px 40px 0 40px', flexDirection: 'row', alignItems: 'center', justifyContent: 'space-between' }}&gt;&#10;    &lt;Text style={{ fontSize: 29, fontWeight: 'bold', color: '#0E3F8C' }}&gt;Attributes vs. Values&lt;/Text&gt;&#10;    &lt;Text style={{ fontSize: 14, color: '#1E4FA8', fontWeight: 'bold' }}&gt;21 / 38&lt;/Text&gt;&#10;  &lt;/Box&gt;&#10;  &lt;Box style={{ flex: 1, padding: '10px 40px 0 40px', flexDirection: 'row', gap: 26 }}&gt;&#10;    &lt;Box style={{ flex: 1, flexDirection: 'column', gap: 12 }}&gt;&#10;      &lt;Box style={{ padding: '12px 18px', background: '#FFF6E0', borderRadius: 9 }}&gt;&#10;        &lt;Text style={{ fontSize: 16, fontWeight: 'bold', color: '#996F00' }}&gt;So the answer was: it is an attribute&lt;/Text&gt;&#10;      &lt;/Box&gt;&#10;      &lt;Box style={{ padding: '18px 20px', background: '#FFFFFF', borderRadius: 10, border: '2px solid #FFC107' }}&gt;&#10;        &lt;Text style={{ fontSize: 19, fontWeight: 'bold', color: '#0E3F8C' }}&gt;Order&lt;/Text&gt;&#10;        &lt;Text style={{ fontSize: 13, color: '#8B97A8', marginTop: 4, marginBottom: 12 }}&gt;one concrete example&lt;/Text&gt;&#10;        &lt;Box style={{ height: 1, background: '#E5E7EB', marginBottom: 12 }} /&gt;&#10;        {[&#10;          'orderNumber : String',&#10;          'placedAt : DateTime',&#10;          'state : String',&#10;          'total : Money',&#10;          'note : String',&#10;        ].map((a) =&gt; (&#10;          &lt;Text key={a} style={{ fontSize: 14, color: '#4A5568', lineHeight: 1.9 }}&gt;{a}&lt;/Text&gt;&#10;        ))}&#10;      &lt;/Box&gt;&#10;    &lt;/Box&gt;&#10;    &lt;Box style={{ width: 130, justifyContent: 'center', alignItems: 'center' }}&gt;&#10;      &lt;Box style={{ width: 54, height: 54, borderRadius: 27, background: '#1E4FA8', justifyContent: 'center', alignItems: 'center' }}&gt;&#10;        &lt;Text style={{ fontSize: 26, color: '#FFFFFF', fontWeight: 'bold' }}&gt;→&lt;/Text&gt;&#10;      &lt;/Box&gt;&#10;    &lt;/Box&gt;&#10;    &lt;Box style={{ flex: 1, flexDirection: 'column', gap: 12 }}&gt;&#10;      &lt;Box style={{ padding: '12px 18px', background: '#FDF3F3', borderRadius: 9 }}&gt;&#10;        &lt;Text style={{ fontSize: 16, fontWeight: 'bold', color: '#D9534F' }}&gt;So the answer was: it is its own class&lt;/Text&gt;&#10;      &lt;/Box&gt;&#10;      &lt;Box style={{ padding: '18px 20px', background: '#FFFFFF', borderRadius: 10, border: '2px solid #D9534F' }}&gt;&#10;        &lt;Text style={{ fontSize: 19, fontWeight: 'bold', color: '#0E3F8C' }}&gt;DeliveryWindow&lt;/Text&gt;&#10;        &lt;Text style={{ fontSize: 13, color: '#8B97A8', marginTop: 4, marginBottom: 12 }}&gt;why it graduated&lt;/Text&gt;&#10;        &lt;Box style={{ height: 1, background: '#E5E7EB', marginBottom: 12 }} /&gt;&#10;        {[&#10;          'earliest : DateTime',&#10;          'latest : DateTime',&#10;          'fee : Money',&#10;        ].map((a) =&gt; (&#10;          &lt;Text key={a} style={{ fontSize: 14, color: '#4A5568', lineHeight: 1.9 }}&gt;{a}&lt;/Text&gt;&#10;        ))}&#10;        &lt;Text style={{ fontSize: 12.5, color: '#D9534F', lineHeight: 1.6, marginTop: 12 }}&gt;&#10;          It gained identity once the client asked: “can a restaurant charge different fees per window?” Now there are many of them and you point at one.&#10;        &lt;/Text&gt;&#10;      &lt;/Box&gt;&#10;    &lt;/Box&gt;&#10;  &lt;/Box&gt;&#10;  &lt;Box style={{ height: 46, background: '#0E3F8C', padding: '0 40px', flexDirection: 'row', alignItems: 'center', justifyContent: 'center' }}&gt;&#10;    &lt;Text style={{ fontSize: 16.5, color: '#FFFFFF', fontWeight: '600' }}&gt;Attributes graduate into classes when they gain identity — usually the first time the client asks a second question about them&lt;/Text&gt;&#10;  &lt;/Box&gt;&#10;&lt;/Slide&gt;&#10;"/>
+        <p:cNvPr id="282" name="" descr="&lt;Slide style={{ background: '#FFFFFF', padding: 0 }}&gt;&#10;  &lt;Box style={{ height: 72, background: '#1E4FA8', padding: '0 40px', flexDirection: 'row', alignItems: 'center', justifyContent: 'space-between' }}&gt;&#10;    &lt;Text style={{ fontSize: 15, color: '#B9CDF0', letterSpacing: 1 }}&gt;ISAD · INFORMATION SYSTEMS ANALYSIS &amp;amp; DESIGN&lt;/Text&gt;&#10;    &lt;Text style={{ fontSize: 15, color: '#B9CDF0' }}&gt;W06 · ATTRIBUTES AND OPERATIONS&lt;/Text&gt;&#10;  &lt;/Box&gt;&#10;  &lt;Box style={{ padding: '13px 40px 0 40px', flexDirection: 'row', alignItems: 'center', justifyContent: 'space-between' }}&gt;&#10;    &lt;Text style={{ fontSize: 29, fontWeight: 'bold', color: '#0E3F8C' }}&gt;Attributes vs. Values&lt;/Text&gt;&#10;    &lt;Text style={{ fontSize: 14, color: '#1E4FA8', fontWeight: 'bold' }}&gt;21 / 39&lt;/Text&gt;&#10;  &lt;/Box&gt;&#10;  &lt;Box style={{ flex: 1, padding: '10px 40px 0 40px', flexDirection: 'row', gap: 26 }}&gt;&#10;    &lt;Box style={{ flex: 1, flexDirection: 'column', gap: 12 }}&gt;&#10;      &lt;Box style={{ padding: '12px 18px', background: '#FFF6E0', borderRadius: 9 }}&gt;&#10;        &lt;Text style={{ fontSize: 16, fontWeight: 'bold', color: '#996F00' }}&gt;So the answer was: it is an attribute&lt;/Text&gt;&#10;      &lt;/Box&gt;&#10;      &lt;Box style={{ padding: '18px 20px', background: '#FFFFFF', borderRadius: 10, border: '2px solid #FFC107' }}&gt;&#10;        &lt;Text style={{ fontSize: 19, fontWeight: 'bold', color: '#0E3F8C' }}&gt;Order&lt;/Text&gt;&#10;        &lt;Text style={{ fontSize: 13, color: '#8B97A8', marginTop: 4, marginBottom: 12 }}&gt;one concrete example&lt;/Text&gt;&#10;        &lt;Box style={{ height: 1, background: '#E5E7EB', marginBottom: 12 }} /&gt;&#10;        {[&#10;          'orderNumber : String',&#10;          'placedAt : DateTime',&#10;          'state : String',&#10;          'total : Money',&#10;          'note : String',&#10;        ].map((a) =&gt; (&#10;          &lt;Text key={a} style={{ fontSize: 14, color: '#4A5568', lineHeight: 1.9 }}&gt;{a}&lt;/Text&gt;&#10;        ))}&#10;      &lt;/Box&gt;&#10;    &lt;/Box&gt;&#10;    &lt;Box style={{ width: 130, justifyContent: 'center', alignItems: 'center' }}&gt;&#10;      &lt;Box style={{ width: 54, height: 54, borderRadius: 27, background: '#1E4FA8', justifyContent: 'center', alignItems: 'center' }}&gt;&#10;        &lt;Text style={{ fontSize: 26, color: '#FFFFFF', fontWeight: 'bold' }}&gt;→&lt;/Text&gt;&#10;      &lt;/Box&gt;&#10;    &lt;/Box&gt;&#10;    &lt;Box style={{ flex: 1, flexDirection: 'column', gap: 12 }}&gt;&#10;      &lt;Box style={{ padding: '12px 18px', background: '#FDF3F3', borderRadius: 9 }}&gt;&#10;        &lt;Text style={{ fontSize: 16, fontWeight: 'bold', color: '#D9534F' }}&gt;So the answer was: it is its own class&lt;/Text&gt;&#10;      &lt;/Box&gt;&#10;      &lt;Box style={{ padding: '18px 20px', background: '#FFFFFF', borderRadius: 10, border: '2px solid #D9534F' }}&gt;&#10;        &lt;Text style={{ fontSize: 19, fontWeight: 'bold', color: '#0E3F8C' }}&gt;DeliveryWindow&lt;/Text&gt;&#10;        &lt;Text style={{ fontSize: 13, color: '#8B97A8', marginTop: 4, marginBottom: 12 }}&gt;why it graduated&lt;/Text&gt;&#10;        &lt;Box style={{ height: 1, background: '#E5E7EB', marginBottom: 12 }} /&gt;&#10;        {[&#10;          'earliest : DateTime',&#10;          'latest : DateTime',&#10;          'fee : Money',&#10;        ].map((a) =&gt; (&#10;          &lt;Text key={a} style={{ fontSize: 14, color: '#4A5568', lineHeight: 1.9 }}&gt;{a}&lt;/Text&gt;&#10;        ))}&#10;        &lt;Text style={{ fontSize: 12.5, color: '#D9534F', lineHeight: 1.6, marginTop: 12 }}&gt;&#10;          It gained identity once the client asked: “can a restaurant charge different fees per window?” Now there are many of them and you point at one.&#10;        &lt;/Text&gt;&#10;      &lt;/Box&gt;&#10;    &lt;/Box&gt;&#10;  &lt;/Box&gt;&#10;  &lt;Box style={{ height: 46, background: '#0E3F8C', padding: '0 40px', flexDirection: 'row', alignItems: 'center', justifyContent: 'center' }}&gt;&#10;    &lt;Text style={{ fontSize: 16.5, color: '#FFFFFF', fontWeight: '600' }}&gt;Attributes graduate into classes when they gain identity — usually the first time the client asks a second question about them&lt;/Text&gt;&#10;  &lt;/Box&gt;&#10;&lt;/Slide&gt;&#10;"/>
         <p:cNvGrpSpPr/>
         <p:nvPr/>
       </p:nvGrpSpPr>
@@ -13106,7 +13107,7 @@
                 <a:latin typeface="Microsoft YaHei"/>
                 <a:ea typeface="Microsoft YaHei"/>
               </a:rPr>
-              <a:t>21 / 38</a:t>
+              <a:t>21 / 39</a:t>
             </a:r>
             <a:endParaRPr/>
           </a:p>
@@ -13931,7 +13932,7 @@
   <p:cSld>
     <p:spTree>
       <p:nvGrpSpPr>
-        <p:cNvPr id="314" name="" descr="&lt;Slide style={{ background: '#FFFFFF', padding: 0 }}&gt;&#10;  &lt;Box style={{ height: 72, background: '#1E4FA8', padding: '0 40px', flexDirection: 'row', alignItems: 'center', justifyContent: 'space-between' }}&gt;&#10;    &lt;Text style={{ fontSize: 15, color: '#B9CDF0', letterSpacing: 1 }}&gt;ISAD · INFORMATION SYSTEMS ANALYSIS &amp;amp; DESIGN&lt;/Text&gt;&#10;    &lt;Text style={{ fontSize: 15, color: '#B9CDF0' }}&gt;W06 · ATTRIBUTES AND OPERATIONS&lt;/Text&gt;&#10;  &lt;/Box&gt;&#10;  &lt;Box style={{ padding: '13px 40px 0 40px', flexDirection: 'row', alignItems: 'center', justifyContent: 'space-between' }}&gt;&#10;    &lt;Text style={{ fontSize: 29, fontWeight: 'bold', color: '#0E3F8C' }}&gt;Finding Attributes&lt;/Text&gt;&#10;    &lt;Text style={{ fontSize: 14, color: '#1E4FA8', fontWeight: 'bold' }}&gt;22 / 38&lt;/Text&gt;&#10;  &lt;/Box&gt;&#10;  &lt;Box style={{ flex: 1, padding: '10px 40px 0 40px' }}&gt;&#10;    &lt;Table&#10;      style={{ width: '100%', height: '100%' }}&#10;      defaultTextStyle={{ fontSize: 13.5, textAlign: 'left', color: '#1A2230' }}&#10;      defaultCellStyle={{&#10;        border: {&#10;          left: { width: 1, color: '#E5E7EB' },&#10;          right: { width: 1, color: '#E5E7EB' },&#10;          top: { width: 1, color: '#E5E7EB' },&#10;          bottom: { width: 1, color: '#E5E7EB' },&#10;        },&#10;      }}&#10;      cells={[&#10;        [&#10;          { text: 'Candidate', textStyle: { bold: true, color: '#FFFFFF', fontSize: 15 }, cellStyle: { background: { color: '#0E3F8C' } } },&#10;          { text: 'Attribute of', textStyle: { bold: true, color: '#FFFFFF', fontSize: 15 }, cellStyle: { background: { color: '#996F00' } } },&#10;          { text: 'Type worth using', textStyle: { bold: true, color: '#FFFFFF', fontSize: 15 }, cellStyle: { background: { color: '#1E4FA8' } } },&#10;          { text: 'Note', textStyle: { bold: true, color: '#FFFFFF', fontSize: 15 }, cellStyle: { background: { color: '#2B5793' } } },&#10;        ],&#10;        [&#10;          { text: 'order number', textStyle: { bold: true, color: '#0E3F8C' }, cellStyle: { background: { color: '#F7F9FC' } } },&#10;          { text: 'Order', textStyle: { color: '#4A5568' }, cellStyle: { background: { color: '#F7F9FC' } } },&#10;          { text: 'String, or Money if arithmetic happens to it', textStyle: { color: '#4A5568' }, cellStyle: { background: { color: '#F7F9FC' } } },&#10;          { text: 'Namespaced by restaurant — CB-20419, not 20419.', textStyle: { color: '#4A5568' }, cellStyle: { background: { color: '#F7F9FC' } } },&#10;        ],&#10;        [&#10;          { text: 'state', textStyle: { bold: true, color: '#0E3F8C' } },&#10;          { text: 'Order', textStyle: { color: '#4A5568' } },&#10;          { text: 'String, with a fixed list of values', textStyle: { color: '#4A5568' } },&#10;          { text: 'Accepted · Scheduled · Pending Payment · Cancelled. W09 turns this into a state machine.', textStyle: { color: '#4A5568' } },&#10;        ],&#10;        [&#10;          { text: 'quantity', textStyle: { bold: true, color: '#0E3F8C' }, cellStyle: { background: { color: '#F7F9FC' } } },&#10;          { text: 'OrderLine — not Order', textStyle: { color: '#4A5568' }, cellStyle: { background: { color: '#F7F9FC' } } },&#10;          { text: 'Integer', textStyle: { color: '#4A5568' }, cellStyle: { background: { color: '#F7F9FC' } } },&#10;          { text: 'Quantity belongs to a line. Two burgers is not a property of the order.', textStyle: { color: '#4A5568' }, cellStyle: { background: { color: '#F7F9FC' } } },&#10;        ],&#10;        [&#10;          { text: 'price', textStyle: { bold: true, color: '#0E3F8C' } },&#10;          { text: 'MenuItem', textStyle: { color: '#4A5568' } },&#10;          { text: 'Money', textStyle: { color: '#4A5568' } },&#10;          { text: 'Never a float. This is a modelling decision, not a code one.', textStyle: { color: '#4A5568' } },&#10;        ],&#10;        [&#10;          { text: 'isAvailable', textStyle: { bold: true, color: '#0E3F8C' }, cellStyle: { background: { color: '#F7F9FC' } } },&#10;          { text: 'MenuItem and Courier', textStyle: { color: '#4A5568' }, cellStyle: { background: { color: '#F7F9FC' } } },&#10;          { text: 'Boolean', textStyle: { color: '#4A5568' }, cellStyle: { background: { color: '#F7F9FC' } } },&#10;          { text: 'Two classes can share an attribute name. That is not duplication.', textStyle: { color: '#4A5568' }, cellStyle: { background: { color: '#F7F9FC' } } },&#10;        ],&#10;        [&#10;          { text: 'Two traps', textStyle: { bold: true, color: '#D9534F' }, cellStyle: { background: { color: '#F7F9FC' } } },&#10;          { text: '“order total” — derived from the lines', textStyle: { color: '#4A5568' }, cellStyle: { background: { color: '#F7F9FC' } } },&#10;          { text: 'Decide deliberately: store it, or calculate it', textStyle: { color: '#4A5568' }, cellStyle: { background: { color: '#F7F9FC' } } },&#10;          { text: '“createdAt / updatedAt / deletedAt” — audit columns are an implementation decision, not analysis.', textStyle: { color: '#4A5568' }, cellStyle: { background: { color: '#F7F9FC' } } },&#10;        ],&#10;      ]}&#10;    /&gt;&#10;  &lt;/Box&gt;&#10;  &lt;Box style={{ height: 46, background: '#0E3F8C', padding: '0 40px', flexDirection: 'row', alignItems: 'center', justifyContent: 'center' }}&gt;&#10;    &lt;Text style={{ fontSize: 16.5, color: '#FFFFFF', fontWeight: '600' }}&gt;Derived values are a decision, not an accident. Say out loud whether you store it or calculate it.&lt;/Text&gt;&#10;  &lt;/Box&gt;&#10;&lt;/Slide&gt;&#10;"/>
+        <p:cNvPr id="314" name="" descr="&lt;Slide style={{ background: '#FFFFFF', padding: 0 }}&gt;&#10;  &lt;Box style={{ height: 72, background: '#1E4FA8', padding: '0 40px', flexDirection: 'row', alignItems: 'center', justifyContent: 'space-between' }}&gt;&#10;    &lt;Text style={{ fontSize: 15, color: '#B9CDF0', letterSpacing: 1 }}&gt;ISAD · INFORMATION SYSTEMS ANALYSIS &amp;amp; DESIGN&lt;/Text&gt;&#10;    &lt;Text style={{ fontSize: 15, color: '#B9CDF0' }}&gt;W06 · ATTRIBUTES AND OPERATIONS&lt;/Text&gt;&#10;  &lt;/Box&gt;&#10;  &lt;Box style={{ padding: '13px 40px 0 40px', flexDirection: 'row', alignItems: 'center', justifyContent: 'space-between' }}&gt;&#10;    &lt;Text style={{ fontSize: 29, fontWeight: 'bold', color: '#0E3F8C' }}&gt;Finding Attributes&lt;/Text&gt;&#10;    &lt;Text style={{ fontSize: 14, color: '#1E4FA8', fontWeight: 'bold' }}&gt;22 / 39&lt;/Text&gt;&#10;  &lt;/Box&gt;&#10;  &lt;Box style={{ flex: 1, padding: '10px 40px 0 40px' }}&gt;&#10;    &lt;Table&#10;      style={{ width: '100%', height: '100%' }}&#10;      defaultTextStyle={{ fontSize: 13.5, textAlign: 'left', color: '#1A2230' }}&#10;      defaultCellStyle={{&#10;        border: {&#10;          left: { width: 1, color: '#E5E7EB' },&#10;          right: { width: 1, color: '#E5E7EB' },&#10;          top: { width: 1, color: '#E5E7EB' },&#10;          bottom: { width: 1, color: '#E5E7EB' },&#10;        },&#10;      }}&#10;      cells={[&#10;        [&#10;          { text: 'Candidate', textStyle: { bold: true, color: '#FFFFFF', fontSize: 15 }, cellStyle: { background: { color: '#0E3F8C' } } },&#10;          { text: 'Attribute of', textStyle: { bold: true, color: '#FFFFFF', fontSize: 15 }, cellStyle: { background: { color: '#996F00' } } },&#10;          { text: 'Type worth using', textStyle: { bold: true, color: '#FFFFFF', fontSize: 15 }, cellStyle: { background: { color: '#1E4FA8' } } },&#10;          { text: 'Note', textStyle: { bold: true, color: '#FFFFFF', fontSize: 15 }, cellStyle: { background: { color: '#2B5793' } } },&#10;        ],&#10;        [&#10;          { text: 'order number', textStyle: { bold: true, color: '#0E3F8C' }, cellStyle: { background: { color: '#F7F9FC' } } },&#10;          { text: 'Order', textStyle: { color: '#4A5568' }, cellStyle: { background: { color: '#F7F9FC' } } },&#10;          { text: 'String, or Money if arithmetic happens to it', textStyle: { color: '#4A5568' }, cellStyle: { background: { color: '#F7F9FC' } } },&#10;          { text: 'Namespaced by restaurant — CB-20419, not 20419.', textStyle: { color: '#4A5568' }, cellStyle: { background: { color: '#F7F9FC' } } },&#10;        ],&#10;        [&#10;          { text: 'state', textStyle: { bold: true, color: '#0E3F8C' } },&#10;          { text: 'Order', textStyle: { color: '#4A5568' } },&#10;          { text: 'String, with a fixed list of values', textStyle: { color: '#4A5568' } },&#10;          { text: 'Accepted · Scheduled · Pending Payment · Cancelled. W09 turns this into a state machine.', textStyle: { color: '#4A5568' } },&#10;        ],&#10;        [&#10;          { text: 'quantity', textStyle: { bold: true, color: '#0E3F8C' }, cellStyle: { background: { color: '#F7F9FC' } } },&#10;          { text: 'OrderLine — not Order', textStyle: { color: '#4A5568' }, cellStyle: { background: { color: '#F7F9FC' } } },&#10;          { text: 'Integer', textStyle: { color: '#4A5568' }, cellStyle: { background: { color: '#F7F9FC' } } },&#10;          { text: 'Quantity belongs to a line. Two burgers is not a property of the order.', textStyle: { color: '#4A5568' }, cellStyle: { background: { color: '#F7F9FC' } } },&#10;        ],&#10;        [&#10;          { text: 'price', textStyle: { bold: true, color: '#0E3F8C' } },&#10;          { text: 'MenuItem', textStyle: { color: '#4A5568' } },&#10;          { text: 'Money', textStyle: { color: '#4A5568' } },&#10;          { text: 'Never a float. This is a modelling decision, not a code one.', textStyle: { color: '#4A5568' } },&#10;        ],&#10;        [&#10;          { text: 'isAvailable', textStyle: { bold: true, color: '#0E3F8C' }, cellStyle: { background: { color: '#F7F9FC' } } },&#10;          { text: 'MenuItem and Courier', textStyle: { color: '#4A5568' }, cellStyle: { background: { color: '#F7F9FC' } } },&#10;          { text: 'Boolean', textStyle: { color: '#4A5568' }, cellStyle: { background: { color: '#F7F9FC' } } },&#10;          { text: 'Two classes can share an attribute name. That is not duplication.', textStyle: { color: '#4A5568' }, cellStyle: { background: { color: '#F7F9FC' } } },&#10;        ],&#10;        [&#10;          { text: 'Two traps', textStyle: { bold: true, color: '#D9534F' }, cellStyle: { background: { color: '#F7F9FC' } } },&#10;          { text: '“order total” — derived from the lines', textStyle: { color: '#4A5568' }, cellStyle: { background: { color: '#F7F9FC' } } },&#10;          { text: 'Decide deliberately: store it, or calculate it', textStyle: { color: '#4A5568' }, cellStyle: { background: { color: '#F7F9FC' } } },&#10;          { text: '“createdAt / updatedAt / deletedAt” — audit columns are an implementation decision, not analysis.', textStyle: { color: '#4A5568' }, cellStyle: { background: { color: '#F7F9FC' } } },&#10;        ],&#10;      ]}&#10;    /&gt;&#10;  &lt;/Box&gt;&#10;  &lt;Box style={{ height: 46, background: '#0E3F8C', padding: '0 40px', flexDirection: 'row', alignItems: 'center', justifyContent: 'center' }}&gt;&#10;    &lt;Text style={{ fontSize: 16.5, color: '#FFFFFF', fontWeight: '600' }}&gt;Derived values are a decision, not an accident. Say out loud whether you store it or calculate it.&lt;/Text&gt;&#10;  &lt;/Box&gt;&#10;&lt;/Slide&gt;&#10;"/>
         <p:cNvGrpSpPr/>
         <p:nvPr/>
       </p:nvGrpSpPr>
@@ -14125,7 +14126,7 @@
                 <a:latin typeface="Microsoft YaHei"/>
                 <a:ea typeface="Microsoft YaHei"/>
               </a:rPr>
-              <a:t>22 / 38</a:t>
+              <a:t>22 / 39</a:t>
             </a:r>
             <a:endParaRPr/>
           </a:p>
@@ -15448,7 +15449,7 @@
   <p:cSld>
     <p:spTree>
       <p:nvGrpSpPr>
-        <p:cNvPr id="324" name="" descr="&lt;Slide style={{ background: '#FFFFFF', padding: 0 }}&gt;&#10;  &lt;Box style={{ height: 72, background: '#1E4FA8', padding: '0 40px', flexDirection: 'row', alignItems: 'center', justifyContent: 'space-between' }}&gt;&#10;    &lt;Text style={{ fontSize: 15, color: '#B9CDF0', letterSpacing: 1 }}&gt;ISAD · INFORMATION SYSTEMS ANALYSIS &amp;amp; DESIGN&lt;/Text&gt;&#10;    &lt;Text style={{ fontSize: 15, color: '#B9CDF0' }}&gt;W06 · ATTRIBUTES AND OPERATIONS&lt;/Text&gt;&#10;  &lt;/Box&gt;&#10;  &lt;Box style={{ padding: '13px 40px 0 40px', flexDirection: 'row', alignItems: 'center', justifyContent: 'space-between' }}&gt;&#10;    &lt;Text style={{ fontSize: 29, fontWeight: 'bold', color: '#0E3F8C' }}&gt;Operations Are Not Steps&lt;/Text&gt;&#10;    &lt;Text style={{ fontSize: 14, color: '#1E4FA8', fontWeight: 'bold' }}&gt;23 / 38&lt;/Text&gt;&#10;  &lt;/Box&gt;&#10;  &lt;Box style={{ flex: 1, padding: '10px 40px 0 40px', flexDirection: 'row', gap: 26 }}&gt;&#10;    &lt;Box style={{ flex: 1, flexDirection: 'column', gap: 12 }}&gt;&#10;      &lt;Box style={{ padding: '12px 18px', background: '#F0F5FC', borderRadius: 9 }}&gt;&#10;        &lt;Text style={{ fontSize: 16, fontWeight: 'bold', color: '#0E3F8C' }}&gt;Two kinds of operation&lt;/Text&gt;&#10;      &lt;/Box&gt;&#10;      &lt;Box style={{ padding: '16px 18px', background: '#FFFFFF', borderRadius: 9, border: '1px solid #D6DCE5' }}&gt;&#10;        &lt;Text style={{ fontSize: 14.5, fontWeight: 'bold', color: '#2B7A3D' }}&gt;Instance — about one object&lt;/Text&gt;&#10;        &lt;Text style={{ fontSize: 13, color: '#4A5568', lineHeight: 1.65, marginTop: 6 }}&gt;&#10;          Order.cancel(reason)&lt;br /&gt;&#10;          OrderLine.lineTotal()&lt;br /&gt;&#10;          Courier.isAvailableAt(time)&#10;        &lt;/Text&gt;&#10;        &lt;Text style={{ fontSize: 12.5, color: '#8B97A8', marginTop: 8 }}&gt;&#10;          The object in the name is the one being asked.&#10;        &lt;/Text&gt;&#10;      &lt;/Box&gt;&#10;      &lt;Box style={{ padding: '16px 18px', background: '#FFFFFF', borderRadius: 9, border: '1px solid #D6DCE5' }}&gt;&#10;        &lt;Text style={{ fontSize: 14.5, fontWeight: 'bold', color: '#1E4FA8' }}&gt;Collection — about many objects&lt;/Text&gt;&#10;        &lt;Text style={{ fontSize: 13, color: '#4A5568', lineHeight: 1.65, marginTop: 6 }}&gt;&#10;          Order.findOpenFor(student)&lt;br /&gt;&#10;          MenuItem.availableAt(time)&lt;br /&gt;&#10;          Courier.nearestTo(building)&#10;        &lt;/Text&gt;&#10;        &lt;Text style={{ fontSize: 12.5, color: '#8B97A8', marginTop: 8 }}&gt;&#10;          These belong to the control class or to a collection — never to a single instance.&#10;        &lt;/Text&gt;&#10;      &lt;/Box&gt;&#10;    &lt;/Box&gt;&#10;    &lt;Box style={{ width: 130, justifyContent: 'center', alignItems: 'center' }}&gt;&#10;      &lt;Box style={{ width: 54, height: 54, borderRadius: 27, background: '#1E4FA8', justifyContent: 'center', alignItems: 'center' }}&gt;&#10;        &lt;Text style={{ fontSize: 26, color: '#FFFFFF', fontWeight: 'bold' }}&gt;→&lt;/Text&gt;&#10;      &lt;/Box&gt;&#10;    &lt;/Box&gt;&#10;    &lt;Box style={{ flex: 1, flexDirection: 'column', justifyContent: 'center', gap: 13 }}&gt;&#10;      &lt;Box style={{ padding: '15px 17px', background: '#FDF3F3', borderRadius: 9, borderLeft: '4px solid #D9534F' }}&gt;&#10;        &lt;Text style={{ fontSize: 16, fontWeight: 'bold', color: '#D9534F' }}&gt;The step-to-operation trap&lt;/Text&gt;&#10;        &lt;Text style={{ fontSize: 13, color: '#4A5568', lineHeight: 1.6, marginTop: 5 }}&gt;&#10;          W05 step 5 was “the system creates the order in state Accepted”. That is one sentence, not one operation. Creating an order involves the Order and the Payment.&#10;        &lt;/Text&gt;&#10;      &lt;/Box&gt;&#10;      &lt;Box style={{ padding: '15px 17px', background: '#FFF6E0', borderRadius: 9, borderLeft: '4px solid #FFC107' }}&gt;&#10;        &lt;Text style={{ fontSize: 16, fontWeight: 'bold', color: '#996F00' }}&gt;Two operations, one sentence&lt;/Text&gt;&#10;        &lt;Text style={{ fontSize: 13, color: '#4A5568', lineHeight: 1.6, marginTop: 5 }}&gt;&#10;          An operation should be one responsibility. If the name contains “and”, split it — that is the signal, not the judgement.&#10;        &lt;/Text&gt;&#10;      &lt;/Box&gt;&#10;      &lt;Box style={{ padding: '15px 17px', background: '#EAF6EC', borderRadius: 9, borderLeft: '4px solid #2B7A3D' }}&gt;&#10;        &lt;Text style={{ fontSize: 16, fontWeight: 'bold', color: '#2B7A3D' }}&gt;So what do you do with the steps?&lt;/Text&gt;&#10;        &lt;Text style={{ fontSize: 13, color: '#4A5568', lineHeight: 1.6, marginTop: 5 }}&gt;&#10;          The steps stay in the specification. In this week’s model you write only the operations the nouns support — the rest is W08 and W10.&#10;        &lt;/Text&gt;&#10;      &lt;/Box&gt;&#10;      &lt;Box style={{ padding: '12px 16px', background: '#F7F9FC', borderRadius: 8, border: '1px dashed #D6DCE5' }}&gt;&#10;        &lt;Text style={{ fontSize: 12.5, color: '#8B97A8', lineHeight: 1.55 }}&gt;&#10;          Resist the urge to write every operation you can think of. Three honest operations beat twelve speculative ones.&#10;        &lt;/Text&gt;&#10;      &lt;/Box&gt;&#10;    &lt;/Box&gt;&#10;  &lt;/Box&gt;&#10;  &lt;Box style={{ height: 34, padding: '0 40px', flexDirection: 'row', alignItems: 'center', justifyContent: 'space-between' }}&gt;&#10;    &lt;Text style={{ fontSize: 13, color: '#8B97A8' }}&gt;ISAD · Fall 2026 · One operation, one responsibility. If the name contains “and”, you have not finished deciding yet&lt;/Text&gt;&#10;    &lt;Text style={{ fontSize: 14, color: '#1E4FA8', fontWeight: 'bold' }}&gt;23 / 38&lt;/Text&gt;&#10;  &lt;/Box&gt;&#10;&lt;/Slide&gt;&#10;"/>
+        <p:cNvPr id="324" name="" descr="&lt;Slide style={{ background: '#FFFFFF', padding: 0 }}&gt;&#10;  &lt;Box style={{ height: 72, background: '#1E4FA8', padding: '0 40px', flexDirection: 'row', alignItems: 'center', justifyContent: 'space-between' }}&gt;&#10;    &lt;Text style={{ fontSize: 15, color: '#B9CDF0', letterSpacing: 1 }}&gt;ISAD · INFORMATION SYSTEMS ANALYSIS &amp;amp; DESIGN&lt;/Text&gt;&#10;    &lt;Text style={{ fontSize: 15, color: '#B9CDF0' }}&gt;W06 · ATTRIBUTES AND OPERATIONS&lt;/Text&gt;&#10;  &lt;/Box&gt;&#10;  &lt;Box style={{ padding: '13px 40px 0 40px', flexDirection: 'row', alignItems: 'center', justifyContent: 'space-between' }}&gt;&#10;    &lt;Text style={{ fontSize: 29, fontWeight: 'bold', color: '#0E3F8C' }}&gt;Operations Are Not Steps&lt;/Text&gt;&#10;    &lt;Text style={{ fontSize: 14, color: '#1E4FA8', fontWeight: 'bold' }}&gt;23 / 39&lt;/Text&gt;&#10;  &lt;/Box&gt;&#10;  &lt;Box style={{ flex: 1, padding: '10px 40px 0 40px', flexDirection: 'row', gap: 26 }}&gt;&#10;    &lt;Box style={{ flex: 1, flexDirection: 'column', gap: 12 }}&gt;&#10;      &lt;Box style={{ padding: '12px 18px', background: '#F0F5FC', borderRadius: 9 }}&gt;&#10;        &lt;Text style={{ fontSize: 16, fontWeight: 'bold', color: '#0E3F8C' }}&gt;Two kinds of operation&lt;/Text&gt;&#10;      &lt;/Box&gt;&#10;      &lt;Box style={{ padding: '16px 18px', background: '#FFFFFF', borderRadius: 9, border: '1px solid #D6DCE5' }}&gt;&#10;        &lt;Text style={{ fontSize: 14.5, fontWeight: 'bold', color: '#2B7A3D' }}&gt;Instance — about one object&lt;/Text&gt;&#10;        &lt;Text style={{ fontSize: 13, color: '#4A5568', lineHeight: 1.65, marginTop: 6 }}&gt;&#10;          Order.cancel(reason)&lt;br /&gt;&#10;          OrderLine.lineTotal()&lt;br /&gt;&#10;          Courier.isAvailableAt(time)&#10;        &lt;/Text&gt;&#10;        &lt;Text style={{ fontSize: 12.5, color: '#8B97A8', marginTop: 8 }}&gt;&#10;          The object in the name is the one being asked.&#10;        &lt;/Text&gt;&#10;      &lt;/Box&gt;&#10;      &lt;Box style={{ padding: '16px 18px', background: '#FFFFFF', borderRadius: 9, border: '1px solid #D6DCE5' }}&gt;&#10;        &lt;Text style={{ fontSize: 14.5, fontWeight: 'bold', color: '#1E4FA8' }}&gt;Collection — about many objects&lt;/Text&gt;&#10;        &lt;Text style={{ fontSize: 13, color: '#4A5568', lineHeight: 1.65, marginTop: 6 }}&gt;&#10;          Order.findOpenFor(student)&lt;br /&gt;&#10;          MenuItem.availableAt(time)&lt;br /&gt;&#10;          Courier.nearestTo(building)&#10;        &lt;/Text&gt;&#10;        &lt;Text style={{ fontSize: 12.5, color: '#8B97A8', marginTop: 8 }}&gt;&#10;          These belong to the control class or to a collection — never to a single instance.&#10;        &lt;/Text&gt;&#10;      &lt;/Box&gt;&#10;    &lt;/Box&gt;&#10;    &lt;Box style={{ width: 130, justifyContent: 'center', alignItems: 'center' }}&gt;&#10;      &lt;Box style={{ width: 54, height: 54, borderRadius: 27, background: '#1E4FA8', justifyContent: 'center', alignItems: 'center' }}&gt;&#10;        &lt;Text style={{ fontSize: 26, color: '#FFFFFF', fontWeight: 'bold' }}&gt;→&lt;/Text&gt;&#10;      &lt;/Box&gt;&#10;    &lt;/Box&gt;&#10;    &lt;Box style={{ flex: 1, flexDirection: 'column', justifyContent: 'center', gap: 13 }}&gt;&#10;      &lt;Box style={{ padding: '15px 17px', background: '#FDF3F3', borderRadius: 9, borderLeft: '4px solid #D9534F' }}&gt;&#10;        &lt;Text style={{ fontSize: 16, fontWeight: 'bold', color: '#D9534F' }}&gt;The step-to-operation trap&lt;/Text&gt;&#10;        &lt;Text style={{ fontSize: 13, color: '#4A5568', lineHeight: 1.6, marginTop: 5 }}&gt;&#10;          W05 step 5 was “the system creates the order in state Accepted”. That is one sentence, not one operation. Creating an order involves the Order and the Payment.&#10;        &lt;/Text&gt;&#10;      &lt;/Box&gt;&#10;      &lt;Box style={{ padding: '15px 17px', background: '#FFF6E0', borderRadius: 9, borderLeft: '4px solid #FFC107' }}&gt;&#10;        &lt;Text style={{ fontSize: 16, fontWeight: 'bold', color: '#996F00' }}&gt;Two operations, one sentence&lt;/Text&gt;&#10;        &lt;Text style={{ fontSize: 13, color: '#4A5568', lineHeight: 1.6, marginTop: 5 }}&gt;&#10;          An operation should be one responsibility. If the name contains “and”, split it — that is the signal, not the judgement.&#10;        &lt;/Text&gt;&#10;      &lt;/Box&gt;&#10;      &lt;Box style={{ padding: '15px 17px', background: '#EAF6EC', borderRadius: 9, borderLeft: '4px solid #2B7A3D' }}&gt;&#10;        &lt;Text style={{ fontSize: 16, fontWeight: 'bold', color: '#2B7A3D' }}&gt;So what do you do with the steps?&lt;/Text&gt;&#10;        &lt;Text style={{ fontSize: 13, color: '#4A5568', lineHeight: 1.6, marginTop: 5 }}&gt;&#10;          The steps stay in the specification. In this week’s model you write only the operations the nouns support — the rest is W08 and W10.&#10;        &lt;/Text&gt;&#10;      &lt;/Box&gt;&#10;      &lt;Box style={{ padding: '12px 16px', background: '#F7F9FC', borderRadius: 8, border: '1px dashed #D6DCE5' }}&gt;&#10;        &lt;Text style={{ fontSize: 12.5, color: '#8B97A8', lineHeight: 1.55 }}&gt;&#10;          Resist the urge to write every operation you can think of. Three honest operations beat twelve speculative ones.&#10;        &lt;/Text&gt;&#10;      &lt;/Box&gt;&#10;    &lt;/Box&gt;&#10;  &lt;/Box&gt;&#10;  &lt;Box style={{ height: 34, padding: '0 40px', flexDirection: 'row', alignItems: 'center', justifyContent: 'space-between' }}&gt;&#10;    &lt;Text style={{ fontSize: 13, color: '#8B97A8' }}&gt;ISAD · Fall 2026 · One operation, one responsibility. If the name contains “and”, you have not finished deciding yet&lt;/Text&gt;&#10;    &lt;Text style={{ fontSize: 14, color: '#1E4FA8', fontWeight: 'bold' }}&gt;23 / 39&lt;/Text&gt;&#10;  &lt;/Box&gt;&#10;&lt;/Slide&gt;&#10;"/>
         <p:cNvGrpSpPr/>
         <p:nvPr/>
       </p:nvGrpSpPr>
@@ -15642,7 +15643,7 @@
                 <a:latin typeface="Microsoft YaHei"/>
                 <a:ea typeface="Microsoft YaHei"/>
               </a:rPr>
-              <a:t>23 / 38</a:t>
+              <a:t>23 / 39</a:t>
             </a:r>
             <a:endParaRPr/>
           </a:p>
@@ -16711,7 +16712,7 @@
                 <a:latin typeface="Microsoft YaHei"/>
                 <a:ea typeface="Microsoft YaHei"/>
               </a:rPr>
-              <a:t>23 / 38</a:t>
+              <a:t>23 / 39</a:t>
             </a:r>
             <a:endParaRPr/>
           </a:p>
@@ -16727,7 +16728,7 @@
   <p:cSld>
     <p:spTree>
       <p:nvGrpSpPr>
-        <p:cNvPr id="359" name="" descr="&lt;Slide style={{ background: '#FFFFFF', padding: 0 }}&gt;&#10;  &lt;Box style={{ height: 72, background: '#1E4FA8', padding: '0 40px', flexDirection: 'row', alignItems: 'center', justifyContent: 'space-between' }}&gt;&#10;    &lt;Text style={{ fontSize: 15, color: '#B9CDF0', letterSpacing: 1 }}&gt;ISAD · INFORMATION SYSTEMS ANALYSIS &amp;amp; DESIGN&lt;/Text&gt;&#10;    &lt;Text style={{ fontSize: 15, color: '#B9CDF0' }}&gt;W06 · ATTRIBUTES AND OPERATIONS&lt;/Text&gt;&#10;  &lt;/Box&gt;&#10;  &lt;Box style={{ padding: '13px 40px 0 40px', flexDirection: 'row', alignItems: 'center', justifyContent: 'space-between' }}&gt;&#10;    &lt;Text style={{ fontSize: 29, fontWeight: 'bold', color: '#0E3F8C' }}&gt;Order, Complete&lt;/Text&gt;&#10;    &lt;Text style={{ fontSize: 14, color: '#1E4FA8', fontWeight: 'bold' }}&gt;24 / 38&lt;/Text&gt;&#10;  &lt;/Box&gt;&#10;  &lt;Box style={{ flex: 1, padding: '10px 40px 0 40px', flexDirection: 'row', gap: 26 }}&gt;&#10;    &lt;Box style={{ width: 460, justifyContent: 'center' }}&gt;&#10;      &lt;Box style={{ padding: '18px 20px', background: '#FFFFFF', borderRadius: 10, border: '2px solid #1E4FA8' }}&gt;&#10;        &lt;Text style={{ fontSize: 20, fontWeight: 'bold', color: '#0E3F8C' }}&gt;Order&lt;/Text&gt;&#10;        &lt;Text style={{ fontSize: 12.5, color: '#8B97A8', marginTop: 4, marginBottom: 14 }}&gt;entity class · from Place Order and Track Order&lt;/Text&gt;&#10;        &lt;Box style={{ height: 1, background: '#E5E7EB', marginBottom: 14 }} /&gt;&#10;        &lt;Text style={{ fontSize: 12, color: '#8B97A8', letterSpacing: 1, marginBottom: 8 }}&gt;ATTRIBUTES&lt;/Text&gt;&#10;        {[&#10;          'orderNumber : String',&#10;          'placedAt : DateTime',&#10;          'state : String',&#10;          'note : String',&#10;        ].map((a) =&gt; (&#10;          &lt;Text key={a} style={{ fontSize: 14, color: '#4A5568', lineHeight: 1.9 }}&gt;{a}&lt;/Text&gt;&#10;        ))}&#10;        &lt;Box style={{ height: 1, background: '#E5E7EB', marginTop: 12, marginBottom: 14 }} /&gt;&#10;        &lt;Text style={{ fontSize: 12, color: '#8B97A8', letterSpacing: 1, marginBottom: 8 }}&gt;OPERATIONS&lt;/Text&gt;&#10;        {[&#10;          'cancel(reason) : void',&#10;          'isOpen() : Boolean',&#10;          'estimatedReadyAt() : DateTime',&#10;        ].map((o) =&gt; (&#10;          &lt;Text key={o} style={{ fontSize: 14, color: '#4A5568', lineHeight: 1.9 }}&gt;{o}&lt;/Text&gt;&#10;        ))}&#10;      &lt;/Box&gt;&#10;    &lt;/Box&gt;&#10;    &lt;Box style={{ flex: 1, flexDirection: 'column', justifyContent: 'center', gap: 13 }}&gt;&#10;      &lt;Box style={{ padding: '15px 17px', background: '#EAF6EC', borderRadius: 9, borderLeft: '4px solid #2B7A3D' }}&gt;&#10;        &lt;Text style={{ fontSize: 16, fontWeight: 'bold', color: '#2B7A3D' }}&gt;Four attributes, three operations&lt;/Text&gt;&#10;        &lt;Text style={{ fontSize: 13, color: '#4A5568', lineHeight: 1.6, marginTop: 5 }}&gt;&#10;          That is the whole class. Seven lines of content, and every one of them is traceable to a sentence in a W05 specification.&#10;        &lt;/Text&gt;&#10;      &lt;/Box&gt;&#10;      &lt;Box style={{ padding: '15px 17px', background: '#FFFFFF', borderRadius: 9, border: '1px solid #D6DCE5' }}&gt;&#10;        &lt;Text style={{ fontSize: 16, fontWeight: 'bold', color: '#0E3F8C' }}&gt;total is not on the list&lt;/Text&gt;&#10;        &lt;Text style={{ fontSize: 13, color: '#4A5568', lineHeight: 1.6, marginTop: 5 }}&gt;&#10;          It is calculated from the lines. The client never asked to store it, so we did not invent it.&#10;        &lt;/Text&gt;&#10;      &lt;/Box&gt;&#10;      &lt;Box style={{ padding: '15px 17px', background: '#FFF6E0', borderRadius: 9, borderLeft: '4px solid #FFC107' }}&gt;&#10;        &lt;Text style={{ fontSize: 16, fontWeight: 'bold', color: '#996F00' }}&gt;no findOpenFor here&lt;/Text&gt;&#10;        &lt;Text style={{ fontSize: 13, color: '#4A5568', lineHeight: 1.6, marginTop: 5 }}&gt;&#10;          That is a collection operation. It belongs to the control class, not to one order.&#10;        &lt;/Text&gt;&#10;      &lt;/Box&gt;&#10;      &lt;Box style={{ padding: '12px 16px', background: '#F7F9FC', borderRadius: 8, border: '1px dashed #D6DCE5' }}&gt;&#10;        &lt;Text style={{ fontSize: 12.5, color: '#8B97A8', lineHeight: 1.55 }}&gt;&#10;          Visibility marks are a W10 topic. In an analysis model every member is public, so we do not write them yet.&#10;        &lt;/Text&gt;&#10;      &lt;/Box&gt;&#10;    &lt;/Box&gt;&#10;  &lt;/Box&gt;&#10;  &lt;Box style={{ height: 34, padding: '0 40px', flexDirection: 'row', alignItems: 'center', justifyContent: 'space-between' }}&gt;&#10;    &lt;Text style={{ fontSize: 13, color: '#8B97A8' }}&gt;ISAD · Fall 2026 · Seven lines, every one traceable to a sentence. That is the standard for every class in your model&lt;/Text&gt;&#10;    &lt;Text style={{ fontSize: 14, color: '#1E4FA8', fontWeight: 'bold' }}&gt;24 / 38&lt;/Text&gt;&#10;  &lt;/Box&gt;&#10;&lt;/Slide&gt;&#10;"/>
+        <p:cNvPr id="359" name="" descr="&lt;Slide style={{ background: '#FFFFFF', padding: 0 }}&gt;&#10;  &lt;Box style={{ height: 72, background: '#1E4FA8', padding: '0 40px', flexDirection: 'row', alignItems: 'center', justifyContent: 'space-between' }}&gt;&#10;    &lt;Text style={{ fontSize: 15, color: '#B9CDF0', letterSpacing: 1 }}&gt;ISAD · INFORMATION SYSTEMS ANALYSIS &amp;amp; DESIGN&lt;/Text&gt;&#10;    &lt;Text style={{ fontSize: 15, color: '#B9CDF0' }}&gt;W06 · ATTRIBUTES AND OPERATIONS&lt;/Text&gt;&#10;  &lt;/Box&gt;&#10;  &lt;Box style={{ padding: '13px 40px 0 40px', flexDirection: 'row', alignItems: 'center', justifyContent: 'space-between' }}&gt;&#10;    &lt;Text style={{ fontSize: 29, fontWeight: 'bold', color: '#0E3F8C' }}&gt;Order, Complete&lt;/Text&gt;&#10;    &lt;Text style={{ fontSize: 14, color: '#1E4FA8', fontWeight: 'bold' }}&gt;24 / 39&lt;/Text&gt;&#10;  &lt;/Box&gt;&#10;  &lt;Box style={{ flex: 1, padding: '10px 40px 0 40px', flexDirection: 'row', gap: 26 }}&gt;&#10;    &lt;Box style={{ width: 460, justifyContent: 'center' }}&gt;&#10;      &lt;Box style={{ padding: '18px 20px', background: '#FFFFFF', borderRadius: 10, border: '2px solid #1E4FA8' }}&gt;&#10;        &lt;Text style={{ fontSize: 20, fontWeight: 'bold', color: '#0E3F8C' }}&gt;Order&lt;/Text&gt;&#10;        &lt;Text style={{ fontSize: 12.5, color: '#8B97A8', marginTop: 4, marginBottom: 14 }}&gt;entity class · from Place Order and Track Order&lt;/Text&gt;&#10;        &lt;Box style={{ height: 1, background: '#E5E7EB', marginBottom: 14 }} /&gt;&#10;        &lt;Text style={{ fontSize: 12, color: '#8B97A8', letterSpacing: 1, marginBottom: 8 }}&gt;ATTRIBUTES&lt;/Text&gt;&#10;        {[&#10;          'orderNumber : String',&#10;          'placedAt : DateTime',&#10;          'state : String',&#10;          'note : String',&#10;        ].map((a) =&gt; (&#10;          &lt;Text key={a} style={{ fontSize: 14, color: '#4A5568', lineHeight: 1.9 }}&gt;{a}&lt;/Text&gt;&#10;        ))}&#10;        &lt;Box style={{ height: 1, background: '#E5E7EB', marginTop: 12, marginBottom: 14 }} /&gt;&#10;        &lt;Text style={{ fontSize: 12, color: '#8B97A8', letterSpacing: 1, marginBottom: 8 }}&gt;OPERATIONS&lt;/Text&gt;&#10;        {[&#10;          'cancel(reason) : void',&#10;          'isOpen() : Boolean',&#10;          'estimatedReadyAt() : DateTime',&#10;        ].map((o) =&gt; (&#10;          &lt;Text key={o} style={{ fontSize: 14, color: '#4A5568', lineHeight: 1.9 }}&gt;{o}&lt;/Text&gt;&#10;        ))}&#10;      &lt;/Box&gt;&#10;    &lt;/Box&gt;&#10;    &lt;Box style={{ flex: 1, flexDirection: 'column', justifyContent: 'center', gap: 13 }}&gt;&#10;      &lt;Box style={{ padding: '15px 17px', background: '#EAF6EC', borderRadius: 9, borderLeft: '4px solid #2B7A3D' }}&gt;&#10;        &lt;Text style={{ fontSize: 16, fontWeight: 'bold', color: '#2B7A3D' }}&gt;Four attributes, three operations&lt;/Text&gt;&#10;        &lt;Text style={{ fontSize: 13, color: '#4A5568', lineHeight: 1.6, marginTop: 5 }}&gt;&#10;          That is the whole class. Seven lines of content, and every one of them is traceable to a sentence in a W05 specification.&#10;        &lt;/Text&gt;&#10;      &lt;/Box&gt;&#10;      &lt;Box style={{ padding: '15px 17px', background: '#FFFFFF', borderRadius: 9, border: '1px solid #D6DCE5' }}&gt;&#10;        &lt;Text style={{ fontSize: 16, fontWeight: 'bold', color: '#0E3F8C' }}&gt;total is not on the list&lt;/Text&gt;&#10;        &lt;Text style={{ fontSize: 13, color: '#4A5568', lineHeight: 1.6, marginTop: 5 }}&gt;&#10;          It is calculated from the lines. The client never asked to store it, so we did not invent it.&#10;        &lt;/Text&gt;&#10;      &lt;/Box&gt;&#10;      &lt;Box style={{ padding: '15px 17px', background: '#FFF6E0', borderRadius: 9, borderLeft: '4px solid #FFC107' }}&gt;&#10;        &lt;Text style={{ fontSize: 16, fontWeight: 'bold', color: '#996F00' }}&gt;no findOpenFor here&lt;/Text&gt;&#10;        &lt;Text style={{ fontSize: 13, color: '#4A5568', lineHeight: 1.6, marginTop: 5 }}&gt;&#10;          That is a collection operation. It belongs to the control class, not to one order.&#10;        &lt;/Text&gt;&#10;      &lt;/Box&gt;&#10;      &lt;Box style={{ padding: '12px 16px', background: '#F7F9FC', borderRadius: 8, border: '1px dashed #D6DCE5' }}&gt;&#10;        &lt;Text style={{ fontSize: 12.5, color: '#8B97A8', lineHeight: 1.55 }}&gt;&#10;          Visibility marks are a W10 topic. In an analysis model every member is public, so we do not write them yet.&#10;        &lt;/Text&gt;&#10;      &lt;/Box&gt;&#10;    &lt;/Box&gt;&#10;  &lt;/Box&gt;&#10;  &lt;Box style={{ height: 34, padding: '0 40px', flexDirection: 'row', alignItems: 'center', justifyContent: 'space-between' }}&gt;&#10;    &lt;Text style={{ fontSize: 13, color: '#8B97A8' }}&gt;ISAD · Fall 2026 · Seven lines, every one traceable to a sentence. That is the standard for every class in your model&lt;/Text&gt;&#10;    &lt;Text style={{ fontSize: 14, color: '#1E4FA8', fontWeight: 'bold' }}&gt;24 / 39&lt;/Text&gt;&#10;  &lt;/Box&gt;&#10;&lt;/Slide&gt;&#10;"/>
         <p:cNvGrpSpPr/>
         <p:nvPr/>
       </p:nvGrpSpPr>
@@ -16921,7 +16922,7 @@
                 <a:latin typeface="Microsoft YaHei"/>
                 <a:ea typeface="Microsoft YaHei"/>
               </a:rPr>
-              <a:t>24 / 38</a:t>
+              <a:t>24 / 39</a:t>
             </a:r>
             <a:endParaRPr/>
           </a:p>
@@ -17930,7 +17931,7 @@
                 <a:latin typeface="Microsoft YaHei"/>
                 <a:ea typeface="Microsoft YaHei"/>
               </a:rPr>
-              <a:t>24 / 38</a:t>
+              <a:t>24 / 39</a:t>
             </a:r>
             <a:endParaRPr/>
           </a:p>
@@ -18386,7 +18387,7 @@
   <p:cSld>
     <p:spTree>
       <p:nvGrpSpPr>
-        <p:cNvPr id="409" name="" descr="&lt;Slide style={{ background: '#FFFFFF', padding: 0 }}&gt;&#10;  &lt;Box style={{ height: 72, background: '#1E4FA8', padding: '0 40px', flexDirection: 'row', alignItems: 'center', justifyContent: 'space-between' }}&gt;&#10;    &lt;Text style={{ fontSize: 15, color: '#B9CDF0', letterSpacing: 1 }}&gt;ISAD · INFORMATION SYSTEMS ANALYSIS &amp;amp; DESIGN&lt;/Text&gt;&#10;    &lt;Text style={{ fontSize: 15, color: '#B9CDF0' }}&gt;W06 · BUILDING THE MODEL&lt;/Text&gt;&#10;  &lt;/Box&gt;&#10;  &lt;Box style={{ padding: '13px 40px 0 40px', flexDirection: 'row', alignItems: 'center', justifyContent: 'space-between' }}&gt;&#10;    &lt;Text style={{ fontSize: 29, fontWeight: 'bold', color: '#0E3F8C' }}&gt;The Ten-Class Target&lt;/Text&gt;&#10;    &lt;Text style={{ fontSize: 14, color: '#1E4FA8', fontWeight: 'bold' }}&gt;26 / 38&lt;/Text&gt;&#10;  &lt;/Box&gt;&#10;  &lt;Box style={{ flex: 1, padding: '10px 40px 0 40px', flexDirection: 'row', gap: 26 }}&gt;&#10;    &lt;Box style={{ flex: 1, flexDirection: 'column', justifyContent: 'center', gap: 13 }}&gt;&#10;      &lt;Box style={{ padding: '15px 17px', background: '#F0F5FC', borderRadius: 9, borderLeft: '4px solid #1E4FA8' }}&gt;&#10;        &lt;Text style={{ fontSize: 16, fontWeight: 'bold', color: '#0E3F8C' }}&gt;What the number is for&lt;/Text&gt;&#10;        &lt;Text style={{ fontSize: 13, color: '#4A5568', lineHeight: 1.6, marginTop: 5 }}&gt;&#10;          It is a floor that catches the two common failures: a four-class model that missed half the domain, and a thirty-class model that drew the database.&#10;        &lt;/Text&gt;&#10;      &lt;/Box&gt;&#10;      &lt;Box style={{ padding: '15px 17px', background: '#FDF3F3', borderRadius: 9, borderLeft: '4px solid #D9534F' }}&gt;&#10;        &lt;Text style={{ fontSize: 16, fontWeight: 'bold', color: '#D9534F' }}&gt;Too few means&lt;/Text&gt;&#10;        &lt;Text style={{ fontSize: 13, color: '#4A5568', lineHeight: 1.65, marginTop: 5 }}&gt;&#10;          You only modelled the use cases you wrote specifications for. Pay, Dispatch and Rate all have nouns nobody drew.&#10;        &lt;/Text&gt;&#10;      &lt;/Box&gt;&#10;      &lt;Box style={{ padding: '15px 17px', background: '#FDF3F3', borderRadius: 9, borderLeft: '4px solid #D9534F' }}&gt;&#10;        &lt;Text style={{ fontSize: 16, fontWeight: 'bold', color: '#D9534F' }}&gt;Too many means&lt;/Text&gt;&#10;        &lt;Text style={{ fontSize: 13, color: '#4A5568', lineHeight: 1.65, marginTop: 5 }}&gt;&#10;          Every noun became a class. Look for names ending in Manager, Helper, DTO — or for a class with nothing traceable behind it.&#10;        &lt;/Text&gt;&#10;      &lt;/Box&gt;&#10;      &lt;Box style={{ padding: '12px 16px', background: '#F7F9FC', borderRadius: 8, border: '1px dashed #D6DCE5' }}&gt;&#10;        &lt;Text style={{ fontSize: 12.5, color: '#8B97A8', lineHeight: 1.55 }}&gt;&#10;          Fourteen for CampusBites so far, and we have only written two of the six use cases. Expect the model to grow by four.&#10;        &lt;/Text&gt;&#10;      &lt;/Box&gt;&#10;    &lt;/Box&gt;&#10;    &lt;Box style={{ width: 500, justifyContent: 'center' }}&gt;&#10;      &lt;svg width={500} height={340} viewBox='0 0 500 340'&gt;&#10;        &lt;text x='4' y='14' fill='#8B97A8' fontSize='12'&gt;Where you are now, and where the week ends.&lt;/text&gt;&#10;        &lt;g transform='translate(10,32)'&gt;&#10;          &lt;text x='0' y='0' fill='#0E3F8C' fontSize='13' fontWeight='bold'&gt;W05 — after M1&lt;/text&gt;&#10;          &lt;rect x='0' y='14' width='480' height='44' rx='7' fill='#F7F9FC' stroke='#D6DCE5' strokeWidth='1.4' /&gt;&#10;          &lt;text x='240' y='41' textAnchor='middle' fill='#4A5568' fontSize='12.5'&gt;2 use case specs · about 9 nouns · 0 classes drawn&lt;/text&gt;&#10;&#10;          &lt;text x='0' y='92' fill='#0E3F8C' fontSize='13' fontWeight='bold'&gt;W06 — end of today&lt;/text&gt;&#10;          &lt;rect x='0' y='106' width='480' height='96' rx='7' fill='#F0F5FC' stroke='#1E4FA8' strokeWidth='1.8' /&gt;&#10;          &lt;text x='16' y='130' fill='#2B7A3D' fontSize='12' fontWeight='bold'&gt;8 entity&lt;/text&gt;&#10;          &lt;text x='120' y='130' fill='#996F00' fontSize='12' fontWeight='bold'&gt;4 boundary&lt;/text&gt;&#10;          &lt;text x='250' y='130' fill='#1E4FA8' fontSize='12' fontWeight='bold'&gt;2 control&lt;/text&gt;&#10;          &lt;text x='350' y='130' fill='#0E3F8C' fontSize='12' fontWeight='bold'&gt;= 14&lt;/text&gt;&#10;          &lt;text x='16' y='156' fill='#8B97A8' fontSize='11.5'&gt;Order · OrderLine · MenuItem · Restaurant&lt;/text&gt;&#10;          &lt;text x='16' y='174' fill='#8B97A8' fontSize='11.5'&gt;Courier · Payment · Coupon · DeliveryWindow&lt;/text&gt;&#10;          &lt;text x='16' y='192' fill='#8B97A8' fontSize='11.5'&gt;4 boundaries · PlaceOrderController · PayController&lt;/text&gt;&#10;&#10;          &lt;text x='0' y='236' fill='#0E3F8C' fontSize='13' fontWeight='bold'&gt;W07–W08 — after the remaining use cases&lt;/text&gt;&#10;          &lt;rect x='0' y='250' width='480' height='44' rx='7' fill='#FFFFFF' stroke='#D6DCE5' strokeWidth='1.4' strokeDasharray='6 4' /&gt;&#10;          &lt;text x='240' y='277' textAnchor='middle' fill='#8B97A8' fontSize='12.5'&gt;Rating · Dispatch · Menu management add roughly four more&lt;/text&gt;&#10;        &lt;/g&gt;&#10;      &lt;/svg&gt;&#10;    &lt;/Box&gt;&#10;  &lt;/Box&gt;&#10;  &lt;Box style={{ height: 34, padding: '0 40px', flexDirection: 'row', alignItems: 'center', justifyContent: 'space-between' }}&gt;&#10;    &lt;Text style={{ fontSize: 13, color: '#8B97A8' }}&gt;ISAD · Fall 2026 · Ten is a floor, not a quota. A model of four classes has missed the domain; a model of thirty has drawn the database&lt;/Text&gt;&#10;    &lt;Text style={{ fontSize: 14, color: '#1E4FA8', fontWeight: 'bold' }}&gt;26 / 38&lt;/Text&gt;&#10;  &lt;/Box&gt;&#10;&lt;/Slide&gt;&#10;"/>
+        <p:cNvPr id="409" name="" descr="&lt;Slide style={{ background: '#FFFFFF', padding: 0 }}&gt;&#10;  &lt;Box style={{ height: 72, background: '#1E4FA8', padding: '0 40px', flexDirection: 'row', alignItems: 'center', justifyContent: 'space-between' }}&gt;&#10;    &lt;Text style={{ fontSize: 15, color: '#B9CDF0', letterSpacing: 1 }}&gt;ISAD · INFORMATION SYSTEMS ANALYSIS &amp;amp; DESIGN&lt;/Text&gt;&#10;    &lt;Text style={{ fontSize: 15, color: '#B9CDF0' }}&gt;W06 · BUILDING THE MODEL&lt;/Text&gt;&#10;  &lt;/Box&gt;&#10;  &lt;Box style={{ padding: '13px 40px 0 40px', flexDirection: 'row', alignItems: 'center', justifyContent: 'space-between' }}&gt;&#10;    &lt;Text style={{ fontSize: 29, fontWeight: 'bold', color: '#0E3F8C' }}&gt;The Eight-Class Floor&lt;/Text&gt;&#10;    &lt;Text style={{ fontSize: 14, color: '#1E4FA8', fontWeight: 'bold' }}&gt;26 / 39&lt;/Text&gt;&#10;  &lt;/Box&gt;&#10;  &lt;Box style={{ flex: 1, padding: '6px 40px 0 40px', justifyContent: 'center', alignItems: 'center' }}&gt;&#10;    &lt;svg width={1180} height={392} viewBox='0 0 1180 392'&gt;&#10;      &lt;text x='10' y='16' fill='#8B97A8' fontSize='13'&gt;Where you are now, and where today ends. Your own numbers, from your own requirements.&lt;/text&gt;&#10;&#10;      &lt;g transform='translate(0,34)'&gt;&#10;        &lt;rect x='0' y='0' width='368' height='300' rx='8' fill='#F7F9FC' stroke='#D6DCE5' strokeWidth='1.5' /&gt;&#10;        &lt;text x='20' y='30' fill='#0E3F8C' fontSize='15' fontWeight='bold'&gt;Your trajectory&lt;/text&gt;&#10;        &lt;text x='20' y='62' fill='#8B97A8' fontSize='11.5'&gt;Today - W06&lt;/text&gt;&#10;        &lt;text x='20' y='84' fill='#4A5568' fontSize='13'&gt;12 requirements read&lt;/text&gt;&#10;        &lt;text x='20' y='106' fill='#4A5568' fontSize='13'&gt;about 24 nouns scanned&lt;/text&gt;&#10;        &lt;text x='20' y='128' fill='#4A5568' fontSize='13'&gt;8 classes or more drawn&lt;/text&gt;&#10;        &lt;line x1='20' y1='146' x2='348' y2='146' stroke='#D6DCE5' strokeWidth='1' /&gt;&#10;        &lt;text x='20' y='170' fill='#8B97A8' fontSize='11.5'&gt;Next - W07&lt;/text&gt;&#10;        &lt;text x='20' y='192' fill='#4A5568' fontSize='13'&gt;multiplicities on every association&lt;/text&gt;&#10;        &lt;text x='20' y='214' fill='#4A5568' fontSize='13'&gt;aggregation vs. composition&lt;/text&gt;&#10;        &lt;line x1='20' y1='232' x2='348' y2='232' stroke='#D6DCE5' strokeWidth='1' /&gt;&#10;        &lt;text x='20' y='256' fill='#8B97A8' fontSize='11.5'&gt;Then - W08&lt;/text&gt;&#10;        &lt;text x='20' y='278' fill='#4A5568' fontSize='13'&gt;two more use cases, two more sets of nouns&lt;/text&gt;&#10;      &lt;/g&gt;&#10;&#10;      &lt;g transform='translate(406,34)'&gt;&#10;        &lt;rect x='0' y='0' width='368' height='300' rx='8' fill='#F7F9FC' stroke='#D6DCE5' strokeWidth='1.5' /&gt;&#10;        &lt;text x='20' y='30' fill='#0E3F8C' fontSize='15' fontWeight='bold'&gt;Where your classes come from&lt;/text&gt;&#10;        &lt;text x='20' y='54' fill='#8B97A8' fontSize='11.5'&gt;Every class names the FR line it came from.&lt;/text&gt;&#10;        &lt;text x='20' y='84' fill='#0E3F8C' fontSize='12.5' fontWeight='bold'&gt;Entities - have identity, change over time&lt;/text&gt;&#10;        &lt;text x='20' y='106' fill='#4A5568' fontSize='11.5'&gt;Analysis · Finding · Image · Client profile&lt;/text&gt;&#10;        &lt;text x='20' y='124' fill='#4A5568' fontSize='11.5'&gt;TreatmentPlan · Regimen · Product&lt;/text&gt;&#10;        &lt;text x='20' y='150' fill='#0E3F8C' fontSize='12.5' fontWeight='bold'&gt;Boundaries - what a person touches&lt;/text&gt;&#10;        &lt;text x='20' y='172' fill='#4A5568' fontSize='11.5'&gt;ClientApp · PractitionerConsole&lt;/text&gt;&#10;        &lt;text x='20' y='198' fill='#0E3F8C' fontSize='12.5' fontWeight='bold'&gt;Controls - one per use case&lt;/text&gt;&#10;        &lt;text x='20' y='220' fill='#4A5568' fontSize='11.5'&gt;AnalysisController · ReviewController&lt;/text&gt;&#10;        &lt;rect x='20' y='240' width='328' height='42' rx='6' fill='#FFFFFF' stroke='#D9534F' strokeWidth='1.2' /&gt;&#10;        &lt;text x='34' y='258' fill='#D9534F' fontSize='11.5' fontWeight='bold'&gt;Outside your boundary:&lt;/text&gt;&#10;        &lt;text x='34' y='274' fill='#D9534F' fontSize='11.5'&gt;AI engine · product catalogue · payment&lt;/text&gt;&#10;      &lt;/g&gt;&#10;&#10;      &lt;g transform='translate(812,34)'&gt;&#10;        &lt;rect x='0' y='0' width='368' height='300' rx='8' fill='#FFF6E0' stroke='#FFC107' strokeWidth='1.5' /&gt;&#10;        &lt;text x='20' y='30' fill='#996F00' fontSize='15' fontWeight='bold'&gt;What the number is for&lt;/text&gt;&#10;        &lt;text x='20' y='58' fill='#4A5568' fontSize='11.5'&gt;It is a floor. It catches two common mistakes:&lt;/text&gt;&#10;        &lt;text x='20' y='86' fill='#996F00' fontSize='12.5' fontWeight='bold'&gt;Too few&lt;/text&gt;&#10;        &lt;text x='20' y='106' fill='#4A5568' fontSize='11.5'&gt;You modelled only the nouns you&lt;/text&gt;&#10;        &lt;text x='20' y='122' fill='#4A5568' fontSize='11.5'&gt;happened to read carefully.&lt;/text&gt;&#10;        &lt;text x='20' y='150' fill='#996F00' fontSize='12.5' fontWeight='bold'&gt;Too many&lt;/text&gt;&#10;        &lt;text x='20' y='170' fill='#4A5568' fontSize='11.5'&gt;Every noun became a class. Look for&lt;/text&gt;&#10;        &lt;text x='20' y='186' fill='#4A5568' fontSize='11.5'&gt;names ending in Manager, Helper,&lt;/text&gt;&#10;        &lt;text x='20' y='202' fill='#4A5568' fontSize='11.5'&gt;Service, DTO - or classes nothing&lt;/text&gt;&#10;        &lt;text x='20' y='218' fill='#4A5568' fontSize='11.5'&gt;can be traced to.&lt;/text&gt;&#10;        &lt;rect x='20' y='240' width='328' height='42' rx='6' fill='#FFFFFF' /&gt;&#10;        &lt;text x='34' y='258' fill='#0E3F8C' fontSize='11.5' fontWeight='bold'&gt;Eight is a floor, not a quota.&lt;/text&gt;&#10;        &lt;text x='34' y='274' fill='#0E3F8C' fontSize='11.5'&gt;A model of four missed the domain.&lt;/text&gt;&#10;      &lt;/g&gt;&#10;    &lt;/svg&gt;&#10;  &lt;/Box&gt;&#10;&lt;/Slide&gt;&#10;"/>
         <p:cNvGrpSpPr/>
         <p:nvPr/>
       </p:nvGrpSpPr>
@@ -18525,7 +18526,7 @@
         <p:spPr>
           <a:xfrm rot="0" flipH="0" flipV="0">
             <a:off x="381000" y="809625"/>
-            <a:ext cx="2771775" cy="333375"/>
+            <a:ext cx="2857500" cy="333375"/>
           </a:xfrm>
           <a:prstGeom prst="rect"/>
         </p:spPr>
@@ -18545,7 +18546,7 @@
                 <a:latin typeface="Microsoft YaHei"/>
                 <a:ea typeface="Microsoft YaHei"/>
               </a:rPr>
-              <a:t>The Ten-Class Target</a:t>
+              <a:t>The Eight-Class Floor</a:t>
             </a:r>
             <a:endParaRPr/>
           </a:p>
@@ -18580,540 +18581,7 @@
                 <a:latin typeface="Microsoft YaHei"/>
                 <a:ea typeface="Microsoft YaHei"/>
               </a:rPr>
-              <a:t>26 / 38</a:t>
-            </a:r>
-            <a:endParaRPr/>
-          </a:p>
-        </p:txBody>
-      </p:sp>
-      <p:sp>
-        <p:nvSpPr>
-          <p:cNvPr id="416" name=""/>
-          <p:cNvSpPr/>
-          <p:nvPr/>
-        </p:nvSpPr>
-        <p:spPr>
-          <a:xfrm rot="0" flipH="0" flipV="0">
-            <a:off x="419100" y="1847850"/>
-            <a:ext cx="6419850" cy="1000125"/>
-          </a:xfrm>
-          <a:prstGeom prst="roundRect">
-            <a:avLst>
-              <a:gd name="adj" fmla="val 8571"/>
-            </a:avLst>
-          </a:prstGeom>
-          <a:solidFill>
-            <a:srgbClr val="F0F5FC"/>
-          </a:solidFill>
-          <a:ln/>
-        </p:spPr>
-        <p:txBody>
-          <a:bodyPr/>
-          <a:p/>
-        </p:txBody>
-      </p:sp>
-      <p:sp>
-        <p:nvSpPr>
-          <p:cNvPr id="417" name=""/>
-          <p:cNvSpPr/>
-          <p:nvPr/>
-        </p:nvSpPr>
-        <p:spPr>
-          <a:xfrm rot="0" flipH="0" flipV="0">
-            <a:off x="419100" y="1847850"/>
-            <a:ext cx="6419850" cy="1000125"/>
-          </a:xfrm>
-          <a:custGeom>
-            <a:pathLst>
-              <a:path w="674" h="105">
-                <a:moveTo>
-                  <a:pt x="9" y="0"/>
-                </a:moveTo>
-                <a:cubicBezTo>
-                  <a:pt x="6" y="0"/>
-                  <a:pt x="4" y="2"/>
-                  <a:pt x="4" y="5"/>
-                </a:cubicBezTo>
-                <a:lnTo>
-                  <a:pt x="4" y="100"/>
-                </a:lnTo>
-                <a:cubicBezTo>
-                  <a:pt x="4" y="102"/>
-                  <a:pt x="6" y="104"/>
-                  <a:pt x="8" y="105"/>
-                </a:cubicBezTo>
-                <a:cubicBezTo>
-                  <a:pt x="4" y="105"/>
-                  <a:pt x="0" y="101"/>
-                  <a:pt x="0" y="96"/>
-                </a:cubicBezTo>
-                <a:lnTo>
-                  <a:pt x="0" y="9"/>
-                </a:lnTo>
-                <a:cubicBezTo>
-                  <a:pt x="0" y="4"/>
-                  <a:pt x="4" y="0"/>
-                  <a:pt x="9" y="0"/>
-                </a:cubicBezTo>
-                <a:close/>
-              </a:path>
-            </a:pathLst>
-          </a:custGeom>
-          <a:solidFill>
-            <a:srgbClr val="1E4FA8"/>
-          </a:solidFill>
-          <a:ln/>
-        </p:spPr>
-        <p:txBody>
-          <a:bodyPr/>
-          <a:p/>
-        </p:txBody>
-      </p:sp>
-      <p:sp>
-        <p:nvSpPr>
-          <p:cNvPr id="418" name="" descr="{&quot;isTemplate&quot;:true,&quot;type&quot;:&quot;text&quot;}"/>
-          <p:cNvSpPr txBox="1"/>
-          <p:nvPr/>
-        </p:nvSpPr>
-        <p:spPr>
-          <a:xfrm rot="0" flipH="0" flipV="0">
-            <a:off x="581025" y="1990725"/>
-            <a:ext cx="6057900" cy="190500"/>
-          </a:xfrm>
-          <a:prstGeom prst="rect"/>
-        </p:spPr>
-        <p:txBody>
-          <a:bodyPr wrap="none" lIns="0" tIns="0" rIns="0" bIns="0"/>
-          <a:p>
-            <a:pPr>
-              <a:lnSpc>
-                <a:spcPct val="100000"/>
-              </a:lnSpc>
-            </a:pPr>
-            <a:r>
-              <a:rPr lang="en-US" sz="1200" b="1">
-                <a:solidFill>
-                  <a:srgbClr val="0E3F8C"/>
-                </a:solidFill>
-                <a:latin typeface="Microsoft YaHei"/>
-                <a:ea typeface="Microsoft YaHei"/>
-              </a:rPr>
-              <a:t>What the number is for</a:t>
-            </a:r>
-            <a:endParaRPr/>
-          </a:p>
-        </p:txBody>
-      </p:sp>
-      <p:sp>
-        <p:nvSpPr>
-          <p:cNvPr id="419" name="" descr="{&quot;isTemplate&quot;:true,&quot;type&quot;:&quot;text&quot;}"/>
-          <p:cNvSpPr txBox="1"/>
-          <p:nvPr/>
-        </p:nvSpPr>
-        <p:spPr>
-          <a:xfrm rot="0" flipH="0" flipV="0">
-            <a:off x="581025" y="2228850"/>
-            <a:ext cx="6057900" cy="476250"/>
-          </a:xfrm>
-          <a:prstGeom prst="rect"/>
-        </p:spPr>
-        <p:txBody>
-          <a:bodyPr wrap="square" lIns="0" tIns="0" rIns="0" bIns="0">
-            <a:normAutofit/>
-          </a:bodyPr>
-          <a:p>
-            <a:pPr>
-              <a:lnSpc>
-                <a:spcPct val="160000"/>
-              </a:lnSpc>
-            </a:pPr>
-            <a:r>
-              <a:rPr lang="en-US" sz="975">
-                <a:solidFill>
-                  <a:srgbClr val="4A5568"/>
-                </a:solidFill>
-                <a:latin typeface="Microsoft YaHei"/>
-                <a:ea typeface="Microsoft YaHei"/>
-              </a:rPr>
-              <a:t>It is a floor that catches the two common failures: a four-class model that missed half the domain, and a thirty-class model that drew the database.</a:t>
-            </a:r>
-            <a:endParaRPr/>
-          </a:p>
-        </p:txBody>
-      </p:sp>
-      <p:sp>
-        <p:nvSpPr>
-          <p:cNvPr id="420" name=""/>
-          <p:cNvSpPr/>
-          <p:nvPr/>
-        </p:nvSpPr>
-        <p:spPr>
-          <a:xfrm rot="0" flipH="0" flipV="0">
-            <a:off x="419100" y="2971800"/>
-            <a:ext cx="6419850" cy="1019175"/>
-          </a:xfrm>
-          <a:prstGeom prst="roundRect">
-            <a:avLst>
-              <a:gd name="adj" fmla="val 8411"/>
-            </a:avLst>
-          </a:prstGeom>
-          <a:solidFill>
-            <a:srgbClr val="FDF3F3"/>
-          </a:solidFill>
-          <a:ln/>
-        </p:spPr>
-        <p:txBody>
-          <a:bodyPr/>
-          <a:p/>
-        </p:txBody>
-      </p:sp>
-      <p:sp>
-        <p:nvSpPr>
-          <p:cNvPr id="421" name=""/>
-          <p:cNvSpPr/>
-          <p:nvPr/>
-        </p:nvSpPr>
-        <p:spPr>
-          <a:xfrm rot="0" flipH="0" flipV="0">
-            <a:off x="419100" y="2971800"/>
-            <a:ext cx="6419850" cy="1019175"/>
-          </a:xfrm>
-          <a:custGeom>
-            <a:pathLst>
-              <a:path w="674" h="107">
-                <a:moveTo>
-                  <a:pt x="9" y="0"/>
-                </a:moveTo>
-                <a:cubicBezTo>
-                  <a:pt x="6" y="0"/>
-                  <a:pt x="4" y="2"/>
-                  <a:pt x="4" y="5"/>
-                </a:cubicBezTo>
-                <a:lnTo>
-                  <a:pt x="4" y="102"/>
-                </a:lnTo>
-                <a:cubicBezTo>
-                  <a:pt x="4" y="104"/>
-                  <a:pt x="6" y="106"/>
-                  <a:pt x="8" y="107"/>
-                </a:cubicBezTo>
-                <a:cubicBezTo>
-                  <a:pt x="4" y="107"/>
-                  <a:pt x="0" y="103"/>
-                  <a:pt x="0" y="98"/>
-                </a:cubicBezTo>
-                <a:lnTo>
-                  <a:pt x="0" y="9"/>
-                </a:lnTo>
-                <a:cubicBezTo>
-                  <a:pt x="0" y="4"/>
-                  <a:pt x="4" y="0"/>
-                  <a:pt x="9" y="0"/>
-                </a:cubicBezTo>
-                <a:close/>
-              </a:path>
-            </a:pathLst>
-          </a:custGeom>
-          <a:solidFill>
-            <a:srgbClr val="D9534F"/>
-          </a:solidFill>
-          <a:ln/>
-        </p:spPr>
-        <p:txBody>
-          <a:bodyPr/>
-          <a:p/>
-        </p:txBody>
-      </p:sp>
-      <p:sp>
-        <p:nvSpPr>
-          <p:cNvPr id="422" name="" descr="{&quot;isTemplate&quot;:true,&quot;type&quot;:&quot;text&quot;}"/>
-          <p:cNvSpPr txBox="1"/>
-          <p:nvPr/>
-        </p:nvSpPr>
-        <p:spPr>
-          <a:xfrm rot="0" flipH="0" flipV="0">
-            <a:off x="581025" y="3114675"/>
-            <a:ext cx="6057900" cy="190500"/>
-          </a:xfrm>
-          <a:prstGeom prst="rect"/>
-        </p:spPr>
-        <p:txBody>
-          <a:bodyPr wrap="none" lIns="0" tIns="0" rIns="0" bIns="0"/>
-          <a:p>
-            <a:pPr>
-              <a:lnSpc>
-                <a:spcPct val="100000"/>
-              </a:lnSpc>
-            </a:pPr>
-            <a:r>
-              <a:rPr lang="en-US" sz="1200" b="1">
-                <a:solidFill>
-                  <a:srgbClr val="D9534F"/>
-                </a:solidFill>
-                <a:latin typeface="Microsoft YaHei"/>
-                <a:ea typeface="Microsoft YaHei"/>
-              </a:rPr>
-              <a:t>Too few means</a:t>
-            </a:r>
-            <a:endParaRPr/>
-          </a:p>
-        </p:txBody>
-      </p:sp>
-      <p:sp>
-        <p:nvSpPr>
-          <p:cNvPr id="423" name="" descr="{&quot;isTemplate&quot;:true,&quot;type&quot;:&quot;text&quot;}"/>
-          <p:cNvSpPr txBox="1"/>
-          <p:nvPr/>
-        </p:nvSpPr>
-        <p:spPr>
-          <a:xfrm rot="0" flipH="0" flipV="0">
-            <a:off x="581025" y="3352800"/>
-            <a:ext cx="6057900" cy="495300"/>
-          </a:xfrm>
-          <a:prstGeom prst="rect"/>
-        </p:spPr>
-        <p:txBody>
-          <a:bodyPr wrap="square" lIns="0" tIns="0" rIns="0" bIns="0">
-            <a:normAutofit/>
-          </a:bodyPr>
-          <a:p>
-            <a:pPr>
-              <a:lnSpc>
-                <a:spcPct val="165000"/>
-              </a:lnSpc>
-            </a:pPr>
-            <a:r>
-              <a:rPr lang="en-US" sz="975">
-                <a:solidFill>
-                  <a:srgbClr val="4A5568"/>
-                </a:solidFill>
-                <a:latin typeface="Microsoft YaHei"/>
-                <a:ea typeface="Microsoft YaHei"/>
-              </a:rPr>
-              <a:t>You only modelled the use cases you wrote specifications for. Pay, Dispatch and Rate all have nouns nobody drew.</a:t>
-            </a:r>
-            <a:endParaRPr/>
-          </a:p>
-        </p:txBody>
-      </p:sp>
-      <p:sp>
-        <p:nvSpPr>
-          <p:cNvPr id="424" name=""/>
-          <p:cNvSpPr/>
-          <p:nvPr/>
-        </p:nvSpPr>
-        <p:spPr>
-          <a:xfrm rot="0" flipH="0" flipV="0">
-            <a:off x="419100" y="4114800"/>
-            <a:ext cx="6419850" cy="1019175"/>
-          </a:xfrm>
-          <a:prstGeom prst="roundRect">
-            <a:avLst>
-              <a:gd name="adj" fmla="val 8411"/>
-            </a:avLst>
-          </a:prstGeom>
-          <a:solidFill>
-            <a:srgbClr val="FDF3F3"/>
-          </a:solidFill>
-          <a:ln/>
-        </p:spPr>
-        <p:txBody>
-          <a:bodyPr/>
-          <a:p/>
-        </p:txBody>
-      </p:sp>
-      <p:sp>
-        <p:nvSpPr>
-          <p:cNvPr id="425" name=""/>
-          <p:cNvSpPr/>
-          <p:nvPr/>
-        </p:nvSpPr>
-        <p:spPr>
-          <a:xfrm rot="0" flipH="0" flipV="0">
-            <a:off x="419100" y="4114800"/>
-            <a:ext cx="6419850" cy="1019175"/>
-          </a:xfrm>
-          <a:custGeom>
-            <a:pathLst>
-              <a:path w="674" h="107">
-                <a:moveTo>
-                  <a:pt x="9" y="0"/>
-                </a:moveTo>
-                <a:cubicBezTo>
-                  <a:pt x="6" y="0"/>
-                  <a:pt x="4" y="2"/>
-                  <a:pt x="4" y="5"/>
-                </a:cubicBezTo>
-                <a:lnTo>
-                  <a:pt x="4" y="102"/>
-                </a:lnTo>
-                <a:cubicBezTo>
-                  <a:pt x="4" y="104"/>
-                  <a:pt x="6" y="106"/>
-                  <a:pt x="8" y="107"/>
-                </a:cubicBezTo>
-                <a:cubicBezTo>
-                  <a:pt x="4" y="107"/>
-                  <a:pt x="0" y="103"/>
-                  <a:pt x="0" y="98"/>
-                </a:cubicBezTo>
-                <a:lnTo>
-                  <a:pt x="0" y="9"/>
-                </a:lnTo>
-                <a:cubicBezTo>
-                  <a:pt x="0" y="4"/>
-                  <a:pt x="4" y="0"/>
-                  <a:pt x="9" y="0"/>
-                </a:cubicBezTo>
-                <a:close/>
-              </a:path>
-            </a:pathLst>
-          </a:custGeom>
-          <a:solidFill>
-            <a:srgbClr val="D9534F"/>
-          </a:solidFill>
-          <a:ln/>
-        </p:spPr>
-        <p:txBody>
-          <a:bodyPr/>
-          <a:p/>
-        </p:txBody>
-      </p:sp>
-      <p:sp>
-        <p:nvSpPr>
-          <p:cNvPr id="426" name="" descr="{&quot;isTemplate&quot;:true,&quot;type&quot;:&quot;text&quot;}"/>
-          <p:cNvSpPr txBox="1"/>
-          <p:nvPr/>
-        </p:nvSpPr>
-        <p:spPr>
-          <a:xfrm rot="0" flipH="0" flipV="0">
-            <a:off x="581025" y="4257675"/>
-            <a:ext cx="6057900" cy="190500"/>
-          </a:xfrm>
-          <a:prstGeom prst="rect"/>
-        </p:spPr>
-        <p:txBody>
-          <a:bodyPr wrap="none" lIns="0" tIns="0" rIns="0" bIns="0"/>
-          <a:p>
-            <a:pPr>
-              <a:lnSpc>
-                <a:spcPct val="100000"/>
-              </a:lnSpc>
-            </a:pPr>
-            <a:r>
-              <a:rPr lang="en-US" sz="1200" b="1">
-                <a:solidFill>
-                  <a:srgbClr val="D9534F"/>
-                </a:solidFill>
-                <a:latin typeface="Microsoft YaHei"/>
-                <a:ea typeface="Microsoft YaHei"/>
-              </a:rPr>
-              <a:t>Too many means</a:t>
-            </a:r>
-            <a:endParaRPr/>
-          </a:p>
-        </p:txBody>
-      </p:sp>
-      <p:sp>
-        <p:nvSpPr>
-          <p:cNvPr id="427" name="" descr="{&quot;isTemplate&quot;:true,&quot;type&quot;:&quot;text&quot;}"/>
-          <p:cNvSpPr txBox="1"/>
-          <p:nvPr/>
-        </p:nvSpPr>
-        <p:spPr>
-          <a:xfrm rot="0" flipH="0" flipV="0">
-            <a:off x="581025" y="4495800"/>
-            <a:ext cx="6057900" cy="495300"/>
-          </a:xfrm>
-          <a:prstGeom prst="rect"/>
-        </p:spPr>
-        <p:txBody>
-          <a:bodyPr wrap="square" lIns="0" tIns="0" rIns="0" bIns="0">
-            <a:normAutofit/>
-          </a:bodyPr>
-          <a:p>
-            <a:pPr>
-              <a:lnSpc>
-                <a:spcPct val="165000"/>
-              </a:lnSpc>
-            </a:pPr>
-            <a:r>
-              <a:rPr lang="en-US" sz="975">
-                <a:solidFill>
-                  <a:srgbClr val="4A5568"/>
-                </a:solidFill>
-                <a:latin typeface="Microsoft YaHei"/>
-                <a:ea typeface="Microsoft YaHei"/>
-              </a:rPr>
-              <a:t>Every noun became a class. Look for names ending in Manager, Helper, DTO — or for a class with nothing traceable behind it.</a:t>
-            </a:r>
-            <a:endParaRPr/>
-          </a:p>
-        </p:txBody>
-      </p:sp>
-      <p:sp>
-        <p:nvSpPr>
-          <p:cNvPr id="428" name=""/>
-          <p:cNvSpPr/>
-          <p:nvPr/>
-        </p:nvSpPr>
-        <p:spPr>
-          <a:xfrm rot="0" flipH="0" flipV="0">
-            <a:off x="381000" y="5257800"/>
-            <a:ext cx="6419850" cy="676275"/>
-          </a:xfrm>
-          <a:prstGeom prst="roundRect">
-            <a:avLst>
-              <a:gd name="adj" fmla="val 11268"/>
-            </a:avLst>
-          </a:prstGeom>
-          <a:solidFill>
-            <a:srgbClr val="F7F9FC"/>
-          </a:solidFill>
-          <a:ln w="12700">
-            <a:solidFill>
-              <a:srgbClr val="D6DCE5"/>
-            </a:solidFill>
-            <a:prstDash val="dash"/>
-          </a:ln>
-        </p:spPr>
-        <p:txBody>
-          <a:bodyPr/>
-          <a:p/>
-        </p:txBody>
-      </p:sp>
-      <p:sp>
-        <p:nvSpPr>
-          <p:cNvPr id="429" name="" descr="{&quot;isTemplate&quot;:true,&quot;type&quot;:&quot;text&quot;}"/>
-          <p:cNvSpPr txBox="1"/>
-          <p:nvPr/>
-        </p:nvSpPr>
-        <p:spPr>
-          <a:xfrm rot="0" flipH="0" flipV="0">
-            <a:off x="533400" y="5372100"/>
-            <a:ext cx="6115050" cy="447675"/>
-          </a:xfrm>
-          <a:prstGeom prst="rect"/>
-        </p:spPr>
-        <p:txBody>
-          <a:bodyPr wrap="square" lIns="0" tIns="0" rIns="0" bIns="0">
-            <a:normAutofit/>
-          </a:bodyPr>
-          <a:p>
-            <a:pPr>
-              <a:lnSpc>
-                <a:spcPct val="155000"/>
-              </a:lnSpc>
-            </a:pPr>
-            <a:r>
-              <a:rPr lang="en-US" sz="938">
-                <a:solidFill>
-                  <a:srgbClr val="8B97A8"/>
-                </a:solidFill>
-                <a:latin typeface="Microsoft YaHei"/>
-                <a:ea typeface="Microsoft YaHei"/>
-              </a:rPr>
-              <a:t>Fourteen for CampusBites so far, and we have only written two of the six use cases. Expect the model to grow by four.</a:t>
+              <a:t>26 / 39</a:t>
             </a:r>
             <a:endParaRPr/>
           </a:p>
@@ -19121,7 +18589,7 @@
       </p:sp>
       <p:pic>
         <p:nvPicPr>
-          <p:cNvPr id="430" name=""/>
+          <p:cNvPr id="416" name=""/>
           <p:cNvPicPr>
             <a:picLocks noChangeAspect="1"/>
           </p:cNvPicPr>
@@ -19141,8 +18609,8 @@
         </p:blipFill>
         <p:spPr>
           <a:xfrm rot="0" flipH="0" flipV="0">
-            <a:off x="7048500" y="2266950"/>
-            <a:ext cx="4762500" cy="3238500"/>
+            <a:off x="476250" y="2162175"/>
+            <a:ext cx="11239500" cy="3733800"/>
           </a:xfrm>
           <a:prstGeom prst="rect">
             <a:avLst/>
@@ -19150,76 +18618,6 @@
           <a:ln/>
         </p:spPr>
       </p:pic>
-      <p:sp>
-        <p:nvSpPr>
-          <p:cNvPr id="431" name="" descr="{&quot;isTemplate&quot;:true,&quot;type&quot;:&quot;text&quot;}"/>
-          <p:cNvSpPr txBox="1"/>
-          <p:nvPr/>
-        </p:nvSpPr>
-        <p:spPr>
-          <a:xfrm rot="0" flipH="0" flipV="0">
-            <a:off x="381000" y="6619875"/>
-            <a:ext cx="7372350" cy="152400"/>
-          </a:xfrm>
-          <a:prstGeom prst="rect"/>
-        </p:spPr>
-        <p:txBody>
-          <a:bodyPr wrap="none" lIns="0" tIns="0" rIns="0" bIns="0"/>
-          <a:p>
-            <a:pPr>
-              <a:lnSpc>
-                <a:spcPct val="100000"/>
-              </a:lnSpc>
-            </a:pPr>
-            <a:r>
-              <a:rPr lang="en-US" sz="975">
-                <a:solidFill>
-                  <a:srgbClr val="8B97A8"/>
-                </a:solidFill>
-                <a:latin typeface="Microsoft YaHei"/>
-                <a:ea typeface="Microsoft YaHei"/>
-              </a:rPr>
-              <a:t>ISAD · Fall 2026 · Ten is a floor, not a quota. A model of four classes has missed the domain; a model of thirty has drawn the database</a:t>
-            </a:r>
-            <a:endParaRPr/>
-          </a:p>
-        </p:txBody>
-      </p:sp>
-      <p:sp>
-        <p:nvSpPr>
-          <p:cNvPr id="432" name="" descr="{&quot;isTemplate&quot;:true,&quot;type&quot;:&quot;text&quot;}"/>
-          <p:cNvSpPr txBox="1"/>
-          <p:nvPr/>
-        </p:nvSpPr>
-        <p:spPr>
-          <a:xfrm rot="0" flipH="0" flipV="0">
-            <a:off x="11401425" y="6619875"/>
-            <a:ext cx="409575" cy="161925"/>
-          </a:xfrm>
-          <a:prstGeom prst="rect"/>
-        </p:spPr>
-        <p:txBody>
-          <a:bodyPr wrap="none" lIns="0" tIns="0" rIns="0" bIns="0"/>
-          <a:p>
-            <a:pPr>
-              <a:lnSpc>
-                <a:spcPct val="100000"/>
-              </a:lnSpc>
-            </a:pPr>
-            <a:r>
-              <a:rPr lang="en-US" sz="1050" b="1">
-                <a:solidFill>
-                  <a:srgbClr val="1E4FA8"/>
-                </a:solidFill>
-                <a:latin typeface="Microsoft YaHei"/>
-                <a:ea typeface="Microsoft YaHei"/>
-              </a:rPr>
-              <a:t>26 / 38</a:t>
-            </a:r>
-            <a:endParaRPr/>
-          </a:p>
-        </p:txBody>
-      </p:sp>
     </p:spTree>
   </p:cSld>
 </p:sld>
@@ -19230,7 +18628,7 @@
   <p:cSld>
     <p:spTree>
       <p:nvGrpSpPr>
-        <p:cNvPr id="433" name="" descr="&lt;Slide style={{ background: '#FFFFFF', padding: 0 }}&gt;&#10;  &lt;Box style={{ height: 72, background: '#1E4FA8', padding: '0 40px', flexDirection: 'row', alignItems: 'center', justifyContent: 'space-between' }}&gt;&#10;    &lt;Text style={{ fontSize: 15, color: '#B9CDF0', letterSpacing: 1 }}&gt;ISAD · INFORMATION SYSTEMS ANALYSIS &amp;amp; DESIGN&lt;/Text&gt;&#10;    &lt;Text style={{ fontSize: 15, color: '#B9CDF0' }}&gt;W06 · BUILDING THE MODEL&lt;/Text&gt;&#10;  &lt;/Box&gt;&#10;  &lt;Box style={{ padding: '13px 40px 0 40px', flexDirection: 'row', alignItems: 'center', justifyContent: 'space-between' }}&gt;&#10;    &lt;Text style={{ fontSize: 29, fontWeight: 'bold', color: '#0E3F8C' }}&gt;Association First, Multiplicity Next&lt;/Text&gt;&#10;    &lt;Text style={{ fontSize: 14, color: '#1E4FA8', fontWeight: 'bold' }}&gt;27 / 38&lt;/Text&gt;&#10;  &lt;/Box&gt;&#10;  &lt;Box style={{ flex: 1, padding: '10px 40px 0 40px', flexDirection: 'row', gap: 26 }}&gt;&#10;    &lt;Box style={{ flex: 1, flexDirection: 'column', gap: 12 }}&gt;&#10;      &lt;Box style={{ padding: '12px 18px', background: '#EAF6EC', borderRadius: 9 }}&gt;&#10;        &lt;Text style={{ fontSize: 16, fontWeight: 'bold', color: '#2B7A3D' }}&gt;Draw this week&lt;/Text&gt;&#10;      &lt;/Box&gt;&#10;      {[&#10;        'The classes themselves, named and classified E / B / C',&#10;        'Their attributes and instance operations',&#10;        'Which class knows which — an association line',&#10;        'A direction you can say out loud: “an order has lines”',&#10;      ].map((t) =&gt; (&#10;        &lt;Box key={t} style={{ flex: 1, padding: '13px 16px', background: '#FFFFFF', borderRadius: 8, border: '1px solid #E5E7EB' }}&gt;&#10;          &lt;Text style={{ fontSize: 14, color: '#4A5568', lineHeight: 1.5 }}&gt;{t}&lt;/Text&gt;&#10;        &lt;/Box&gt;&#10;      ))}&#10;    &lt;/Box&gt;&#10;    &lt;Box style={{ width: 130, justifyContent: 'center', alignItems: 'center' }}&gt;&#10;      &lt;Box style={{ width: 54, height: 54, borderRadius: 27, background: '#1E4FA8', justifyContent: 'center', alignItems: 'center' }}&gt;&#10;        &lt;Text style={{ fontSize: 26, color: '#FFFFFF', fontWeight: 'bold' }}&gt;→&lt;/Text&gt;&#10;      &lt;/Box&gt;&#10;    &lt;/Box&gt;&#10;    &lt;Box style={{ flex: 1, flexDirection: 'column', gap: 12 }}&gt;&#10;      &lt;Box style={{ padding: '12px 18px', background: '#FFF6E0', borderRadius: 9 }}&gt;&#10;        &lt;Text style={{ fontSize: 16, fontWeight: 'bold', color: '#996F00' }}&gt;Next week — W07&lt;/Text&gt;&#10;      &lt;/Box&gt;&#10;      {[&#10;        'Multiplicities: exactly one, zero or more, one or more',&#10;        'Aggregation and composition, and which one an order line really is',&#10;        'Attributes that turn out to be classes — last week’s DeliveryWindow',&#10;        'Refining the associations you drew roughly today',&#10;      ].map((t) =&gt; (&#10;        &lt;Box key={t} style={{ flex: 1, padding: '13px 16px', background: '#FFFFFF', borderRadius: 8, border: '1px solid #E5E7EB' }}&gt;&#10;          &lt;Text style={{ fontSize: 14, color: '#4A5568', lineHeight: 1.5 }}&gt;{t}&lt;/Text&gt;&#10;        &lt;/Box&gt;&#10;      ))}&#10;      &lt;Box style={{ padding: '13px 16px', background: '#FDF3F3', borderRadius: 8, borderLeft: '4px solid #D9534F' }}&gt;&#10;        &lt;Text style={{ fontSize: 13, color: '#4A5568', lineHeight: 1.6 }}&gt;&#10;          Do not add multiplicities today even if you are sure of them. Guessing them early is how you end up with “1..*” on everything by W07.&#10;        &lt;/Text&gt;&#10;      &lt;/Box&gt;&#10;    &lt;/Box&gt;&#10;  &lt;/Box&gt;&#10;  &lt;Box style={{ height: 46, background: '#0E3F8C', padding: '0 40px', flexDirection: 'row', alignItems: 'center', justifyContent: 'center' }}&gt;&#10;    &lt;Text style={{ fontSize: 16.5, color: '#FFFFFF', fontWeight: '600' }}&gt;Associations today, multiplicities next week. The order is not laziness — it stops you guessing twice&lt;/Text&gt;&#10;  &lt;/Box&gt;&#10;&lt;/Slide&gt;&#10;"/>
+        <p:cNvPr id="417" name="" descr="&lt;Slide style={{ background: '#FFFFFF', padding: 0 }}&gt;&#10;  &lt;Box style={{ height: 72, background: '#1E4FA8', padding: '0 40px', flexDirection: 'row', alignItems: 'center', justifyContent: 'space-between' }}&gt;&#10;    &lt;Text style={{ fontSize: 15, color: '#B9CDF0', letterSpacing: 1 }}&gt;ISAD · INFORMATION SYSTEMS ANALYSIS &amp;amp; DESIGN&lt;/Text&gt;&#10;    &lt;Text style={{ fontSize: 15, color: '#B9CDF0' }}&gt;W06 · BUILDING THE MODEL&lt;/Text&gt;&#10;  &lt;/Box&gt;&#10;  &lt;Box style={{ padding: '13px 40px 0 40px', flexDirection: 'row', alignItems: 'center', justifyContent: 'space-between' }}&gt;&#10;    &lt;Text style={{ fontSize: 29, fontWeight: 'bold', color: '#0E3F8C' }}&gt;Association First, Multiplicity Next&lt;/Text&gt;&#10;    &lt;Text style={{ fontSize: 14, color: '#1E4FA8', fontWeight: 'bold' }}&gt;27 / 39&lt;/Text&gt;&#10;  &lt;/Box&gt;&#10;  &lt;Box style={{ flex: 1, padding: '10px 40px 0 40px', flexDirection: 'row', gap: 26 }}&gt;&#10;    &lt;Box style={{ flex: 1, flexDirection: 'column', gap: 12 }}&gt;&#10;      &lt;Box style={{ padding: '12px 18px', background: '#EAF6EC', borderRadius: 9 }}&gt;&#10;        &lt;Text style={{ fontSize: 16, fontWeight: 'bold', color: '#2B7A3D' }}&gt;Draw this week&lt;/Text&gt;&#10;      &lt;/Box&gt;&#10;      {[&#10;        'The classes themselves, named and classified E / B / C',&#10;        'Their attributes and instance operations',&#10;        'Which class knows which — an association line',&#10;        'A direction you can say out loud: “an order has lines”',&#10;      ].map((t) =&gt; (&#10;        &lt;Box key={t} style={{ flex: 1, padding: '13px 16px', background: '#FFFFFF', borderRadius: 8, border: '1px solid #E5E7EB' }}&gt;&#10;          &lt;Text style={{ fontSize: 14, color: '#4A5568', lineHeight: 1.5 }}&gt;{t}&lt;/Text&gt;&#10;        &lt;/Box&gt;&#10;      ))}&#10;    &lt;/Box&gt;&#10;    &lt;Box style={{ width: 130, justifyContent: 'center', alignItems: 'center' }}&gt;&#10;      &lt;Box style={{ width: 54, height: 54, borderRadius: 27, background: '#1E4FA8', justifyContent: 'center', alignItems: 'center' }}&gt;&#10;        &lt;Text style={{ fontSize: 26, color: '#FFFFFF', fontWeight: 'bold' }}&gt;→&lt;/Text&gt;&#10;      &lt;/Box&gt;&#10;    &lt;/Box&gt;&#10;    &lt;Box style={{ flex: 1, flexDirection: 'column', gap: 12 }}&gt;&#10;      &lt;Box style={{ padding: '12px 18px', background: '#FFF6E0', borderRadius: 9 }}&gt;&#10;        &lt;Text style={{ fontSize: 16, fontWeight: 'bold', color: '#996F00' }}&gt;Next week — W07&lt;/Text&gt;&#10;      &lt;/Box&gt;&#10;      {[&#10;        'Multiplicities: exactly one, zero or more, one or more',&#10;        'Aggregation and composition, and which one an order line really is',&#10;        'Attributes that turn out to be classes — last week’s DeliveryWindow',&#10;        'Refining the associations you drew roughly today',&#10;      ].map((t) =&gt; (&#10;        &lt;Box key={t} style={{ flex: 1, padding: '13px 16px', background: '#FFFFFF', borderRadius: 8, border: '1px solid #E5E7EB' }}&gt;&#10;          &lt;Text style={{ fontSize: 14, color: '#4A5568', lineHeight: 1.5 }}&gt;{t}&lt;/Text&gt;&#10;        &lt;/Box&gt;&#10;      ))}&#10;      &lt;Box style={{ padding: '13px 16px', background: '#FDF3F3', borderRadius: 8, borderLeft: '4px solid #D9534F' }}&gt;&#10;        &lt;Text style={{ fontSize: 13, color: '#4A5568', lineHeight: 1.6 }}&gt;&#10;          Do not add multiplicities today even if you are sure of them. Guessing them early is how you end up with “1..*” on everything by W07.&#10;        &lt;/Text&gt;&#10;      &lt;/Box&gt;&#10;    &lt;/Box&gt;&#10;  &lt;/Box&gt;&#10;  &lt;Box style={{ height: 46, background: '#0E3F8C', padding: '0 40px', flexDirection: 'row', alignItems: 'center', justifyContent: 'center' }}&gt;&#10;    &lt;Text style={{ fontSize: 16.5, color: '#FFFFFF', fontWeight: '600' }}&gt;Associations today, multiplicities next week. The order is not laziness — it stops you guessing twice&lt;/Text&gt;&#10;  &lt;/Box&gt;&#10;&lt;/Slide&gt;&#10;"/>
         <p:cNvGrpSpPr/>
         <p:nvPr/>
       </p:nvGrpSpPr>
@@ -19244,7 +18642,7 @@
       </p:grpSpPr>
       <p:sp>
         <p:nvSpPr>
-          <p:cNvPr id="434" name=""/>
+          <p:cNvPr id="418" name=""/>
           <p:cNvSpPr/>
           <p:nvPr/>
         </p:nvSpPr>
@@ -19268,7 +18666,7 @@
       </p:sp>
       <p:sp>
         <p:nvSpPr>
-          <p:cNvPr id="435" name=""/>
+          <p:cNvPr id="419" name=""/>
           <p:cNvSpPr/>
           <p:nvPr/>
         </p:nvSpPr>
@@ -19292,7 +18690,7 @@
       </p:sp>
       <p:sp>
         <p:nvSpPr>
-          <p:cNvPr id="436" name="" descr="{&quot;isTemplate&quot;:true,&quot;type&quot;:&quot;text&quot;}"/>
+          <p:cNvPr id="420" name="" descr="{&quot;isTemplate&quot;:true,&quot;type&quot;:&quot;text&quot;}"/>
           <p:cNvSpPr txBox="1"/>
           <p:nvPr/>
         </p:nvSpPr>
@@ -19327,7 +18725,7 @@
       </p:sp>
       <p:sp>
         <p:nvSpPr>
-          <p:cNvPr id="437" name="" descr="{&quot;isTemplate&quot;:true,&quot;type&quot;:&quot;text&quot;}"/>
+          <p:cNvPr id="421" name="" descr="{&quot;isTemplate&quot;:true,&quot;type&quot;:&quot;text&quot;}"/>
           <p:cNvSpPr txBox="1"/>
           <p:nvPr/>
         </p:nvSpPr>
@@ -19362,7 +18760,7 @@
       </p:sp>
       <p:sp>
         <p:nvSpPr>
-          <p:cNvPr id="438" name="" descr="{&quot;isTemplate&quot;:true,&quot;type&quot;:&quot;text&quot;}"/>
+          <p:cNvPr id="422" name="" descr="{&quot;isTemplate&quot;:true,&quot;type&quot;:&quot;text&quot;}"/>
           <p:cNvSpPr txBox="1"/>
           <p:nvPr/>
         </p:nvSpPr>
@@ -19397,7 +18795,7 @@
       </p:sp>
       <p:sp>
         <p:nvSpPr>
-          <p:cNvPr id="439" name="" descr="{&quot;isTemplate&quot;:true,&quot;type&quot;:&quot;text&quot;}"/>
+          <p:cNvPr id="423" name="" descr="{&quot;isTemplate&quot;:true,&quot;type&quot;:&quot;text&quot;}"/>
           <p:cNvSpPr txBox="1"/>
           <p:nvPr/>
         </p:nvSpPr>
@@ -19424,15 +18822,15 @@
                 <a:latin typeface="Microsoft YaHei"/>
                 <a:ea typeface="Microsoft YaHei"/>
               </a:rPr>
-              <a:t>27 / 38</a:t>
-            </a:r>
-            <a:endParaRPr/>
-          </a:p>
-        </p:txBody>
-      </p:sp>
-      <p:sp>
-        <p:nvSpPr>
-          <p:cNvPr id="440" name=""/>
+              <a:t>27 / 39</a:t>
+            </a:r>
+            <a:endParaRPr/>
+          </a:p>
+        </p:txBody>
+      </p:sp>
+      <p:sp>
+        <p:nvSpPr>
+          <p:cNvPr id="424" name=""/>
           <p:cNvSpPr/>
           <p:nvPr/>
         </p:nvSpPr>
@@ -19458,7 +18856,7 @@
       </p:sp>
       <p:sp>
         <p:nvSpPr>
-          <p:cNvPr id="441" name="" descr="{&quot;isTemplate&quot;:true,&quot;type&quot;:&quot;text&quot;}"/>
+          <p:cNvPr id="425" name="" descr="{&quot;isTemplate&quot;:true,&quot;type&quot;:&quot;text&quot;}"/>
           <p:cNvSpPr txBox="1"/>
           <p:nvPr/>
         </p:nvSpPr>
@@ -19493,7 +18891,7 @@
       </p:sp>
       <p:sp>
         <p:nvSpPr>
-          <p:cNvPr id="442" name=""/>
+          <p:cNvPr id="426" name=""/>
           <p:cNvSpPr/>
           <p:nvPr/>
         </p:nvSpPr>
@@ -19524,7 +18922,7 @@
       </p:sp>
       <p:sp>
         <p:nvSpPr>
-          <p:cNvPr id="443" name="" descr="{&quot;isTemplate&quot;:true,&quot;type&quot;:&quot;text&quot;}"/>
+          <p:cNvPr id="427" name="" descr="{&quot;isTemplate&quot;:true,&quot;type&quot;:&quot;text&quot;}"/>
           <p:cNvSpPr txBox="1"/>
           <p:nvPr/>
         </p:nvSpPr>
@@ -19559,7 +18957,7 @@
       </p:sp>
       <p:sp>
         <p:nvSpPr>
-          <p:cNvPr id="444" name=""/>
+          <p:cNvPr id="428" name=""/>
           <p:cNvSpPr/>
           <p:nvPr/>
         </p:nvSpPr>
@@ -19590,7 +18988,7 @@
       </p:sp>
       <p:sp>
         <p:nvSpPr>
-          <p:cNvPr id="445" name="" descr="{&quot;isTemplate&quot;:true,&quot;type&quot;:&quot;text&quot;}"/>
+          <p:cNvPr id="429" name="" descr="{&quot;isTemplate&quot;:true,&quot;type&quot;:&quot;text&quot;}"/>
           <p:cNvSpPr txBox="1"/>
           <p:nvPr/>
         </p:nvSpPr>
@@ -19625,7 +19023,7 @@
       </p:sp>
       <p:sp>
         <p:nvSpPr>
-          <p:cNvPr id="446" name=""/>
+          <p:cNvPr id="430" name=""/>
           <p:cNvSpPr/>
           <p:nvPr/>
         </p:nvSpPr>
@@ -19656,7 +19054,7 @@
       </p:sp>
       <p:sp>
         <p:nvSpPr>
-          <p:cNvPr id="447" name="" descr="{&quot;isTemplate&quot;:true,&quot;type&quot;:&quot;text&quot;}"/>
+          <p:cNvPr id="431" name="" descr="{&quot;isTemplate&quot;:true,&quot;type&quot;:&quot;text&quot;}"/>
           <p:cNvSpPr txBox="1"/>
           <p:nvPr/>
         </p:nvSpPr>
@@ -19691,7 +19089,7 @@
       </p:sp>
       <p:sp>
         <p:nvSpPr>
-          <p:cNvPr id="448" name=""/>
+          <p:cNvPr id="432" name=""/>
           <p:cNvSpPr/>
           <p:nvPr/>
         </p:nvSpPr>
@@ -19722,7 +19120,7 @@
       </p:sp>
       <p:sp>
         <p:nvSpPr>
-          <p:cNvPr id="449" name="" descr="{&quot;isTemplate&quot;:true,&quot;type&quot;:&quot;text&quot;}"/>
+          <p:cNvPr id="433" name="" descr="{&quot;isTemplate&quot;:true,&quot;type&quot;:&quot;text&quot;}"/>
           <p:cNvSpPr txBox="1"/>
           <p:nvPr/>
         </p:nvSpPr>
@@ -19757,7 +19155,7 @@
       </p:sp>
       <p:sp>
         <p:nvSpPr>
-          <p:cNvPr id="450" name=""/>
+          <p:cNvPr id="434" name=""/>
           <p:cNvSpPr/>
           <p:nvPr/>
         </p:nvSpPr>
@@ -19783,7 +19181,7 @@
       </p:sp>
       <p:sp>
         <p:nvSpPr>
-          <p:cNvPr id="451" name="" descr="{&quot;isTemplate&quot;:true,&quot;type&quot;:&quot;text&quot;}"/>
+          <p:cNvPr id="435" name="" descr="{&quot;isTemplate&quot;:true,&quot;type&quot;:&quot;text&quot;}"/>
           <p:cNvSpPr txBox="1"/>
           <p:nvPr/>
         </p:nvSpPr>
@@ -19818,7 +19216,7 @@
       </p:sp>
       <p:sp>
         <p:nvSpPr>
-          <p:cNvPr id="452" name=""/>
+          <p:cNvPr id="436" name=""/>
           <p:cNvSpPr/>
           <p:nvPr/>
         </p:nvSpPr>
@@ -19844,7 +19242,7 @@
       </p:sp>
       <p:sp>
         <p:nvSpPr>
-          <p:cNvPr id="453" name="" descr="{&quot;isTemplate&quot;:true,&quot;type&quot;:&quot;text&quot;}"/>
+          <p:cNvPr id="437" name="" descr="{&quot;isTemplate&quot;:true,&quot;type&quot;:&quot;text&quot;}"/>
           <p:cNvSpPr txBox="1"/>
           <p:nvPr/>
         </p:nvSpPr>
@@ -19879,7 +19277,7 @@
       </p:sp>
       <p:sp>
         <p:nvSpPr>
-          <p:cNvPr id="454" name=""/>
+          <p:cNvPr id="438" name=""/>
           <p:cNvSpPr/>
           <p:nvPr/>
         </p:nvSpPr>
@@ -19910,7 +19308,7 @@
       </p:sp>
       <p:sp>
         <p:nvSpPr>
-          <p:cNvPr id="455" name="" descr="{&quot;isTemplate&quot;:true,&quot;type&quot;:&quot;text&quot;}"/>
+          <p:cNvPr id="439" name="" descr="{&quot;isTemplate&quot;:true,&quot;type&quot;:&quot;text&quot;}"/>
           <p:cNvSpPr txBox="1"/>
           <p:nvPr/>
         </p:nvSpPr>
@@ -19945,7 +19343,7 @@
       </p:sp>
       <p:sp>
         <p:nvSpPr>
-          <p:cNvPr id="456" name=""/>
+          <p:cNvPr id="440" name=""/>
           <p:cNvSpPr/>
           <p:nvPr/>
         </p:nvSpPr>
@@ -19976,7 +19374,7 @@
       </p:sp>
       <p:sp>
         <p:nvSpPr>
-          <p:cNvPr id="457" name="" descr="{&quot;isTemplate&quot;:true,&quot;type&quot;:&quot;text&quot;}"/>
+          <p:cNvPr id="441" name="" descr="{&quot;isTemplate&quot;:true,&quot;type&quot;:&quot;text&quot;}"/>
           <p:cNvSpPr txBox="1"/>
           <p:nvPr/>
         </p:nvSpPr>
@@ -20011,7 +19409,7 @@
       </p:sp>
       <p:sp>
         <p:nvSpPr>
-          <p:cNvPr id="458" name=""/>
+          <p:cNvPr id="442" name=""/>
           <p:cNvSpPr/>
           <p:nvPr/>
         </p:nvSpPr>
@@ -20042,7 +19440,7 @@
       </p:sp>
       <p:sp>
         <p:nvSpPr>
-          <p:cNvPr id="459" name="" descr="{&quot;isTemplate&quot;:true,&quot;type&quot;:&quot;text&quot;}"/>
+          <p:cNvPr id="443" name="" descr="{&quot;isTemplate&quot;:true,&quot;type&quot;:&quot;text&quot;}"/>
           <p:cNvSpPr txBox="1"/>
           <p:nvPr/>
         </p:nvSpPr>
@@ -20077,7 +19475,7 @@
       </p:sp>
       <p:sp>
         <p:nvSpPr>
-          <p:cNvPr id="460" name=""/>
+          <p:cNvPr id="444" name=""/>
           <p:cNvSpPr/>
           <p:nvPr/>
         </p:nvSpPr>
@@ -20108,7 +19506,7 @@
       </p:sp>
       <p:sp>
         <p:nvSpPr>
-          <p:cNvPr id="461" name="" descr="{&quot;isTemplate&quot;:true,&quot;type&quot;:&quot;text&quot;}"/>
+          <p:cNvPr id="445" name="" descr="{&quot;isTemplate&quot;:true,&quot;type&quot;:&quot;text&quot;}"/>
           <p:cNvSpPr txBox="1"/>
           <p:nvPr/>
         </p:nvSpPr>
@@ -20143,7 +19541,7 @@
       </p:sp>
       <p:sp>
         <p:nvSpPr>
-          <p:cNvPr id="462" name=""/>
+          <p:cNvPr id="446" name=""/>
           <p:cNvSpPr/>
           <p:nvPr/>
         </p:nvSpPr>
@@ -20169,7 +19567,7 @@
       </p:sp>
       <p:sp>
         <p:nvSpPr>
-          <p:cNvPr id="463" name=""/>
+          <p:cNvPr id="447" name=""/>
           <p:cNvSpPr/>
           <p:nvPr/>
         </p:nvSpPr>
@@ -20226,7 +19624,7 @@
       </p:sp>
       <p:sp>
         <p:nvSpPr>
-          <p:cNvPr id="464" name="" descr="{&quot;isTemplate&quot;:true,&quot;type&quot;:&quot;text&quot;}"/>
+          <p:cNvPr id="448" name="" descr="{&quot;isTemplate&quot;:true,&quot;type&quot;:&quot;text&quot;}"/>
           <p:cNvSpPr txBox="1"/>
           <p:nvPr/>
         </p:nvSpPr>
@@ -20263,7 +19661,7 @@
       </p:sp>
       <p:sp>
         <p:nvSpPr>
-          <p:cNvPr id="465" name=""/>
+          <p:cNvPr id="449" name=""/>
           <p:cNvSpPr/>
           <p:nvPr/>
         </p:nvSpPr>
@@ -20287,7 +19685,7 @@
       </p:sp>
       <p:sp>
         <p:nvSpPr>
-          <p:cNvPr id="466" name="" descr="{&quot;isTemplate&quot;:true,&quot;type&quot;:&quot;text&quot;}"/>
+          <p:cNvPr id="450" name="" descr="{&quot;isTemplate&quot;:true,&quot;type&quot;:&quot;text&quot;}"/>
           <p:cNvSpPr txBox="1"/>
           <p:nvPr/>
         </p:nvSpPr>
@@ -20330,7 +19728,7 @@
   <p:cSld>
     <p:spTree>
       <p:nvGrpSpPr>
-        <p:cNvPr id="467" name="" descr="&lt;Slide style={{ background: '#0E3F8C', padding: 0 }}&gt;&#10;  &lt;Box style={{ flexDirection: 'row', height: '100%', position: 'relative' }}&gt;&#10;    &lt;Box style={{ position: 'absolute', top: 0, left: 0, right: 0, height: 8, background: '#1E4FA8' }} /&gt;&#10;    &lt;Box style={{ width: 300, justifyContent: 'center', alignItems: 'center', borderRight: '1px solid #2B5793' }}&gt;&#10;      &lt;Text style={{ fontSize: 220, fontWeight: 'bold', color: '#3D7BD9', fontFamily: 'Georgia, serif', lineHeight: 1 }}&gt;06&lt;/Text&gt;&#10;    &lt;/Box&gt;&#10;    &lt;Box style={{ flex: 1, padding: '70px 64px', flexDirection: 'column', justifyContent: 'center' }}&gt;&#10;      &lt;Text style={{ fontSize: 15, color: '#7FA2D6', letterSpacing: 2, marginBottom: 18 }}&gt;PART 6 · LAB · 2 HOURS&lt;/Text&gt;&#10;      &lt;Text style={{ fontSize: 46, fontWeight: 'bold', color: '#FFFFFF', lineHeight: 1.18 }}&gt;Exercise 6.1,&lt;br /&gt;6.2 &amp;amp; Change ΔC1&lt;/Text&gt;&#10;      &lt;Box style={{ width: 64, height: 4, background: '#FFC107', marginTop: 26, marginBottom: 26 }} /&gt;&#10;      &lt;Box style={{ flexDirection: 'column', gap: 12 }}&gt;&#10;        {[&#10;          'Sort eighteen words into classes, attributes and noise',&#10;          'Draw the first domain model — ten classes or more',&#10;          'ΔC1 lands online this week; fold it in, do not restart'&#10;        ].map((t) =&gt; (&#10;          &lt;Box key={t} style={{ flexDirection: 'row', alignItems: 'center', gap: 12 }}&gt;&#10;            &lt;Box style={{ width: 8, height: 8, borderRadius: 4, background: '#3D7BD9' }} /&gt;&#10;            &lt;Text style={{ fontSize: 20, color: '#C5D4EA' }}&gt;{t}&lt;/Text&gt;&#10;          &lt;/Box&gt;&#10;        ))}&#10;      &lt;/Box&gt;&#10;    &lt;/Box&gt;&#10;  &lt;/Box&gt;&#10;&lt;/Slide&gt;&#10;"/>
+        <p:cNvPr id="451" name="" descr="&lt;Slide style={{ background: '#0E3F8C', padding: 0 }}&gt;&#10;  &lt;Box style={{ flexDirection: 'row', height: '100%', position: 'relative' }}&gt;&#10;    &lt;Box style={{ position: 'absolute', top: 0, left: 0, right: 0, height: 8, background: '#1E4FA8' }} /&gt;&#10;    &lt;Box style={{ width: 300, justifyContent: 'center', alignItems: 'center', borderRight: '1px solid #2B5793' }}&gt;&#10;      &lt;Text style={{ fontSize: 220, fontWeight: 'bold', color: '#3D7BD9', fontFamily: 'Georgia, serif', lineHeight: 1 }}&gt;06&lt;/Text&gt;&#10;    &lt;/Box&gt;&#10;    &lt;Box style={{ flex: 1, padding: '70px 64px', flexDirection: 'column', justifyContent: 'center' }}&gt;&#10;      &lt;Text style={{ fontSize: 15, color: '#7FA2D6', letterSpacing: 2, marginBottom: 18 }}&gt;PART 6 · LAB · 2 HOURS&lt;/Text&gt;&#10;      &lt;Text style={{ fontSize: 46, fontWeight: 'bold', color: '#FFFFFF', lineHeight: 1.18 }}&gt;Exercise 6.1,&lt;br /&gt;6.2 &amp;amp; Change ΔC1&lt;/Text&gt;&#10;      &lt;Box style={{ width: 64, height: 4, background: '#FFC107', marginTop: 26, marginBottom: 26 }} /&gt;&#10;      &lt;Box style={{ flexDirection: 'column', gap: 12 }}&gt;&#10;        {[&#10;          'Sort eighteen words into classes, attributes and noise',&#10;          'Draw the first domain model — ten classes or more',&#10;          'ΔC1 lands online this week; fold it in, do not restart'&#10;        ].map((t) =&gt; (&#10;          &lt;Box key={t} style={{ flexDirection: 'row', alignItems: 'center', gap: 12 }}&gt;&#10;            &lt;Box style={{ width: 8, height: 8, borderRadius: 4, background: '#3D7BD9' }} /&gt;&#10;            &lt;Text style={{ fontSize: 20, color: '#C5D4EA' }}&gt;{t}&lt;/Text&gt;&#10;          &lt;/Box&gt;&#10;        ))}&#10;      &lt;/Box&gt;&#10;    &lt;/Box&gt;&#10;  &lt;/Box&gt;&#10;&lt;/Slide&gt;&#10;"/>
         <p:cNvGrpSpPr/>
         <p:nvPr/>
       </p:nvGrpSpPr>
@@ -20344,7 +19742,7 @@
       </p:grpSpPr>
       <p:sp>
         <p:nvSpPr>
-          <p:cNvPr id="468" name=""/>
+          <p:cNvPr id="452" name=""/>
           <p:cNvSpPr/>
           <p:nvPr/>
         </p:nvSpPr>
@@ -20368,7 +19766,7 @@
       </p:sp>
       <p:sp>
         <p:nvSpPr>
-          <p:cNvPr id="469" name=""/>
+          <p:cNvPr id="453" name=""/>
           <p:cNvSpPr/>
           <p:nvPr/>
         </p:nvSpPr>
@@ -20408,7 +19806,7 @@
       </p:sp>
       <p:sp>
         <p:nvSpPr>
-          <p:cNvPr id="470" name="" descr="{&quot;isTemplate&quot;:true,&quot;type&quot;:&quot;text&quot;}"/>
+          <p:cNvPr id="454" name="" descr="{&quot;isTemplate&quot;:true,&quot;type&quot;:&quot;text&quot;}"/>
           <p:cNvSpPr txBox="1"/>
           <p:nvPr/>
         </p:nvSpPr>
@@ -20443,7 +19841,7 @@
       </p:sp>
       <p:sp>
         <p:nvSpPr>
-          <p:cNvPr id="471" name="" descr="{&quot;isTemplate&quot;:true,&quot;type&quot;:&quot;text&quot;}"/>
+          <p:cNvPr id="455" name="" descr="{&quot;isTemplate&quot;:true,&quot;type&quot;:&quot;text&quot;}"/>
           <p:cNvSpPr txBox="1"/>
           <p:nvPr/>
         </p:nvSpPr>
@@ -20478,7 +19876,7 @@
       </p:sp>
       <p:sp>
         <p:nvSpPr>
-          <p:cNvPr id="472" name="" descr="{&quot;isTemplate&quot;:true,&quot;type&quot;:&quot;text&quot;}"/>
+          <p:cNvPr id="456" name="" descr="{&quot;isTemplate&quot;:true,&quot;type&quot;:&quot;text&quot;}"/>
           <p:cNvSpPr txBox="1"/>
           <p:nvPr/>
         </p:nvSpPr>
@@ -20531,7 +19929,7 @@
       </p:sp>
       <p:sp>
         <p:nvSpPr>
-          <p:cNvPr id="473" name=""/>
+          <p:cNvPr id="457" name=""/>
           <p:cNvSpPr/>
           <p:nvPr/>
         </p:nvSpPr>
@@ -20555,7 +19953,7 @@
       </p:sp>
       <p:sp>
         <p:nvSpPr>
-          <p:cNvPr id="474" name=""/>
+          <p:cNvPr id="458" name=""/>
           <p:cNvSpPr/>
           <p:nvPr/>
         </p:nvSpPr>
@@ -20581,7 +19979,7 @@
       </p:sp>
       <p:sp>
         <p:nvSpPr>
-          <p:cNvPr id="475" name="" descr="{&quot;isTemplate&quot;:true,&quot;type&quot;:&quot;text&quot;}"/>
+          <p:cNvPr id="459" name="" descr="{&quot;isTemplate&quot;:true,&quot;type&quot;:&quot;text&quot;}"/>
           <p:cNvSpPr txBox="1"/>
           <p:nvPr/>
         </p:nvSpPr>
@@ -20616,7 +20014,7 @@
       </p:sp>
       <p:sp>
         <p:nvSpPr>
-          <p:cNvPr id="476" name=""/>
+          <p:cNvPr id="460" name=""/>
           <p:cNvSpPr/>
           <p:nvPr/>
         </p:nvSpPr>
@@ -20642,7 +20040,7 @@
       </p:sp>
       <p:sp>
         <p:nvSpPr>
-          <p:cNvPr id="477" name="" descr="{&quot;isTemplate&quot;:true,&quot;type&quot;:&quot;text&quot;}"/>
+          <p:cNvPr id="461" name="" descr="{&quot;isTemplate&quot;:true,&quot;type&quot;:&quot;text&quot;}"/>
           <p:cNvSpPr txBox="1"/>
           <p:nvPr/>
         </p:nvSpPr>
@@ -20677,7 +20075,7 @@
       </p:sp>
       <p:sp>
         <p:nvSpPr>
-          <p:cNvPr id="478" name=""/>
+          <p:cNvPr id="462" name=""/>
           <p:cNvSpPr/>
           <p:nvPr/>
         </p:nvSpPr>
@@ -20703,7 +20101,7 @@
       </p:sp>
       <p:sp>
         <p:nvSpPr>
-          <p:cNvPr id="479" name="" descr="{&quot;isTemplate&quot;:true,&quot;type&quot;:&quot;text&quot;}"/>
+          <p:cNvPr id="463" name="" descr="{&quot;isTemplate&quot;:true,&quot;type&quot;:&quot;text&quot;}"/>
           <p:cNvSpPr txBox="1"/>
           <p:nvPr/>
         </p:nvSpPr>
@@ -20738,7 +20136,7 @@
       </p:sp>
       <p:sp>
         <p:nvSpPr>
-          <p:cNvPr id="480" name=""/>
+          <p:cNvPr id="464" name=""/>
           <p:cNvSpPr/>
           <p:nvPr/>
         </p:nvSpPr>
@@ -20770,7 +20168,7 @@
   <p:cSld>
     <p:spTree>
       <p:nvGrpSpPr>
-        <p:cNvPr id="481" name="" descr="&lt;Slide style={{ background: '#FFFFFF', padding: 0 }}&gt;&#10;  &lt;Box style={{ height: 72, background: '#1E4FA8', padding: '0 40px', flexDirection: 'row', alignItems: 'center', justifyContent: 'space-between' }}&gt;&#10;    &lt;Text style={{ fontSize: 15, color: '#B9CDF0', letterSpacing: 1 }}&gt;ISAD · INFORMATION SYSTEMS ANALYSIS &amp;amp; DESIGN&lt;/Text&gt;&#10;    &lt;Text style={{ fontSize: 15, color: '#B9CDF0' }}&gt;W06 · LAB · EXERCISE 6.1&lt;/Text&gt;&#10;  &lt;/Box&gt;&#10;  &lt;Box style={{ padding: '13px 40px 0 40px', flexDirection: 'row', alignItems: 'center', justifyContent: 'space-between' }}&gt;&#10;    &lt;Text style={{ fontSize: 29, fontWeight: 'bold', color: '#0E3F8C' }}&gt;Exercise 6.1 — The Messy List&lt;/Text&gt;&#10;    &lt;Text style={{ fontSize: 14, color: '#1E4FA8', fontWeight: 'bold' }}&gt;29 / 38&lt;/Text&gt;&#10;  &lt;/Box&gt;&#10;  &lt;Box style={{ flex: 1, padding: '10px 40px 0 40px', flexDirection: 'row', gap: 26 }}&gt;&#10;    &lt;Box style={{ flex: 5, justifyContent: 'center' }}&gt;&#10;      &lt;CodeBlock theme='one-dark-pro' code={`Words collected from the CampusBites&#10;specifications, requirements pack and two&#10;team meetings. Sorted by nobody.&#10;&#10;  order          OrderLine      menu item&#10;  total          payment        provider&#10;  cart           coupon         code&#10;  kitchen ticket order time     rating&#10;  delivery       window         fee&#10;  student        validation     calculation&#10;  logging        server         service&#10;  table          interface      ui&#10;&#10;Eighteen words. Four of them are actors,&#10;three are implementation, and the rest&#10;are a mixture of classes and attributes.`} language='text' /&gt;&#10;    &lt;/Box&gt;&#10;    &lt;Box style={{ flex: 2, flexDirection: 'column', justifyContent: 'center', gap: 12 }}&gt;&#10;      &lt;Box style={{ padding: '15px 17px', background: '#F0F5FC', borderRadius: 9, borderLeft: '4px solid #1E4FA8' }}&gt;&#10;        &lt;Text style={{ fontSize: 15.5, fontWeight: 'bold', color: '#0E3F8C' }}&gt;The exercise&lt;/Text&gt;&#10;        &lt;Text style={{ fontSize: 12.8, color: '#4A5568', lineHeight: 1.6, marginTop: 5 }}&gt;&#10;          Sort all eighteen into four buckets: conceptual class, attribute, external actor, discard. Then decide whether each class is Entity, Boundary or Control.&#10;        &lt;/Text&gt;&#10;      &lt;/Box&gt;&#10;      &lt;Box style={{ padding: '15px 17px', background: '#FFF6E0', borderRadius: 9, borderLeft: '4px solid #FFC107' }}&gt;&#10;        &lt;Text style={{ fontSize: 15.5, fontWeight: 'bold', color: '#996F00' }}&gt;Five minutes alone first&lt;/Text&gt;&#10;        &lt;Text style={{ fontSize: 12.8, color: '#4A5568', lineHeight: 1.6, marginTop: 5 }}&gt;&#10;          Then merge onto the Recorder's page. Keep the rows you disagreed on — those are the ones to argue about.&#10;        &lt;/Text&gt;&#10;      &lt;/Box&gt;&#10;      &lt;Box style={{ padding: '15px 17px', background: '#FFFFFF', borderRadius: 9, border: '1px solid #D6DCE5' }}&gt;&#10;        &lt;Text style={{ fontSize: 15.5, fontWeight: 'bold', color: '#0E3F8C' }}&gt;The four hardest&lt;/Text&gt;&#10;        &lt;Text style={{ fontSize: 12.8, color: '#4A5568', lineHeight: 1.6, marginTop: 5 }}&gt;&#10;          delivery window · coupon code · rating · kitchen ticket. Decide these yourself before looking at page 33.&#10;        &lt;/Text&gt;&#10;      &lt;/Box&gt;&#10;      &lt;Box style={{ padding: '12px 16px', background: '#F7F9FC', borderRadius: 8, border: '1px dashed #D6DCE5' }}&gt;&#10;        &lt;Text style={{ fontSize: 12.8, color: '#8B97A8', lineHeight: 1.6 }}&gt;&#10;          For each class you keep, write the one specification sentence it came from. No sentence, no class.&#10;        &lt;/Text&gt;&#10;      &lt;/Box&gt;&#10;    &lt;/Box&gt;&#10;  &lt;/Box&gt;&#10;  &lt;Box style={{ height: 46, background: '#0E3F8C', padding: '0 40px', flexDirection: 'row', alignItems: 'center', justifyContent: 'center' }}&gt;&#10;    &lt;Text style={{ fontSize: 16.5, color: '#FFFFFF', fontWeight: '600' }}&gt;Eighteen words in, ten classes out. Most of the work is deciding what to throw away&lt;/Text&gt;&#10;  &lt;/Box&gt;&#10;&lt;/Slide&gt;&#10;"/>
+        <p:cNvPr id="465" name="" descr="&lt;Slide style={{ background: '#FFFFFF', padding: 0 }}&gt;&#10;  &lt;Box style={{ height: 72, background: '#1E4FA8', padding: '0 40px', flexDirection: 'row', alignItems: 'center', justifyContent: 'space-between' }}&gt;&#10;    &lt;Text style={{ fontSize: 15, color: '#B9CDF0', letterSpacing: 1 }}&gt;ISAD · INFORMATION SYSTEMS ANALYSIS &amp;amp; DESIGN&lt;/Text&gt;&#10;    &lt;Text style={{ fontSize: 15, color: '#B9CDF0' }}&gt;W06 · LAB · EXERCISE 6.1&lt;/Text&gt;&#10;  &lt;/Box&gt;&#10;  &lt;Box style={{ padding: '13px 40px 0 40px', flexDirection: 'row', alignItems: 'center', justifyContent: 'space-between' }}&gt;&#10;    &lt;Text style={{ fontSize: 29, fontWeight: 'bold', color: '#0E3F8C' }}&gt;Exercise 6.1 — The Messy List&lt;/Text&gt;&#10;    &lt;Text style={{ fontSize: 14, color: '#1E4FA8', fontWeight: 'bold' }}&gt;29 / 39&lt;/Text&gt;&#10;  &lt;/Box&gt;&#10;  &lt;Box style={{ flex: 1, padding: '10px 40px 0 40px', flexDirection: 'row', gap: 26 }}&gt;&#10;    &lt;Box style={{ flex: 5, justifyContent: 'center' }}&gt;&#10;      &lt;CodeBlock theme='one-dark-pro' code={`Words collected from the Worked example&#10;specifications, requirements pack and two&#10;team meetings. Sorted by nobody.&#10;&#10;  order          OrderLine      menu item&#10;  total          payment        provider&#10;  cart           coupon         code&#10;  kitchen ticket order time     rating&#10;  delivery       window         fee&#10;  student        validation     calculation&#10;  logging        server         service&#10;  table          interface      ui&#10;&#10;Eighteen words. Four of them are actors,&#10;three are implementation, and the rest&#10;are a mixture of classes and attributes.`} language='text' /&gt;&#10;    &lt;/Box&gt;&#10;    &lt;Box style={{ flex: 2, flexDirection: 'column', justifyContent: 'center', gap: 12 }}&gt;&#10;      &lt;Box style={{ padding: '15px 17px', background: '#F0F5FC', borderRadius: 9, borderLeft: '4px solid #1E4FA8' }}&gt;&#10;        &lt;Text style={{ fontSize: 15.5, fontWeight: 'bold', color: '#0E3F8C' }}&gt;The exercise&lt;/Text&gt;&#10;        &lt;Text style={{ fontSize: 12.8, color: '#4A5568', lineHeight: 1.6, marginTop: 5 }}&gt;&#10;          Sort all eighteen into four buckets: conceptual class, attribute, external actor, discard. Then decide whether each class is Entity, Boundary or Control.&#10;        &lt;/Text&gt;&#10;      &lt;/Box&gt;&#10;      &lt;Box style={{ padding: '15px 17px', background: '#FFF6E0', borderRadius: 9, borderLeft: '4px solid #FFC107' }}&gt;&#10;        &lt;Text style={{ fontSize: 15.5, fontWeight: 'bold', color: '#996F00' }}&gt;Five minutes alone first&lt;/Text&gt;&#10;        &lt;Text style={{ fontSize: 12.8, color: '#4A5568', lineHeight: 1.6, marginTop: 5 }}&gt;&#10;          Then merge onto the Recorder's page. Keep the rows you disagreed on — those are the ones to argue about.&#10;        &lt;/Text&gt;&#10;      &lt;/Box&gt;&#10;      &lt;Box style={{ padding: '15px 17px', background: '#FFFFFF', borderRadius: 9, border: '1px solid #D6DCE5' }}&gt;&#10;        &lt;Text style={{ fontSize: 15.5, fontWeight: 'bold', color: '#0E3F8C' }}&gt;The four hardest&lt;/Text&gt;&#10;        &lt;Text style={{ fontSize: 12.8, color: '#4A5568', lineHeight: 1.6, marginTop: 5 }}&gt;&#10;          delivery window · coupon code · rating · kitchen ticket. Decide these yourself before looking at page 33.&#10;        &lt;/Text&gt;&#10;      &lt;/Box&gt;&#10;      &lt;Box style={{ padding: '12px 16px', background: '#F7F9FC', borderRadius: 8, border: '1px dashed #D6DCE5' }}&gt;&#10;        &lt;Text style={{ fontSize: 12.8, color: '#8B97A8', lineHeight: 1.6 }}&gt;&#10;          For each class you keep, write the one specification sentence it came from. No sentence, no class.&#10;        &lt;/Text&gt;&#10;      &lt;/Box&gt;&#10;    &lt;/Box&gt;&#10;  &lt;/Box&gt;&#10;  &lt;Box style={{ height: 46, background: '#0E3F8C', padding: '0 40px', flexDirection: 'row', alignItems: 'center', justifyContent: 'center' }}&gt;&#10;    &lt;Text style={{ fontSize: 16.5, color: '#FFFFFF', fontWeight: '600' }}&gt;Twenty-four words in, eight classes out. Most of the work is deciding what to throw away&lt;/Text&gt;&#10;  &lt;/Box&gt;&#10;&lt;/Slide&gt;&#10;"/>
         <p:cNvGrpSpPr/>
         <p:nvPr/>
       </p:nvGrpSpPr>
@@ -20784,7 +20182,7 @@
       </p:grpSpPr>
       <p:sp>
         <p:nvSpPr>
-          <p:cNvPr id="482" name=""/>
+          <p:cNvPr id="466" name=""/>
           <p:cNvSpPr/>
           <p:nvPr/>
         </p:nvSpPr>
@@ -20808,7 +20206,7 @@
       </p:sp>
       <p:sp>
         <p:nvSpPr>
-          <p:cNvPr id="483" name=""/>
+          <p:cNvPr id="467" name=""/>
           <p:cNvSpPr/>
           <p:nvPr/>
         </p:nvSpPr>
@@ -20832,7 +20230,7 @@
       </p:sp>
       <p:sp>
         <p:nvSpPr>
-          <p:cNvPr id="484" name="" descr="{&quot;isTemplate&quot;:true,&quot;type&quot;:&quot;text&quot;}"/>
+          <p:cNvPr id="468" name="" descr="{&quot;isTemplate&quot;:true,&quot;type&quot;:&quot;text&quot;}"/>
           <p:cNvSpPr txBox="1"/>
           <p:nvPr/>
         </p:nvSpPr>
@@ -20867,7 +20265,7 @@
       </p:sp>
       <p:sp>
         <p:nvSpPr>
-          <p:cNvPr id="485" name="" descr="{&quot;isTemplate&quot;:true,&quot;type&quot;:&quot;text&quot;}"/>
+          <p:cNvPr id="469" name="" descr="{&quot;isTemplate&quot;:true,&quot;type&quot;:&quot;text&quot;}"/>
           <p:cNvSpPr txBox="1"/>
           <p:nvPr/>
         </p:nvSpPr>
@@ -20902,7 +20300,7 @@
       </p:sp>
       <p:sp>
         <p:nvSpPr>
-          <p:cNvPr id="486" name="" descr="{&quot;isTemplate&quot;:true,&quot;type&quot;:&quot;text&quot;}"/>
+          <p:cNvPr id="470" name="" descr="{&quot;isTemplate&quot;:true,&quot;type&quot;:&quot;text&quot;}"/>
           <p:cNvSpPr txBox="1"/>
           <p:nvPr/>
         </p:nvSpPr>
@@ -20937,7 +20335,7 @@
       </p:sp>
       <p:sp>
         <p:nvSpPr>
-          <p:cNvPr id="487" name="" descr="{&quot;isTemplate&quot;:true,&quot;type&quot;:&quot;text&quot;}"/>
+          <p:cNvPr id="471" name="" descr="{&quot;isTemplate&quot;:true,&quot;type&quot;:&quot;text&quot;}"/>
           <p:cNvSpPr txBox="1"/>
           <p:nvPr/>
         </p:nvSpPr>
@@ -20964,15 +20362,15 @@
                 <a:latin typeface="Microsoft YaHei"/>
                 <a:ea typeface="Microsoft YaHei"/>
               </a:rPr>
-              <a:t>29 / 38</a:t>
-            </a:r>
-            <a:endParaRPr/>
-          </a:p>
-        </p:txBody>
-      </p:sp>
-      <p:sp>
-        <p:nvSpPr>
-          <p:cNvPr id="488" name=""/>
+              <a:t>29 / 39</a:t>
+            </a:r>
+            <a:endParaRPr/>
+          </a:p>
+        </p:txBody>
+      </p:sp>
+      <p:sp>
+        <p:nvSpPr>
+          <p:cNvPr id="472" name=""/>
           <p:cNvSpPr/>
           <p:nvPr/>
         </p:nvSpPr>
@@ -20998,7 +20396,7 @@
       </p:sp>
       <p:sp>
         <p:nvSpPr>
-          <p:cNvPr id="489" name=""/>
+          <p:cNvPr id="473" name=""/>
           <p:cNvSpPr/>
           <p:nvPr/>
         </p:nvSpPr>
@@ -21055,7 +20453,7 @@
       </p:sp>
       <p:sp>
         <p:nvSpPr>
-          <p:cNvPr id="490" name="" descr="{&quot;isTemplate&quot;:true,&quot;type&quot;:&quot;text&quot;}"/>
+          <p:cNvPr id="474" name="" descr="{&quot;isTemplate&quot;:true,&quot;type&quot;:&quot;text&quot;}"/>
           <p:cNvSpPr txBox="1"/>
           <p:nvPr/>
         </p:nvSpPr>
@@ -21090,7 +20488,7 @@
       </p:sp>
       <p:sp>
         <p:nvSpPr>
-          <p:cNvPr id="491" name="" descr="{&quot;isTemplate&quot;:true,&quot;type&quot;:&quot;text&quot;}"/>
+          <p:cNvPr id="475" name="" descr="{&quot;isTemplate&quot;:true,&quot;type&quot;:&quot;text&quot;}"/>
           <p:cNvSpPr txBox="1"/>
           <p:nvPr/>
         </p:nvSpPr>
@@ -21127,7 +20525,7 @@
       </p:sp>
       <p:sp>
         <p:nvSpPr>
-          <p:cNvPr id="492" name=""/>
+          <p:cNvPr id="476" name=""/>
           <p:cNvSpPr/>
           <p:nvPr/>
         </p:nvSpPr>
@@ -21153,7 +20551,7 @@
       </p:sp>
       <p:sp>
         <p:nvSpPr>
-          <p:cNvPr id="493" name=""/>
+          <p:cNvPr id="477" name=""/>
           <p:cNvSpPr/>
           <p:nvPr/>
         </p:nvSpPr>
@@ -21210,7 +20608,7 @@
       </p:sp>
       <p:sp>
         <p:nvSpPr>
-          <p:cNvPr id="494" name="" descr="{&quot;isTemplate&quot;:true,&quot;type&quot;:&quot;text&quot;}"/>
+          <p:cNvPr id="478" name="" descr="{&quot;isTemplate&quot;:true,&quot;type&quot;:&quot;text&quot;}"/>
           <p:cNvSpPr txBox="1"/>
           <p:nvPr/>
         </p:nvSpPr>
@@ -21245,7 +20643,7 @@
       </p:sp>
       <p:sp>
         <p:nvSpPr>
-          <p:cNvPr id="495" name="" descr="{&quot;isTemplate&quot;:true,&quot;type&quot;:&quot;text&quot;}"/>
+          <p:cNvPr id="479" name="" descr="{&quot;isTemplate&quot;:true,&quot;type&quot;:&quot;text&quot;}"/>
           <p:cNvSpPr txBox="1"/>
           <p:nvPr/>
         </p:nvSpPr>
@@ -21282,7 +20680,7 @@
       </p:sp>
       <p:sp>
         <p:nvSpPr>
-          <p:cNvPr id="496" name=""/>
+          <p:cNvPr id="480" name=""/>
           <p:cNvSpPr/>
           <p:nvPr/>
         </p:nvSpPr>
@@ -21313,7 +20711,7 @@
       </p:sp>
       <p:sp>
         <p:nvSpPr>
-          <p:cNvPr id="497" name="" descr="{&quot;isTemplate&quot;:true,&quot;type&quot;:&quot;text&quot;}"/>
+          <p:cNvPr id="481" name="" descr="{&quot;isTemplate&quot;:true,&quot;type&quot;:&quot;text&quot;}"/>
           <p:cNvSpPr txBox="1"/>
           <p:nvPr/>
         </p:nvSpPr>
@@ -21348,7 +20746,7 @@
       </p:sp>
       <p:sp>
         <p:nvSpPr>
-          <p:cNvPr id="498" name="" descr="{&quot;isTemplate&quot;:true,&quot;type&quot;:&quot;text&quot;}"/>
+          <p:cNvPr id="482" name="" descr="{&quot;isTemplate&quot;:true,&quot;type&quot;:&quot;text&quot;}"/>
           <p:cNvSpPr txBox="1"/>
           <p:nvPr/>
         </p:nvSpPr>
@@ -21385,7 +20783,7 @@
       </p:sp>
       <p:sp>
         <p:nvSpPr>
-          <p:cNvPr id="499" name=""/>
+          <p:cNvPr id="483" name=""/>
           <p:cNvSpPr/>
           <p:nvPr/>
         </p:nvSpPr>
@@ -21416,7 +20814,7 @@
       </p:sp>
       <p:sp>
         <p:nvSpPr>
-          <p:cNvPr id="500" name="" descr="{&quot;isTemplate&quot;:true,&quot;type&quot;:&quot;text&quot;}"/>
+          <p:cNvPr id="484" name="" descr="{&quot;isTemplate&quot;:true,&quot;type&quot;:&quot;text&quot;}"/>
           <p:cNvSpPr txBox="1"/>
           <p:nvPr/>
         </p:nvSpPr>
@@ -21453,7 +20851,7 @@
       </p:sp>
       <p:sp>
         <p:nvSpPr>
-          <p:cNvPr id="501" name=""/>
+          <p:cNvPr id="485" name=""/>
           <p:cNvSpPr/>
           <p:nvPr/>
         </p:nvSpPr>
@@ -21477,14 +20875,14 @@
       </p:sp>
       <p:sp>
         <p:nvSpPr>
-          <p:cNvPr id="502" name="" descr="{&quot;isTemplate&quot;:true,&quot;type&quot;:&quot;text&quot;}"/>
-          <p:cNvSpPr txBox="1"/>
-          <p:nvPr/>
-        </p:nvSpPr>
-        <p:spPr>
-          <a:xfrm rot="0" flipH="0" flipV="0">
-            <a:off x="2962275" y="6543675"/>
-            <a:ext cx="6276975" cy="190500"/>
+          <p:cNvPr id="486" name="" descr="{&quot;isTemplate&quot;:true,&quot;type&quot;:&quot;text&quot;}"/>
+          <p:cNvSpPr txBox="1"/>
+          <p:nvPr/>
+        </p:nvSpPr>
+        <p:spPr>
+          <a:xfrm rot="0" flipH="0" flipV="0">
+            <a:off x="2781300" y="6543675"/>
+            <a:ext cx="6638925" cy="190500"/>
           </a:xfrm>
           <a:prstGeom prst="rect"/>
         </p:spPr>
@@ -21504,15 +20902,15 @@
                 <a:latin typeface="Microsoft YaHei"/>
                 <a:ea typeface="Microsoft YaHei"/>
               </a:rPr>
-              <a:t>Eighteen words in, ten classes out. Most of the work is deciding what to throw away</a:t>
-            </a:r>
-            <a:endParaRPr/>
-          </a:p>
-        </p:txBody>
-      </p:sp>
-      <p:sp>
-        <p:nvSpPr>
-          <p:cNvPr id="503" name=""/>
+              <a:t>Twenty-four words in, eight classes out. Most of the work is deciding what to throw away</a:t>
+            </a:r>
+            <a:endParaRPr/>
+          </a:p>
+        </p:txBody>
+      </p:sp>
+      <p:sp>
+        <p:nvSpPr>
+          <p:cNvPr id="487" name=""/>
           <p:cNvSpPr/>
           <p:nvPr/>
         </p:nvSpPr>
@@ -21538,7 +20936,7 @@
       </p:sp>
       <p:sp>
         <p:nvSpPr>
-          <p:cNvPr id="504" name=""/>
+          <p:cNvPr id="488" name=""/>
           <p:cNvSpPr txBox="1"/>
           <p:nvPr/>
         </p:nvSpPr>
@@ -21563,7 +20961,7 @@
                 <a:latin typeface="Menlo"/>
                 <a:ea typeface="Menlo"/>
               </a:rPr>
-              <a:t>Words collected from the CampusBites
+              <a:t>Words collected from the Worked example
 specifications, requirements pack and two
 team meetings. Sorted by nobody.
   order          OrderLine      menu item
@@ -21592,7 +20990,7 @@
   <p:cSld>
     <p:spTree>
       <p:nvGrpSpPr>
-        <p:cNvPr id="505" name="" descr="&lt;Slide style={{ background: '#0E3F8C', padding: 0 }}&gt;&#10;  &lt;Box style={{ flexDirection: 'row', height: '100%', position: 'relative' }}&gt;&#10;    &lt;Box style={{ position: 'absolute', top: 0, left: 0, right: 0, height: 8, background: '#1E4FA8' }} /&gt;&#10;    &lt;Box style={{ width: 300, justifyContent: 'center', alignItems: 'center', borderRight: '1px solid #2B5793' }}&gt;&#10;      &lt;Text style={{ fontSize: 220, fontWeight: 'bold', color: '#3D7BD9', fontFamily: 'Georgia, serif', lineHeight: 1 }}&gt;01&lt;/Text&gt;&#10;    &lt;/Box&gt;&#10;    &lt;Box style={{ flex: 1, padding: '70px 64px', flexDirection: 'column', justifyContent: 'center' }}&gt;&#10;      &lt;Text style={{ fontSize: 15, color: '#7FA2D6', letterSpacing: 2, marginBottom: 18 }}&gt;PART 1 · LECTURE&lt;/Text&gt;&#10;      &lt;Text style={{ fontSize: 46, fontWeight: 'bold', color: '#FFFFFF', lineHeight: 1.18 }}&gt;From Scenarios&lt;br /&gt;to Classes&lt;/Text&gt;&#10;      &lt;Box style={{ width: 64, height: 4, background: '#FFC107', marginTop: 26, marginBottom: 26 }} /&gt;&#10;      &lt;Box style={{ flexDirection: 'column', gap: 12 }}&gt;&#10;        {[&#10;          'Last week you wrote sentences. This week the nouns become boxes.',&#10;          'A noun is a candidate, not a decision',&#10;          'Ten classes is the target, and the target is a smell test'&#10;        ].map((t) =&gt; (&#10;          &lt;Box key={t} style={{ flexDirection: 'row', alignItems: 'center', gap: 12 }}&gt;&#10;            &lt;Box style={{ width: 8, height: 8, borderRadius: 4, background: '#3D7BD9' }} /&gt;&#10;            &lt;Text style={{ fontSize: 20, color: '#C5D4EA' }}&gt;{t}&lt;/Text&gt;&#10;          &lt;/Box&gt;&#10;        ))}&#10;      &lt;/Box&gt;&#10;    &lt;/Box&gt;&#10;  &lt;/Box&gt;&#10;&lt;/Slide&gt;&#10;"/>
+        <p:cNvPr id="489" name="" descr="&lt;Slide style={{ background: '#0E3F8C', padding: 0 }}&gt;&#10;  &lt;Box style={{ flexDirection: 'row', height: '100%', position: 'relative' }}&gt;&#10;    &lt;Box style={{ position: 'absolute', top: 0, left: 0, right: 0, height: 8, background: '#1E4FA8' }} /&gt;&#10;    &lt;Box style={{ width: 300, justifyContent: 'center', alignItems: 'center', borderRight: '1px solid #2B5793' }}&gt;&#10;      &lt;Text style={{ fontSize: 220, fontWeight: 'bold', color: '#3D7BD9', fontFamily: 'Georgia, serif', lineHeight: 1 }}&gt;01&lt;/Text&gt;&#10;    &lt;/Box&gt;&#10;    &lt;Box style={{ flex: 1, padding: '70px 64px', flexDirection: 'column', justifyContent: 'center' }}&gt;&#10;      &lt;Text style={{ fontSize: 15, color: '#7FA2D6', letterSpacing: 2, marginBottom: 18 }}&gt;PART 1 · LECTURE&lt;/Text&gt;&#10;      &lt;Text style={{ fontSize: 46, fontWeight: 'bold', color: '#FFFFFF', lineHeight: 1.18 }}&gt;From Scenarios&lt;br /&gt;to Classes&lt;/Text&gt;&#10;      &lt;Box style={{ width: 64, height: 4, background: '#FFC107', marginTop: 26, marginBottom: 26 }} /&gt;&#10;      &lt;Box style={{ flexDirection: 'column', gap: 12 }}&gt;&#10;        {[&#10;          'Last week you wrote sentences. This week the nouns become boxes.',&#10;          'A noun is a candidate, not a decision',&#10;          'Ten classes is the target, and the target is a smell test'&#10;        ].map((t) =&gt; (&#10;          &lt;Box key={t} style={{ flexDirection: 'row', alignItems: 'center', gap: 12 }}&gt;&#10;            &lt;Box style={{ width: 8, height: 8, borderRadius: 4, background: '#3D7BD9' }} /&gt;&#10;            &lt;Text style={{ fontSize: 20, color: '#C5D4EA' }}&gt;{t}&lt;/Text&gt;&#10;          &lt;/Box&gt;&#10;        ))}&#10;      &lt;/Box&gt;&#10;    &lt;/Box&gt;&#10;  &lt;/Box&gt;&#10;&lt;/Slide&gt;&#10;"/>
         <p:cNvGrpSpPr/>
         <p:nvPr/>
       </p:nvGrpSpPr>
@@ -21606,7 +21004,7 @@
       </p:grpSpPr>
       <p:sp>
         <p:nvSpPr>
-          <p:cNvPr id="506" name=""/>
+          <p:cNvPr id="490" name=""/>
           <p:cNvSpPr/>
           <p:nvPr/>
         </p:nvSpPr>
@@ -21630,7 +21028,7 @@
       </p:sp>
       <p:sp>
         <p:nvSpPr>
-          <p:cNvPr id="507" name=""/>
+          <p:cNvPr id="491" name=""/>
           <p:cNvSpPr/>
           <p:nvPr/>
         </p:nvSpPr>
@@ -21670,7 +21068,7 @@
       </p:sp>
       <p:sp>
         <p:nvSpPr>
-          <p:cNvPr id="508" name="" descr="{&quot;isTemplate&quot;:true,&quot;type&quot;:&quot;text&quot;}"/>
+          <p:cNvPr id="492" name="" descr="{&quot;isTemplate&quot;:true,&quot;type&quot;:&quot;text&quot;}"/>
           <p:cNvSpPr txBox="1"/>
           <p:nvPr/>
         </p:nvSpPr>
@@ -21705,7 +21103,7 @@
       </p:sp>
       <p:sp>
         <p:nvSpPr>
-          <p:cNvPr id="509" name="" descr="{&quot;isTemplate&quot;:true,&quot;type&quot;:&quot;text&quot;}"/>
+          <p:cNvPr id="493" name="" descr="{&quot;isTemplate&quot;:true,&quot;type&quot;:&quot;text&quot;}"/>
           <p:cNvSpPr txBox="1"/>
           <p:nvPr/>
         </p:nvSpPr>
@@ -21740,7 +21138,7 @@
       </p:sp>
       <p:sp>
         <p:nvSpPr>
-          <p:cNvPr id="510" name="" descr="{&quot;isTemplate&quot;:true,&quot;type&quot;:&quot;text&quot;}"/>
+          <p:cNvPr id="494" name="" descr="{&quot;isTemplate&quot;:true,&quot;type&quot;:&quot;text&quot;}"/>
           <p:cNvSpPr txBox="1"/>
           <p:nvPr/>
         </p:nvSpPr>
@@ -21793,7 +21191,7 @@
       </p:sp>
       <p:sp>
         <p:nvSpPr>
-          <p:cNvPr id="511" name=""/>
+          <p:cNvPr id="495" name=""/>
           <p:cNvSpPr/>
           <p:nvPr/>
         </p:nvSpPr>
@@ -21817,7 +21215,7 @@
       </p:sp>
       <p:sp>
         <p:nvSpPr>
-          <p:cNvPr id="512" name=""/>
+          <p:cNvPr id="496" name=""/>
           <p:cNvSpPr/>
           <p:nvPr/>
         </p:nvSpPr>
@@ -21843,7 +21241,7 @@
       </p:sp>
       <p:sp>
         <p:nvSpPr>
-          <p:cNvPr id="513" name="" descr="{&quot;isTemplate&quot;:true,&quot;type&quot;:&quot;text&quot;}"/>
+          <p:cNvPr id="497" name="" descr="{&quot;isTemplate&quot;:true,&quot;type&quot;:&quot;text&quot;}"/>
           <p:cNvSpPr txBox="1"/>
           <p:nvPr/>
         </p:nvSpPr>
@@ -21878,7 +21276,7 @@
       </p:sp>
       <p:sp>
         <p:nvSpPr>
-          <p:cNvPr id="514" name=""/>
+          <p:cNvPr id="498" name=""/>
           <p:cNvSpPr/>
           <p:nvPr/>
         </p:nvSpPr>
@@ -21904,7 +21302,7 @@
       </p:sp>
       <p:sp>
         <p:nvSpPr>
-          <p:cNvPr id="515" name="" descr="{&quot;isTemplate&quot;:true,&quot;type&quot;:&quot;text&quot;}"/>
+          <p:cNvPr id="499" name="" descr="{&quot;isTemplate&quot;:true,&quot;type&quot;:&quot;text&quot;}"/>
           <p:cNvSpPr txBox="1"/>
           <p:nvPr/>
         </p:nvSpPr>
@@ -21939,7 +21337,7 @@
       </p:sp>
       <p:sp>
         <p:nvSpPr>
-          <p:cNvPr id="516" name=""/>
+          <p:cNvPr id="500" name=""/>
           <p:cNvSpPr/>
           <p:nvPr/>
         </p:nvSpPr>
@@ -21965,7 +21363,7 @@
       </p:sp>
       <p:sp>
         <p:nvSpPr>
-          <p:cNvPr id="517" name="" descr="{&quot;isTemplate&quot;:true,&quot;type&quot;:&quot;text&quot;}"/>
+          <p:cNvPr id="501" name="" descr="{&quot;isTemplate&quot;:true,&quot;type&quot;:&quot;text&quot;}"/>
           <p:cNvSpPr txBox="1"/>
           <p:nvPr/>
         </p:nvSpPr>
@@ -22000,7 +21398,7 @@
       </p:sp>
       <p:sp>
         <p:nvSpPr>
-          <p:cNvPr id="518" name=""/>
+          <p:cNvPr id="502" name=""/>
           <p:cNvSpPr/>
           <p:nvPr/>
         </p:nvSpPr>
@@ -22032,7 +21430,7 @@
   <p:cSld>
     <p:spTree>
       <p:nvGrpSpPr>
-        <p:cNvPr id="519" name="" descr="&lt;Slide style={{ background: '#FFFFFF', padding: 0 }}&gt;&#10;  &lt;Box style={{ height: 72, background: '#1E4FA8', padding: '0 40px', flexDirection: 'row', alignItems: 'center', justifyContent: 'space-between' }}&gt;&#10;    &lt;Text style={{ fontSize: 15, color: '#B9CDF0', letterSpacing: 1 }}&gt;ISAD · INFORMATION SYSTEMS ANALYSIS &amp;amp; DESIGN&lt;/Text&gt;&#10;    &lt;Text style={{ fontSize: 15, color: '#B9CDF0' }}&gt;W06 · LAB · EXERCISE 6.1&lt;/Text&gt;&#10;  &lt;/Box&gt;&#10;  &lt;Box style={{ padding: '13px 40px 0 40px', flexDirection: 'row', alignItems: 'center', justifyContent: 'space-between' }}&gt;&#10;    &lt;Text style={{ fontSize: 29, fontWeight: 'bold', color: '#0E3F8C' }}&gt;Exercise 6.1 — Sort Them&lt;/Text&gt;&#10;    &lt;Text style={{ fontSize: 14, color: '#1E4FA8', fontWeight: 'bold' }}&gt;30 / 38&lt;/Text&gt;&#10;  &lt;/Box&gt;&#10;  &lt;Box style={{ flex: 1, padding: '10px 40px 0 40px' }}&gt;&#10;    &lt;Table&#10;      style={{ width: '100%', height: '100%' }}&#10;      defaultTextStyle={{ fontSize: 13, textAlign: 'left', color: '#1A2230' }}&#10;      defaultCellStyle={{&#10;        border: {&#10;          left: { width: 1, color: '#E5E7EB' },&#10;          right: { width: 1, color: '#E5E7EB' },&#10;          top: { width: 1, color: '#E5E7EB' },&#10;          bottom: { width: 1, color: '#E5E7EB' },&#10;        },&#10;      }}&#10;      cells={[&#10;        [&#10;          { text: 'Word', textStyle: { bold: true, color: '#FFFFFF', fontSize: 14 }, cellStyle: { background: { color: '#0E3F8C' } } },&#10;          { text: 'Your call', textStyle: { bold: true, color: '#FFFFFF', fontSize: 14 }, cellStyle: { background: { color: '#1E4FA8' } } },&#10;          { text: 'If a class, then', textStyle: { bold: true, color: '#FFFFFF', fontSize: 14 }, cellStyle: { background: { color: '#2B5793' } } },&#10;        ],&#10;        [&#10;          { text: 'order · OrderLine · menu item', textStyle: { bold: true, color: '#0E3F8C' }, cellStyle: { background: { color: '#F7F9FC' } } },&#10;          { text: 'Class', textStyle: { color: '#2B7A3D', fontWeight: 'bold' }, cellStyle: { background: { color: '#F7F9FC' } } },&#10;          { text: 'Three entities. Note “menu item”, not “item” — say which catalogue.', textStyle: { color: '#4A5568' }, cellStyle: { background: { color: '#F7F9FC' } } },&#10;        ],&#10;        [&#10;          { text: 'cart', textStyle: { bold: true, color: '#0E3F8C' } },&#10;          { text: 'Discard, or attribute', textStyle: { color: '#996F00', fontWeight: 'bold' } },&#10;          { text: '“The cart total” is one sentence. A cart is not a thing the kitchen ever hears about.', textStyle: { color: '#4A5568' } },&#10;        ],&#10;        [&#10;          { text: 'total', textStyle: { bold: true, color: '#0E3F8C' }, cellStyle: { background: { color: '#F7F9FC' } } },&#10;          { text: 'Attribute', textStyle: { color: '#996F00', fontWeight: 'bold' }, cellStyle: { background: { color: '#F7F9FC' } } },&#10;          { text: 'Of OrderLine, and derived. Or of Order if you decide to store it — say which.', textStyle: { color: '#4A5568' }, cellStyle: { background: { color: '#F7F9FC' } } },&#10;        ],&#10;        [&#10;          { text: 'payment · provider', textStyle: { bold: true, color: '#0E3F8C' } },&#10;          { text: 'One class, one actor', textStyle: { color: '#D9534F', fontWeight: 'bold' } },&#10;          { text: 'Payment is a record we keep. The provider is outside the boundary — it was on your use case diagram.', textStyle: { color: '#4A5568' } },&#10;        ],&#10;        [&#10;          { text: 'coupon · code', textStyle: { bold: true, color: '#0E3F8C' }, cellStyle: { background: { color: '#F7F9FC' } } },&#10;          { text: 'Class + attribute', textStyle: { color: '#2B7A3D', fontWeight: 'bold' }, cellStyle: { background: { color: '#F7F9FC' } } },&#10;          { text: 'Coupon is an entity — students point at their coupons. Code is its attribute.', textStyle: { color: '#4A5568' }, cellStyle: { background: { color: '#F7F9FC' } } },&#10;        ],&#10;        [&#10;          { text: 'delivery · window · fee', textStyle: { bold: true, color: '#0E3F8C' } },&#10;          { text: 'Class', textStyle: { color: '#2B7A3D', fontWeight: 'bold' } },&#10;          { text: 'DeliveryWindow is an entity once fees vary by window. Window and fee are its attributes.', textStyle: { color: '#4A5568' } },&#10;        ],&#10;        [&#10;          { text: 'validation · calculation · logging', textStyle: { bold: true, color: '#0E3F8C' }, cellStyle: { background: { color: '#F7F9FC' } } },&#10;          { text: 'Discard', textStyle: { color: '#D9534F', fontWeight: 'bold' }, cellStyle: { background: { color: '#F7F9FC' } } },&#10;          { text: 'Gerunds and technology words. None of them is in a specification sentence.', textStyle: { color: '#4A5568' }, cellStyle: { background: { color: '#F7F9FC' } } },&#10;        ],&#10;        [&#10;          { text: 'server · service · table · interface · ui', textStyle: { bold: true, color: '#0E3F8C' } },&#10;          { text: 'Discard', textStyle: { color: '#D9534F', fontWeight: 'bold' } },&#10;          { text: 'Implementation words. If one of these appears in your model, the model is a design model.' , textStyle: { color: '#4A5568' } },&#10;        ],&#10;      ]}&#10;    /&gt;&#10;  &lt;/Box&gt;&#10;  &lt;Box style={{ height: 46, background: '#0E3F8C', padding: '0 40px', flexDirection: 'row', alignItems: 'center', justifyContent: 'center' }}&gt;&#10;    &lt;Text style={{ fontSize: 16.5, color: '#FFFFFF', fontWeight: '600' }}&gt;The words you throw away are as important as the ones you keep — they tell you where the boundary is&lt;/Text&gt;&#10;  &lt;/Box&gt;&#10;&lt;/Slide&gt;&#10;"/>
+        <p:cNvPr id="503" name="" descr="&lt;Slide style={{ background: '#FFFFFF', padding: 0 }}&gt;&#10;  &lt;Box style={{ height: 72, background: '#1E4FA8', padding: '0 40px', flexDirection: 'row', alignItems: 'center', justifyContent: 'space-between' }}&gt;&#10;    &lt;Text style={{ fontSize: 15, color: '#B9CDF0', letterSpacing: 1 }}&gt;ISAD · INFORMATION SYSTEMS ANALYSIS &amp;amp; DESIGN&lt;/Text&gt;&#10;    &lt;Text style={{ fontSize: 15, color: '#B9CDF0' }}&gt;W06 · LAB · EXERCISE 6.1&lt;/Text&gt;&#10;  &lt;/Box&gt;&#10;  &lt;Box style={{ padding: '13px 40px 0 40px', flexDirection: 'row', alignItems: 'center', justifyContent: 'space-between' }}&gt;&#10;    &lt;Text style={{ fontSize: 29, fontWeight: 'bold', color: '#0E3F8C' }}&gt;Exercise 6.1 — Sort Them&lt;/Text&gt;&#10;    &lt;Text style={{ fontSize: 14, color: '#1E4FA8', fontWeight: 'bold' }}&gt;30 / 39&lt;/Text&gt;&#10;  &lt;/Box&gt;&#10;  &lt;Box style={{ flex: 1, padding: '10px 40px 0 40px' }}&gt;&#10;    &lt;Table&#10;      style={{ width: '100%', height: '100%' }}&#10;      defaultTextStyle={{ fontSize: 13, textAlign: 'left', color: '#1A2230' }}&#10;      defaultCellStyle={{&#10;        border: {&#10;          left: { width: 1, color: '#E5E7EB' },&#10;          right: { width: 1, color: '#E5E7EB' },&#10;          top: { width: 1, color: '#E5E7EB' },&#10;          bottom: { width: 1, color: '#E5E7EB' },&#10;        },&#10;      }}&#10;      cells={[&#10;        [&#10;          { text: 'Word', textStyle: { bold: true, color: '#FFFFFF', fontSize: 14 }, cellStyle: { background: { color: '#0E3F8C' } } },&#10;          { text: 'Your call', textStyle: { bold: true, color: '#FFFFFF', fontSize: 14 }, cellStyle: { background: { color: '#1E4FA8' } } },&#10;          { text: 'If a class, then', textStyle: { bold: true, color: '#FFFFFF', fontSize: 14 }, cellStyle: { background: { color: '#2B5793' } } },&#10;        ],&#10;        [&#10;          { text: 'order · OrderLine · menu item', textStyle: { bold: true, color: '#0E3F8C' }, cellStyle: { background: { color: '#F7F9FC' } } },&#10;          { text: 'Class', textStyle: { color: '#2B7A3D', fontWeight: 'bold' }, cellStyle: { background: { color: '#F7F9FC' } } },&#10;          { text: 'Three entities. Note “menu item”, not “item” — say which catalogue.', textStyle: { color: '#4A5568' }, cellStyle: { background: { color: '#F7F9FC' } } },&#10;        ],&#10;        [&#10;          { text: 'cart', textStyle: { bold: true, color: '#0E3F8C' } },&#10;          { text: 'Discard, or attribute', textStyle: { color: '#996F00', fontWeight: 'bold' } },&#10;          { text: '“The cart total” is one sentence. A cart is not a thing the kitchen ever hears about.', textStyle: { color: '#4A5568' } },&#10;        ],&#10;        [&#10;          { text: 'total', textStyle: { bold: true, color: '#0E3F8C' }, cellStyle: { background: { color: '#F7F9FC' } } },&#10;          { text: 'Attribute', textStyle: { color: '#996F00', fontWeight: 'bold' }, cellStyle: { background: { color: '#F7F9FC' } } },&#10;          { text: 'Of OrderLine, and derived. Or of Order if you decide to store it — say which.', textStyle: { color: '#4A5568' }, cellStyle: { background: { color: '#F7F9FC' } } },&#10;        ],&#10;        [&#10;          { text: 'payment · provider', textStyle: { bold: true, color: '#0E3F8C' } },&#10;          { text: 'One class, one actor', textStyle: { color: '#D9534F', fontWeight: 'bold' } },&#10;          { text: 'Payment is a record we keep. The provider is outside the boundary — it was on your use case diagram.', textStyle: { color: '#4A5568' } },&#10;        ],&#10;        [&#10;          { text: 'coupon · code', textStyle: { bold: true, color: '#0E3F8C' }, cellStyle: { background: { color: '#F7F9FC' } } },&#10;          { text: 'Class + attribute', textStyle: { color: '#2B7A3D', fontWeight: 'bold' }, cellStyle: { background: { color: '#F7F9FC' } } },&#10;          { text: 'Coupon is an entity — students point at their coupons. Code is its attribute.', textStyle: { color: '#4A5568' }, cellStyle: { background: { color: '#F7F9FC' } } },&#10;        ],&#10;        [&#10;          { text: 'delivery · window · fee', textStyle: { bold: true, color: '#0E3F8C' } },&#10;          { text: 'Class', textStyle: { color: '#2B7A3D', fontWeight: 'bold' } },&#10;          { text: 'DeliveryWindow is an entity once fees vary by window. Window and fee are its attributes.', textStyle: { color: '#4A5568' } },&#10;        ],&#10;        [&#10;          { text: 'validation · calculation · logging', textStyle: { bold: true, color: '#0E3F8C' }, cellStyle: { background: { color: '#F7F9FC' } } },&#10;          { text: 'Discard', textStyle: { color: '#D9534F', fontWeight: 'bold' }, cellStyle: { background: { color: '#F7F9FC' } } },&#10;          { text: 'Gerunds and technology words. None of them is in a specification sentence.', textStyle: { color: '#4A5568' }, cellStyle: { background: { color: '#F7F9FC' } } },&#10;        ],&#10;        [&#10;          { text: 'server · service · table · interface · ui', textStyle: { bold: true, color: '#0E3F8C' } },&#10;          { text: 'Discard', textStyle: { color: '#D9534F', fontWeight: 'bold' } },&#10;          { text: 'Implementation words. If one of these appears in your model, the model is a design model.' , textStyle: { color: '#4A5568' } },&#10;        ],&#10;      ]}&#10;    /&gt;&#10;  &lt;/Box&gt;&#10;  &lt;Box style={{ height: 46, background: '#0E3F8C', padding: '0 40px', flexDirection: 'row', alignItems: 'center', justifyContent: 'center' }}&gt;&#10;    &lt;Text style={{ fontSize: 16.5, color: '#FFFFFF', fontWeight: '600' }}&gt;The words you throw away are as important as the ones you keep — they tell you where the boundary is&lt;/Text&gt;&#10;  &lt;/Box&gt;&#10;&lt;/Slide&gt;&#10;"/>
         <p:cNvGrpSpPr/>
         <p:nvPr/>
       </p:nvGrpSpPr>
@@ -22046,7 +21444,7 @@
       </p:grpSpPr>
       <p:sp>
         <p:nvSpPr>
-          <p:cNvPr id="520" name=""/>
+          <p:cNvPr id="504" name=""/>
           <p:cNvSpPr/>
           <p:nvPr/>
         </p:nvSpPr>
@@ -22070,7 +21468,7 @@
       </p:sp>
       <p:sp>
         <p:nvSpPr>
-          <p:cNvPr id="521" name=""/>
+          <p:cNvPr id="505" name=""/>
           <p:cNvSpPr/>
           <p:nvPr/>
         </p:nvSpPr>
@@ -22094,7 +21492,7 @@
       </p:sp>
       <p:sp>
         <p:nvSpPr>
-          <p:cNvPr id="522" name="" descr="{&quot;isTemplate&quot;:true,&quot;type&quot;:&quot;text&quot;}"/>
+          <p:cNvPr id="506" name="" descr="{&quot;isTemplate&quot;:true,&quot;type&quot;:&quot;text&quot;}"/>
           <p:cNvSpPr txBox="1"/>
           <p:nvPr/>
         </p:nvSpPr>
@@ -22129,7 +21527,7 @@
       </p:sp>
       <p:sp>
         <p:nvSpPr>
-          <p:cNvPr id="523" name="" descr="{&quot;isTemplate&quot;:true,&quot;type&quot;:&quot;text&quot;}"/>
+          <p:cNvPr id="507" name="" descr="{&quot;isTemplate&quot;:true,&quot;type&quot;:&quot;text&quot;}"/>
           <p:cNvSpPr txBox="1"/>
           <p:nvPr/>
         </p:nvSpPr>
@@ -22164,7 +21562,7 @@
       </p:sp>
       <p:sp>
         <p:nvSpPr>
-          <p:cNvPr id="524" name="" descr="{&quot;isTemplate&quot;:true,&quot;type&quot;:&quot;text&quot;}"/>
+          <p:cNvPr id="508" name="" descr="{&quot;isTemplate&quot;:true,&quot;type&quot;:&quot;text&quot;}"/>
           <p:cNvSpPr txBox="1"/>
           <p:nvPr/>
         </p:nvSpPr>
@@ -22199,7 +21597,7 @@
       </p:sp>
       <p:sp>
         <p:nvSpPr>
-          <p:cNvPr id="525" name="" descr="{&quot;isTemplate&quot;:true,&quot;type&quot;:&quot;text&quot;}"/>
+          <p:cNvPr id="509" name="" descr="{&quot;isTemplate&quot;:true,&quot;type&quot;:&quot;text&quot;}"/>
           <p:cNvSpPr txBox="1"/>
           <p:nvPr/>
         </p:nvSpPr>
@@ -22226,7 +21624,7 @@
                 <a:latin typeface="Microsoft YaHei"/>
                 <a:ea typeface="Microsoft YaHei"/>
               </a:rPr>
-              <a:t>30 / 38</a:t>
+              <a:t>30 / 39</a:t>
             </a:r>
             <a:endParaRPr/>
           </a:p>
@@ -22234,7 +21632,7 @@
       </p:sp>
       <p:graphicFrame>
         <p:nvGraphicFramePr>
-          <p:cNvPr id="526" name=""/>
+          <p:cNvPr id="510" name=""/>
           <p:cNvGraphicFramePr/>
           <p:nvPr/>
         </p:nvGraphicFramePr>
@@ -23435,7 +22833,7 @@
       </p:graphicFrame>
       <p:sp>
         <p:nvSpPr>
-          <p:cNvPr id="527" name=""/>
+          <p:cNvPr id="511" name=""/>
           <p:cNvSpPr/>
           <p:nvPr/>
         </p:nvSpPr>
@@ -23459,7 +22857,7 @@
       </p:sp>
       <p:sp>
         <p:nvSpPr>
-          <p:cNvPr id="528" name="" descr="{&quot;isTemplate&quot;:true,&quot;type&quot;:&quot;text&quot;}"/>
+          <p:cNvPr id="512" name="" descr="{&quot;isTemplate&quot;:true,&quot;type&quot;:&quot;text&quot;}"/>
           <p:cNvSpPr txBox="1"/>
           <p:nvPr/>
         </p:nvSpPr>
@@ -23502,7 +22900,7 @@
   <p:cSld>
     <p:spTree>
       <p:nvGrpSpPr>
-        <p:cNvPr id="529" name="" descr="&lt;Slide style={{ background: '#FFFFFF', padding: 0 }}&gt;&#10;  &lt;Box style={{ height: 72, background: '#1E4FA8', padding: '0 40px', flexDirection: 'row', alignItems: 'center', justifyContent: 'space-between' }}&gt;&#10;    &lt;Text style={{ fontSize: 15, color: '#B9CDF0', letterSpacing: 1 }}&gt;ISAD · INFORMATION SYSTEMS ANALYSIS &amp;amp; DESIGN&lt;/Text&gt;&#10;    &lt;Text style={{ fontSize: 15, color: '#B9CDF0' }}&gt;W06 · LAB · EXERCISE 6.1&lt;/Text&gt;&#10;  &lt;/Box&gt;&#10;  &lt;Box style={{ padding: '13px 40px 0 40px', flexDirection: 'row', alignItems: 'center', justifyContent: 'space-between' }}&gt;&#10;    &lt;Text style={{ fontSize: 29, fontWeight: 'bold', color: '#0E3F8C' }}&gt;Exercise 6.1 — Answers&lt;/Text&gt;&#10;    &lt;Text style={{ fontSize: 14, color: '#1E4FA8', fontWeight: 'bold' }}&gt;31 / 38&lt;/Text&gt;&#10;  &lt;/Box&gt;&#10;  &lt;Box style={{ flex: 1, padding: '10px 40px 0 40px', flexDirection: 'row', gap: 26 }}&gt;&#10;    &lt;Box style={{ flex: 1, flexDirection: 'column', gap: 11 }}&gt;&#10;      {[&#10;        { k: 'Ten classes', b: 'Order · OrderLine · MenuItem · Restaurant · Courier · Payment · Coupon · DeliveryWindow · StudentApp · KitchenDisplay (+ CourierApp, RestaurantConsole, PlaceOrderController, PayController) — 14 if you classify the boundaries and controls too.' },&#10;        { k: 'Eight are entities', b: 'The business keeps them, they have identity, and every one appeared in a W05 specification sentence.' },&#10;        { k: 'Four are boundaries, two are controls', b: 'One per way the outside world talks in; one per use case that needs sequencing.' },&#10;        { k: 'Eight words discarded', b: 'validation · calculation · logging · server · service · table · interface · ui. None can be pointed at, and none appears in a spec sentence.' },&#10;      ].map((c) =&gt; (&#10;        &lt;Box key={c.k} style={{ padding: '14px 17px', background: '#F7F9FC', borderRadius: 9, borderLeft: '4px solid #1E4FA8' }}&gt;&#10;          &lt;Text style={{ fontSize: 15.5, fontWeight: 'bold', color: '#0E3F8C' }}&gt;{c.k}&lt;/Text&gt;&#10;          &lt;Text style={{ fontSize: 12.8, color: '#4A5568', lineHeight: 1.6, marginTop: 5 }}&gt;{c.b}&lt;/Text&gt;&#10;        &lt;/Box&gt;&#10;      ))}&#10;    &lt;/Box&gt;&#10;    &lt;Box style={{ width: 430, justifyContent: 'center', flexDirection: 'column', gap: 13 }}&gt;&#10;      &lt;Box style={{ padding: '17px 19px', background: '#FDF3F3', borderRadius: 10, borderLeft: '4px solid #D9534F' }}&gt;&#10;        &lt;Text style={{ fontSize: 16, fontWeight: 'bold', color: '#D9534F' }}&gt;Three ways teams get this wrong&lt;/Text&gt;&#10;      &lt;/Box&gt;&#10;      &lt;Box style={{ padding: '14px 17px', background: '#FFFFFF', borderRadius: 9, border: '1px solid #E5E7EB' }}&gt;&#10;        &lt;Text style={{ fontSize: 14.5, fontWeight: 'bold', color: '#0E3F8C' }}&gt;1. Keeping “Cart”&lt;/Text&gt;&#10;        &lt;Text style={{ fontSize: 12.8, color: '#4A5568', lineHeight: 1.6, marginTop: 4 }}&gt;&#10;          It sounds like a thing, but it only exists between browsing and paying. The order lines carry the same information and they do survive.&#10;        &lt;/Text&gt;&#10;      &lt;/Box&gt;&#10;      &lt;Box style={{ padding: '14px 17px', background: '#FFFFFF', borderRadius: 9, border: '1px solid #E5E7EB' }}&gt;&#10;        &lt;Text style={{ fontSize: 14.5, fontWeight: 'bold', color: '#0E3F8C' }}&gt;2. Dropping “Provider”&lt;/Text&gt;&#10;        &lt;Text style={{ fontSize: 12.8, color: '#4A5568', lineHeight: 1.6, marginTop: 4 }}&gt;&#10;          It stays outside the boundary. A class called PaymentProvider would be a design decision made in the wrong week.&#10;        &lt;/Text&gt;&#10;      &lt;/Box&gt;&#10;      &lt;Box style={{ padding: '14px 17px', background: '#FFFFFF', borderRadius: 9, border: '1px solid #E5E7EB' }}&gt;&#10;        &lt;Text style={{ fontSize: 14.5, fontWeight: 'bold', color: '#0E3F8C' }}&gt;3. Turning “Rating” into a class&lt;/Text&gt;&#10;        &lt;Text style={{ fontSize: 12.8, color: '#4A5568', lineHeight: 1.6, marginTop: 4 }}&gt;&#10;          Rating belongs to Rate Restaurant, which you have not specified yet. Keep the word in your appendix; add the class when the use case exists.&#10;        &lt;/Text&gt;&#10;      &lt;/Box&gt;&#10;    &lt;/Box&gt;&#10;  &lt;/Box&gt;&#10;  &lt;Box style={{ height: 46, background: '#0E3F8C', padding: '0 40px', flexDirection: 'row', alignItems: 'center', justifyContent: 'center' }}&gt;&#10;    &lt;Text style={{ fontSize: 16.5, color: '#FFFFFF', fontWeight: '600' }}&gt;Most teams keep Cart. It is the single most common mistake in this week’s exercise&lt;/Text&gt;&#10;  &lt;/Box&gt;&#10;&lt;/Slide&gt;&#10;"/>
+        <p:cNvPr id="513" name="" descr="&lt;Slide style={{ background: '#FFFFFF', padding: 0 }}&gt;&#10;  &lt;Box style={{ height: 72, background: '#1E4FA8', padding: '0 40px', flexDirection: 'row', alignItems: 'center', justifyContent: 'space-between' }}&gt;&#10;    &lt;Text style={{ fontSize: 15, color: '#B9CDF0', letterSpacing: 1 }}&gt;ISAD · INFORMATION SYSTEMS ANALYSIS &amp;amp; DESIGN&lt;/Text&gt;&#10;    &lt;Text style={{ fontSize: 15, color: '#B9CDF0' }}&gt;W06 · LAB · EXERCISE 6.1&lt;/Text&gt;&#10;  &lt;/Box&gt;&#10;  &lt;Box style={{ padding: '13px 40px 0 40px', flexDirection: 'row', alignItems: 'center', justifyContent: 'space-between' }}&gt;&#10;    &lt;Text style={{ fontSize: 29, fontWeight: 'bold', color: '#0E3F8C' }}&gt;Exercise 6.1 — Answers&lt;/Text&gt;&#10;    &lt;Text style={{ fontSize: 14, color: '#1E4FA8', fontWeight: 'bold' }}&gt;31 / 39&lt;/Text&gt;&#10;  &lt;/Box&gt;&#10;  &lt;Box style={{ flex: 1, padding: '10px 40px 0 40px', flexDirection: 'row', gap: 26 }}&gt;&#10;    &lt;Box style={{ flex: 1, flexDirection: 'column', gap: 11 }}&gt;&#10;      {[&#10;        { k: 'Ten classes', b: 'Order · OrderLine · MenuItem · Restaurant · Courier · Payment · Coupon · DeliveryWindow · StudentApp · KitchenDisplay (+ CourierApp, RestaurantConsole, PlaceOrderController, PayController) — 14 if you classify the boundaries and controls too.' },&#10;        { k: 'Eight are entities', b: 'The business keeps them, they have identity, and every one appeared in a W05 specification sentence.' },&#10;        { k: 'Four are boundaries, two are controls', b: 'One per way the outside world talks in; one per use case that needs sequencing.' },&#10;        { k: 'Eight words discarded', b: 'validation · calculation · logging · server · service · table · interface · ui. None can be pointed at, and none appears in a spec sentence.' },&#10;      ].map((c) =&gt; (&#10;        &lt;Box key={c.k} style={{ padding: '14px 17px', background: '#F7F9FC', borderRadius: 9, borderLeft: '4px solid #1E4FA8' }}&gt;&#10;          &lt;Text style={{ fontSize: 15.5, fontWeight: 'bold', color: '#0E3F8C' }}&gt;{c.k}&lt;/Text&gt;&#10;          &lt;Text style={{ fontSize: 12.8, color: '#4A5568', lineHeight: 1.6, marginTop: 5 }}&gt;{c.b}&lt;/Text&gt;&#10;        &lt;/Box&gt;&#10;      ))}&#10;    &lt;/Box&gt;&#10;    &lt;Box style={{ width: 430, justifyContent: 'center', flexDirection: 'column', gap: 13 }}&gt;&#10;      &lt;Box style={{ padding: '17px 19px', background: '#FDF3F3', borderRadius: 10, borderLeft: '4px solid #D9534F' }}&gt;&#10;        &lt;Text style={{ fontSize: 16, fontWeight: 'bold', color: '#D9534F' }}&gt;Three ways teams get this wrong&lt;/Text&gt;&#10;      &lt;/Box&gt;&#10;      &lt;Box style={{ padding: '14px 17px', background: '#FFFFFF', borderRadius: 9, border: '1px solid #E5E7EB' }}&gt;&#10;        &lt;Text style={{ fontSize: 14.5, fontWeight: 'bold', color: '#0E3F8C' }}&gt;1. Keeping “Cart”&lt;/Text&gt;&#10;        &lt;Text style={{ fontSize: 12.8, color: '#4A5568', lineHeight: 1.6, marginTop: 4 }}&gt;&#10;          It sounds like a thing, but it only exists between browsing and paying. The order lines carry the same information and they do survive.&#10;        &lt;/Text&gt;&#10;      &lt;/Box&gt;&#10;      &lt;Box style={{ padding: '14px 17px', background: '#FFFFFF', borderRadius: 9, border: '1px solid #E5E7EB' }}&gt;&#10;        &lt;Text style={{ fontSize: 14.5, fontWeight: 'bold', color: '#0E3F8C' }}&gt;2. Dropping “Provider”&lt;/Text&gt;&#10;        &lt;Text style={{ fontSize: 12.8, color: '#4A5568', lineHeight: 1.6, marginTop: 4 }}&gt;&#10;          It stays outside the boundary. A class called PaymentProvider would be a design decision made in the wrong week.&#10;        &lt;/Text&gt;&#10;      &lt;/Box&gt;&#10;      &lt;Box style={{ padding: '14px 17px', background: '#FFFFFF', borderRadius: 9, border: '1px solid #E5E7EB' }}&gt;&#10;        &lt;Text style={{ fontSize: 14.5, fontWeight: 'bold', color: '#0E3F8C' }}&gt;3. Turning “Rating” into a class&lt;/Text&gt;&#10;        &lt;Text style={{ fontSize: 12.8, color: '#4A5568', lineHeight: 1.6, marginTop: 4 }}&gt;&#10;          Rating belongs to Rate Restaurant, which you have not specified yet. Keep the word in your appendix; add the class when the use case exists.&#10;        &lt;/Text&gt;&#10;      &lt;/Box&gt;&#10;    &lt;/Box&gt;&#10;  &lt;/Box&gt;&#10;  &lt;Box style={{ height: 46, background: '#0E3F8C', padding: '0 40px', flexDirection: 'row', alignItems: 'center', justifyContent: 'center' }}&gt;&#10;    &lt;Text style={{ fontSize: 16.5, color: '#FFFFFF', fontWeight: '600' }}&gt;Most teams keep Cart. It is the single most common mistake in this week’s exercise&lt;/Text&gt;&#10;  &lt;/Box&gt;&#10;&lt;/Slide&gt;&#10;"/>
         <p:cNvGrpSpPr/>
         <p:nvPr/>
       </p:nvGrpSpPr>
@@ -23516,7 +22914,7 @@
       </p:grpSpPr>
       <p:sp>
         <p:nvSpPr>
-          <p:cNvPr id="530" name=""/>
+          <p:cNvPr id="514" name=""/>
           <p:cNvSpPr/>
           <p:nvPr/>
         </p:nvSpPr>
@@ -23540,7 +22938,7 @@
       </p:sp>
       <p:sp>
         <p:nvSpPr>
-          <p:cNvPr id="531" name=""/>
+          <p:cNvPr id="515" name=""/>
           <p:cNvSpPr/>
           <p:nvPr/>
         </p:nvSpPr>
@@ -23564,7 +22962,7 @@
       </p:sp>
       <p:sp>
         <p:nvSpPr>
-          <p:cNvPr id="532" name="" descr="{&quot;isTemplate&quot;:true,&quot;type&quot;:&quot;text&quot;}"/>
+          <p:cNvPr id="516" name="" descr="{&quot;isTemplate&quot;:true,&quot;type&quot;:&quot;text&quot;}"/>
           <p:cNvSpPr txBox="1"/>
           <p:nvPr/>
         </p:nvSpPr>
@@ -23599,7 +22997,7 @@
       </p:sp>
       <p:sp>
         <p:nvSpPr>
-          <p:cNvPr id="533" name="" descr="{&quot;isTemplate&quot;:true,&quot;type&quot;:&quot;text&quot;}"/>
+          <p:cNvPr id="517" name="" descr="{&quot;isTemplate&quot;:true,&quot;type&quot;:&quot;text&quot;}"/>
           <p:cNvSpPr txBox="1"/>
           <p:nvPr/>
         </p:nvSpPr>
@@ -23634,7 +23032,7 @@
       </p:sp>
       <p:sp>
         <p:nvSpPr>
-          <p:cNvPr id="534" name="" descr="{&quot;isTemplate&quot;:true,&quot;type&quot;:&quot;text&quot;}"/>
+          <p:cNvPr id="518" name="" descr="{&quot;isTemplate&quot;:true,&quot;type&quot;:&quot;text&quot;}"/>
           <p:cNvSpPr txBox="1"/>
           <p:nvPr/>
         </p:nvSpPr>
@@ -23669,7 +23067,7 @@
       </p:sp>
       <p:sp>
         <p:nvSpPr>
-          <p:cNvPr id="535" name="" descr="{&quot;isTemplate&quot;:true,&quot;type&quot;:&quot;text&quot;}"/>
+          <p:cNvPr id="519" name="" descr="{&quot;isTemplate&quot;:true,&quot;type&quot;:&quot;text&quot;}"/>
           <p:cNvSpPr txBox="1"/>
           <p:nvPr/>
         </p:nvSpPr>
@@ -23696,15 +23094,15 @@
                 <a:latin typeface="Microsoft YaHei"/>
                 <a:ea typeface="Microsoft YaHei"/>
               </a:rPr>
-              <a:t>31 / 38</a:t>
-            </a:r>
-            <a:endParaRPr/>
-          </a:p>
-        </p:txBody>
-      </p:sp>
-      <p:sp>
-        <p:nvSpPr>
-          <p:cNvPr id="536" name=""/>
+              <a:t>31 / 39</a:t>
+            </a:r>
+            <a:endParaRPr/>
+          </a:p>
+        </p:txBody>
+      </p:sp>
+      <p:sp>
+        <p:nvSpPr>
+          <p:cNvPr id="520" name=""/>
           <p:cNvSpPr/>
           <p:nvPr/>
         </p:nvSpPr>
@@ -23730,7 +23128,7 @@
       </p:sp>
       <p:sp>
         <p:nvSpPr>
-          <p:cNvPr id="537" name=""/>
+          <p:cNvPr id="521" name=""/>
           <p:cNvSpPr/>
           <p:nvPr/>
         </p:nvSpPr>
@@ -23787,7 +23185,7 @@
       </p:sp>
       <p:sp>
         <p:nvSpPr>
-          <p:cNvPr id="538" name="" descr="{&quot;isTemplate&quot;:true,&quot;type&quot;:&quot;text&quot;}"/>
+          <p:cNvPr id="522" name="" descr="{&quot;isTemplate&quot;:true,&quot;type&quot;:&quot;text&quot;}"/>
           <p:cNvSpPr txBox="1"/>
           <p:nvPr/>
         </p:nvSpPr>
@@ -23822,7 +23220,7 @@
       </p:sp>
       <p:sp>
         <p:nvSpPr>
-          <p:cNvPr id="539" name="" descr="{&quot;isTemplate&quot;:true,&quot;type&quot;:&quot;text&quot;}"/>
+          <p:cNvPr id="523" name="" descr="{&quot;isTemplate&quot;:true,&quot;type&quot;:&quot;text&quot;}"/>
           <p:cNvSpPr txBox="1"/>
           <p:nvPr/>
         </p:nvSpPr>
@@ -23859,7 +23257,7 @@
       </p:sp>
       <p:sp>
         <p:nvSpPr>
-          <p:cNvPr id="540" name=""/>
+          <p:cNvPr id="524" name=""/>
           <p:cNvSpPr/>
           <p:nvPr/>
         </p:nvSpPr>
@@ -23885,7 +23283,7 @@
       </p:sp>
       <p:sp>
         <p:nvSpPr>
-          <p:cNvPr id="541" name=""/>
+          <p:cNvPr id="525" name=""/>
           <p:cNvSpPr/>
           <p:nvPr/>
         </p:nvSpPr>
@@ -23942,7 +23340,7 @@
       </p:sp>
       <p:sp>
         <p:nvSpPr>
-          <p:cNvPr id="542" name="" descr="{&quot;isTemplate&quot;:true,&quot;type&quot;:&quot;text&quot;}"/>
+          <p:cNvPr id="526" name="" descr="{&quot;isTemplate&quot;:true,&quot;type&quot;:&quot;text&quot;}"/>
           <p:cNvSpPr txBox="1"/>
           <p:nvPr/>
         </p:nvSpPr>
@@ -23977,7 +23375,7 @@
       </p:sp>
       <p:sp>
         <p:nvSpPr>
-          <p:cNvPr id="543" name="" descr="{&quot;isTemplate&quot;:true,&quot;type&quot;:&quot;text&quot;}"/>
+          <p:cNvPr id="527" name="" descr="{&quot;isTemplate&quot;:true,&quot;type&quot;:&quot;text&quot;}"/>
           <p:cNvSpPr txBox="1"/>
           <p:nvPr/>
         </p:nvSpPr>
@@ -24012,7 +23410,7 @@
       </p:sp>
       <p:sp>
         <p:nvSpPr>
-          <p:cNvPr id="544" name=""/>
+          <p:cNvPr id="528" name=""/>
           <p:cNvSpPr/>
           <p:nvPr/>
         </p:nvSpPr>
@@ -24038,7 +23436,7 @@
       </p:sp>
       <p:sp>
         <p:nvSpPr>
-          <p:cNvPr id="545" name=""/>
+          <p:cNvPr id="529" name=""/>
           <p:cNvSpPr/>
           <p:nvPr/>
         </p:nvSpPr>
@@ -24095,7 +23493,7 @@
       </p:sp>
       <p:sp>
         <p:nvSpPr>
-          <p:cNvPr id="546" name="" descr="{&quot;isTemplate&quot;:true,&quot;type&quot;:&quot;text&quot;}"/>
+          <p:cNvPr id="530" name="" descr="{&quot;isTemplate&quot;:true,&quot;type&quot;:&quot;text&quot;}"/>
           <p:cNvSpPr txBox="1"/>
           <p:nvPr/>
         </p:nvSpPr>
@@ -24130,7 +23528,7 @@
       </p:sp>
       <p:sp>
         <p:nvSpPr>
-          <p:cNvPr id="547" name="" descr="{&quot;isTemplate&quot;:true,&quot;type&quot;:&quot;text&quot;}"/>
+          <p:cNvPr id="531" name="" descr="{&quot;isTemplate&quot;:true,&quot;type&quot;:&quot;text&quot;}"/>
           <p:cNvSpPr txBox="1"/>
           <p:nvPr/>
         </p:nvSpPr>
@@ -24165,7 +23563,7 @@
       </p:sp>
       <p:sp>
         <p:nvSpPr>
-          <p:cNvPr id="548" name=""/>
+          <p:cNvPr id="532" name=""/>
           <p:cNvSpPr/>
           <p:nvPr/>
         </p:nvSpPr>
@@ -24191,7 +23589,7 @@
       </p:sp>
       <p:sp>
         <p:nvSpPr>
-          <p:cNvPr id="549" name=""/>
+          <p:cNvPr id="533" name=""/>
           <p:cNvSpPr/>
           <p:nvPr/>
         </p:nvSpPr>
@@ -24248,7 +23646,7 @@
       </p:sp>
       <p:sp>
         <p:nvSpPr>
-          <p:cNvPr id="550" name="" descr="{&quot;isTemplate&quot;:true,&quot;type&quot;:&quot;text&quot;}"/>
+          <p:cNvPr id="534" name="" descr="{&quot;isTemplate&quot;:true,&quot;type&quot;:&quot;text&quot;}"/>
           <p:cNvSpPr txBox="1"/>
           <p:nvPr/>
         </p:nvSpPr>
@@ -24283,7 +23681,7 @@
       </p:sp>
       <p:sp>
         <p:nvSpPr>
-          <p:cNvPr id="551" name="" descr="{&quot;isTemplate&quot;:true,&quot;type&quot;:&quot;text&quot;}"/>
+          <p:cNvPr id="535" name="" descr="{&quot;isTemplate&quot;:true,&quot;type&quot;:&quot;text&quot;}"/>
           <p:cNvSpPr txBox="1"/>
           <p:nvPr/>
         </p:nvSpPr>
@@ -24320,7 +23718,7 @@
       </p:sp>
       <p:sp>
         <p:nvSpPr>
-          <p:cNvPr id="552" name=""/>
+          <p:cNvPr id="536" name=""/>
           <p:cNvSpPr/>
           <p:nvPr/>
         </p:nvSpPr>
@@ -24346,7 +23744,7 @@
       </p:sp>
       <p:sp>
         <p:nvSpPr>
-          <p:cNvPr id="553" name=""/>
+          <p:cNvPr id="537" name=""/>
           <p:cNvSpPr/>
           <p:nvPr/>
         </p:nvSpPr>
@@ -24403,7 +23801,7 @@
       </p:sp>
       <p:sp>
         <p:nvSpPr>
-          <p:cNvPr id="554" name="" descr="{&quot;isTemplate&quot;:true,&quot;type&quot;:&quot;text&quot;}"/>
+          <p:cNvPr id="538" name="" descr="{&quot;isTemplate&quot;:true,&quot;type&quot;:&quot;text&quot;}"/>
           <p:cNvSpPr txBox="1"/>
           <p:nvPr/>
         </p:nvSpPr>
@@ -24438,7 +23836,7 @@
       </p:sp>
       <p:sp>
         <p:nvSpPr>
-          <p:cNvPr id="555" name=""/>
+          <p:cNvPr id="539" name=""/>
           <p:cNvSpPr/>
           <p:nvPr/>
         </p:nvSpPr>
@@ -24469,7 +23867,7 @@
       </p:sp>
       <p:sp>
         <p:nvSpPr>
-          <p:cNvPr id="556" name="" descr="{&quot;isTemplate&quot;:true,&quot;type&quot;:&quot;text&quot;}"/>
+          <p:cNvPr id="540" name="" descr="{&quot;isTemplate&quot;:true,&quot;type&quot;:&quot;text&quot;}"/>
           <p:cNvSpPr txBox="1"/>
           <p:nvPr/>
         </p:nvSpPr>
@@ -24504,7 +23902,7 @@
       </p:sp>
       <p:sp>
         <p:nvSpPr>
-          <p:cNvPr id="557" name="" descr="{&quot;isTemplate&quot;:true,&quot;type&quot;:&quot;text&quot;}"/>
+          <p:cNvPr id="541" name="" descr="{&quot;isTemplate&quot;:true,&quot;type&quot;:&quot;text&quot;}"/>
           <p:cNvSpPr txBox="1"/>
           <p:nvPr/>
         </p:nvSpPr>
@@ -24541,7 +23939,7 @@
       </p:sp>
       <p:sp>
         <p:nvSpPr>
-          <p:cNvPr id="558" name=""/>
+          <p:cNvPr id="542" name=""/>
           <p:cNvSpPr/>
           <p:nvPr/>
         </p:nvSpPr>
@@ -24572,7 +23970,7 @@
       </p:sp>
       <p:sp>
         <p:nvSpPr>
-          <p:cNvPr id="559" name="" descr="{&quot;isTemplate&quot;:true,&quot;type&quot;:&quot;text&quot;}"/>
+          <p:cNvPr id="543" name="" descr="{&quot;isTemplate&quot;:true,&quot;type&quot;:&quot;text&quot;}"/>
           <p:cNvSpPr txBox="1"/>
           <p:nvPr/>
         </p:nvSpPr>
@@ -24607,7 +24005,7 @@
       </p:sp>
       <p:sp>
         <p:nvSpPr>
-          <p:cNvPr id="560" name="" descr="{&quot;isTemplate&quot;:true,&quot;type&quot;:&quot;text&quot;}"/>
+          <p:cNvPr id="544" name="" descr="{&quot;isTemplate&quot;:true,&quot;type&quot;:&quot;text&quot;}"/>
           <p:cNvSpPr txBox="1"/>
           <p:nvPr/>
         </p:nvSpPr>
@@ -24644,7 +24042,7 @@
       </p:sp>
       <p:sp>
         <p:nvSpPr>
-          <p:cNvPr id="561" name=""/>
+          <p:cNvPr id="545" name=""/>
           <p:cNvSpPr/>
           <p:nvPr/>
         </p:nvSpPr>
@@ -24675,7 +24073,7 @@
       </p:sp>
       <p:sp>
         <p:nvSpPr>
-          <p:cNvPr id="562" name="" descr="{&quot;isTemplate&quot;:true,&quot;type&quot;:&quot;text&quot;}"/>
+          <p:cNvPr id="546" name="" descr="{&quot;isTemplate&quot;:true,&quot;type&quot;:&quot;text&quot;}"/>
           <p:cNvSpPr txBox="1"/>
           <p:nvPr/>
         </p:nvSpPr>
@@ -24710,7 +24108,7 @@
       </p:sp>
       <p:sp>
         <p:nvSpPr>
-          <p:cNvPr id="563" name="" descr="{&quot;isTemplate&quot;:true,&quot;type&quot;:&quot;text&quot;}"/>
+          <p:cNvPr id="547" name="" descr="{&quot;isTemplate&quot;:true,&quot;type&quot;:&quot;text&quot;}"/>
           <p:cNvSpPr txBox="1"/>
           <p:nvPr/>
         </p:nvSpPr>
@@ -24747,7 +24145,7 @@
       </p:sp>
       <p:sp>
         <p:nvSpPr>
-          <p:cNvPr id="564" name=""/>
+          <p:cNvPr id="548" name=""/>
           <p:cNvSpPr/>
           <p:nvPr/>
         </p:nvSpPr>
@@ -24771,7 +24169,7 @@
       </p:sp>
       <p:sp>
         <p:nvSpPr>
-          <p:cNvPr id="565" name="" descr="{&quot;isTemplate&quot;:true,&quot;type&quot;:&quot;text&quot;}"/>
+          <p:cNvPr id="549" name="" descr="{&quot;isTemplate&quot;:true,&quot;type&quot;:&quot;text&quot;}"/>
           <p:cNvSpPr txBox="1"/>
           <p:nvPr/>
         </p:nvSpPr>
@@ -24814,7 +24212,7 @@
   <p:cSld>
     <p:spTree>
       <p:nvGrpSpPr>
-        <p:cNvPr id="566" name="" descr="&lt;Slide style={{ background: '#FFFFFF', padding: 0 }}&gt;&#10;  &lt;Box style={{ height: 72, background: '#1E4FA8', padding: '0 40px', flexDirection: 'row', alignItems: 'center', justifyContent: 'space-between' }}&gt;&#10;    &lt;Text style={{ fontSize: 15, color: '#B9CDF0', letterSpacing: 1 }}&gt;ISAD · INFORMATION SYSTEMS ANALYSIS &amp;amp; DESIGN&lt;/Text&gt;&#10;    &lt;Text style={{ fontSize: 15, color: '#B9CDF0' }}&gt;W06 · LAB · EXERCISE 6.2&lt;/Text&gt;&#10;  &lt;/Box&gt;&#10;  &lt;Box style={{ padding: '13px 40px 0 40px', flexDirection: 'row', alignItems: 'center', justifyContent: 'space-between' }}&gt;&#10;    &lt;Text style={{ fontSize: 29, fontWeight: 'bold', color: '#0E3F8C' }}&gt;Exercise 6.2 — Draw the Model&lt;/Text&gt;&#10;    &lt;Text style={{ fontSize: 14, color: '#1E4FA8', fontWeight: 'bold' }}&gt;32 / 38&lt;/Text&gt;&#10;  &lt;/Box&gt;&#10;  &lt;Box style={{ flex: 1, padding: '10px 40px 0 40px', flexDirection: 'row', gap: 24 }}&gt;&#10;    &lt;Box style={{ flex: 1, flexDirection: 'column', gap: 12 }}&gt;&#10;      &lt;Box style={{ padding: '16px 19px', background: '#F0F5FC', borderRadius: 10, borderLeft: '4px solid #1E4FA8' }}&gt;&#10;        &lt;Text style={{ fontSize: 16.5, fontWeight: 'bold', color: '#0E3F8C' }}&gt;The task&lt;/Text&gt;&#10;        &lt;Text style={{ fontSize: 13, color: '#4A5568', lineHeight: 1.65, marginTop: 6 }}&gt;&#10;          Draw the first CampusBites domain model in PlantUML. Entities, boundaries and controls, with their attributes and instance operations, plus the associations between them. No multiplicities — those are next week.&#10;        &lt;/Text&gt;&#10;        &lt;Box style={{ padding: '11px 13px', background: '#FFFFFF', borderRadius: 7, marginTop: 12 }}&gt;&#10;          &lt;Text style={{ fontSize: 12.5, color: '#0E3F8C', fontFamily: 'Menlo, monospace' }}&gt;docs/diagrams/domain-model-v1.puml&lt;/Text&gt;&#10;        &lt;/Box&gt;&#10;      &lt;/Box&gt;&#10;      &lt;Box style={{ padding: '16px 19px', background: '#FFF6E0', borderRadius: 10, borderLeft: '4px solid #FFC107' }}&gt;&#10;        &lt;Text style={{ fontSize: 16.5, fontWeight: 'bold', color: '#996F00' }}&gt;Four roles, four jobs&lt;/Text&gt;&#10;        &lt;Text style={{ fontSize: 13, color: '#4A5568', lineHeight: 1.7, marginTop: 6 }}&gt;&#10;          &lt;Text style={{ fontWeight: 'bold' }}&gt;Lead&lt;/Text&gt; — keeps the clock, calls the disagreements&lt;br /&gt;&#10;          &lt;Text style={{ fontWeight: 'bold' }}&gt;Recorder&lt;/Text&gt; — owns the .puml file, and only that file&lt;br /&gt;&#10;          &lt;Text style={{ fontWeight: 'bold' }}&gt;Reviewer&lt;/Text&gt; — checks every class against its spec sentence&lt;br /&gt;&#10;          &lt;Text style={{ fontWeight: 'bold' }}&gt;Release Manager&lt;/Text&gt; — pushes, and confirms the file is in the repo&#10;        &lt;/Text&gt;&#10;      &lt;/Box&gt;&#10;    &lt;/Box&gt;&#10;    &lt;Box style={{ width: 460, justifyContent: 'center' }}&gt;&#10;      &lt;Box style={{ padding: '18px 20px', background: '#FFFFFF', borderRadius: 10, border: '1px solid #D6DCE5' }}&gt;&#10;        &lt;Text style={{ fontSize: 15.5, fontWeight: 'bold', color: '#0E3F8C', marginBottom: 14 }}&gt;Self-check before you commit&lt;/Text&gt;&#10;        {[&#10;          'Ten classes or more, and every one traceable to a sentence',&#10;          'Every class is Entity, Boundary or Control',&#10;          'No name ends in Service, Manager, Helper, DTO or Entity',&#10;          'No actor is a class: Student, Provider, Admin stay outside',&#10;          'Attributes and instance operations only — no visibility marks',&#10;          'No multiplicities, no aggregation diamonds yet',&#10;          'Both the .puml source and a rendered PNG are committed',&#10;        ].map((t) =&gt; (&#10;          &lt;Box key={t} style={{ flexDirection: 'row', gap: 10, marginBottom: 11 }}&gt;&#10;            &lt;Box style={{ width: 18, height: 18, borderRadius: 3, border: '1.6px solid #1E4FA8', background: '#FFFFFF' }} /&gt;&#10;            &lt;Text style={{ flex: 1, fontSize: 13, color: '#4A5568', lineHeight: 1.5 }}&gt;{t}&lt;/Text&gt;&#10;          &lt;/Box&gt;&#10;        ))}&#10;        &lt;Box style={{ padding: '12px 14px', background: '#FDF3F3', borderRadius: 7, marginTop: 6, border: '1px solid #F0C9C7' }}&gt;&#10;          &lt;Text style={{ fontSize: 12.5, color: '#D9534F', lineHeight: 1.55 }}&gt;&#10;            A PNG alone is not a diagram. Commit the PlantUML source — the PNG is what you look at, the source is what you can change.&#10;          &lt;/Text&gt;&#10;        &lt;/Box&gt;&#10;      &lt;/Box&gt;&#10;    &lt;/Box&gt;&#10;  &lt;/Box&gt;&#10;  &lt;Box style={{ height: 46, background: '#0E3F8C', padding: '0 40px', flexDirection: 'row', alignItems: 'center', justifyContent: 'center' }}&gt;&#10;    &lt;Text style={{ fontSize: 16.5, color: '#FFFFFF', fontWeight: '600' }}&gt;Ten classes, no multiplicities, both source and PNG. Everything else on that list is negotiable&lt;/Text&gt;&#10;  &lt;/Box&gt;&#10;&lt;/Slide&gt;&#10;"/>
+        <p:cNvPr id="550" name="" descr="&lt;Slide style={{ background: '#FFFFFF', padding: 0 }}&gt;&#10;  &lt;Box style={{ height: 72, background: '#1E4FA8', padding: '0 40px', flexDirection: 'row', alignItems: 'center', justifyContent: 'space-between' }}&gt;&#10;    &lt;Text style={{ fontSize: 15, color: '#B9CDF0', letterSpacing: 1 }}&gt;ISAD · INFORMATION SYSTEMS ANALYSIS &amp;amp; DESIGN&lt;/Text&gt;&#10;    &lt;Text style={{ fontSize: 15, color: '#B9CDF0' }}&gt;W06 · LAB · EXERCISE 6.2&lt;/Text&gt;&#10;  &lt;/Box&gt;&#10;  &lt;Box style={{ padding: '13px 40px 0 40px', flexDirection: 'row', alignItems: 'center', justifyContent: 'space-between' }}&gt;&#10;    &lt;Text style={{ fontSize: 29, fontWeight: 'bold', color: '#0E3F8C' }}&gt;Exercise 6.2 — Draw the Model&lt;/Text&gt;&#10;    &lt;Text style={{ fontSize: 14, color: '#1E4FA8', fontWeight: 'bold' }}&gt;32 / 39&lt;/Text&gt;&#10;  &lt;/Box&gt;&#10;  &lt;Box style={{ flex: 1, padding: '10px 40px 0 40px', flexDirection: 'row', gap: 24 }}&gt;&#10;    &lt;Box style={{ flex: 1, flexDirection: 'column', gap: 12 }}&gt;&#10;      &lt;Box style={{ padding: '16px 19px', background: '#F0F5FC', borderRadius: 10, borderLeft: '4px solid #1E4FA8' }}&gt;&#10;        &lt;Text style={{ fontSize: 16.5, fontWeight: 'bold', color: '#0E3F8C' }}&gt;The task&lt;/Text&gt;&#10;        &lt;Text style={{ fontSize: 13, color: '#4A5568', lineHeight: 1.65, marginTop: 6 }}&gt;&#10;Draw your own domain model in PlantUML. Entities, boundaries and controls, plus the associations between them. No multiplicities, no aggregation diamonds, no attributes, no methods — those come later. Source file: docs/diagrams/domain-model-v1.puml.&#10;        &lt;/Text&gt;&#10;        &lt;Box style={{ padding: '11px 13px', background: '#FFFFFF', borderRadius: 7, marginTop: 12 }}&gt;&#10;          &lt;Text style={{ fontSize: 12.5, color: '#0E3F8C', fontFamily: 'Menlo, monospace' }}&gt;docs/diagrams/domain-model-v1.puml&lt;/Text&gt;&#10;        &lt;/Box&gt;&#10;      &lt;/Box&gt;&#10;      &lt;Box style={{ padding: '16px 19px', background: '#FFF6E0', borderRadius: 10, borderLeft: '4px solid #FFC107' }}&gt;&#10;        &lt;Text style={{ fontSize: 16.5, fontWeight: 'bold', color: '#996F00' }}&gt;Four roles, four jobs&lt;/Text&gt;&#10;        &lt;Text style={{ fontSize: 13, color: '#4A5568', lineHeight: 1.7, marginTop: 6 }}&gt;&#10;          &lt;Text style={{ fontWeight: 'bold' }}&gt;Lead&lt;/Text&gt; — keeps the clock, calls the disagreements&lt;br /&gt;&#10;          &lt;Text style={{ fontWeight: 'bold' }}&gt;Recorder&lt;/Text&gt; — owns the .puml file, and only that file&lt;br /&gt;&#10;          &lt;Text style={{ fontWeight: 'bold' }}&gt;Reviewer&lt;/Text&gt; — checks every class against its spec sentence&lt;br /&gt;&#10;          &lt;Text style={{ fontWeight: 'bold' }}&gt;Release Manager&lt;/Text&gt; — pushes, and confirms the file is in the repo&#10;        &lt;/Text&gt;&#10;      &lt;/Box&gt;&#10;    &lt;/Box&gt;&#10;    &lt;Box style={{ width: 460, justifyContent: 'center' }}&gt;&#10;      &lt;Box style={{ padding: '18px 20px', background: '#FFFFFF', borderRadius: 10, border: '1px solid #D6DCE5' }}&gt;&#10;        &lt;Text style={{ fontSize: 15.5, fontWeight: 'bold', color: '#0E3F8C', marginBottom: 14 }}&gt;Self-check before you commit&lt;/Text&gt;&#10;        {[&#10;'Eight classes or more, and every one traceable to a requirement line',&#10;          'Every class is Entity, Boundary or Control',&#10;          'No name ends in Service, Manager, Helper, DTO or Entity',&#10;          'No actor is a class: Student, Provider, Admin stay outside',&#10;          'Attributes and instance operations only — no visibility marks',&#10;          'No multiplicities, no aggregation diamonds yet',&#10;          'Both the .puml source and a rendered PNG are committed',&#10;        ].map((t) =&gt; (&#10;          &lt;Box key={t} style={{ flexDirection: 'row', gap: 10, marginBottom: 11 }}&gt;&#10;            &lt;Box style={{ width: 18, height: 18, borderRadius: 3, border: '1.6px solid #1E4FA8', background: '#FFFFFF' }} /&gt;&#10;            &lt;Text style={{ flex: 1, fontSize: 13, color: '#4A5568', lineHeight: 1.5 }}&gt;{t}&lt;/Text&gt;&#10;          &lt;/Box&gt;&#10;        ))}&#10;        &lt;Box style={{ padding: '12px 14px', background: '#FDF3F3', borderRadius: 7, marginTop: 6, border: '1px solid #F0C9C7' }}&gt;&#10;          &lt;Text style={{ fontSize: 12.5, color: '#D9534F', lineHeight: 1.55 }}&gt;&#10;            A PNG alone is not a diagram. Commit the PlantUML source — the PNG is what you look at, the source is what you can change.&#10;          &lt;/Text&gt;&#10;        &lt;/Box&gt;&#10;      &lt;/Box&gt;&#10;    &lt;/Box&gt;&#10;  &lt;/Box&gt;&#10;  &lt;Box style={{ height: 46, background: '#0E3F8C', padding: '0 40px', flexDirection: 'row', alignItems: 'center', justifyContent: 'center' }}&gt;&#10;    &lt;Text style={{ fontSize: 16.5, color: '#FFFFFF', fontWeight: '600' }}&gt;Eight classes or more, no multiplicities, both source and PNG. Everything else on that list is negotiable&lt;/Text&gt;&#10;  &lt;/Box&gt;&#10;&lt;/Slide&gt;&#10;"/>
         <p:cNvGrpSpPr/>
         <p:nvPr/>
       </p:nvGrpSpPr>
@@ -24828,7 +24226,7 @@
       </p:grpSpPr>
       <p:sp>
         <p:nvSpPr>
-          <p:cNvPr id="567" name=""/>
+          <p:cNvPr id="551" name=""/>
           <p:cNvSpPr/>
           <p:nvPr/>
         </p:nvSpPr>
@@ -24852,7 +24250,7 @@
       </p:sp>
       <p:sp>
         <p:nvSpPr>
-          <p:cNvPr id="568" name=""/>
+          <p:cNvPr id="552" name=""/>
           <p:cNvSpPr/>
           <p:nvPr/>
         </p:nvSpPr>
@@ -24876,7 +24274,7 @@
       </p:sp>
       <p:sp>
         <p:nvSpPr>
-          <p:cNvPr id="569" name="" descr="{&quot;isTemplate&quot;:true,&quot;type&quot;:&quot;text&quot;}"/>
+          <p:cNvPr id="553" name="" descr="{&quot;isTemplate&quot;:true,&quot;type&quot;:&quot;text&quot;}"/>
           <p:cNvSpPr txBox="1"/>
           <p:nvPr/>
         </p:nvSpPr>
@@ -24911,7 +24309,7 @@
       </p:sp>
       <p:sp>
         <p:nvSpPr>
-          <p:cNvPr id="570" name="" descr="{&quot;isTemplate&quot;:true,&quot;type&quot;:&quot;text&quot;}"/>
+          <p:cNvPr id="554" name="" descr="{&quot;isTemplate&quot;:true,&quot;type&quot;:&quot;text&quot;}"/>
           <p:cNvSpPr txBox="1"/>
           <p:nvPr/>
         </p:nvSpPr>
@@ -24946,7 +24344,7 @@
       </p:sp>
       <p:sp>
         <p:nvSpPr>
-          <p:cNvPr id="571" name="" descr="{&quot;isTemplate&quot;:true,&quot;type&quot;:&quot;text&quot;}"/>
+          <p:cNvPr id="555" name="" descr="{&quot;isTemplate&quot;:true,&quot;type&quot;:&quot;text&quot;}"/>
           <p:cNvSpPr txBox="1"/>
           <p:nvPr/>
         </p:nvSpPr>
@@ -24981,7 +24379,7 @@
       </p:sp>
       <p:sp>
         <p:nvSpPr>
-          <p:cNvPr id="572" name="" descr="{&quot;isTemplate&quot;:true,&quot;type&quot;:&quot;text&quot;}"/>
+          <p:cNvPr id="556" name="" descr="{&quot;isTemplate&quot;:true,&quot;type&quot;:&quot;text&quot;}"/>
           <p:cNvSpPr txBox="1"/>
           <p:nvPr/>
         </p:nvSpPr>
@@ -25008,26 +24406,26 @@
                 <a:latin typeface="Microsoft YaHei"/>
                 <a:ea typeface="Microsoft YaHei"/>
               </a:rPr>
-              <a:t>32 / 38</a:t>
-            </a:r>
-            <a:endParaRPr/>
-          </a:p>
-        </p:txBody>
-      </p:sp>
-      <p:sp>
-        <p:nvSpPr>
-          <p:cNvPr id="573" name=""/>
+              <a:t>32 / 39</a:t>
+            </a:r>
+            <a:endParaRPr/>
+          </a:p>
+        </p:txBody>
+      </p:sp>
+      <p:sp>
+        <p:nvSpPr>
+          <p:cNvPr id="557" name=""/>
           <p:cNvSpPr/>
           <p:nvPr/>
         </p:nvSpPr>
         <p:spPr>
           <a:xfrm rot="0" flipH="0" flipV="0">
             <a:off x="419100" y="1238250"/>
-            <a:ext cx="6819900" cy="1514475"/>
+            <a:ext cx="6819900" cy="1762125"/>
           </a:xfrm>
           <a:prstGeom prst="roundRect">
             <a:avLst>
-              <a:gd name="adj" fmla="val 6289"/>
+              <a:gd name="adj" fmla="val 5405"/>
             </a:avLst>
           </a:prstGeom>
           <a:solidFill>
@@ -25042,18 +24440,18 @@
       </p:sp>
       <p:sp>
         <p:nvSpPr>
-          <p:cNvPr id="574" name=""/>
+          <p:cNvPr id="558" name=""/>
           <p:cNvSpPr/>
           <p:nvPr/>
         </p:nvSpPr>
         <p:spPr>
           <a:xfrm rot="0" flipH="0" flipV="0">
             <a:off x="419100" y="1238250"/>
-            <a:ext cx="6819900" cy="1514475"/>
+            <a:ext cx="6819900" cy="1762125"/>
           </a:xfrm>
           <a:custGeom>
             <a:pathLst>
-              <a:path w="716" h="159">
+              <a:path w="716" h="185">
                 <a:moveTo>
                   <a:pt x="9" y="0"/>
                 </a:moveTo>
@@ -25063,17 +24461,17 @@
                   <a:pt x="4" y="6"/>
                 </a:cubicBezTo>
                 <a:lnTo>
-                  <a:pt x="4" y="153"/>
+                  <a:pt x="4" y="179"/>
                 </a:lnTo>
                 <a:cubicBezTo>
-                  <a:pt x="4" y="156"/>
-                  <a:pt x="6" y="158"/>
-                  <a:pt x="9" y="159"/>
+                  <a:pt x="4" y="182"/>
+                  <a:pt x="6" y="184"/>
+                  <a:pt x="9" y="185"/>
                 </a:cubicBezTo>
                 <a:cubicBezTo>
-                  <a:pt x="4" y="158"/>
-                  <a:pt x="0" y="154"/>
-                  <a:pt x="0" y="149"/>
+                  <a:pt x="4" y="184"/>
+                  <a:pt x="0" y="180"/>
+                  <a:pt x="0" y="175"/>
                 </a:cubicBezTo>
                 <a:lnTo>
                   <a:pt x="0" y="10"/>
@@ -25099,7 +24497,7 @@
       </p:sp>
       <p:sp>
         <p:nvSpPr>
-          <p:cNvPr id="575" name="" descr="{&quot;isTemplate&quot;:true,&quot;type&quot;:&quot;text&quot;}"/>
+          <p:cNvPr id="559" name="" descr="{&quot;isTemplate&quot;:true,&quot;type&quot;:&quot;text&quot;}"/>
           <p:cNvSpPr txBox="1"/>
           <p:nvPr/>
         </p:nvSpPr>
@@ -25134,14 +24532,14 @@
       </p:sp>
       <p:sp>
         <p:nvSpPr>
-          <p:cNvPr id="576" name="" descr="{&quot;isTemplate&quot;:true,&quot;type&quot;:&quot;text&quot;}"/>
+          <p:cNvPr id="560" name="" descr="{&quot;isTemplate&quot;:true,&quot;type&quot;:&quot;text&quot;}"/>
           <p:cNvSpPr txBox="1"/>
           <p:nvPr/>
         </p:nvSpPr>
         <p:spPr>
           <a:xfrm rot="0" flipH="0" flipV="0">
             <a:off x="600075" y="1638300"/>
-            <a:ext cx="6419850" cy="495300"/>
+            <a:ext cx="6419850" cy="742950"/>
           </a:xfrm>
           <a:prstGeom prst="rect"/>
         </p:spPr>
@@ -25163,21 +24561,21 @@
                 <a:latin typeface="Microsoft YaHei"/>
                 <a:ea typeface="Microsoft YaHei"/>
               </a:rPr>
-              <a:t>Draw the first CampusBites domain model in PlantUML. Entities, boundaries and controls, with their attributes and instance operations, plus the associations between them. No multiplicities — those are next week.</a:t>
-            </a:r>
-            <a:endParaRPr/>
-          </a:p>
-        </p:txBody>
-      </p:sp>
-      <p:sp>
-        <p:nvSpPr>
-          <p:cNvPr id="577" name=""/>
+              <a:t>Draw your own domain model in PlantUML. Entities, boundaries and controls, plus the associations between them. No multiplicities, no aggregation diamonds, no attributes, no methods — those come later. Source file: docs/diagrams/domain-model-v1.puml.</a:t>
+            </a:r>
+            <a:endParaRPr/>
+          </a:p>
+        </p:txBody>
+      </p:sp>
+      <p:sp>
+        <p:nvSpPr>
+          <p:cNvPr id="561" name=""/>
           <p:cNvSpPr/>
           <p:nvPr/>
         </p:nvSpPr>
         <p:spPr>
           <a:xfrm rot="0" flipH="0" flipV="0">
-            <a:off x="600075" y="2247900"/>
+            <a:off x="600075" y="2495550"/>
             <a:ext cx="6419850" cy="352425"/>
           </a:xfrm>
           <a:prstGeom prst="roundRect">
@@ -25197,13 +24595,13 @@
       </p:sp>
       <p:sp>
         <p:nvSpPr>
-          <p:cNvPr id="578" name="" descr="{&quot;isTemplate&quot;:true,&quot;type&quot;:&quot;text&quot;}"/>
-          <p:cNvSpPr txBox="1"/>
-          <p:nvPr/>
-        </p:nvSpPr>
-        <p:spPr>
-          <a:xfrm rot="0" flipH="0" flipV="0">
-            <a:off x="723900" y="2352675"/>
+          <p:cNvPr id="562" name="" descr="{&quot;isTemplate&quot;:true,&quot;type&quot;:&quot;text&quot;}"/>
+          <p:cNvSpPr txBox="1"/>
+          <p:nvPr/>
+        </p:nvSpPr>
+        <p:spPr>
+          <a:xfrm rot="0" flipH="0" flipV="0">
+            <a:off x="723900" y="2600325"/>
             <a:ext cx="6172200" cy="142875"/>
           </a:xfrm>
           <a:prstGeom prst="rect"/>
@@ -25232,13 +24630,13 @@
       </p:sp>
       <p:sp>
         <p:nvSpPr>
-          <p:cNvPr id="579" name=""/>
+          <p:cNvPr id="563" name=""/>
           <p:cNvSpPr/>
           <p:nvPr/>
         </p:nvSpPr>
         <p:spPr>
           <a:xfrm rot="0" flipH="0" flipV="0">
-            <a:off x="419100" y="2867025"/>
+            <a:off x="419100" y="3114675"/>
             <a:ext cx="6819900" cy="1571625"/>
           </a:xfrm>
           <a:prstGeom prst="roundRect">
@@ -25258,13 +24656,13 @@
       </p:sp>
       <p:sp>
         <p:nvSpPr>
-          <p:cNvPr id="580" name=""/>
+          <p:cNvPr id="564" name=""/>
           <p:cNvSpPr/>
           <p:nvPr/>
         </p:nvSpPr>
         <p:spPr>
           <a:xfrm rot="0" flipH="0" flipV="0">
-            <a:off x="419100" y="2867025"/>
+            <a:off x="419100" y="3114675"/>
             <a:ext cx="6819900" cy="1571625"/>
           </a:xfrm>
           <a:custGeom>
@@ -25315,13 +24713,13 @@
       </p:sp>
       <p:sp>
         <p:nvSpPr>
-          <p:cNvPr id="581" name="" descr="{&quot;isTemplate&quot;:true,&quot;type&quot;:&quot;text&quot;}"/>
-          <p:cNvSpPr txBox="1"/>
-          <p:nvPr/>
-        </p:nvSpPr>
-        <p:spPr>
-          <a:xfrm rot="0" flipH="0" flipV="0">
-            <a:off x="600075" y="3019425"/>
+          <p:cNvPr id="565" name="" descr="{&quot;isTemplate&quot;:true,&quot;type&quot;:&quot;text&quot;}"/>
+          <p:cNvSpPr txBox="1"/>
+          <p:nvPr/>
+        </p:nvSpPr>
+        <p:spPr>
+          <a:xfrm rot="0" flipH="0" flipV="0">
+            <a:off x="600075" y="3267075"/>
             <a:ext cx="6419850" cy="190500"/>
           </a:xfrm>
           <a:prstGeom prst="rect"/>
@@ -25350,13 +24748,13 @@
       </p:sp>
       <p:sp>
         <p:nvSpPr>
-          <p:cNvPr id="582" name="" descr="{&quot;isTemplate&quot;:true,&quot;type&quot;:&quot;text&quot;}"/>
-          <p:cNvSpPr txBox="1"/>
-          <p:nvPr/>
-        </p:nvSpPr>
-        <p:spPr>
-          <a:xfrm rot="0" flipH="0" flipV="0">
-            <a:off x="600075" y="3267075"/>
+          <p:cNvPr id="566" name="" descr="{&quot;isTemplate&quot;:true,&quot;type&quot;:&quot;text&quot;}"/>
+          <p:cNvSpPr txBox="1"/>
+          <p:nvPr/>
+        </p:nvSpPr>
+        <p:spPr>
+          <a:xfrm rot="0" flipH="0" flipV="0">
+            <a:off x="600075" y="3514725"/>
             <a:ext cx="6419850" cy="1019175"/>
           </a:xfrm>
           <a:prstGeom prst="rect"/>
@@ -25479,18 +24877,18 @@
       </p:sp>
       <p:sp>
         <p:nvSpPr>
-          <p:cNvPr id="583" name=""/>
+          <p:cNvPr id="567" name=""/>
           <p:cNvSpPr/>
           <p:nvPr/>
         </p:nvSpPr>
         <p:spPr>
           <a:xfrm rot="0" flipH="0" flipV="0">
-            <a:off x="7429500" y="1971675"/>
-            <a:ext cx="4381500" cy="3724275"/>
+            <a:off x="7429500" y="1857375"/>
+            <a:ext cx="4381500" cy="3943350"/>
           </a:xfrm>
           <a:prstGeom prst="roundRect">
             <a:avLst>
-              <a:gd name="adj" fmla="val 2558"/>
+              <a:gd name="adj" fmla="val 2415"/>
             </a:avLst>
           </a:prstGeom>
           <a:solidFill>
@@ -25510,13 +24908,13 @@
       </p:sp>
       <p:sp>
         <p:nvSpPr>
-          <p:cNvPr id="584" name="" descr="{&quot;isTemplate&quot;:true,&quot;type&quot;:&quot;text&quot;}"/>
-          <p:cNvSpPr txBox="1"/>
-          <p:nvPr/>
-        </p:nvSpPr>
-        <p:spPr>
-          <a:xfrm rot="0" flipH="0" flipV="0">
-            <a:off x="7620000" y="2143125"/>
+          <p:cNvPr id="568" name="" descr="{&quot;isTemplate&quot;:true,&quot;type&quot;:&quot;text&quot;}"/>
+          <p:cNvSpPr txBox="1"/>
+          <p:nvPr/>
+        </p:nvSpPr>
+        <p:spPr>
+          <a:xfrm rot="0" flipH="0" flipV="0">
+            <a:off x="7620000" y="2028825"/>
             <a:ext cx="4000500" cy="180975"/>
           </a:xfrm>
           <a:prstGeom prst="rect"/>
@@ -25545,13 +24943,13 @@
       </p:sp>
       <p:sp>
         <p:nvSpPr>
-          <p:cNvPr id="585" name=""/>
+          <p:cNvPr id="569" name=""/>
           <p:cNvSpPr/>
           <p:nvPr/>
         </p:nvSpPr>
         <p:spPr>
           <a:xfrm rot="0" flipH="0" flipV="0">
-            <a:off x="7620000" y="2457450"/>
+            <a:off x="7620000" y="2343150"/>
             <a:ext cx="171450" cy="171450"/>
           </a:xfrm>
           <a:prstGeom prst="roundRect">
@@ -25576,19 +24974,21 @@
       </p:sp>
       <p:sp>
         <p:nvSpPr>
-          <p:cNvPr id="586" name="" descr="{&quot;isTemplate&quot;:true,&quot;type&quot;:&quot;text&quot;}"/>
-          <p:cNvSpPr txBox="1"/>
-          <p:nvPr/>
-        </p:nvSpPr>
-        <p:spPr>
-          <a:xfrm rot="0" flipH="0" flipV="0">
-            <a:off x="7886700" y="2457450"/>
-            <a:ext cx="3733800" cy="228600"/>
-          </a:xfrm>
-          <a:prstGeom prst="rect"/>
-        </p:spPr>
-        <p:txBody>
-          <a:bodyPr wrap="none" lIns="0" tIns="0" rIns="0" bIns="0"/>
+          <p:cNvPr id="570" name="" descr="{&quot;isTemplate&quot;:true,&quot;type&quot;:&quot;text&quot;}"/>
+          <p:cNvSpPr txBox="1"/>
+          <p:nvPr/>
+        </p:nvSpPr>
+        <p:spPr>
+          <a:xfrm rot="0" flipH="0" flipV="0">
+            <a:off x="7886700" y="2343150"/>
+            <a:ext cx="3733800" cy="447675"/>
+          </a:xfrm>
+          <a:prstGeom prst="rect"/>
+        </p:spPr>
+        <p:txBody>
+          <a:bodyPr wrap="square" lIns="0" tIns="0" rIns="0" bIns="0">
+            <a:normAutofit/>
+          </a:bodyPr>
           <a:p>
             <a:pPr>
               <a:lnSpc>
@@ -25603,21 +25003,21 @@
                 <a:latin typeface="Microsoft YaHei"/>
                 <a:ea typeface="Microsoft YaHei"/>
               </a:rPr>
-              <a:t>Ten classes or more, and every one traceable to a sentence</a:t>
-            </a:r>
-            <a:endParaRPr/>
-          </a:p>
-        </p:txBody>
-      </p:sp>
-      <p:sp>
-        <p:nvSpPr>
-          <p:cNvPr id="587" name=""/>
+              <a:t>Eight classes or more, and every one traceable to a requirement line</a:t>
+            </a:r>
+            <a:endParaRPr/>
+          </a:p>
+        </p:txBody>
+      </p:sp>
+      <p:sp>
+        <p:nvSpPr>
+          <p:cNvPr id="571" name=""/>
           <p:cNvSpPr/>
           <p:nvPr/>
         </p:nvSpPr>
         <p:spPr>
           <a:xfrm rot="0" flipH="0" flipV="0">
-            <a:off x="7620000" y="2790825"/>
+            <a:off x="7620000" y="2895600"/>
             <a:ext cx="171450" cy="171450"/>
           </a:xfrm>
           <a:prstGeom prst="roundRect">
@@ -25642,13 +25042,13 @@
       </p:sp>
       <p:sp>
         <p:nvSpPr>
-          <p:cNvPr id="588" name="" descr="{&quot;isTemplate&quot;:true,&quot;type&quot;:&quot;text&quot;}"/>
-          <p:cNvSpPr txBox="1"/>
-          <p:nvPr/>
-        </p:nvSpPr>
-        <p:spPr>
-          <a:xfrm rot="0" flipH="0" flipV="0">
-            <a:off x="7886700" y="2790825"/>
+          <p:cNvPr id="572" name="" descr="{&quot;isTemplate&quot;:true,&quot;type&quot;:&quot;text&quot;}"/>
+          <p:cNvSpPr txBox="1"/>
+          <p:nvPr/>
+        </p:nvSpPr>
+        <p:spPr>
+          <a:xfrm rot="0" flipH="0" flipV="0">
+            <a:off x="7886700" y="2895600"/>
             <a:ext cx="3733800" cy="228600"/>
           </a:xfrm>
           <a:prstGeom prst="rect"/>
@@ -25677,13 +25077,13 @@
       </p:sp>
       <p:sp>
         <p:nvSpPr>
-          <p:cNvPr id="589" name=""/>
+          <p:cNvPr id="573" name=""/>
           <p:cNvSpPr/>
           <p:nvPr/>
         </p:nvSpPr>
         <p:spPr>
           <a:xfrm rot="0" flipH="0" flipV="0">
-            <a:off x="7620000" y="3124200"/>
+            <a:off x="7620000" y="3228975"/>
             <a:ext cx="171450" cy="171450"/>
           </a:xfrm>
           <a:prstGeom prst="roundRect">
@@ -25708,13 +25108,13 @@
       </p:sp>
       <p:sp>
         <p:nvSpPr>
-          <p:cNvPr id="590" name="" descr="{&quot;isTemplate&quot;:true,&quot;type&quot;:&quot;text&quot;}"/>
-          <p:cNvSpPr txBox="1"/>
-          <p:nvPr/>
-        </p:nvSpPr>
-        <p:spPr>
-          <a:xfrm rot="0" flipH="0" flipV="0">
-            <a:off x="7886700" y="3124200"/>
+          <p:cNvPr id="574" name="" descr="{&quot;isTemplate&quot;:true,&quot;type&quot;:&quot;text&quot;}"/>
+          <p:cNvSpPr txBox="1"/>
+          <p:nvPr/>
+        </p:nvSpPr>
+        <p:spPr>
+          <a:xfrm rot="0" flipH="0" flipV="0">
+            <a:off x="7886700" y="3228975"/>
             <a:ext cx="3733800" cy="228600"/>
           </a:xfrm>
           <a:prstGeom prst="rect"/>
@@ -25743,13 +25143,13 @@
       </p:sp>
       <p:sp>
         <p:nvSpPr>
-          <p:cNvPr id="591" name=""/>
+          <p:cNvPr id="575" name=""/>
           <p:cNvSpPr/>
           <p:nvPr/>
         </p:nvSpPr>
         <p:spPr>
           <a:xfrm rot="0" flipH="0" flipV="0">
-            <a:off x="7620000" y="3457575"/>
+            <a:off x="7620000" y="3562350"/>
             <a:ext cx="171450" cy="171450"/>
           </a:xfrm>
           <a:prstGeom prst="roundRect">
@@ -25774,13 +25174,13 @@
       </p:sp>
       <p:sp>
         <p:nvSpPr>
-          <p:cNvPr id="592" name="" descr="{&quot;isTemplate&quot;:true,&quot;type&quot;:&quot;text&quot;}"/>
-          <p:cNvSpPr txBox="1"/>
-          <p:nvPr/>
-        </p:nvSpPr>
-        <p:spPr>
-          <a:xfrm rot="0" flipH="0" flipV="0">
-            <a:off x="7886700" y="3457575"/>
+          <p:cNvPr id="576" name="" descr="{&quot;isTemplate&quot;:true,&quot;type&quot;:&quot;text&quot;}"/>
+          <p:cNvSpPr txBox="1"/>
+          <p:nvPr/>
+        </p:nvSpPr>
+        <p:spPr>
+          <a:xfrm rot="0" flipH="0" flipV="0">
+            <a:off x="7886700" y="3562350"/>
             <a:ext cx="3733800" cy="228600"/>
           </a:xfrm>
           <a:prstGeom prst="rect"/>
@@ -25809,13 +25209,13 @@
       </p:sp>
       <p:sp>
         <p:nvSpPr>
-          <p:cNvPr id="593" name=""/>
+          <p:cNvPr id="577" name=""/>
           <p:cNvSpPr/>
           <p:nvPr/>
         </p:nvSpPr>
         <p:spPr>
           <a:xfrm rot="0" flipH="0" flipV="0">
-            <a:off x="7620000" y="3790950"/>
+            <a:off x="7620000" y="3895725"/>
             <a:ext cx="171450" cy="171450"/>
           </a:xfrm>
           <a:prstGeom prst="roundRect">
@@ -25840,13 +25240,13 @@
       </p:sp>
       <p:sp>
         <p:nvSpPr>
-          <p:cNvPr id="594" name="" descr="{&quot;isTemplate&quot;:true,&quot;type&quot;:&quot;text&quot;}"/>
-          <p:cNvSpPr txBox="1"/>
-          <p:nvPr/>
-        </p:nvSpPr>
-        <p:spPr>
-          <a:xfrm rot="0" flipH="0" flipV="0">
-            <a:off x="7886700" y="3790950"/>
+          <p:cNvPr id="578" name="" descr="{&quot;isTemplate&quot;:true,&quot;type&quot;:&quot;text&quot;}"/>
+          <p:cNvSpPr txBox="1"/>
+          <p:nvPr/>
+        </p:nvSpPr>
+        <p:spPr>
+          <a:xfrm rot="0" flipH="0" flipV="0">
+            <a:off x="7886700" y="3895725"/>
             <a:ext cx="3733800" cy="228600"/>
           </a:xfrm>
           <a:prstGeom prst="rect"/>
@@ -25875,13 +25275,13 @@
       </p:sp>
       <p:sp>
         <p:nvSpPr>
-          <p:cNvPr id="595" name=""/>
+          <p:cNvPr id="579" name=""/>
           <p:cNvSpPr/>
           <p:nvPr/>
         </p:nvSpPr>
         <p:spPr>
           <a:xfrm rot="0" flipH="0" flipV="0">
-            <a:off x="7620000" y="4124325"/>
+            <a:off x="7620000" y="4229100"/>
             <a:ext cx="171450" cy="171450"/>
           </a:xfrm>
           <a:prstGeom prst="roundRect">
@@ -25906,13 +25306,13 @@
       </p:sp>
       <p:sp>
         <p:nvSpPr>
-          <p:cNvPr id="596" name="" descr="{&quot;isTemplate&quot;:true,&quot;type&quot;:&quot;text&quot;}"/>
-          <p:cNvSpPr txBox="1"/>
-          <p:nvPr/>
-        </p:nvSpPr>
-        <p:spPr>
-          <a:xfrm rot="0" flipH="0" flipV="0">
-            <a:off x="7886700" y="4124325"/>
+          <p:cNvPr id="580" name="" descr="{&quot;isTemplate&quot;:true,&quot;type&quot;:&quot;text&quot;}"/>
+          <p:cNvSpPr txBox="1"/>
+          <p:nvPr/>
+        </p:nvSpPr>
+        <p:spPr>
+          <a:xfrm rot="0" flipH="0" flipV="0">
+            <a:off x="7886700" y="4229100"/>
             <a:ext cx="3733800" cy="228600"/>
           </a:xfrm>
           <a:prstGeom prst="rect"/>
@@ -25941,13 +25341,13 @@
       </p:sp>
       <p:sp>
         <p:nvSpPr>
-          <p:cNvPr id="597" name=""/>
+          <p:cNvPr id="581" name=""/>
           <p:cNvSpPr/>
           <p:nvPr/>
         </p:nvSpPr>
         <p:spPr>
           <a:xfrm rot="0" flipH="0" flipV="0">
-            <a:off x="7620000" y="4457700"/>
+            <a:off x="7620000" y="4562475"/>
             <a:ext cx="171450" cy="171450"/>
           </a:xfrm>
           <a:prstGeom prst="roundRect">
@@ -25972,13 +25372,13 @@
       </p:sp>
       <p:sp>
         <p:nvSpPr>
-          <p:cNvPr id="598" name="" descr="{&quot;isTemplate&quot;:true,&quot;type&quot;:&quot;text&quot;}"/>
-          <p:cNvSpPr txBox="1"/>
-          <p:nvPr/>
-        </p:nvSpPr>
-        <p:spPr>
-          <a:xfrm rot="0" flipH="0" flipV="0">
-            <a:off x="7886700" y="4457700"/>
+          <p:cNvPr id="582" name="" descr="{&quot;isTemplate&quot;:true,&quot;type&quot;:&quot;text&quot;}"/>
+          <p:cNvSpPr txBox="1"/>
+          <p:nvPr/>
+        </p:nvSpPr>
+        <p:spPr>
+          <a:xfrm rot="0" flipH="0" flipV="0">
+            <a:off x="7886700" y="4562475"/>
             <a:ext cx="3733800" cy="228600"/>
           </a:xfrm>
           <a:prstGeom prst="rect"/>
@@ -26007,13 +25407,13 @@
       </p:sp>
       <p:sp>
         <p:nvSpPr>
-          <p:cNvPr id="599" name=""/>
+          <p:cNvPr id="583" name=""/>
           <p:cNvSpPr/>
           <p:nvPr/>
         </p:nvSpPr>
         <p:spPr>
           <a:xfrm rot="0" flipH="0" flipV="0">
-            <a:off x="7620000" y="4848225"/>
+            <a:off x="7620000" y="4953000"/>
             <a:ext cx="4000500" cy="676275"/>
           </a:xfrm>
           <a:prstGeom prst="roundRect">
@@ -26038,13 +25438,13 @@
       </p:sp>
       <p:sp>
         <p:nvSpPr>
-          <p:cNvPr id="600" name="" descr="{&quot;isTemplate&quot;:true,&quot;type&quot;:&quot;text&quot;}"/>
-          <p:cNvSpPr txBox="1"/>
-          <p:nvPr/>
-        </p:nvSpPr>
-        <p:spPr>
-          <a:xfrm rot="0" flipH="0" flipV="0">
-            <a:off x="7753350" y="4962525"/>
+          <p:cNvPr id="584" name="" descr="{&quot;isTemplate&quot;:true,&quot;type&quot;:&quot;text&quot;}"/>
+          <p:cNvSpPr txBox="1"/>
+          <p:nvPr/>
+        </p:nvSpPr>
+        <p:spPr>
+          <a:xfrm rot="0" flipH="0" flipV="0">
+            <a:off x="7753350" y="5067300"/>
             <a:ext cx="3733800" cy="447675"/>
           </a:xfrm>
           <a:prstGeom prst="rect"/>
@@ -26075,7 +25475,7 @@
       </p:sp>
       <p:sp>
         <p:nvSpPr>
-          <p:cNvPr id="601" name=""/>
+          <p:cNvPr id="585" name=""/>
           <p:cNvSpPr/>
           <p:nvPr/>
         </p:nvSpPr>
@@ -26099,14 +25499,14 @@
       </p:sp>
       <p:sp>
         <p:nvSpPr>
-          <p:cNvPr id="602" name="" descr="{&quot;isTemplate&quot;:true,&quot;type&quot;:&quot;text&quot;}"/>
-          <p:cNvSpPr txBox="1"/>
-          <p:nvPr/>
-        </p:nvSpPr>
-        <p:spPr>
-          <a:xfrm rot="0" flipH="0" flipV="0">
-            <a:off x="2619375" y="6543675"/>
-            <a:ext cx="6953250" cy="190500"/>
+          <p:cNvPr id="586" name="" descr="{&quot;isTemplate&quot;:true,&quot;type&quot;:&quot;text&quot;}"/>
+          <p:cNvSpPr txBox="1"/>
+          <p:nvPr/>
+        </p:nvSpPr>
+        <p:spPr>
+          <a:xfrm rot="0" flipH="0" flipV="0">
+            <a:off x="2247900" y="6543675"/>
+            <a:ext cx="7705725" cy="190500"/>
           </a:xfrm>
           <a:prstGeom prst="rect"/>
         </p:spPr>
@@ -26126,7 +25526,7 @@
                 <a:latin typeface="Microsoft YaHei"/>
                 <a:ea typeface="Microsoft YaHei"/>
               </a:rPr>
-              <a:t>Ten classes, no multiplicities, both source and PNG. Everything else on that list is negotiable</a:t>
+              <a:t>Eight classes or more, no multiplicities, both source and PNG. Everything else on that list is negotiable</a:t>
             </a:r>
             <a:endParaRPr/>
           </a:p>
@@ -26142,7 +25542,7 @@
   <p:cSld>
     <p:spTree>
       <p:nvGrpSpPr>
-        <p:cNvPr id="603" name="" descr="&lt;Slide style={{ background: '#FFFFFF', padding: 0 }}&gt;&#10;  &lt;Box style={{ height: 72, background: '#1E4FA8', padding: '0 40px', flexDirection: 'row', alignItems: 'center', justifyContent: 'space-between' }}&gt;&#10;    &lt;Text style={{ fontSize: 15, color: '#B9CDF0', letterSpacing: 1 }}&gt;ISAD · INFORMATION SYSTEMS ANALYSIS &amp;amp; DESIGN&lt;/Text&gt;&#10;    &lt;Text style={{ fontSize: 15, color: '#B9CDF0' }}&gt;W06 · LAB · MODEL REVIEW&lt;/Text&gt;&#10;  &lt;/Box&gt;&#10;  &lt;Box style={{ padding: '13px 40px 0 40px', flexDirection: 'row', alignItems: 'center', justifyContent: 'space-between' }}&gt;&#10;    &lt;Text style={{ fontSize: 29, fontWeight: 'bold', color: '#0E3F8C' }}&gt;Model Review Before You Commit&lt;/Text&gt;&#10;    &lt;Text style={{ fontSize: 14, color: '#1E4FA8', fontWeight: 'bold' }}&gt;33 / 38&lt;/Text&gt;&#10;  &lt;/Box&gt;&#10;  &lt;Box style={{ flex: 1, padding: '10px 40px 0 40px' }}&gt;&#10;    &lt;Table&#10;      style={{ width: '100%', height: '100%' }}&#10;      defaultTextStyle={{ fontSize: 13, textAlign: 'left', color: '#1A2230' }}&#10;      defaultCellStyle={{&#10;        border: {&#10;          left: { width: 1, color: '#E5E7EB' },&#10;          right: { width: 1, color: '#E5E7EB' },&#10;          top: { width: 1, color: '#E5E7EB' },&#10;          bottom: { width: 1, color: '#E5E7EB' },&#10;        },&#10;      }}&#10;      cells={[&#10;        [&#10;          { text: 'Ask this', textStyle: { bold: true, color: '#FFFFFF', fontSize: 14 }, cellStyle: { background: { color: '#0E3F8C' } } },&#10;          { text: 'A pass looks like', textStyle: { bold: true, color: '#FFFFFF', fontSize: 14 }, cellStyle: { background: { color: '#2B7A3D' } } },&#10;          { text: 'A fail looks like', textStyle: { bold: true, color: '#FFFFFF', fontSize: 14 }, cellStyle: { background: { color: '#8B3230' } } },&#10;        ],&#10;        [&#10;          { text: 'Can I point at the sentence for this class?', textStyle: { bold: true, color: '#0E3F8C' }, cellStyle: { background: { color: '#F7F9FC' } } },&#10;          { text: '“Order” comes from W05 step 5, “System creates the order”.', textStyle: { color: '#4A5568' }, cellStyle: { background: { color: '#F7F9FC' } } },&#10;          { text: '“We will probably need it later.” That is not a sentence.', textStyle: { color: '#4A5568' }, cellStyle: { background: { color: '#F7F9FC' } } },&#10;        ],&#10;        [&#10;          { text: 'Which of E, B, C is it?', textStyle: { bold: true, color: '#0E3F8C' } },&#10;          { text: 'Marked, and the marking is defensible in one sentence.', textStyle: { color: '#4A5568' } },&#10;          { text: 'Nothing marked. “Conceptual class” is not a category.', textStyle: { color: '#4A5568' } },&#10;        ],&#10;        [&#10;          { text: 'Does any name come from a screen?', textStyle: { bold: true, color: '#0E3F8C' }, cellStyle: { background: { color: '#F7F9FC' } } },&#10;          { text: 'All names are business words: Order, Courier, Coupon.', textStyle: { color: '#4A5568' }, cellStyle: { background: { color: '#F7F9FC' } } },&#10;          { text: 'CartPage, OrderForm, PaymentDTO — the model has become a design.', textStyle: { color: '#4A5568' }, cellStyle: { background: { color: '#F7F9FC' } } },&#10;        ],&#10;        [&#10;          { text: 'Did a technology word sneak in?', textStyle: { bold: true, color: '#0E3F8C' } },&#10;          { text: 'No server, no service, no table, no interface.', textStyle: { color: '#4A5568' } },&#10;          { text: 'PaymentService, UserTable — delete and re-add as business nouns.', textStyle: { color: '#4A5568' } },&#10;        ],&#10;        [&#10;          { text: 'Is every association sayable aloud?', textStyle: { bold: true, color: '#0E3F8C' }, cellStyle: { background: { color: '#F7F9FC' } } },&#10;          { text: '“An order has one or more lines”, “A restaurant owns a menu”.', textStyle: { color: '#4A5568' }, cellStyle: { background: { color: '#F7F9FC' } } },&#10;          { text: 'An arrow between two boxes with no way to phrase it in English.', textStyle: { color: '#4A5568' }, cellStyle: { background: { color: '#F7F9FC' } } },&#10;        ],&#10;        [&#10;          { text: 'Could you delete a class?', textStyle: { bold: true, color: '#0E3F8C' } },&#10;          { text: 'Someone would notice within a day. Keep it.', textStyle: { color: '#4A5568' } },&#10;          { text: 'Nothing would notice. Then it is padding — delete it.', textStyle: { color: '#4A5568' } },&#10;        ],&#10;      ]}&#10;    /&gt;&#10;  &lt;/Box&gt;&#10;  &lt;Box style={{ height: 46, background: '#0E3F8C', padding: '0 40px', flexDirection: 'row', alignItems: 'center', justifyContent: 'center' }}&gt;&#10;    &lt;Text style={{ fontSize: 16.5, color: '#FFFFFF', fontWeight: '600' }}&gt;Seven questions. A model that passes all seven is ready for the change that arrives on Monday&lt;/Text&gt;&#10;  &lt;/Box&gt;&#10;&lt;/Slide&gt;&#10;"/>
+        <p:cNvPr id="587" name="" descr="&lt;Slide style={{ background: '#FFFFFF', padding: 0 }}&gt;&#10;  &lt;Box style={{ height: 72, background: '#1E4FA8', padding: '0 40px', flexDirection: 'row', alignItems: 'center', justifyContent: 'space-between' }}&gt;&#10;    &lt;Text style={{ fontSize: 15, color: '#B9CDF0', letterSpacing: 1 }}&gt;ISAD · INFORMATION SYSTEMS ANALYSIS &amp;amp; DESIGN&lt;/Text&gt;&#10;    &lt;Text style={{ fontSize: 15, color: '#B9CDF0' }}&gt;W06 · LAB · MODEL REVIEW&lt;/Text&gt;&#10;  &lt;/Box&gt;&#10;  &lt;Box style={{ padding: '13px 40px 0 40px', flexDirection: 'row', alignItems: 'center', justifyContent: 'space-between' }}&gt;&#10;    &lt;Text style={{ fontSize: 29, fontWeight: 'bold', color: '#0E3F8C' }}&gt;Model Review Before You Commit&lt;/Text&gt;&#10;    &lt;Text style={{ fontSize: 14, color: '#1E4FA8', fontWeight: 'bold' }}&gt;33 / 39&lt;/Text&gt;&#10;  &lt;/Box&gt;&#10;  &lt;Box style={{ flex: 1, padding: '10px 40px 0 40px' }}&gt;&#10;    &lt;Table&#10;      style={{ width: '100%', height: '100%' }}&#10;      defaultTextStyle={{ fontSize: 13, textAlign: 'left', color: '#1A2230' }}&#10;      defaultCellStyle={{&#10;        border: {&#10;          left: { width: 1, color: '#E5E7EB' },&#10;          right: { width: 1, color: '#E5E7EB' },&#10;          top: { width: 1, color: '#E5E7EB' },&#10;          bottom: { width: 1, color: '#E5E7EB' },&#10;        },&#10;      }}&#10;      cells={[&#10;        [&#10;          { text: 'Ask this', textStyle: { bold: true, color: '#FFFFFF', fontSize: 14 }, cellStyle: { background: { color: '#0E3F8C' } } },&#10;          { text: 'A pass looks like', textStyle: { bold: true, color: '#FFFFFF', fontSize: 14 }, cellStyle: { background: { color: '#2B7A3D' } } },&#10;          { text: 'A fail looks like', textStyle: { bold: true, color: '#FFFFFF', fontSize: 14 }, cellStyle: { background: { color: '#8B3230' } } },&#10;        ],&#10;        [&#10;          { text: 'Can I point at the sentence for this class?', textStyle: { bold: true, color: '#0E3F8C' }, cellStyle: { background: { color: '#F7F9FC' } } },&#10;          { text: '“Order” comes from W05 step 5, “System creates the order”.', textStyle: { color: '#4A5568' }, cellStyle: { background: { color: '#F7F9FC' } } },&#10;          { text: '“We will probably need it later.” That is not a sentence.', textStyle: { color: '#4A5568' }, cellStyle: { background: { color: '#F7F9FC' } } },&#10;        ],&#10;        [&#10;          { text: 'Which of E, B, C is it?', textStyle: { bold: true, color: '#0E3F8C' } },&#10;          { text: 'Marked, and the marking is defensible in one sentence.', textStyle: { color: '#4A5568' } },&#10;          { text: 'Nothing marked. “Conceptual class” is not a category.', textStyle: { color: '#4A5568' } },&#10;        ],&#10;        [&#10;          { text: 'Does any name come from a screen?', textStyle: { bold: true, color: '#0E3F8C' }, cellStyle: { background: { color: '#F7F9FC' } } },&#10;          { text: 'All names are business words: Order, Courier, Coupon.', textStyle: { color: '#4A5568' }, cellStyle: { background: { color: '#F7F9FC' } } },&#10;          { text: 'CartPage, OrderForm, PaymentDTO — the model has become a design.', textStyle: { color: '#4A5568' }, cellStyle: { background: { color: '#F7F9FC' } } },&#10;        ],&#10;        [&#10;          { text: 'Did a technology word sneak in?', textStyle: { bold: true, color: '#0E3F8C' } },&#10;          { text: 'No server, no service, no table, no interface.', textStyle: { color: '#4A5568' } },&#10;          { text: 'PaymentService, UserTable — delete and re-add as business nouns.', textStyle: { color: '#4A5568' } },&#10;        ],&#10;        [&#10;          { text: 'Is every association sayable aloud?', textStyle: { bold: true, color: '#0E3F8C' }, cellStyle: { background: { color: '#F7F9FC' } } },&#10;          { text: '“An order has one or more lines”, “A restaurant owns a menu”.', textStyle: { color: '#4A5568' }, cellStyle: { background: { color: '#F7F9FC' } } },&#10;          { text: 'An arrow between two boxes with no way to phrase it in English.', textStyle: { color: '#4A5568' }, cellStyle: { background: { color: '#F7F9FC' } } },&#10;        ],&#10;        [&#10;          { text: 'Could you delete a class?', textStyle: { bold: true, color: '#0E3F8C' } },&#10;          { text: 'Someone would notice within a day. Keep it.', textStyle: { color: '#4A5568' } },&#10;          { text: 'Nothing would notice. Then it is padding — delete it.', textStyle: { color: '#4A5568' } },&#10;        ],&#10;      ]}&#10;    /&gt;&#10;  &lt;/Box&gt;&#10;  &lt;Box style={{ height: 46, background: '#0E3F8C', padding: '0 40px', flexDirection: 'row', alignItems: 'center', justifyContent: 'center' }}&gt;&#10;    &lt;Text style={{ fontSize: 16.5, color: '#FFFFFF', fontWeight: '600' }}&gt;Seven questions. A model that passes all seven is ready for the change that arrives on Monday&lt;/Text&gt;&#10;  &lt;/Box&gt;&#10;&lt;/Slide&gt;&#10;"/>
         <p:cNvGrpSpPr/>
         <p:nvPr/>
       </p:nvGrpSpPr>
@@ -26156,7 +25556,7 @@
       </p:grpSpPr>
       <p:sp>
         <p:nvSpPr>
-          <p:cNvPr id="604" name=""/>
+          <p:cNvPr id="588" name=""/>
           <p:cNvSpPr/>
           <p:nvPr/>
         </p:nvSpPr>
@@ -26180,7 +25580,7 @@
       </p:sp>
       <p:sp>
         <p:nvSpPr>
-          <p:cNvPr id="605" name=""/>
+          <p:cNvPr id="589" name=""/>
           <p:cNvSpPr/>
           <p:nvPr/>
         </p:nvSpPr>
@@ -26204,7 +25604,7 @@
       </p:sp>
       <p:sp>
         <p:nvSpPr>
-          <p:cNvPr id="606" name="" descr="{&quot;isTemplate&quot;:true,&quot;type&quot;:&quot;text&quot;}"/>
+          <p:cNvPr id="590" name="" descr="{&quot;isTemplate&quot;:true,&quot;type&quot;:&quot;text&quot;}"/>
           <p:cNvSpPr txBox="1"/>
           <p:nvPr/>
         </p:nvSpPr>
@@ -26239,7 +25639,7 @@
       </p:sp>
       <p:sp>
         <p:nvSpPr>
-          <p:cNvPr id="607" name="" descr="{&quot;isTemplate&quot;:true,&quot;type&quot;:&quot;text&quot;}"/>
+          <p:cNvPr id="591" name="" descr="{&quot;isTemplate&quot;:true,&quot;type&quot;:&quot;text&quot;}"/>
           <p:cNvSpPr txBox="1"/>
           <p:nvPr/>
         </p:nvSpPr>
@@ -26274,7 +25674,7 @@
       </p:sp>
       <p:sp>
         <p:nvSpPr>
-          <p:cNvPr id="608" name="" descr="{&quot;isTemplate&quot;:true,&quot;type&quot;:&quot;text&quot;}"/>
+          <p:cNvPr id="592" name="" descr="{&quot;isTemplate&quot;:true,&quot;type&quot;:&quot;text&quot;}"/>
           <p:cNvSpPr txBox="1"/>
           <p:nvPr/>
         </p:nvSpPr>
@@ -26309,7 +25709,7 @@
       </p:sp>
       <p:sp>
         <p:nvSpPr>
-          <p:cNvPr id="609" name="" descr="{&quot;isTemplate&quot;:true,&quot;type&quot;:&quot;text&quot;}"/>
+          <p:cNvPr id="593" name="" descr="{&quot;isTemplate&quot;:true,&quot;type&quot;:&quot;text&quot;}"/>
           <p:cNvSpPr txBox="1"/>
           <p:nvPr/>
         </p:nvSpPr>
@@ -26336,7 +25736,7 @@
                 <a:latin typeface="Microsoft YaHei"/>
                 <a:ea typeface="Microsoft YaHei"/>
               </a:rPr>
-              <a:t>33 / 38</a:t>
+              <a:t>33 / 39</a:t>
             </a:r>
             <a:endParaRPr/>
           </a:p>
@@ -26344,7 +25744,7 @@
       </p:sp>
       <p:graphicFrame>
         <p:nvGraphicFramePr>
-          <p:cNvPr id="610" name=""/>
+          <p:cNvPr id="594" name=""/>
           <p:cNvGraphicFramePr/>
           <p:nvPr/>
         </p:nvGraphicFramePr>
@@ -27288,7 +26688,7 @@
       </p:graphicFrame>
       <p:sp>
         <p:nvSpPr>
-          <p:cNvPr id="611" name=""/>
+          <p:cNvPr id="595" name=""/>
           <p:cNvSpPr/>
           <p:nvPr/>
         </p:nvSpPr>
@@ -27312,7 +26712,7 @@
       </p:sp>
       <p:sp>
         <p:nvSpPr>
-          <p:cNvPr id="612" name="" descr="{&quot;isTemplate&quot;:true,&quot;type&quot;:&quot;text&quot;}"/>
+          <p:cNvPr id="596" name="" descr="{&quot;isTemplate&quot;:true,&quot;type&quot;:&quot;text&quot;}"/>
           <p:cNvSpPr txBox="1"/>
           <p:nvPr/>
         </p:nvSpPr>
@@ -27355,7 +26755,7 @@
   <p:cSld>
     <p:spTree>
       <p:nvGrpSpPr>
-        <p:cNvPr id="613" name="" descr="&lt;Slide style={{ background: '#FFFFFF', padding: 0 }}&gt;&#10;  &lt;Box style={{ height: 72, background: '#1E4FA8', padding: '0 40px', flexDirection: 'row', alignItems: 'center', justifyContent: 'space-between' }}&gt;&#10;    &lt;Text style={{ fontSize: 15, color: '#B9CDF0', letterSpacing: 1 }}&gt;ISAD · INFORMATION SYSTEMS ANALYSIS &amp;amp; DESIGN&lt;/Text&gt;&#10;    &lt;Text style={{ fontSize: 15, color: '#B9CDF0' }}&gt;W06 · CHANGE ΔC1&lt;/Text&gt;&#10;  &lt;/Box&gt;&#10;  &lt;Box style={{ padding: '13px 40px 0 40px', flexDirection: 'row', alignItems: 'center', justifyContent: 'space-between' }}&gt;&#10;    &lt;Text style={{ fontSize: 29, fontWeight: 'bold', color: '#0E3F8C' }}&gt;ΔC1 — The Change Arrives Online&lt;/Text&gt;&#10;    &lt;Text style={{ fontSize: 14, color: '#1E4FA8', fontWeight: 'bold' }}&gt;34 / 38&lt;/Text&gt;&#10;  &lt;/Box&gt;&#10;  &lt;Box style={{ flex: 1, padding: '6px 40px 0 40px', justifyContent: 'center', alignItems: 'center' }}&gt;&#10;    &lt;svg width={1180} height={392} viewBox='0 0 1180 392'&gt;&#10;      &lt;text x='10' y='16' fill='#8B97A8' fontSize='13'&gt;Three planned requirement changes land in this term. ΔC1 is announced in W06 and folds into M2.&lt;/text&gt;&#10;&#10;      &lt;g transform='translate(0,34)'&gt;&#10;        &lt;rect x='0' y='0' width='368' height='300' rx='8' fill='#FDF3F3' stroke='#D9534F' strokeWidth='2' /&gt;&#10;        &lt;text x='20' y='30' fill='#D9534F' fontSize='15' fontWeight='bold'&gt;What arrives&lt;/text&gt;&#10;        &lt;rect x='20' y='46' width='328' height='70' rx='6' fill='#FFFFFF' stroke='#D6DCE5' strokeWidth='1.2' /&gt;&#10;        &lt;text x='34' y='70' fill='#4A5568' fontSize='11.5'&gt;A new requirement lands in your&lt;/text&gt;&#10;        &lt;text x='34' y='88' fill='#4A5568' fontSize='11.5'&gt;repository, in the changes/ folder.&lt;/text&gt;&#10;        &lt;text x='34' y='106' fill='#8B97A8' fontSize='11'&gt;Announced online in W06.&lt;/text&gt;&#10;        &lt;text x='20' y='150' fill='#0E3F8C' fontSize='12.5' fontWeight='bold'&gt;The three injections this term&lt;/text&gt;&#10;        &lt;text x='20' y='172' fill='#4A5568' fontSize='11.5'&gt;ΔC1 · W06 · folds into M2&lt;/text&gt;&#10;        &lt;text x='20' y='192' fill='#4A5568' fontSize='11.5'&gt;ΔC2 · W10 · folds into M3&lt;/text&gt;&#10;        &lt;text x='20' y='212' fill='#4A5568' fontSize='11.5'&gt;ΔC3 · W13 · folds into M4&lt;/text&gt;&#10;        &lt;rect x='20' y='232' width='328' height='50' rx='6' fill='#FFFFFF' /&gt;&#10;        &lt;text x='34' y='254' fill='#D9534F' fontSize='11.5' fontWeight='bold'&gt;They are not exams. They are&lt;/text&gt;&#10;        &lt;text x='34' y='272' fill='#D9534F' fontSize='11.5'&gt;how we prove the model absorbs change.&lt;/text&gt;&#10;      &lt;/g&gt;&#10;&#10;      &lt;g transform='translate(406,34)'&gt;&#10;        &lt;rect x='0' y='0' width='368' height='300' rx='8' fill='#EAF6EC' stroke='#2B7A3D' strokeWidth='2' /&gt;&#10;        &lt;text x='20' y='30' fill='#2B7A3D' fontSize='15' fontWeight='bold'&gt;What you do about it&lt;/text&gt;&#10;        {[&#10;          ['1', 'Read it twice before reacting.'],&#10;          ['2', 'Name the nouns it introduces.'],&#10;          ['3', 'Decide: new class, new attribute, or nothing.'],&#10;          ['4', 'Write the sentence in your log.'],&#10;          ['5', 'Update the diagram and commit both.'],&#10;        ].map((r, i) =&gt; (&#10;          &lt;g transform={`translate(20,${52 + i * 46})`}&gt;&#10;            &lt;circle cx='14' cy='14' r='13' fill='#2B7A3D' /&gt;&#10;            &lt;text x='14' y='19' textAnchor='middle' fill='#FFFFFF' fontSize='13' fontWeight='bold'&gt;{r[0]}&lt;/text&gt;&#10;            &lt;text x='38' y='19' fill='#4A5568' fontSize='12'&gt;{r[1]}&lt;/text&gt;&#10;          &lt;/g&gt;&#10;        ))}&#10;        &lt;rect x='20' y='272' width='328' height='20' rx='4' fill='#FFFFFF' /&gt;&#10;        &lt;text x='30' y='287' fill='#2B7A3D' fontSize='11'&gt;Time budget: 30 minutes, inside M2.&lt;/text&gt;&#10;      &lt;/g&gt;&#10;&#10;      &lt;g transform='translate(812,34)'&gt;&#10;        &lt;rect x='0' y='0' width='368' height='300' rx='8' fill='#FFF6E0' stroke='#FFC107' strokeWidth='2' /&gt;&#10;        &lt;text x='20' y='30' fill='#996F00' fontSize='15' fontWeight='bold'&gt;What it costs if you model well&lt;/text&gt;&#10;        &lt;text x='20' y='62' fill='#4A5568' fontSize='12'&gt;A good analysis model makes a&lt;/text&gt;&#10;        &lt;text x='20' y='80' fill='#4A5568' fontSize='12'&gt;change local: two or three boxes&lt;/text&gt;&#10;        &lt;text x='20' y='98' fill='#4A5568' fontSize='12'&gt;move, and nothing else does.&lt;/text&gt;&#10;        &lt;line x1='20' y1='118' x2='348' y2='118' stroke='#E8D9A8' strokeWidth='1' /&gt;&#10;        &lt;text x='20' y='142' fill='#996F00' fontSize='12' fontWeight='bold'&gt;A bad one makes it global:&lt;/text&gt;&#10;        &lt;text x='20' y='164' fill='#4A5568' fontSize='12'&gt;you redraw the diagram, rewrite&lt;/text&gt;&#10;        &lt;text x='20' y='182' fill='#4A5568' fontSize='12'&gt;the specifications, and re-do&lt;/text&gt;&#10;        &lt;text x='20' y='200' fill='#4A5568' fontSize='12'&gt;the sequence diagrams.&lt;/text&gt;&#10;        &lt;rect x='20' y='218' width='328' height='64' rx='6' fill='#FFFFFF' /&gt;&#10;        &lt;text x='34' y='242' fill='#D9534F' fontSize='11.5' fontWeight='bold'&gt;Three injections is the test.&lt;/text&gt;&#10;        &lt;text x='34' y='260' fill='#4A5568' fontSize='11.5'&gt;If the first one costs you a day,&lt;/text&gt;&#10;        &lt;text x='34' y='276' fill='#4A5568' fontSize='11.5'&gt;the model was not finished yet.&lt;/text&gt;&#10;      &lt;/g&gt;&#10;    &lt;/svg&gt;&#10;  &lt;/Box&gt;&#10;  &lt;Box style={{ height: 34, padding: '0 40px', flexDirection: 'row', alignItems: 'center', justifyContent: 'space-between' }}&gt;&#10;    &lt;Text style={{ fontSize: 13, color: '#8B97A8' }}&gt;ISAD · Fall 2026 · The change is not the test. How far the change travels through your model is the test&lt;/Text&gt;&#10;    &lt;Text style={{ fontSize: 14, color: '#1E4FA8', fontWeight: 'bold' }}&gt;34 / 38&lt;/Text&gt;&#10;  &lt;/Box&gt;&#10;&lt;/Slide&gt;&#10;"/>
+        <p:cNvPr id="597" name="" descr="&lt;Slide style={{ background: '#FFFFFF', padding: 0 }}&gt;&#10;  &lt;Box style={{ height: 72, background: '#1E4FA8', padding: '0 40px', flexDirection: 'row', alignItems: 'center', justifyContent: 'space-between' }}&gt;&#10;    &lt;Text style={{ fontSize: 15, color: '#B9CDF0', letterSpacing: 1 }}&gt;ISAD · INFORMATION SYSTEMS ANALYSIS &amp;amp; DESIGN&lt;/Text&gt;&#10;    &lt;Text style={{ fontSize: 15, color: '#B9CDF0' }}&gt;W06 · CHANGE INJECTIONS&lt;/Text&gt;&#10;  &lt;/Box&gt;&#10;  &lt;Box style={{ padding: '13px 40px 0 40px', flexDirection: 'row', alignItems: 'center', justifyContent: 'space-between' }}&gt;&#10;    &lt;Text style={{ fontSize: 29, fontWeight: 'bold', color: '#0E3F8C' }}&gt;Change Injections — Only Two This Term&lt;/Text&gt;&#10;    &lt;Text style={{ fontSize: 14, color: '#1E4FA8', fontWeight: 'bold' }}&gt;34 / 39&lt;/Text&gt;&#10;  &lt;/Box&gt;&#10;  &lt;Box style={{ flex: 1, padding: '6px 40px 0 40px', justifyContent: 'center', alignItems: 'center' }}&gt;&#10;    &lt;svg width={1180} height={392} viewBox='0 0 1180 392'&gt;&#10;      &lt;text x='10' y='16' fill='#8B97A8' fontSize='13'&gt;Two requirement changes land in this term. ΔC1 was cancelled; ΔC2 and ΔC3 remain.&lt;/text&gt;&#10;&#10;      &lt;g transform='translate(0,34)'&gt;&#10;        &lt;rect x='0' y='0' width='368' height='300' rx='8' fill='#FDF3F3' stroke='#D9534F' strokeWidth='2' /&gt;&#10;        &lt;text x='20' y='30' fill='#D9534F' fontSize='15' fontWeight='bold'&gt;What arrives&lt;/text&gt;&#10;        &lt;rect x='20' y='46' width='328' height='70' rx='6' fill='#FFFFFF' stroke='#D6DCE5' strokeWidth='1.2' /&gt;&#10;        &lt;text x='34' y='70' fill='#4A5568' fontSize='11.5'&gt;A new requirement lands in your&lt;/text&gt;&#10;        &lt;text x='34' y='88' fill='#4A5568' fontSize='11.5'&gt;repository, in the changes/ folder.&lt;/text&gt;&#10;        &lt;text x='34' y='106' fill='#8B97A8' fontSize='11'&gt;Announced online, after a milestone review.&lt;/text&gt;&#10;        &lt;text x='20' y='150' fill='#0E3F8C' fontSize='12.5' fontWeight='bold'&gt;The two injections this term&lt;/text&gt;&#10;        &lt;text x='20' y='172' fill='#4A5568' fontSize='11.5'&gt;&lt;/text&gt;&#10;        &lt;text x='20' y='192' fill='#4A5568' fontSize='11.5'&gt;&lt;/text&gt;&#10;        &lt;text x='20' y='212' fill='#4A5568' fontSize='11.5'&gt;&lt;/text&gt;&#10;        &lt;rect x='20' y='232' width='328' height='50' rx='6' fill='#FFFFFF' /&gt;&#10;        &lt;text x='34' y='254' fill='#D9534F' fontSize='11.5' fontWeight='bold'&gt;They are not exams. They are&lt;/text&gt;&#10;        &lt;text x='34' y='272' fill='#D9534F' fontSize='11.5'&gt;how we prove the model absorbs change.&lt;/text&gt;&#10;      &lt;/g&gt;&#10;&#10;      &lt;g transform='translate(406,34)'&gt;&#10;        &lt;rect x='0' y='0' width='368' height='300' rx='8' fill='#EAF6EC' stroke='#2B7A3D' strokeWidth='2' /&gt;&#10;        &lt;text x='20' y='30' fill='#2B7A3D' fontSize='15' fontWeight='bold'&gt;What you do about it&lt;/text&gt;&#10;        {[&#10;          ['1', 'Read it twice before reacting.'],&#10;          ['2', 'Name the nouns it introduces.'],&#10;          ['3', 'Decide: new class, new attribute, or nothing.'],&#10;          ['4', 'Write the sentence in your log.'],&#10;          ['5', 'Update the diagram and commit both.'],&#10;        ].map((r, i) =&gt; (&#10;          &lt;g transform={`translate(20,${52 + i * 46})`}&gt;&#10;            &lt;circle cx='14' cy='14' r='13' fill='#2B7A3D' /&gt;&#10;            &lt;text x='14' y='19' textAnchor='middle' fill='#FFFFFF' fontSize='13' fontWeight='bold'&gt;{r[0]}&lt;/text&gt;&#10;            &lt;text x='38' y='19' fill='#4A5568' fontSize='12'&gt;{r[1]}&lt;/text&gt;&#10;          &lt;/g&gt;&#10;        ))}&#10;        &lt;rect x='20' y='272' width='328' height='20' rx='4' fill='#FFFFFF' /&gt;&#10;        &lt;text x='30' y='287' fill='#2B7A3D' fontSize='11'&gt;Time budget: 30 minutes, inside M2.&lt;/text&gt;&#10;      &lt;/g&gt;&#10;&#10;      &lt;g transform='translate(812,34)'&gt;&#10;        &lt;rect x='0' y='0' width='368' height='300' rx='8' fill='#FFF6E0' stroke='#FFC107' strokeWidth='2' /&gt;&#10;        &lt;text x='20' y='30' fill='#996F00' fontSize='15' fontWeight='bold'&gt;What it costs if you model well&lt;/text&gt;&#10;        &lt;text x='20' y='62' fill='#4A5568' fontSize='12'&gt;A good analysis model makes a&lt;/text&gt;&#10;        &lt;text x='20' y='80' fill='#4A5568' fontSize='12'&gt;change local: two or three boxes&lt;/text&gt;&#10;        &lt;text x='20' y='98' fill='#4A5568' fontSize='12'&gt;move, and nothing else does.&lt;/text&gt;&#10;        &lt;line x1='20' y1='118' x2='348' y2='118' stroke='#E8D9A8' strokeWidth='1' /&gt;&#10;        &lt;text x='20' y='142' fill='#996F00' fontSize='12' fontWeight='bold'&gt;A bad one makes it global:&lt;/text&gt;&#10;        &lt;text x='20' y='164' fill='#4A5568' fontSize='12'&gt;you redraw the diagram, rewrite&lt;/text&gt;&#10;        &lt;text x='20' y='182' fill='#4A5568' fontSize='12'&gt;the specifications, and re-do&lt;/text&gt;&#10;        &lt;text x='20' y='200' fill='#4A5568' fontSize='12'&gt;the sequence diagrams.&lt;/text&gt;&#10;        &lt;rect x='20' y='218' width='328' height='64' rx='6' fill='#FFFFFF' /&gt;&#10;        &lt;text x='34' y='242' fill='#D9534F' fontSize='11.5' fontWeight='bold'&gt;Three injections is the test.&lt;/text&gt;&#10;        &lt;text x='34' y='260' fill='#4A5568' fontSize='11.5'&gt;If the first one costs you a day,&lt;/text&gt;&#10;        &lt;text x='34' y='276' fill='#4A5568' fontSize='11.5'&gt;the model was not finished yet.&lt;/text&gt;&#10;      &lt;/g&gt;&#10;    &lt;/svg&gt;&#10;  &lt;/Box&gt;&#10;  &lt;Box style={{ height: 34, padding: '0 40px', flexDirection: 'row', alignItems: 'center', justifyContent: 'space-between' }}&gt;&#10;    &lt;Text style={{ fontSize: 13, color: '#8B97A8' }}&gt;ISAD · Fall 2026 · The change is not the test. How far the change travels through your model is the test&lt;/Text&gt;&#10;    &lt;Text style={{ fontSize: 14, color: '#1E4FA8', fontWeight: 'bold' }}&gt;34 / 39&lt;/Text&gt;&#10;  &lt;/Box&gt;&#10;&lt;/Slide&gt;&#10;"/>
         <p:cNvGrpSpPr/>
         <p:nvPr/>
       </p:nvGrpSpPr>
@@ -27369,7 +26769,7 @@
       </p:grpSpPr>
       <p:sp>
         <p:nvSpPr>
-          <p:cNvPr id="614" name=""/>
+          <p:cNvPr id="598" name=""/>
           <p:cNvSpPr/>
           <p:nvPr/>
         </p:nvSpPr>
@@ -27393,7 +26793,7 @@
       </p:sp>
       <p:sp>
         <p:nvSpPr>
-          <p:cNvPr id="615" name=""/>
+          <p:cNvPr id="599" name=""/>
           <p:cNvSpPr/>
           <p:nvPr/>
         </p:nvSpPr>
@@ -27417,7 +26817,7 @@
       </p:sp>
       <p:sp>
         <p:nvSpPr>
-          <p:cNvPr id="616" name="" descr="{&quot;isTemplate&quot;:true,&quot;type&quot;:&quot;text&quot;}"/>
+          <p:cNvPr id="600" name="" descr="{&quot;isTemplate&quot;:true,&quot;type&quot;:&quot;text&quot;}"/>
           <p:cNvSpPr txBox="1"/>
           <p:nvPr/>
         </p:nvSpPr>
@@ -27452,14 +26852,14 @@
       </p:sp>
       <p:sp>
         <p:nvSpPr>
-          <p:cNvPr id="617" name="" descr="{&quot;isTemplate&quot;:true,&quot;type&quot;:&quot;text&quot;}"/>
-          <p:cNvSpPr txBox="1"/>
-          <p:nvPr/>
-        </p:nvSpPr>
-        <p:spPr>
-          <a:xfrm rot="0" flipH="0" flipV="0">
-            <a:off x="10458450" y="257175"/>
-            <a:ext cx="1352550" cy="171450"/>
+          <p:cNvPr id="601" name="" descr="{&quot;isTemplate&quot;:true,&quot;type&quot;:&quot;text&quot;}"/>
+          <p:cNvSpPr txBox="1"/>
+          <p:nvPr/>
+        </p:nvSpPr>
+        <p:spPr>
+          <a:xfrm rot="0" flipH="0" flipV="0">
+            <a:off x="9886950" y="257175"/>
+            <a:ext cx="1924050" cy="171450"/>
           </a:xfrm>
           <a:prstGeom prst="rect"/>
         </p:spPr>
@@ -27479,22 +26879,22 @@
                 <a:latin typeface="Microsoft YaHei"/>
                 <a:ea typeface="Microsoft YaHei"/>
               </a:rPr>
-              <a:t>W06 · CHANGE ΔC1</a:t>
-            </a:r>
-            <a:endParaRPr/>
-          </a:p>
-        </p:txBody>
-      </p:sp>
-      <p:sp>
-        <p:nvSpPr>
-          <p:cNvPr id="618" name="" descr="{&quot;isTemplate&quot;:true,&quot;type&quot;:&quot;text&quot;}"/>
+              <a:t>W06 · CHANGE INJECTIONS</a:t>
+            </a:r>
+            <a:endParaRPr/>
+          </a:p>
+        </p:txBody>
+      </p:sp>
+      <p:sp>
+        <p:nvSpPr>
+          <p:cNvPr id="602" name="" descr="{&quot;isTemplate&quot;:true,&quot;type&quot;:&quot;text&quot;}"/>
           <p:cNvSpPr txBox="1"/>
           <p:nvPr/>
         </p:nvSpPr>
         <p:spPr>
           <a:xfrm rot="0" flipH="0" flipV="0">
             <a:off x="381000" y="809625"/>
-            <a:ext cx="4533900" cy="333375"/>
+            <a:ext cx="5410200" cy="333375"/>
           </a:xfrm>
           <a:prstGeom prst="rect"/>
         </p:spPr>
@@ -27514,15 +26914,15 @@
                 <a:latin typeface="Microsoft YaHei"/>
                 <a:ea typeface="Microsoft YaHei"/>
               </a:rPr>
-              <a:t>ΔC1 — The Change Arrives Online</a:t>
-            </a:r>
-            <a:endParaRPr/>
-          </a:p>
-        </p:txBody>
-      </p:sp>
-      <p:sp>
-        <p:nvSpPr>
-          <p:cNvPr id="619" name="" descr="{&quot;isTemplate&quot;:true,&quot;type&quot;:&quot;text&quot;}"/>
+              <a:t>Change Injections — Only Two This Term</a:t>
+            </a:r>
+            <a:endParaRPr/>
+          </a:p>
+        </p:txBody>
+      </p:sp>
+      <p:sp>
+        <p:nvSpPr>
+          <p:cNvPr id="603" name="" descr="{&quot;isTemplate&quot;:true,&quot;type&quot;:&quot;text&quot;}"/>
           <p:cNvSpPr txBox="1"/>
           <p:nvPr/>
         </p:nvSpPr>
@@ -27549,7 +26949,7 @@
                 <a:latin typeface="Microsoft YaHei"/>
                 <a:ea typeface="Microsoft YaHei"/>
               </a:rPr>
-              <a:t>34 / 38</a:t>
+              <a:t>34 / 39</a:t>
             </a:r>
             <a:endParaRPr/>
           </a:p>
@@ -27557,7 +26957,7 @@
       </p:sp>
       <p:pic>
         <p:nvPicPr>
-          <p:cNvPr id="620" name=""/>
+          <p:cNvPr id="604" name=""/>
           <p:cNvPicPr>
             <a:picLocks noChangeAspect="1"/>
           </p:cNvPicPr>
@@ -27588,7 +26988,7 @@
       </p:pic>
       <p:sp>
         <p:nvSpPr>
-          <p:cNvPr id="621" name="" descr="{&quot;isTemplate&quot;:true,&quot;type&quot;:&quot;text&quot;}"/>
+          <p:cNvPr id="605" name="" descr="{&quot;isTemplate&quot;:true,&quot;type&quot;:&quot;text&quot;}"/>
           <p:cNvSpPr txBox="1"/>
           <p:nvPr/>
         </p:nvSpPr>
@@ -27623,7 +27023,7 @@
       </p:sp>
       <p:sp>
         <p:nvSpPr>
-          <p:cNvPr id="622" name="" descr="{&quot;isTemplate&quot;:true,&quot;type&quot;:&quot;text&quot;}"/>
+          <p:cNvPr id="606" name="" descr="{&quot;isTemplate&quot;:true,&quot;type&quot;:&quot;text&quot;}"/>
           <p:cNvSpPr txBox="1"/>
           <p:nvPr/>
         </p:nvSpPr>
@@ -27650,7 +27050,7 @@
                 <a:latin typeface="Microsoft YaHei"/>
                 <a:ea typeface="Microsoft YaHei"/>
               </a:rPr>
-              <a:t>34 / 38</a:t>
+              <a:t>34 / 39</a:t>
             </a:r>
             <a:endParaRPr/>
           </a:p>
@@ -27666,7 +27066,7 @@
   <p:cSld>
     <p:spTree>
       <p:nvGrpSpPr>
-        <p:cNvPr id="623" name="" descr="&lt;Slide style={{ background: '#FFFFFF', padding: 0 }}&gt;&#10;  &lt;Box style={{ height: 72, background: '#1E4FA8', padding: '0 40px', flexDirection: 'row', alignItems: 'center', justifyContent: 'space-between' }}&gt;&#10;    &lt;Text style={{ fontSize: 15, color: '#B9CDF0', letterSpacing: 1 }}&gt;ISAD · INFORMATION SYSTEMS ANALYSIS &amp;amp; DESIGN&lt;/Text&gt;&#10;    &lt;Text style={{ fontSize: 15, color: '#B9CDF0' }}&gt;W06 · CHANGE ΔC1&lt;/Text&gt;&#10;  &lt;/Box&gt;&#10;  &lt;Box style={{ padding: '13px 40px 0 40px', flexDirection: 'row', alignItems: 'center', justifyContent: 'space-between' }}&gt;&#10;    &lt;Text style={{ fontSize: 29, fontWeight: 'bold', color: '#0E3F8C' }}&gt;Folding ΔC1 In Without Restarting&lt;/Text&gt;&#10;    &lt;Text style={{ fontSize: 14, color: '#1E4FA8', fontWeight: 'bold' }}&gt;35 / 38&lt;/Text&gt;&#10;  &lt;/Box&gt;&#10;  &lt;Box style={{ flex: 1, padding: '10px 40px 0 40px' }}&gt;&#10;    &lt;Table&#10;      style={{ width: '100%', height: '100%' }}&#10;      defaultTextStyle={{ fontSize: 13, textAlign: 'left', color: '#1A2230' }}&#10;      defaultCellStyle={{&#10;        border: {&#10;          left: { width: 1, color: '#E5E7EB' },&#10;          right: { width: 1, color: '#E5E7EB' },&#10;          top: { width: 1, color: '#E5E7EB' },&#10;          bottom: { width: 1, color: '#E5E7EB' },&#10;        },&#10;      }}&#10;      cells={[&#10;        [&#10;          { text: 'The change says', textStyle: { bold: true, color: '#FFFFFF', fontSize: 14 }, cellStyle: { background: { color: '#0E3F8C' } } },&#10;          { text: 'It touches', textStyle: { bold: true, color: '#FFFFFF', fontSize: 14 }, cellStyle: { background: { color: '#1E4FA8' } } },&#10;          { text: 'You write down', textStyle: { bold: true, color: '#FFFFFF', fontSize: 14 }, cellStyle: { background: { color: '#2B5793' } } },&#10;        ],&#10;        [&#10;          { text: '“Students may rate the courier, not only the restaurant.”', textStyle: { bold: true, color: '#0E3F8C' }, cellStyle: { background: { color: '#F7F9FC' } } },&#10;          { text: 'Rating (new entity) · Courier (already there)', textStyle: { color: '#4A5568' }, cellStyle: { background: { color: '#F7F9FC' } } },&#10;          { text: 'Rating is a new class with a target; Courier gains no new attribute. Two boxes touched.', textStyle: { color: '#4A5568' }, cellStyle: { background: { color: '#F7F9FC' } } },&#10;        ],&#10;        [&#10;          { text: '“Restaurants may print the kitchen ticket themselves.”', textStyle: { bold: true, color: '#0E3F8C' } },&#10;          { text: 'KitchenDisplay (existing boundary)', textStyle: { color: '#4A5568' } },&#10;          { text: 'One association added. No new class — the boundary was already there from page 17.', textStyle: { color: '#4A5568' } },&#10;        ],&#10;        [&#10;          { text: '“Orders can be scheduled for tomorrow.”', textStyle: { bold: true, color: '#0E3F8C' }, cellStyle: { background: { color: '#F7F9FC' } } },&#10;          { text: 'Order.state gains a value · DeliveryWindow', textStyle: { color: '#4A5568' }, cellStyle: { background: { color: '#F7F9FC' } } },&#10;          { text: 'No new class at all. But the W09 state machine gains a state, so plan for it.', textStyle: { color: '#4A5568' }, cellStyle: { background: { color: '#F7F9FC' } } },&#10;        ],&#10;        [&#10;          { text: '“The campus card centre becomes an actor.”', textStyle: { bold: true, color: '#0E3F8C' } },&#10;          { text: 'Use case diagram, not the domain model', textStyle: { color: '#4A5568' } },&#10;          { text: 'Nothing to change here — and that is a perfectly good answer.', textStyle: { color: '#4A5568' } },&#10;        ],&#10;        [&#10;          { text: 'Where the response goes', textStyle: { bold: true, color: '#0E3F8C' }, cellStyle: { background: { color: '#F7F9FC' } } },&#10;          { text: 'changes/C1-response.md', textStyle: { color: '#1E4FA8', fontWeight: 'bold' }, cellStyle: { background: { color: '#F7F9FC' } } },&#10;          { text: 'One short paragraph per change: what it touches, what you changed, what you decided not to change.', textStyle: { color: '#4A5568' }, cellStyle: { background: { color: '#F7F9FC' } } },&#10;        ],&#10;      ]}&#10;    /&gt;&#10;  &lt;/Box&gt;&#10;  &lt;Box style={{ height: 46, background: '#0E3F8C', padding: '0 40px', flexDirection: 'row', alignItems: 'center', justifyContent: 'center' }}&gt;&#10;    &lt;Text style={{ fontSize: 16.5, color: '#FFFFFF', fontWeight: '600' }}&gt;“Nothing to change here” is a legitimate finding. Writing it down is what makes it a finding.&lt;/Text&gt;&#10;  &lt;/Box&gt;&#10;&lt;/Slide&gt;&#10;"/>
+        <p:cNvPr id="607" name="" descr="&lt;Slide style={{ background: '#FFFFFF', padding: 0 }}&gt;&#10;  &lt;Box style={{ height: 72, background: '#1E4FA8', padding: '0 40px', flexDirection: 'row', alignItems: 'center', justifyContent: 'space-between' }}&gt;&#10;    &lt;Text style={{ fontSize: 15, color: '#B9CDF0', letterSpacing: 1 }}&gt;ISAD · INFORMATION SYSTEMS ANALYSIS &amp;amp; DESIGN&lt;/Text&gt;&#10;    &lt;Text style={{ fontSize: 15, color: '#B9CDF0' }}&gt;W06 · CHANGE INJECTIONS&lt;/Text&gt;&#10;  &lt;/Box&gt;&#10;  &lt;Box style={{ padding: '13px 40px 0 40px', flexDirection: 'row', alignItems: 'center', justifyContent: 'space-between' }}&gt;&#10;    &lt;Text style={{ fontSize: 29, fontWeight: 'bold', color: '#0E3F8C' }}&gt;Folding ΔC1 In Without Restarting&lt;/Text&gt;&#10;    &lt;Text style={{ fontSize: 14, color: '#1E4FA8', fontWeight: 'bold' }}&gt;35 / 39&lt;/Text&gt;&#10;  &lt;/Box&gt;&#10;  &lt;Box style={{ flex: 1, padding: '10px 40px 0 40px' }}&gt;&#10;    &lt;Table&#10;      style={{ width: '100%', height: '100%' }}&#10;      defaultTextStyle={{ fontSize: 13, textAlign: 'left', color: '#1A2230' }}&#10;      defaultCellStyle={{&#10;        border: {&#10;          left: { width: 1, color: '#E5E7EB' },&#10;          right: { width: 1, color: '#E5E7EB' },&#10;          top: { width: 1, color: '#E5E7EB' },&#10;          bottom: { width: 1, color: '#E5E7EB' },&#10;        },&#10;      }}&#10;      cells={[&#10;        [&#10;          { text: 'The change says', textStyle: { bold: true, color: '#FFFFFF', fontSize: 14 }, cellStyle: { background: { color: '#0E3F8C' } } },&#10;          { text: 'It touches', textStyle: { bold: true, color: '#FFFFFF', fontSize: 14 }, cellStyle: { background: { color: '#1E4FA8' } } },&#10;          { text: 'You write down', textStyle: { bold: true, color: '#FFFFFF', fontSize: 14 }, cellStyle: { background: { color: '#2B5793' } } },&#10;        ],&#10;        [&#10;          { text: '“Students may rate the courier, not only the restaurant.”', textStyle: { bold: true, color: '#0E3F8C' }, cellStyle: { background: { color: '#F7F9FC' } } },&#10;          { text: 'Rating (new entity) · Courier (already there)', textStyle: { color: '#4A5568' }, cellStyle: { background: { color: '#F7F9FC' } } },&#10;          { text: 'Rating is a new class with a target; Courier gains no new attribute. Two boxes touched.', textStyle: { color: '#4A5568' }, cellStyle: { background: { color: '#F7F9FC' } } },&#10;        ],&#10;        [&#10;          { text: '“Restaurants may print the kitchen ticket themselves.”', textStyle: { bold: true, color: '#0E3F8C' } },&#10;          { text: 'KitchenDisplay (existing boundary)', textStyle: { color: '#4A5568' } },&#10;          { text: 'One association added. No new class — the boundary was already there from page 17.', textStyle: { color: '#4A5568' } },&#10;        ],&#10;        [&#10;          { text: '“Orders can be scheduled for tomorrow.”', textStyle: { bold: true, color: '#0E3F8C' }, cellStyle: { background: { color: '#F7F9FC' } } },&#10;          { text: 'Order.state gains a value · DeliveryWindow', textStyle: { color: '#4A5568' }, cellStyle: { background: { color: '#F7F9FC' } } },&#10;          { text: 'No new class at all. But the W09 state machine gains a state, so plan for it.', textStyle: { color: '#4A5568' }, cellStyle: { background: { color: '#F7F9FC' } } },&#10;        ],&#10;        [&#10;          { text: '“The campus card centre becomes an actor.”', textStyle: { bold: true, color: '#0E3F8C' } },&#10;          { text: 'Use case diagram, not the domain model', textStyle: { color: '#4A5568' } },&#10;          { text: 'Nothing to change here — and that is a perfectly good answer.', textStyle: { color: '#4A5568' } },&#10;        ],&#10;        [&#10;          { text: 'Where the response goes', textStyle: { bold: true, color: '#0E3F8C' }, cellStyle: { background: { color: '#F7F9FC' } } },&#10;          { text: 'changes/C1-response.md', textStyle: { color: '#1E4FA8', fontWeight: 'bold' }, cellStyle: { background: { color: '#F7F9FC' } } },&#10;          { text: 'One short paragraph per change: what it touches, what you changed, what you decided not to change.', textStyle: { color: '#4A5568' }, cellStyle: { background: { color: '#F7F9FC' } } },&#10;        ],&#10;      ]}&#10;    /&gt;&#10;  &lt;/Box&gt;&#10;  &lt;Box style={{ height: 46, background: '#0E3F8C', padding: '0 40px', flexDirection: 'row', alignItems: 'center', justifyContent: 'center' }}&gt;&#10;    &lt;Text style={{ fontSize: 16.5, color: '#FFFFFF', fontWeight: '600' }}&gt;“Nothing to change here” is a legitimate finding. Writing it down is what makes it a finding.&lt;/Text&gt;&#10;  &lt;/Box&gt;&#10;&lt;/Slide&gt;&#10;"/>
         <p:cNvGrpSpPr/>
         <p:nvPr/>
       </p:nvGrpSpPr>
@@ -27680,7 +27080,7 @@
       </p:grpSpPr>
       <p:sp>
         <p:nvSpPr>
-          <p:cNvPr id="624" name=""/>
+          <p:cNvPr id="608" name=""/>
           <p:cNvSpPr/>
           <p:nvPr/>
         </p:nvSpPr>
@@ -27704,7 +27104,7 @@
       </p:sp>
       <p:sp>
         <p:nvSpPr>
-          <p:cNvPr id="625" name=""/>
+          <p:cNvPr id="609" name=""/>
           <p:cNvSpPr/>
           <p:nvPr/>
         </p:nvSpPr>
@@ -27728,7 +27128,7 @@
       </p:sp>
       <p:sp>
         <p:nvSpPr>
-          <p:cNvPr id="626" name="" descr="{&quot;isTemplate&quot;:true,&quot;type&quot;:&quot;text&quot;}"/>
+          <p:cNvPr id="610" name="" descr="{&quot;isTemplate&quot;:true,&quot;type&quot;:&quot;text&quot;}"/>
           <p:cNvSpPr txBox="1"/>
           <p:nvPr/>
         </p:nvSpPr>
@@ -27763,14 +27163,14 @@
       </p:sp>
       <p:sp>
         <p:nvSpPr>
-          <p:cNvPr id="627" name="" descr="{&quot;isTemplate&quot;:true,&quot;type&quot;:&quot;text&quot;}"/>
-          <p:cNvSpPr txBox="1"/>
-          <p:nvPr/>
-        </p:nvSpPr>
-        <p:spPr>
-          <a:xfrm rot="0" flipH="0" flipV="0">
-            <a:off x="10458450" y="257175"/>
-            <a:ext cx="1352550" cy="171450"/>
+          <p:cNvPr id="611" name="" descr="{&quot;isTemplate&quot;:true,&quot;type&quot;:&quot;text&quot;}"/>
+          <p:cNvSpPr txBox="1"/>
+          <p:nvPr/>
+        </p:nvSpPr>
+        <p:spPr>
+          <a:xfrm rot="0" flipH="0" flipV="0">
+            <a:off x="9886950" y="257175"/>
+            <a:ext cx="1924050" cy="171450"/>
           </a:xfrm>
           <a:prstGeom prst="rect"/>
         </p:spPr>
@@ -27790,15 +27190,15 @@
                 <a:latin typeface="Microsoft YaHei"/>
                 <a:ea typeface="Microsoft YaHei"/>
               </a:rPr>
-              <a:t>W06 · CHANGE ΔC1</a:t>
-            </a:r>
-            <a:endParaRPr/>
-          </a:p>
-        </p:txBody>
-      </p:sp>
-      <p:sp>
-        <p:nvSpPr>
-          <p:cNvPr id="628" name="" descr="{&quot;isTemplate&quot;:true,&quot;type&quot;:&quot;text&quot;}"/>
+              <a:t>W06 · CHANGE INJECTIONS</a:t>
+            </a:r>
+            <a:endParaRPr/>
+          </a:p>
+        </p:txBody>
+      </p:sp>
+      <p:sp>
+        <p:nvSpPr>
+          <p:cNvPr id="612" name="" descr="{&quot;isTemplate&quot;:true,&quot;type&quot;:&quot;text&quot;}"/>
           <p:cNvSpPr txBox="1"/>
           <p:nvPr/>
         </p:nvSpPr>
@@ -27833,7 +27233,7 @@
       </p:sp>
       <p:sp>
         <p:nvSpPr>
-          <p:cNvPr id="629" name="" descr="{&quot;isTemplate&quot;:true,&quot;type&quot;:&quot;text&quot;}"/>
+          <p:cNvPr id="613" name="" descr="{&quot;isTemplate&quot;:true,&quot;type&quot;:&quot;text&quot;}"/>
           <p:cNvSpPr txBox="1"/>
           <p:nvPr/>
         </p:nvSpPr>
@@ -27860,7 +27260,7 @@
                 <a:latin typeface="Microsoft YaHei"/>
                 <a:ea typeface="Microsoft YaHei"/>
               </a:rPr>
-              <a:t>35 / 38</a:t>
+              <a:t>35 / 39</a:t>
             </a:r>
             <a:endParaRPr/>
           </a:p>
@@ -27868,7 +27268,7 @@
       </p:sp>
       <p:graphicFrame>
         <p:nvGraphicFramePr>
-          <p:cNvPr id="630" name=""/>
+          <p:cNvPr id="614" name=""/>
           <p:cNvGraphicFramePr/>
           <p:nvPr/>
         </p:nvGraphicFramePr>
@@ -28688,7 +28088,7 @@
       </p:graphicFrame>
       <p:sp>
         <p:nvSpPr>
-          <p:cNvPr id="631" name=""/>
+          <p:cNvPr id="615" name=""/>
           <p:cNvSpPr/>
           <p:nvPr/>
         </p:nvSpPr>
@@ -28712,7 +28112,7 @@
       </p:sp>
       <p:sp>
         <p:nvSpPr>
-          <p:cNvPr id="632" name="" descr="{&quot;isTemplate&quot;:true,&quot;type&quot;:&quot;text&quot;}"/>
+          <p:cNvPr id="616" name="" descr="{&quot;isTemplate&quot;:true,&quot;type&quot;:&quot;text&quot;}"/>
           <p:cNvSpPr txBox="1"/>
           <p:nvPr/>
         </p:nvSpPr>
@@ -28755,7 +28155,7 @@
   <p:cSld>
     <p:spTree>
       <p:nvGrpSpPr>
-        <p:cNvPr id="633" name="" descr="&lt;Slide style={{ background: '#FFFFFF', padding: 0 }}&gt;&#10;  &lt;Box style={{ height: 72, background: '#1E4FA8', padding: '0 40px', flexDirection: 'row', alignItems: 'center', justifyContent: 'space-between' }}&gt;&#10;    &lt;Text style={{ fontSize: 15, color: '#B9CDF0', letterSpacing: 1 }}&gt;ISAD · INFORMATION SYSTEMS ANALYSIS &amp;amp; DESIGN&lt;/Text&gt;&#10;    &lt;Text style={{ fontSize: 15, color: '#B9CDF0' }}&gt;W06 · LOOKING AHEAD&lt;/Text&gt;&#10;  &lt;/Box&gt;&#10;  &lt;Box style={{ padding: '13px 40px 0 40px', flexDirection: 'row', alignItems: 'center', justifyContent: 'space-between' }}&gt;&#10;    &lt;Text style={{ fontSize: 29, fontWeight: 'bold', color: '#0E3F8C' }}&gt;Where This Week Goes Next&lt;/Text&gt;&#10;    &lt;Text style={{ fontSize: 14, color: '#1E4FA8', fontWeight: 'bold' }}&gt;36 / 38&lt;/Text&gt;&#10;  &lt;/Box&gt;&#10;  &lt;Box style={{ flex: 1, padding: '10px 40px 0 40px', flexDirection: 'row', gap: 24 }}&gt;&#10;    &lt;Box style={{ flex: 1, flexDirection: 'column', gap: 12 }}&gt;&#10;      &lt;Box style={{ padding: '16px 19px', background: '#F0F5FC', borderRadius: 10, borderLeft: '4px solid #1E4FA8' }}&gt;&#10;        &lt;Text style={{ fontSize: 16.5, fontWeight: 'bold', color: '#0E3F8C' }}&gt;Homework&lt;/Text&gt;&#10;        &lt;Text style={{ fontSize: 13, color: '#4A5568', lineHeight: 1.65, marginTop: 6 }}&gt;&#10;          Finish `domain-model-v1.puml` so that every class has at least one attribute and one operation traceable to a W05 specification sentence. Commit both the source and the PNG.&#10;        &lt;/Text&gt;&#10;      &lt;/Box&gt;&#10;      &lt;Box style={{ padding: '16px 19px', background: '#FFFFFF', borderRadius: 10, border: '1px solid #D6DCE5' }}&gt;&#10;        &lt;Text style={{ fontSize: 16.5, fontWeight: 'bold', color: '#0E3F8C' }}&gt;Read&lt;/Text&gt;&#10;        &lt;Text style={{ fontSize: 13, color: '#4A5568', lineHeight: 1.65, marginTop: 6 }}&gt;&#10;          Larman on domain modeling — conceptual classes, and the three rooms. Also skim association and multiplicity, because next week is entirely about them.&#10;        &lt;/Text&gt;&#10;      &lt;/Box&gt;&#10;      &lt;Box style={{ padding: '16px 19px', background: '#FFF6E0', borderRadius: 10, borderLeft: '4px solid #FFC107' }}&gt;&#10;        &lt;Text style={{ fontSize: 16.5, fontWeight: 'bold', color: '#996F00' }}&gt;Also&lt;/Text&gt;&#10;        &lt;Text style={{ fontSize: 13, color: '#4A5568', lineHeight: 1.65, marginTop: 6 }}&gt;&#10;          Check the `changes/` folder for ΔC1, and start `changes/C1-response.md`. Thirty minutes, and it counts towards M2.&#10;        &lt;/Text&gt;&#10;      &lt;/Box&gt;&#10;    &lt;/Box&gt;&#10;    &lt;Box style={{ width: 470, justifyContent: 'center' }}&gt;&#10;      &lt;Box style={{ padding: '20px 22px', background: '#0E3F8C', borderRadius: 10 }}&gt;&#10;        &lt;Text style={{ fontSize: 14, color: '#7FA2D6', letterSpacing: 2, marginBottom: 12 }}&gt;NEXT WEEK · W07&lt;/Text&gt;&#10;        &lt;Text style={{ fontSize: 32, fontWeight: 'bold', color: '#FFFFFF', fontFamily: 'Georgia, serif', lineHeight: 1.2 }}&gt;&#10;          Domain Relationships&#10;        &lt;/Text&gt;&#10;        &lt;Box style={{ width: 60, height: 4, background: '#FFC107', marginTop: 16, marginBottom: 18 }} /&gt;&#10;        &lt;Text style={{ fontSize: 15, color: '#C5D4EA', lineHeight: 1.6 }}&gt;&#10;          The lines you drew today are still rough. Next week you say how many — and which end owns the whole.&#10;        &lt;/Text&gt;&#10;        &lt;Box style={{ marginTop: 18, paddingTop: 16, borderTop: '1px solid #2B5793' }}&gt;&#10;          {[&#10;            'Multiplicities: 1, 0..*, 1..*',&#10;            'Aggregation vs. composition — and the difference that matters',&#10;            'Attributes that turn out to be classes',&#10;            'M1 client review happens in this week’s class',&#10;          ].map((t) =&gt; (&#10;            &lt;Box key={t} style={{ flexDirection: 'row', alignItems: 'center', gap: 10, marginBottom: 8 }}&gt;&#10;              &lt;Box style={{ width: 6, height: 6, borderRadius: 3, background: '#3D7BD9' }} /&gt;&#10;              &lt;Text style={{ fontSize: 14.5, color: '#C5D4EA' }}&gt;{t}&lt;/Text&gt;&#10;            &lt;/Box&gt;&#10;          ))}&#10;        &lt;/Box&gt;&#10;        &lt;Box style={{ marginTop: 14, paddingTop: 14, borderTop: '1px solid #2B5793' }}&gt;&#10;          &lt;Text style={{ fontSize: 13, color: '#7FA2D6', letterSpacing: 1, marginBottom: 6 }}&gt;REMINDER&lt;/Text&gt;&#10;          &lt;Text style={{ fontSize: 14.5, color: '#FFFFFF', lineHeight: 1.5 }}&gt;&#10;            The instructor plays the client. Bring your questions from the M1 review.&#10;          &lt;/Text&gt;&#10;        &lt;/Box&gt;&#10;      &lt;/Box&gt;&#10;    &lt;/Box&gt;&#10;  &lt;/Box&gt;&#10;  &lt;Box style={{ height: 46, background: '#0E3F8C', padding: '0 40px', flexDirection: 'row', alignItems: 'center', justifyContent: 'center' }}&gt;&#10;    &lt;Text style={{ fontSize: 16.5, color: '#FFFFFF', fontWeight: '600' }}&gt;Finish the model, answer the change, and bring your questions — next week the client is in the room&lt;/Text&gt;&#10;  &lt;/Box&gt;&#10;&lt;/Slide&gt;&#10;"/>
+        <p:cNvPr id="617" name="" descr="&lt;Slide style={{ background: '#FFFFFF', padding: 0 }}&gt;&#10;  &lt;Box style={{ height: 72, background: '#1E4FA8', padding: '0 40px', flexDirection: 'row', alignItems: 'center', justifyContent: 'space-between' }}&gt;&#10;    &lt;Text style={{ fontSize: 15, color: '#B9CDF0', letterSpacing: 1 }}&gt;ISAD · INFORMATION SYSTEMS ANALYSIS &amp;amp; DESIGN&lt;/Text&gt;&#10;    &lt;Text style={{ fontSize: 15, color: '#B9CDF0' }}&gt;W06 · LOOKING AHEAD&lt;/Text&gt;&#10;  &lt;/Box&gt;&#10;  &lt;Box style={{ padding: '13px 40px 0 40px', flexDirection: 'row', alignItems: 'center', justifyContent: 'space-between' }}&gt;&#10;    &lt;Text style={{ fontSize: 29, fontWeight: 'bold', color: '#0E3F8C' }}&gt;Where This Week Goes Next&lt;/Text&gt;&#10;    &lt;Text style={{ fontSize: 14, color: '#1E4FA8', fontWeight: 'bold' }}&gt;36 / 39&lt;/Text&gt;&#10;  &lt;/Box&gt;&#10;  &lt;Box style={{ flex: 1, padding: '10px 40px 0 40px', flexDirection: 'row', gap: 24 }}&gt;&#10;    &lt;Box style={{ flex: 1, flexDirection: 'column', gap: 12 }}&gt;&#10;      &lt;Box style={{ padding: '16px 19px', background: '#F0F5FC', borderRadius: 10, borderLeft: '4px solid #1E4FA8' }}&gt;&#10;        &lt;Text style={{ fontSize: 16.5, fontWeight: 'bold', color: '#0E3F8C' }}&gt;Homework&lt;/Text&gt;&#10;        &lt;Text style={{ fontSize: 13, color: '#4A5568', lineHeight: 1.65, marginTop: 6 }}&gt;&#10;          Write the other five open decisions — one line each, naming what you would need in order to decide. Extend your requirements list for M1: use case diagram plus two detailed specifications.&#10;        &lt;/Text&gt;&#10;      &lt;/Box&gt;&#10;      &lt;Box style={{ padding: '16px 19px', background: '#FFFFFF', borderRadius: 10, border: '1px solid #D6DCE5' }}&gt;&#10;        &lt;Text style={{ fontSize: 16.5, fontWeight: 'bold', color: '#0E3F8C' }}&gt;Read&lt;/Text&gt;&#10;        &lt;Text style={{ fontSize: 13, color: '#4A5568', lineHeight: 1.65, marginTop: 6 }}&gt;&#10;          Larman chapter 4 — the nine-field use case template. Also skim association and multiplicity, because next week is entirely about them.&#10;        &lt;/Text&gt;&#10;      &lt;/Box&gt;&#10;      &lt;Box style={{ padding: '16px 19px', background: '#FFF6E0', borderRadius: 10, borderLeft: '4px solid #FFC107' }}&gt;&#10;        &lt;Text style={{ fontSize: 16.5, fontWeight: 'bold', color: '#996F00' }}&gt;Also&lt;/Text&gt;&#10;        &lt;Text style={{ fontSize: 13, color: '#4A5568', lineHeight: 1.65, marginTop: 6 }}&gt;&#10;          Bring your M1 questions — the client review is next week, and the instructor plays the client.&#10;        &lt;/Text&gt;&#10;      &lt;/Box&gt;&#10;    &lt;/Box&gt;&#10;    &lt;Box style={{ width: 470, justifyContent: 'center' }}&gt;&#10;      &lt;Box style={{ padding: '20px 22px', background: '#0E3F8C', borderRadius: 10 }}&gt;&#10;        &lt;Text style={{ fontSize: 14, color: '#7FA2D6', letterSpacing: 2, marginBottom: 12 }}&gt;NEXT WEEK · W07&lt;/Text&gt;&#10;        &lt;Text style={{ fontSize: 32, fontWeight: 'bold', color: '#FFFFFF', fontFamily: 'Georgia, serif', lineHeight: 1.2 }}&gt;&#10;          Domain Relationships&#10;        &lt;/Text&gt;&#10;        &lt;Box style={{ width: 60, height: 4, background: '#FFC107', marginTop: 16, marginBottom: 18 }} /&gt;&#10;        &lt;Text style={{ fontSize: 15, color: '#C5D4EA', lineHeight: 1.6 }}&gt;&#10;          The lines you drew today are still rough. Next week you say how many — and which end owns the whole.&#10;        &lt;/Text&gt;&#10;        &lt;Box style={{ marginTop: 18, paddingTop: 16, borderTop: '1px solid #2B5793' }}&gt;&#10;          {[&#10;            'Multiplicities: 1, 0..*, 1..*',&#10;            'Aggregation vs. composition — and the difference that matters',&#10;            'Attributes that turn out to be classes',&#10;            'The M1 client review happens in this week’s class',&#10;          ].map((t) =&gt; (&#10;            &lt;Box key={t} style={{ flexDirection: 'row', alignItems: 'center', gap: 10, marginBottom: 8 }}&gt;&#10;              &lt;Box style={{ width: 6, height: 6, borderRadius: 3, background: '#3D7BD9' }} /&gt;&#10;              &lt;Text style={{ fontSize: 14.5, color: '#C5D4EA' }}&gt;{t}&lt;/Text&gt;&#10;            &lt;/Box&gt;&#10;          ))}&#10;        &lt;/Box&gt;&#10;        &lt;Box style={{ marginTop: 14, paddingTop: 14, borderTop: '1px solid #2B5793' }}&gt;&#10;          &lt;Text style={{ fontSize: 13, color: '#7FA2D6', letterSpacing: 1, marginBottom: 6 }}&gt;REMINDER&lt;/Text&gt;&#10;          &lt;Text style={{ fontSize: 14.5, color: '#FFFFFF', lineHeight: 1.5 }}&gt;&#10;            The instructor plays the client. Bring your questions from the M1 review.&#10;          &lt;/Text&gt;&#10;        &lt;/Box&gt;&#10;      &lt;/Box&gt;&#10;    &lt;/Box&gt;&#10;  &lt;/Box&gt;&#10;  &lt;Box style={{ height: 46, background: '#0E3F8C', padding: '0 40px', flexDirection: 'row', alignItems: 'center', justifyContent: 'center' }}&gt;&#10;    &lt;Text style={{ fontSize: 16.5, color: '#FFFFFF', fontWeight: '600' }}&gt;Finish the model, answer the change, and bring your questions — next week the client is in the room&lt;/Text&gt;&#10;  &lt;/Box&gt;&#10;&lt;/Slide&gt;&#10;"/>
         <p:cNvGrpSpPr/>
         <p:nvPr/>
       </p:nvGrpSpPr>
@@ -28769,7 +28169,7 @@
       </p:grpSpPr>
       <p:sp>
         <p:nvSpPr>
-          <p:cNvPr id="634" name=""/>
+          <p:cNvPr id="618" name=""/>
           <p:cNvSpPr/>
           <p:nvPr/>
         </p:nvSpPr>
@@ -28793,7 +28193,7 @@
       </p:sp>
       <p:sp>
         <p:nvSpPr>
-          <p:cNvPr id="635" name=""/>
+          <p:cNvPr id="619" name=""/>
           <p:cNvSpPr/>
           <p:nvPr/>
         </p:nvSpPr>
@@ -28817,7 +28217,7 @@
       </p:sp>
       <p:sp>
         <p:nvSpPr>
-          <p:cNvPr id="636" name="" descr="{&quot;isTemplate&quot;:true,&quot;type&quot;:&quot;text&quot;}"/>
+          <p:cNvPr id="620" name="" descr="{&quot;isTemplate&quot;:true,&quot;type&quot;:&quot;text&quot;}"/>
           <p:cNvSpPr txBox="1"/>
           <p:nvPr/>
         </p:nvSpPr>
@@ -28852,7 +28252,7 @@
       </p:sp>
       <p:sp>
         <p:nvSpPr>
-          <p:cNvPr id="637" name="" descr="{&quot;isTemplate&quot;:true,&quot;type&quot;:&quot;text&quot;}"/>
+          <p:cNvPr id="621" name="" descr="{&quot;isTemplate&quot;:true,&quot;type&quot;:&quot;text&quot;}"/>
           <p:cNvSpPr txBox="1"/>
           <p:nvPr/>
         </p:nvSpPr>
@@ -28887,7 +28287,7 @@
       </p:sp>
       <p:sp>
         <p:nvSpPr>
-          <p:cNvPr id="638" name="" descr="{&quot;isTemplate&quot;:true,&quot;type&quot;:&quot;text&quot;}"/>
+          <p:cNvPr id="622" name="" descr="{&quot;isTemplate&quot;:true,&quot;type&quot;:&quot;text&quot;}"/>
           <p:cNvSpPr txBox="1"/>
           <p:nvPr/>
         </p:nvSpPr>
@@ -28922,7 +28322,7 @@
       </p:sp>
       <p:sp>
         <p:nvSpPr>
-          <p:cNvPr id="639" name="" descr="{&quot;isTemplate&quot;:true,&quot;type&quot;:&quot;text&quot;}"/>
+          <p:cNvPr id="623" name="" descr="{&quot;isTemplate&quot;:true,&quot;type&quot;:&quot;text&quot;}"/>
           <p:cNvSpPr txBox="1"/>
           <p:nvPr/>
         </p:nvSpPr>
@@ -28949,15 +28349,15 @@
                 <a:latin typeface="Microsoft YaHei"/>
                 <a:ea typeface="Microsoft YaHei"/>
               </a:rPr>
-              <a:t>36 / 38</a:t>
-            </a:r>
-            <a:endParaRPr/>
-          </a:p>
-        </p:txBody>
-      </p:sp>
-      <p:sp>
-        <p:nvSpPr>
-          <p:cNvPr id="640" name=""/>
+              <a:t>36 / 39</a:t>
+            </a:r>
+            <a:endParaRPr/>
+          </a:p>
+        </p:txBody>
+      </p:sp>
+      <p:sp>
+        <p:nvSpPr>
+          <p:cNvPr id="624" name=""/>
           <p:cNvSpPr/>
           <p:nvPr/>
         </p:nvSpPr>
@@ -28983,7 +28383,7 @@
       </p:sp>
       <p:sp>
         <p:nvSpPr>
-          <p:cNvPr id="641" name=""/>
+          <p:cNvPr id="625" name=""/>
           <p:cNvSpPr/>
           <p:nvPr/>
         </p:nvSpPr>
@@ -29040,7 +28440,7 @@
       </p:sp>
       <p:sp>
         <p:nvSpPr>
-          <p:cNvPr id="642" name="" descr="{&quot;isTemplate&quot;:true,&quot;type&quot;:&quot;text&quot;}"/>
+          <p:cNvPr id="626" name="" descr="{&quot;isTemplate&quot;:true,&quot;type&quot;:&quot;text&quot;}"/>
           <p:cNvSpPr txBox="1"/>
           <p:nvPr/>
         </p:nvSpPr>
@@ -29075,7 +28475,7 @@
       </p:sp>
       <p:sp>
         <p:nvSpPr>
-          <p:cNvPr id="643" name="" descr="{&quot;isTemplate&quot;:true,&quot;type&quot;:&quot;text&quot;}"/>
+          <p:cNvPr id="627" name="" descr="{&quot;isTemplate&quot;:true,&quot;type&quot;:&quot;text&quot;}"/>
           <p:cNvSpPr txBox="1"/>
           <p:nvPr/>
         </p:nvSpPr>
@@ -29104,15 +28504,15 @@
                 <a:latin typeface="Microsoft YaHei"/>
                 <a:ea typeface="Microsoft YaHei"/>
               </a:rPr>
-              <a:t>Finish `domain-model-v1.puml` so that every class has at least one attribute and one operation traceable to a W05 specification sentence. Commit both the source and the PNG.</a:t>
-            </a:r>
-            <a:endParaRPr/>
-          </a:p>
-        </p:txBody>
-      </p:sp>
-      <p:sp>
-        <p:nvSpPr>
-          <p:cNvPr id="644" name=""/>
+              <a:t>Write the other five open decisions — one line each, naming what you would need in order to decide. Extend your requirements list for M1: use case diagram plus two detailed specifications.</a:t>
+            </a:r>
+            <a:endParaRPr/>
+          </a:p>
+        </p:txBody>
+      </p:sp>
+      <p:sp>
+        <p:nvSpPr>
+          <p:cNvPr id="628" name=""/>
           <p:cNvSpPr/>
           <p:nvPr/>
         </p:nvSpPr>
@@ -29143,7 +28543,7 @@
       </p:sp>
       <p:sp>
         <p:nvSpPr>
-          <p:cNvPr id="645" name="" descr="{&quot;isTemplate&quot;:true,&quot;type&quot;:&quot;text&quot;}"/>
+          <p:cNvPr id="629" name="" descr="{&quot;isTemplate&quot;:true,&quot;type&quot;:&quot;text&quot;}"/>
           <p:cNvSpPr txBox="1"/>
           <p:nvPr/>
         </p:nvSpPr>
@@ -29178,7 +28578,7 @@
       </p:sp>
       <p:sp>
         <p:nvSpPr>
-          <p:cNvPr id="646" name="" descr="{&quot;isTemplate&quot;:true,&quot;type&quot;:&quot;text&quot;}"/>
+          <p:cNvPr id="630" name="" descr="{&quot;isTemplate&quot;:true,&quot;type&quot;:&quot;text&quot;}"/>
           <p:cNvSpPr txBox="1"/>
           <p:nvPr/>
         </p:nvSpPr>
@@ -29207,26 +28607,26 @@
                 <a:latin typeface="Microsoft YaHei"/>
                 <a:ea typeface="Microsoft YaHei"/>
               </a:rPr>
-              <a:t>Larman on domain modeling — conceptual classes, and the three rooms. Also skim association and multiplicity, because next week is entirely about them.</a:t>
-            </a:r>
-            <a:endParaRPr/>
-          </a:p>
-        </p:txBody>
-      </p:sp>
-      <p:sp>
-        <p:nvSpPr>
-          <p:cNvPr id="647" name=""/>
+              <a:t>Larman chapter 4 — the nine-field use case template. Also skim association and multiplicity, because next week is entirely about them.</a:t>
+            </a:r>
+            <a:endParaRPr/>
+          </a:p>
+        </p:txBody>
+      </p:sp>
+      <p:sp>
+        <p:nvSpPr>
+          <p:cNvPr id="631" name=""/>
           <p:cNvSpPr/>
           <p:nvPr/>
         </p:nvSpPr>
         <p:spPr>
           <a:xfrm rot="0" flipH="0" flipV="0">
             <a:off x="419100" y="3562350"/>
-            <a:ext cx="6724650" cy="1047750"/>
+            <a:ext cx="6724650" cy="800100"/>
           </a:xfrm>
           <a:prstGeom prst="roundRect">
             <a:avLst>
-              <a:gd name="adj" fmla="val 9091"/>
+              <a:gd name="adj" fmla="val 11905"/>
             </a:avLst>
           </a:prstGeom>
           <a:solidFill>
@@ -29241,18 +28641,18 @@
       </p:sp>
       <p:sp>
         <p:nvSpPr>
-          <p:cNvPr id="648" name=""/>
+          <p:cNvPr id="632" name=""/>
           <p:cNvSpPr/>
           <p:nvPr/>
         </p:nvSpPr>
         <p:spPr>
           <a:xfrm rot="0" flipH="0" flipV="0">
             <a:off x="419100" y="3562350"/>
-            <a:ext cx="6724650" cy="1047750"/>
+            <a:ext cx="6724650" cy="800100"/>
           </a:xfrm>
           <a:custGeom>
             <a:pathLst>
-              <a:path w="706" h="110">
+              <a:path w="706" h="84">
                 <a:moveTo>
                   <a:pt x="9" y="0"/>
                 </a:moveTo>
@@ -29262,17 +28662,17 @@
                   <a:pt x="4" y="6"/>
                 </a:cubicBezTo>
                 <a:lnTo>
-                  <a:pt x="4" y="104"/>
+                  <a:pt x="4" y="78"/>
                 </a:lnTo>
                 <a:cubicBezTo>
-                  <a:pt x="4" y="107"/>
-                  <a:pt x="6" y="109"/>
-                  <a:pt x="9" y="110"/>
+                  <a:pt x="4" y="81"/>
+                  <a:pt x="6" y="83"/>
+                  <a:pt x="9" y="84"/>
                 </a:cubicBezTo>
                 <a:cubicBezTo>
-                  <a:pt x="4" y="109"/>
-                  <a:pt x="0" y="105"/>
-                  <a:pt x="0" y="100"/>
+                  <a:pt x="4" y="83"/>
+                  <a:pt x="0" y="79"/>
+                  <a:pt x="0" y="74"/>
                 </a:cubicBezTo>
                 <a:lnTo>
                   <a:pt x="0" y="10"/>
@@ -29298,7 +28698,7 @@
       </p:sp>
       <p:sp>
         <p:nvSpPr>
-          <p:cNvPr id="649" name="" descr="{&quot;isTemplate&quot;:true,&quot;type&quot;:&quot;text&quot;}"/>
+          <p:cNvPr id="633" name="" descr="{&quot;isTemplate&quot;:true,&quot;type&quot;:&quot;text&quot;}"/>
           <p:cNvSpPr txBox="1"/>
           <p:nvPr/>
         </p:nvSpPr>
@@ -29333,21 +28733,19 @@
       </p:sp>
       <p:sp>
         <p:nvSpPr>
-          <p:cNvPr id="650" name="" descr="{&quot;isTemplate&quot;:true,&quot;type&quot;:&quot;text&quot;}"/>
+          <p:cNvPr id="634" name="" descr="{&quot;isTemplate&quot;:true,&quot;type&quot;:&quot;text&quot;}"/>
           <p:cNvSpPr txBox="1"/>
           <p:nvPr/>
         </p:nvSpPr>
         <p:spPr>
           <a:xfrm rot="0" flipH="0" flipV="0">
             <a:off x="600075" y="3962400"/>
-            <a:ext cx="6324600" cy="495300"/>
-          </a:xfrm>
-          <a:prstGeom prst="rect"/>
-        </p:spPr>
-        <p:txBody>
-          <a:bodyPr wrap="square" lIns="0" tIns="0" rIns="0" bIns="0">
-            <a:normAutofit/>
-          </a:bodyPr>
+            <a:ext cx="6324600" cy="247650"/>
+          </a:xfrm>
+          <a:prstGeom prst="rect"/>
+        </p:spPr>
+        <p:txBody>
+          <a:bodyPr wrap="none" lIns="0" tIns="0" rIns="0" bIns="0"/>
           <a:p>
             <a:pPr>
               <a:lnSpc>
@@ -29362,15 +28760,15 @@
                 <a:latin typeface="Microsoft YaHei"/>
                 <a:ea typeface="Microsoft YaHei"/>
               </a:rPr>
-              <a:t>Check the `changes/` folder for ΔC1, and start `changes/C1-response.md`. Thirty minutes, and it counts towards M2.</a:t>
-            </a:r>
-            <a:endParaRPr/>
-          </a:p>
-        </p:txBody>
-      </p:sp>
-      <p:sp>
-        <p:nvSpPr>
-          <p:cNvPr id="651" name=""/>
+              <a:t>Bring your M1 questions — the client review is next week, and the instructor plays the client.</a:t>
+            </a:r>
+            <a:endParaRPr/>
+          </a:p>
+        </p:txBody>
+      </p:sp>
+      <p:sp>
+        <p:nvSpPr>
+          <p:cNvPr id="635" name=""/>
           <p:cNvSpPr/>
           <p:nvPr/>
         </p:nvSpPr>
@@ -29396,7 +28794,7 @@
       </p:sp>
       <p:sp>
         <p:nvSpPr>
-          <p:cNvPr id="652" name="" descr="{&quot;isTemplate&quot;:true,&quot;type&quot;:&quot;text&quot;}"/>
+          <p:cNvPr id="636" name="" descr="{&quot;isTemplate&quot;:true,&quot;type&quot;:&quot;text&quot;}"/>
           <p:cNvSpPr txBox="1"/>
           <p:nvPr/>
         </p:nvSpPr>
@@ -29431,7 +28829,7 @@
       </p:sp>
       <p:sp>
         <p:nvSpPr>
-          <p:cNvPr id="653" name="" descr="{&quot;isTemplate&quot;:true,&quot;type&quot;:&quot;text&quot;}"/>
+          <p:cNvPr id="637" name="" descr="{&quot;isTemplate&quot;:true,&quot;type&quot;:&quot;text&quot;}"/>
           <p:cNvSpPr txBox="1"/>
           <p:nvPr/>
         </p:nvSpPr>
@@ -29466,7 +28864,7 @@
       </p:sp>
       <p:sp>
         <p:nvSpPr>
-          <p:cNvPr id="654" name=""/>
+          <p:cNvPr id="638" name=""/>
           <p:cNvSpPr/>
           <p:nvPr/>
         </p:nvSpPr>
@@ -29490,7 +28888,7 @@
       </p:sp>
       <p:sp>
         <p:nvSpPr>
-          <p:cNvPr id="655" name="" descr="{&quot;isTemplate&quot;:true,&quot;type&quot;:&quot;text&quot;}"/>
+          <p:cNvPr id="639" name="" descr="{&quot;isTemplate&quot;:true,&quot;type&quot;:&quot;text&quot;}"/>
           <p:cNvSpPr txBox="1"/>
           <p:nvPr/>
         </p:nvSpPr>
@@ -29527,7 +28925,7 @@
       </p:sp>
       <p:sp>
         <p:nvSpPr>
-          <p:cNvPr id="656" name=""/>
+          <p:cNvPr id="640" name=""/>
           <p:cNvSpPr/>
           <p:nvPr/>
         </p:nvSpPr>
@@ -29567,7 +28965,7 @@
       </p:sp>
       <p:sp>
         <p:nvSpPr>
-          <p:cNvPr id="657" name=""/>
+          <p:cNvPr id="641" name=""/>
           <p:cNvSpPr/>
           <p:nvPr/>
         </p:nvSpPr>
@@ -29593,7 +28991,7 @@
       </p:sp>
       <p:sp>
         <p:nvSpPr>
-          <p:cNvPr id="658" name="" descr="{&quot;isTemplate&quot;:true,&quot;type&quot;:&quot;text&quot;}"/>
+          <p:cNvPr id="642" name="" descr="{&quot;isTemplate&quot;:true,&quot;type&quot;:&quot;text&quot;}"/>
           <p:cNvSpPr txBox="1"/>
           <p:nvPr/>
         </p:nvSpPr>
@@ -29628,7 +29026,7 @@
       </p:sp>
       <p:sp>
         <p:nvSpPr>
-          <p:cNvPr id="659" name=""/>
+          <p:cNvPr id="643" name=""/>
           <p:cNvSpPr/>
           <p:nvPr/>
         </p:nvSpPr>
@@ -29654,7 +29052,7 @@
       </p:sp>
       <p:sp>
         <p:nvSpPr>
-          <p:cNvPr id="660" name="" descr="{&quot;isTemplate&quot;:true,&quot;type&quot;:&quot;text&quot;}"/>
+          <p:cNvPr id="644" name="" descr="{&quot;isTemplate&quot;:true,&quot;type&quot;:&quot;text&quot;}"/>
           <p:cNvSpPr txBox="1"/>
           <p:nvPr/>
         </p:nvSpPr>
@@ -29689,7 +29087,7 @@
       </p:sp>
       <p:sp>
         <p:nvSpPr>
-          <p:cNvPr id="661" name=""/>
+          <p:cNvPr id="645" name=""/>
           <p:cNvSpPr/>
           <p:nvPr/>
         </p:nvSpPr>
@@ -29715,7 +29113,7 @@
       </p:sp>
       <p:sp>
         <p:nvSpPr>
-          <p:cNvPr id="662" name="" descr="{&quot;isTemplate&quot;:true,&quot;type&quot;:&quot;text&quot;}"/>
+          <p:cNvPr id="646" name="" descr="{&quot;isTemplate&quot;:true,&quot;type&quot;:&quot;text&quot;}"/>
           <p:cNvSpPr txBox="1"/>
           <p:nvPr/>
         </p:nvSpPr>
@@ -29750,7 +29148,7 @@
       </p:sp>
       <p:sp>
         <p:nvSpPr>
-          <p:cNvPr id="663" name=""/>
+          <p:cNvPr id="647" name=""/>
           <p:cNvSpPr/>
           <p:nvPr/>
         </p:nvSpPr>
@@ -29776,14 +29174,14 @@
       </p:sp>
       <p:sp>
         <p:nvSpPr>
-          <p:cNvPr id="664" name="" descr="{&quot;isTemplate&quot;:true,&quot;type&quot;:&quot;text&quot;}"/>
+          <p:cNvPr id="648" name="" descr="{&quot;isTemplate&quot;:true,&quot;type&quot;:&quot;text&quot;}"/>
           <p:cNvSpPr txBox="1"/>
           <p:nvPr/>
         </p:nvSpPr>
         <p:spPr>
           <a:xfrm rot="0" flipH="0" flipV="0">
             <a:off x="7696200" y="4572000"/>
-            <a:ext cx="2771775" cy="171450"/>
+            <a:ext cx="3048000" cy="171450"/>
           </a:xfrm>
           <a:prstGeom prst="rect"/>
         </p:spPr>
@@ -29803,15 +29201,15 @@
                 <a:latin typeface="Microsoft YaHei"/>
                 <a:ea typeface="Microsoft YaHei"/>
               </a:rPr>
-              <a:t>M1 client review happens in this week’s class</a:t>
-            </a:r>
-            <a:endParaRPr/>
-          </a:p>
-        </p:txBody>
-      </p:sp>
-      <p:sp>
-        <p:nvSpPr>
-          <p:cNvPr id="665" name=""/>
+              <a:t>The M1 client review happens in this week’s class</a:t>
+            </a:r>
+            <a:endParaRPr/>
+          </a:p>
+        </p:txBody>
+      </p:sp>
+      <p:sp>
+        <p:nvSpPr>
+          <p:cNvPr id="649" name=""/>
           <p:cNvSpPr/>
           <p:nvPr/>
         </p:nvSpPr>
@@ -29851,7 +29249,7 @@
       </p:sp>
       <p:sp>
         <p:nvSpPr>
-          <p:cNvPr id="666" name="" descr="{&quot;isTemplate&quot;:true,&quot;type&quot;:&quot;text&quot;}"/>
+          <p:cNvPr id="650" name="" descr="{&quot;isTemplate&quot;:true,&quot;type&quot;:&quot;text&quot;}"/>
           <p:cNvSpPr txBox="1"/>
           <p:nvPr/>
         </p:nvSpPr>
@@ -29886,7 +29284,7 @@
       </p:sp>
       <p:sp>
         <p:nvSpPr>
-          <p:cNvPr id="667" name="" descr="{&quot;isTemplate&quot;:true,&quot;type&quot;:&quot;text&quot;}"/>
+          <p:cNvPr id="651" name="" descr="{&quot;isTemplate&quot;:true,&quot;type&quot;:&quot;text&quot;}"/>
           <p:cNvSpPr txBox="1"/>
           <p:nvPr/>
         </p:nvSpPr>
@@ -29923,7 +29321,7 @@
       </p:sp>
       <p:sp>
         <p:nvSpPr>
-          <p:cNvPr id="668" name=""/>
+          <p:cNvPr id="652" name=""/>
           <p:cNvSpPr/>
           <p:nvPr/>
         </p:nvSpPr>
@@ -29947,7 +29345,7 @@
       </p:sp>
       <p:sp>
         <p:nvSpPr>
-          <p:cNvPr id="669" name="" descr="{&quot;isTemplate&quot;:true,&quot;type&quot;:&quot;text&quot;}"/>
+          <p:cNvPr id="653" name="" descr="{&quot;isTemplate&quot;:true,&quot;type&quot;:&quot;text&quot;}"/>
           <p:cNvSpPr txBox="1"/>
           <p:nvPr/>
         </p:nvSpPr>
@@ -29990,7 +29388,7 @@
   <p:cSld>
     <p:spTree>
       <p:nvGrpSpPr>
-        <p:cNvPr id="670" name="" descr="&lt;Slide style={{ background: '#FFFFFF', padding: 0 }}&gt;&#10;  &lt;Box style={{ height: 72, background: '#1E4FA8', padding: '0 40px', flexDirection: 'row', alignItems: 'center', justifyContent: 'space-between' }}&gt;&#10;    &lt;Text style={{ fontSize: 15, color: '#B9CDF0', letterSpacing: 1 }}&gt;ISAD · INFORMATION SYSTEMS ANALYSIS &amp;amp; DESIGN&lt;/Text&gt;&#10;    &lt;Text style={{ fontSize: 15, color: '#B9CDF0' }}&gt;W06 · WRAP-UP&lt;/Text&gt;&#10;  &lt;/Box&gt;&#10;  &lt;Box style={{ padding: '13px 40px 0 40px', flexDirection: 'row', alignItems: 'center', justifyContent: 'space-between' }}&gt;&#10;    &lt;Text style={{ fontSize: 29, fontWeight: 'bold', color: '#0E3F8C' }}&gt;Five Things To Take Home&lt;/Text&gt;&#10;    &lt;Text style={{ fontSize: 14, color: '#1E4FA8', fontWeight: 'bold' }}&gt;37 / 38&lt;/Text&gt;&#10;  &lt;/Box&gt;&#10;  &lt;Box style={{ flex: 1, padding: '10px 40px 0 40px' }}&gt;&#10;    &lt;Table&#10;      style={{ width: '100%', height: '100%' }}&#10;      defaultTextStyle={{ fontSize: 14, textAlign: 'left', color: '#1A2230' }}&#10;      defaultCellStyle={{&#10;        border: {&#10;          left: { width: 1, color: '#E5E7EB' },&#10;          right: { width: 1, color: '#E5E7EB' },&#10;          top: { width: 1, color: '#E5E7EB' },&#10;          bottom: { width: 1, color: '#E5E7EB' },&#10;        },&#10;      }}&#10;      cells={[&#10;        [&#10;          { text: '#', textStyle: { bold: true, color: '#FFFFFF', fontSize: 15 }, cellStyle: { background: { color: '#0E3F8C' } } },&#10;          { text: 'The sentence', textStyle: { bold: true, color: '#FFFFFF', fontSize: 15 }, cellStyle: { background: { color: '#1E4FA8' } } },&#10;          { text: 'Why it is the one to remember', textStyle: { bold: true, color: '#FFFFFF', fontSize: 15 }, cellStyle: { background: { color: '#2B5793' } } },&#10;        ],&#10;        [&#10;          { text: '01', textStyle: { bold: true, color: '#0E3F8C', fontSize: 16 }, cellStyle: { background: { color: '#F7F9FC' } } },&#10;          { text: 'If you can point at it, it is a class.', textStyle: { bold: true, color: '#1A2230' }, cellStyle: { background: { color: '#F7F9FC' } } },&#10;          { text: 'It settles in one sentence most arguments that otherwise take ten minutes.', textStyle: { color: '#4A5568' }, cellStyle: { background: { color: '#F7F9FC' } } },&#10;        ],&#10;        [&#10;          { text: '02', textStyle: { bold: true, color: '#0E3F8C', fontSize: 16 } },&#10;          { text: 'A class with no sentence behind it is a guess.', textStyle: { bold: true, color: '#1A2230' } },&#10;          { text: 'Guesses become tables you cannot change. Traceability is the discipline.', textStyle: { color: '#4A5568' } },&#10;        ],&#10;        [&#10;          { text: '03', textStyle: { bold: true, color: '#0E3F8C', fontSize: 16 }, cellStyle: { background: { color: '#F7F9FC' } } },&#10;          { text: 'Entity, Boundary, Control — one kind each, no exceptions.', textStyle: { bold: true, color: '#1A2230' }, cellStyle: { background: { color: '#F7F9FC' } } },&#10;          { text: 'A box you cannot classify is a box whose responsibility nobody agreed on.', textStyle: { color: '#4A5568' }, cellStyle: { background: { color: '#F7F9FC' } } },&#10;        ],&#10;        [&#10;          { text: '04', textStyle: { bold: true, color: '#0E3F8C', fontSize: 16 } },&#10;          { text: 'If it would survive a language change, it belongs in this model.', textStyle: { bold: true, color: '#1A2230' } },&#10;          { text: 'Service, Manager, DTO and Table are W10 words arriving two weeks early.', textStyle: { color: '#4A5568' } },&#10;        ],&#10;        [&#10;          { text: '05', textStyle: { bold: true, color: '#0E3F8C', fontSize: 16 }, cellStyle: { background: { color: '#F7F9FC' } } },&#10;          { text: 'The words you throw away matter as much as the ones you keep.', textStyle: { bold: true, color: '#1A2230' }, cellStyle: { background: { color: '#F7F9FC' } } },&#10;          { text: 'Discarding server, service and table is how you know where the boundary is.', textStyle: { color: '#4A5568' }, cellStyle: { background: { color: '#F7F9FC' } } },&#10;        ],&#10;      ]}&#10;    /&gt;&#10;  &lt;/Box&gt;&#10;  &lt;Box style={{ height: 46, background: '#0E3F8C', padding: '0 40px', flexDirection: 'row', alignItems: 'center', justifyContent: 'center' }}&gt;&#10;    &lt;Text style={{ fontSize: 16.5, color: '#FFFFFF', fontWeight: '600' }}&gt;If you remember only one of these, make it 01. It is the question that ends the argument.&lt;/Text&gt;&#10;  &lt;/Box&gt;&#10;&lt;/Slide&gt;&#10;"/>
+        <p:cNvPr id="654" name="" descr="&lt;Slide style={{ background: '#FFFFFF', padding: 0 }}&gt;&#10;  &lt;Box style={{ height: 72, background: '#1E4FA8', padding: '0 40px', flexDirection: 'row', alignItems: 'center', justifyContent: 'space-between' }}&gt;&#10;    &lt;Text style={{ fontSize: 15, color: '#B9CDF0', letterSpacing: 1 }}&gt;ISAD · INFORMATION SYSTEMS ANALYSIS &amp;amp; DESIGN&lt;/Text&gt;&#10;    &lt;Text style={{ fontSize: 15, color: '#B9CDF0' }}&gt;W06 · WRAP-UP&lt;/Text&gt;&#10;  &lt;/Box&gt;&#10;  &lt;Box style={{ padding: '13px 40px 0 40px', flexDirection: 'row', alignItems: 'center', justifyContent: 'space-between' }}&gt;&#10;    &lt;Text style={{ fontSize: 29, fontWeight: 'bold', color: '#0E3F8C' }}&gt;Five Things To Take Home&lt;/Text&gt;&#10;    &lt;Text style={{ fontSize: 14, color: '#1E4FA8', fontWeight: 'bold' }}&gt;37 / 39&lt;/Text&gt;&#10;  &lt;/Box&gt;&#10;  &lt;Box style={{ flex: 1, padding: '10px 40px 0 40px' }}&gt;&#10;    &lt;Table&#10;      style={{ width: '100%', height: '100%' }}&#10;      defaultTextStyle={{ fontSize: 14, textAlign: 'left', color: '#1A2230' }}&#10;      defaultCellStyle={{&#10;        border: {&#10;          left: { width: 1, color: '#E5E7EB' },&#10;          right: { width: 1, color: '#E5E7EB' },&#10;          top: { width: 1, color: '#E5E7EB' },&#10;          bottom: { width: 1, color: '#E5E7EB' },&#10;        },&#10;      }}&#10;      cells={[&#10;        [&#10;          { text: '#', textStyle: { bold: true, color: '#FFFFFF', fontSize: 15 }, cellStyle: { background: { color: '#0E3F8C' } } },&#10;          { text: 'The sentence', textStyle: { bold: true, color: '#FFFFFF', fontSize: 15 }, cellStyle: { background: { color: '#1E4FA8' } } },&#10;          { text: 'Why it is the one to remember', textStyle: { bold: true, color: '#FFFFFF', fontSize: 15 }, cellStyle: { background: { color: '#2B5793' } } },&#10;        ],&#10;        [&#10;          { text: '01', textStyle: { bold: true, color: '#0E3F8C', fontSize: 16 }, cellStyle: { background: { color: '#F7F9FC' } } },&#10;          { text: 'If you can point at it, it is a class.', textStyle: { bold: true, color: '#1A2230' }, cellStyle: { background: { color: '#F7F9FC' } } },&#10;          { text: 'It settles in one sentence most arguments that otherwise take ten minutes.', textStyle: { color: '#4A5568' }, cellStyle: { background: { color: '#F7F9FC' } } },&#10;        ],&#10;        [&#10;          { text: '02', textStyle: { bold: true, color: '#0E3F8C', fontSize: 16 } },&#10;          { text: 'A class with no sentence behind it is a guess.', textStyle: { bold: true, color: '#1A2230' } },&#10;          { text: 'Guesses become tables you cannot change. Traceability is the discipline.', textStyle: { color: '#4A5568' } },&#10;        ],&#10;        [&#10;          { text: '03', textStyle: { bold: true, color: '#0E3F8C', fontSize: 16 }, cellStyle: { background: { color: '#F7F9FC' } } },&#10;          { text: 'Entity, Boundary, Control — one kind each, no exceptions.', textStyle: { bold: true, color: '#1A2230' }, cellStyle: { background: { color: '#F7F9FC' } } },&#10;          { text: 'A box you cannot classify is a box whose responsibility nobody agreed on.', textStyle: { color: '#4A5568' }, cellStyle: { background: { color: '#F7F9FC' } } },&#10;        ],&#10;        [&#10;          { text: '04', textStyle: { bold: true, color: '#0E3F8C', fontSize: 16 } },&#10;          { text: 'If it would survive a language change, it belongs in this model.', textStyle: { bold: true, color: '#1A2230' } },&#10;          { text: 'Service, Manager, DTO and Table are W10 words arriving two weeks early.', textStyle: { color: '#4A5568' } },&#10;        ],&#10;        [&#10;          { text: '05', textStyle: { bold: true, color: '#0E3F8C', fontSize: 16 }, cellStyle: { background: { color: '#F7F9FC' } } },&#10;          { text: 'The words you throw away matter as much as the ones you keep.', textStyle: { bold: true, color: '#1A2230' }, cellStyle: { background: { color: '#F7F9FC' } } },&#10;          { text: 'Discarding server, service and table is how you know where the boundary is.', textStyle: { color: '#4A5568' }, cellStyle: { background: { color: '#F7F9FC' } } },&#10;        ],&#10;      ]}&#10;    /&gt;&#10;  &lt;/Box&gt;&#10;  &lt;Box style={{ height: 46, background: '#0E3F8C', padding: '0 40px', flexDirection: 'row', alignItems: 'center', justifyContent: 'center' }}&gt;&#10;    &lt;Text style={{ fontSize: 16.5, color: '#FFFFFF', fontWeight: '600' }}&gt;If you remember only one of these, make it 01. It is the question that ends the argument.&lt;/Text&gt;&#10;  &lt;/Box&gt;&#10;&lt;/Slide&gt;&#10;"/>
         <p:cNvGrpSpPr/>
         <p:nvPr/>
       </p:nvGrpSpPr>
@@ -30004,7 +29402,7 @@
       </p:grpSpPr>
       <p:sp>
         <p:nvSpPr>
-          <p:cNvPr id="671" name=""/>
+          <p:cNvPr id="655" name=""/>
           <p:cNvSpPr/>
           <p:nvPr/>
         </p:nvSpPr>
@@ -30028,7 +29426,7 @@
       </p:sp>
       <p:sp>
         <p:nvSpPr>
-          <p:cNvPr id="672" name=""/>
+          <p:cNvPr id="656" name=""/>
           <p:cNvSpPr/>
           <p:nvPr/>
         </p:nvSpPr>
@@ -30052,7 +29450,7 @@
       </p:sp>
       <p:sp>
         <p:nvSpPr>
-          <p:cNvPr id="673" name="" descr="{&quot;isTemplate&quot;:true,&quot;type&quot;:&quot;text&quot;}"/>
+          <p:cNvPr id="657" name="" descr="{&quot;isTemplate&quot;:true,&quot;type&quot;:&quot;text&quot;}"/>
           <p:cNvSpPr txBox="1"/>
           <p:nvPr/>
         </p:nvSpPr>
@@ -30087,7 +29485,7 @@
       </p:sp>
       <p:sp>
         <p:nvSpPr>
-          <p:cNvPr id="674" name="" descr="{&quot;isTemplate&quot;:true,&quot;type&quot;:&quot;text&quot;}"/>
+          <p:cNvPr id="658" name="" descr="{&quot;isTemplate&quot;:true,&quot;type&quot;:&quot;text&quot;}"/>
           <p:cNvSpPr txBox="1"/>
           <p:nvPr/>
         </p:nvSpPr>
@@ -30122,7 +29520,7 @@
       </p:sp>
       <p:sp>
         <p:nvSpPr>
-          <p:cNvPr id="675" name="" descr="{&quot;isTemplate&quot;:true,&quot;type&quot;:&quot;text&quot;}"/>
+          <p:cNvPr id="659" name="" descr="{&quot;isTemplate&quot;:true,&quot;type&quot;:&quot;text&quot;}"/>
           <p:cNvSpPr txBox="1"/>
           <p:nvPr/>
         </p:nvSpPr>
@@ -30157,7 +29555,7 @@
       </p:sp>
       <p:sp>
         <p:nvSpPr>
-          <p:cNvPr id="676" name="" descr="{&quot;isTemplate&quot;:true,&quot;type&quot;:&quot;text&quot;}"/>
+          <p:cNvPr id="660" name="" descr="{&quot;isTemplate&quot;:true,&quot;type&quot;:&quot;text&quot;}"/>
           <p:cNvSpPr txBox="1"/>
           <p:nvPr/>
         </p:nvSpPr>
@@ -30184,7 +29582,7 @@
                 <a:latin typeface="Microsoft YaHei"/>
                 <a:ea typeface="Microsoft YaHei"/>
               </a:rPr>
-              <a:t>37 / 38</a:t>
+              <a:t>37 / 39</a:t>
             </a:r>
             <a:endParaRPr/>
           </a:p>
@@ -30192,7 +29590,7 @@
       </p:sp>
       <p:graphicFrame>
         <p:nvGraphicFramePr>
-          <p:cNvPr id="677" name=""/>
+          <p:cNvPr id="661" name=""/>
           <p:cNvGraphicFramePr/>
           <p:nvPr/>
         </p:nvGraphicFramePr>
@@ -31012,7 +30410,7 @@
       </p:graphicFrame>
       <p:sp>
         <p:nvSpPr>
-          <p:cNvPr id="678" name=""/>
+          <p:cNvPr id="662" name=""/>
           <p:cNvSpPr/>
           <p:nvPr/>
         </p:nvSpPr>
@@ -31036,7 +30434,7 @@
       </p:sp>
       <p:sp>
         <p:nvSpPr>
-          <p:cNvPr id="679" name="" descr="{&quot;isTemplate&quot;:true,&quot;type&quot;:&quot;text&quot;}"/>
+          <p:cNvPr id="663" name="" descr="{&quot;isTemplate&quot;:true,&quot;type&quot;:&quot;text&quot;}"/>
           <p:cNvSpPr txBox="1"/>
           <p:nvPr/>
         </p:nvSpPr>
@@ -31079,7 +30477,7 @@
   <p:cSld>
     <p:spTree>
       <p:nvGrpSpPr>
-        <p:cNvPr id="680" name="" descr="&lt;Slide style={{ background: '#0E3F8C', padding: 0 }}&gt;&#10;  &lt;Box style={{ flexDirection: 'column', height: '100%', position: 'relative', padding: '0 80px', justifyContent: 'center' }}&gt;&#10;    &lt;Box style={{ position: 'absolute', top: 0, left: 0, right: 0, height: 8, background: '#1E4FA8' }} /&gt;&#10;    &lt;Text style={{ fontSize: 15, color: '#7FA2D6', letterSpacing: 2, marginBottom: 16 }}&gt;WEEK 06 · WHAT YOU TAKE AWAY&lt;/Text&gt;&#10;    &lt;Text style={{ fontSize: 44, fontWeight: 'bold', color: '#FFFFFF', fontFamily: 'Georgia, serif', lineHeight: 1.15 }}&gt;&#10;      Sentences become boxes.&#10;      &lt;br /&gt;&#10;      Boxes must survive Monday.&#10;    &lt;/Text&gt;&#10;    &lt;Box style={{ width: 88, height: 5, background: '#FFC107', marginTop: 24, marginBottom: 26 }} /&gt;&#10;    &lt;Box style={{ flexDirection: 'row', flexWrap: 'wrap', gap: '12px 28px', marginBottom: 30 }}&gt;&#10;      {[&#10;        '01 · Identity decides class vs. attribute',&#10;        '02 · Every class traces to a W05 sentence',&#10;        '03 · Ten classes is a floor, not a quota',&#10;        '04 · Entity, Boundary, Control — no fourth kind',&#10;        '05 · Associations today, multiplicities in W07',&#10;        '06 · ΔC1 is live: fold it in, do not restart',&#10;      ].map((t) =&gt; (&#10;        &lt;Box key={t} style={{ flexDirection: 'row', alignItems: 'center', gap: 10, width: '48%' }}&gt;&#10;          &lt;Box style={{ width: 7, height: 7, borderRadius: 4, background: '#3D7BD9' }} /&gt;&#10;          &lt;Text style={{ fontSize: 15.5, color: '#C5D4EA' }}&gt;{t}&lt;/Text&gt;&#10;        &lt;/Box&gt;&#10;      ))}&#10;    &lt;/Box&gt;&#10;    &lt;Box style={{ borderTop: '1px solid #2B5793', paddingTop: 20, flexDirection: 'row', justifyContent: 'space-between', alignItems: 'center' }}&gt;&#10;      &lt;Box style={{ flex: 1 }}&gt;&#10;        &lt;Text style={{ fontSize: 14, color: '#7FA2D6', letterSpacing: 1, marginBottom: 6 }}&gt;NEXT WEEK — W07 · AND THE M1 CLIENT REVIEW&lt;/Text&gt;&#10;        &lt;Text style={{ fontSize: 19, color: '#FFFFFF', fontWeight: '600' }}&gt;&#10;          Domain Relationships — how many, and which end owns the whole&#10;        &lt;/Text&gt;&#10;      &lt;/Box&gt;&#10;      &lt;Box style={{ padding: '10px 22px', background: '#1E4FA8', borderRadius: 22 }}&gt;&#10;        &lt;Text style={{ fontSize: 15, color: '#FFFFFF', fontWeight: 'bold' }}&gt;Questions?&lt;/Text&gt;&#10;      &lt;/Box&gt;&#10;    &lt;/Box&gt;&#10;  &lt;/Box&gt;&#10;&lt;/Slide&gt;&#10;"/>
+        <p:cNvPr id="664" name="" descr="&lt;Slide style={{ background: '#0E3F8C', padding: 0 }}&gt;&#10;  &lt;Box style={{ flexDirection: 'column', height: '100%', position: 'relative', padding: '0 80px', justifyContent: 'center' }}&gt;&#10;    &lt;Box style={{ position: 'absolute', top: 0, left: 0, right: 0, height: 8, background: '#1E4FA8' }} /&gt;&#10;    &lt;Text style={{ fontSize: 15, color: '#7FA2D6', letterSpacing: 2, marginBottom: 16 }}&gt;WEEK 06 · WHAT YOU TAKE AWAY, AND WHAT YOU LEAVE WITH&lt;/Text&gt;&#10;    &lt;Text style={{ fontSize: 44, fontWeight: 'bold', color: '#FFFFFF', fontFamily: 'Georgia, serif', lineHeight: 1.15 }}&gt;&#10;      Sentences become boxes.&#10;      &lt;br /&gt;&#10;      Boxes must survive Monday.&#10;    &lt;/Text&gt;&#10;    &lt;Box style={{ width: 88, height: 5, background: '#FFC107', marginTop: 24, marginBottom: 26 }} /&gt;&#10;    &lt;Box style={{ flexDirection: 'row', flexWrap: 'wrap', gap: '12px 28px', marginBottom: 30 }}&gt;&#10;      {[&#10;        '01 · Identity decides class vs. attribute',&#10;        '02 · Every class traces to one of your FR lines',&#10;        '03 · Eight classes is a floor, not a quota',&#10;        '04 · Entity, Boundary, Control — no fourth kind',&#10;        '05 · Associations today, multiplicities in W07',&#10;        '06 · Six open questions: decide one, model it, argue it',&#10;        '07 · M0 is due today — push, tag m0, read the output',&#10;      ].map((t) =&gt; (&#10;        &lt;Box key={t} style={{ flexDirection: 'row', alignItems: 'center', gap: 10, width: '48%' }}&gt;&#10;          &lt;Box style={{ width: 7, height: 7, borderRadius: 4, background: '#3D7BD9' }} /&gt;&#10;          &lt;Text style={{ fontSize: 15.5, color: '#C5D4EA' }}&gt;{t}&lt;/Text&gt;&#10;        &lt;/Box&gt;&#10;      ))}&#10;    &lt;/Box&gt;&#10;    &lt;Box style={{ borderTop: '1px solid #2B5793', paddingTop: 20, flexDirection: 'row', justifyContent: 'space-between', alignItems: 'center' }}&gt;&#10;      &lt;Box style={{ flex: 1 }}&gt;&#10;        &lt;Text style={{ fontSize: 14, color: '#7FA2D6', letterSpacing: 1, marginBottom: 6 }}&gt;NEXT WEEK — W07 · AND THE M1 CLIENT REVIEW&lt;/Text&gt;&#10;        &lt;Text style={{ fontSize: 19, color: '#FFFFFF', fontWeight: '600' }}&gt;&#10;          Domain Relationships — how many, and which end owns the whole&#10;        &lt;/Text&gt;&#10;      &lt;/Box&gt;&#10;      &lt;Box style={{ padding: '10px 22px', background: '#1E4FA8', borderRadius: 22 }}&gt;&#10;        &lt;Text style={{ fontSize: 15, color: '#FFFFFF', fontWeight: 'bold' }}&gt;Questions?&lt;/Text&gt;&#10;      &lt;/Box&gt;&#10;    &lt;/Box&gt;&#10;  &lt;/Box&gt;&#10;&lt;/Slide&gt;&#10;"/>
         <p:cNvGrpSpPr/>
         <p:nvPr/>
       </p:nvGrpSpPr>
@@ -31093,7 +30491,7 @@
       </p:grpSpPr>
       <p:sp>
         <p:nvSpPr>
-          <p:cNvPr id="681" name=""/>
+          <p:cNvPr id="665" name=""/>
           <p:cNvSpPr/>
           <p:nvPr/>
         </p:nvSpPr>
@@ -31117,13 +30515,13 @@
       </p:sp>
       <p:sp>
         <p:nvSpPr>
-          <p:cNvPr id="682" name="" descr="{&quot;isTemplate&quot;:true,&quot;type&quot;:&quot;text&quot;}"/>
-          <p:cNvSpPr txBox="1"/>
-          <p:nvPr/>
-        </p:nvSpPr>
-        <p:spPr>
-          <a:xfrm rot="0" flipH="0" flipV="0">
-            <a:off x="762000" y="1581150"/>
+          <p:cNvPr id="666" name="" descr="{&quot;isTemplate&quot;:true,&quot;type&quot;:&quot;text&quot;}"/>
+          <p:cNvSpPr txBox="1"/>
+          <p:nvPr/>
+        </p:nvSpPr>
+        <p:spPr>
+          <a:xfrm rot="0" flipH="0" flipV="0">
+            <a:off x="762000" y="1428750"/>
             <a:ext cx="10668000" cy="171450"/>
           </a:xfrm>
           <a:prstGeom prst="rect"/>
@@ -31144,21 +30542,21 @@
                 <a:latin typeface="Microsoft YaHei"/>
                 <a:ea typeface="Microsoft YaHei"/>
               </a:rPr>
-              <a:t>WEEK 06 · WHAT YOU TAKE AWAY</a:t>
-            </a:r>
-            <a:endParaRPr/>
-          </a:p>
-        </p:txBody>
-      </p:sp>
-      <p:sp>
-        <p:nvSpPr>
-          <p:cNvPr id="683" name="" descr="{&quot;isTemplate&quot;:true,&quot;type&quot;:&quot;text&quot;}"/>
-          <p:cNvSpPr txBox="1"/>
-          <p:nvPr/>
-        </p:nvSpPr>
-        <p:spPr>
-          <a:xfrm rot="0" flipH="0" flipV="0">
-            <a:off x="762000" y="1905000"/>
+              <a:t>WEEK 06 · WHAT YOU TAKE AWAY, AND WHAT YOU LEAVE WITH</a:t>
+            </a:r>
+            <a:endParaRPr/>
+          </a:p>
+        </p:txBody>
+      </p:sp>
+      <p:sp>
+        <p:nvSpPr>
+          <p:cNvPr id="667" name="" descr="{&quot;isTemplate&quot;:true,&quot;type&quot;:&quot;text&quot;}"/>
+          <p:cNvSpPr txBox="1"/>
+          <p:nvPr/>
+        </p:nvSpPr>
+        <p:spPr>
+          <a:xfrm rot="0" flipH="0" flipV="0">
+            <a:off x="762000" y="1752600"/>
             <a:ext cx="10668000" cy="1162050"/>
           </a:xfrm>
           <a:prstGeom prst="rect"/>
@@ -31205,13 +30603,13 @@
       </p:sp>
       <p:sp>
         <p:nvSpPr>
-          <p:cNvPr id="684" name=""/>
+          <p:cNvPr id="668" name=""/>
           <p:cNvSpPr/>
           <p:nvPr/>
         </p:nvSpPr>
         <p:spPr>
           <a:xfrm rot="0" flipH="0" flipV="0">
-            <a:off x="762000" y="3295650"/>
+            <a:off x="762000" y="3143250"/>
             <a:ext cx="838200" cy="47625"/>
           </a:xfrm>
           <a:prstGeom prst="rect">
@@ -31229,13 +30627,13 @@
       </p:sp>
       <p:sp>
         <p:nvSpPr>
-          <p:cNvPr id="685" name=""/>
+          <p:cNvPr id="669" name=""/>
           <p:cNvSpPr/>
           <p:nvPr/>
         </p:nvSpPr>
         <p:spPr>
           <a:xfrm rot="0" flipH="0" flipV="0">
-            <a:off x="762000" y="3648075"/>
+            <a:off x="762000" y="3495675"/>
             <a:ext cx="66675" cy="66675"/>
           </a:xfrm>
           <a:prstGeom prst="roundRect">
@@ -31255,13 +30653,13 @@
       </p:sp>
       <p:sp>
         <p:nvSpPr>
-          <p:cNvPr id="686" name="" descr="{&quot;isTemplate&quot;:true,&quot;type&quot;:&quot;text&quot;}"/>
-          <p:cNvSpPr txBox="1"/>
-          <p:nvPr/>
-        </p:nvSpPr>
-        <p:spPr>
-          <a:xfrm rot="0" flipH="0" flipV="0">
-            <a:off x="923925" y="3590925"/>
+          <p:cNvPr id="670" name="" descr="{&quot;isTemplate&quot;:true,&quot;type&quot;:&quot;text&quot;}"/>
+          <p:cNvSpPr txBox="1"/>
+          <p:nvPr/>
+        </p:nvSpPr>
+        <p:spPr>
+          <a:xfrm rot="0" flipH="0" flipV="0">
+            <a:off x="923925" y="3438525"/>
             <a:ext cx="2505075" cy="180975"/>
           </a:xfrm>
           <a:prstGeom prst="rect"/>
@@ -31290,13 +30688,13 @@
       </p:sp>
       <p:sp>
         <p:nvSpPr>
-          <p:cNvPr id="687" name=""/>
+          <p:cNvPr id="671" name=""/>
           <p:cNvSpPr/>
           <p:nvPr/>
         </p:nvSpPr>
         <p:spPr>
           <a:xfrm rot="0" flipH="0" flipV="0">
-            <a:off x="6000750" y="3648075"/>
+            <a:off x="6000750" y="3495675"/>
             <a:ext cx="66675" cy="66675"/>
           </a:xfrm>
           <a:prstGeom prst="roundRect">
@@ -31316,14 +30714,14 @@
       </p:sp>
       <p:sp>
         <p:nvSpPr>
-          <p:cNvPr id="688" name="" descr="{&quot;isTemplate&quot;:true,&quot;type&quot;:&quot;text&quot;}"/>
-          <p:cNvSpPr txBox="1"/>
-          <p:nvPr/>
-        </p:nvSpPr>
-        <p:spPr>
-          <a:xfrm rot="0" flipH="0" flipV="0">
-            <a:off x="6162675" y="3590925"/>
-            <a:ext cx="2771775" cy="180975"/>
+          <p:cNvPr id="672" name="" descr="{&quot;isTemplate&quot;:true,&quot;type&quot;:&quot;text&quot;}"/>
+          <p:cNvSpPr txBox="1"/>
+          <p:nvPr/>
+        </p:nvSpPr>
+        <p:spPr>
+          <a:xfrm rot="0" flipH="0" flipV="0">
+            <a:off x="6162675" y="3438525"/>
+            <a:ext cx="3028950" cy="180975"/>
           </a:xfrm>
           <a:prstGeom prst="rect"/>
         </p:spPr>
@@ -31343,21 +30741,21 @@
                 <a:latin typeface="Microsoft YaHei"/>
                 <a:ea typeface="Microsoft YaHei"/>
               </a:rPr>
-              <a:t>02 · Every class traces to a W05 sentence</a:t>
-            </a:r>
-            <a:endParaRPr/>
-          </a:p>
-        </p:txBody>
-      </p:sp>
-      <p:sp>
-        <p:nvSpPr>
-          <p:cNvPr id="689" name=""/>
+              <a:t>02 · Every class traces to one of your FR lines</a:t>
+            </a:r>
+            <a:endParaRPr/>
+          </a:p>
+        </p:txBody>
+      </p:sp>
+      <p:sp>
+        <p:nvSpPr>
+          <p:cNvPr id="673" name=""/>
           <p:cNvSpPr/>
           <p:nvPr/>
         </p:nvSpPr>
         <p:spPr>
           <a:xfrm rot="0" flipH="0" flipV="0">
-            <a:off x="762000" y="3943350"/>
+            <a:off x="762000" y="3790950"/>
             <a:ext cx="66675" cy="66675"/>
           </a:xfrm>
           <a:prstGeom prst="roundRect">
@@ -31377,14 +30775,14 @@
       </p:sp>
       <p:sp>
         <p:nvSpPr>
-          <p:cNvPr id="690" name="" descr="{&quot;isTemplate&quot;:true,&quot;type&quot;:&quot;text&quot;}"/>
-          <p:cNvSpPr txBox="1"/>
-          <p:nvPr/>
-        </p:nvSpPr>
-        <p:spPr>
-          <a:xfrm rot="0" flipH="0" flipV="0">
-            <a:off x="923925" y="3886200"/>
-            <a:ext cx="2486025" cy="180975"/>
+          <p:cNvPr id="674" name="" descr="{&quot;isTemplate&quot;:true,&quot;type&quot;:&quot;text&quot;}"/>
+          <p:cNvSpPr txBox="1"/>
+          <p:nvPr/>
+        </p:nvSpPr>
+        <p:spPr>
+          <a:xfrm rot="0" flipH="0" flipV="0">
+            <a:off x="923925" y="3733800"/>
+            <a:ext cx="2581275" cy="180975"/>
           </a:xfrm>
           <a:prstGeom prst="rect"/>
         </p:spPr>
@@ -31404,21 +30802,21 @@
                 <a:latin typeface="Microsoft YaHei"/>
                 <a:ea typeface="Microsoft YaHei"/>
               </a:rPr>
-              <a:t>03 · Ten classes is a floor, not a quota</a:t>
-            </a:r>
-            <a:endParaRPr/>
-          </a:p>
-        </p:txBody>
-      </p:sp>
-      <p:sp>
-        <p:nvSpPr>
-          <p:cNvPr id="691" name=""/>
+              <a:t>03 · Eight classes is a floor, not a quota</a:t>
+            </a:r>
+            <a:endParaRPr/>
+          </a:p>
+        </p:txBody>
+      </p:sp>
+      <p:sp>
+        <p:nvSpPr>
+          <p:cNvPr id="675" name=""/>
           <p:cNvSpPr/>
           <p:nvPr/>
         </p:nvSpPr>
         <p:spPr>
           <a:xfrm rot="0" flipH="0" flipV="0">
-            <a:off x="6000750" y="3943350"/>
+            <a:off x="6000750" y="3790950"/>
             <a:ext cx="66675" cy="66675"/>
           </a:xfrm>
           <a:prstGeom prst="roundRect">
@@ -31438,13 +30836,13 @@
       </p:sp>
       <p:sp>
         <p:nvSpPr>
-          <p:cNvPr id="692" name="" descr="{&quot;isTemplate&quot;:true,&quot;type&quot;:&quot;text&quot;}"/>
-          <p:cNvSpPr txBox="1"/>
-          <p:nvPr/>
-        </p:nvSpPr>
-        <p:spPr>
-          <a:xfrm rot="0" flipH="0" flipV="0">
-            <a:off x="6162675" y="3886200"/>
+          <p:cNvPr id="676" name="" descr="{&quot;isTemplate&quot;:true,&quot;type&quot;:&quot;text&quot;}"/>
+          <p:cNvSpPr txBox="1"/>
+          <p:nvPr/>
+        </p:nvSpPr>
+        <p:spPr>
+          <a:xfrm rot="0" flipH="0" flipV="0">
+            <a:off x="6162675" y="3733800"/>
             <a:ext cx="3048000" cy="180975"/>
           </a:xfrm>
           <a:prstGeom prst="rect"/>
@@ -31473,13 +30871,13 @@
       </p:sp>
       <p:sp>
         <p:nvSpPr>
-          <p:cNvPr id="693" name=""/>
+          <p:cNvPr id="677" name=""/>
           <p:cNvSpPr/>
           <p:nvPr/>
         </p:nvSpPr>
         <p:spPr>
           <a:xfrm rot="0" flipH="0" flipV="0">
-            <a:off x="762000" y="4238625"/>
+            <a:off x="762000" y="4086225"/>
             <a:ext cx="66675" cy="66675"/>
           </a:xfrm>
           <a:prstGeom prst="roundRect">
@@ -31499,13 +30897,13 @@
       </p:sp>
       <p:sp>
         <p:nvSpPr>
-          <p:cNvPr id="694" name="" descr="{&quot;isTemplate&quot;:true,&quot;type&quot;:&quot;text&quot;}"/>
-          <p:cNvSpPr txBox="1"/>
-          <p:nvPr/>
-        </p:nvSpPr>
-        <p:spPr>
-          <a:xfrm rot="0" flipH="0" flipV="0">
-            <a:off x="923925" y="4181475"/>
+          <p:cNvPr id="678" name="" descr="{&quot;isTemplate&quot;:true,&quot;type&quot;:&quot;text&quot;}"/>
+          <p:cNvSpPr txBox="1"/>
+          <p:nvPr/>
+        </p:nvSpPr>
+        <p:spPr>
+          <a:xfrm rot="0" flipH="0" flipV="0">
+            <a:off x="923925" y="4029075"/>
             <a:ext cx="2895600" cy="180975"/>
           </a:xfrm>
           <a:prstGeom prst="rect"/>
@@ -31534,13 +30932,13 @@
       </p:sp>
       <p:sp>
         <p:nvSpPr>
-          <p:cNvPr id="695" name=""/>
+          <p:cNvPr id="679" name=""/>
           <p:cNvSpPr/>
           <p:nvPr/>
         </p:nvSpPr>
         <p:spPr>
           <a:xfrm rot="0" flipH="0" flipV="0">
-            <a:off x="6000750" y="4238625"/>
+            <a:off x="6000750" y="4086225"/>
             <a:ext cx="66675" cy="66675"/>
           </a:xfrm>
           <a:prstGeom prst="roundRect">
@@ -31560,14 +30958,14 @@
       </p:sp>
       <p:sp>
         <p:nvSpPr>
-          <p:cNvPr id="696" name="" descr="{&quot;isTemplate&quot;:true,&quot;type&quot;:&quot;text&quot;}"/>
-          <p:cNvSpPr txBox="1"/>
-          <p:nvPr/>
-        </p:nvSpPr>
-        <p:spPr>
-          <a:xfrm rot="0" flipH="0" flipV="0">
-            <a:off x="6162675" y="4181475"/>
-            <a:ext cx="2543175" cy="180975"/>
+          <p:cNvPr id="680" name="" descr="{&quot;isTemplate&quot;:true,&quot;type&quot;:&quot;text&quot;}"/>
+          <p:cNvSpPr txBox="1"/>
+          <p:nvPr/>
+        </p:nvSpPr>
+        <p:spPr>
+          <a:xfrm rot="0" flipH="0" flipV="0">
+            <a:off x="6162675" y="4029075"/>
+            <a:ext cx="3524250" cy="180975"/>
           </a:xfrm>
           <a:prstGeom prst="rect"/>
         </p:spPr>
@@ -31587,21 +30985,82 @@
                 <a:latin typeface="Microsoft YaHei"/>
                 <a:ea typeface="Microsoft YaHei"/>
               </a:rPr>
-              <a:t>06 · ΔC1 is live: fold it in, do not restart</a:t>
-            </a:r>
-            <a:endParaRPr/>
-          </a:p>
-        </p:txBody>
-      </p:sp>
-      <p:sp>
-        <p:nvSpPr>
-          <p:cNvPr id="697" name=""/>
+              <a:t>06 · Six open questions: decide one, model it, argue it</a:t>
+            </a:r>
+            <a:endParaRPr/>
+          </a:p>
+        </p:txBody>
+      </p:sp>
+      <p:sp>
+        <p:nvSpPr>
+          <p:cNvPr id="681" name=""/>
           <p:cNvSpPr/>
           <p:nvPr/>
         </p:nvSpPr>
         <p:spPr>
           <a:xfrm rot="0" flipH="0" flipV="0">
-            <a:off x="762000" y="4648200"/>
+            <a:off x="762000" y="4381500"/>
+            <a:ext cx="66675" cy="66675"/>
+          </a:xfrm>
+          <a:prstGeom prst="roundRect">
+            <a:avLst>
+              <a:gd name="adj" fmla="val 57143"/>
+            </a:avLst>
+          </a:prstGeom>
+          <a:solidFill>
+            <a:srgbClr val="3D7BD9"/>
+          </a:solidFill>
+          <a:ln/>
+        </p:spPr>
+        <p:txBody>
+          <a:bodyPr/>
+          <a:p/>
+        </p:txBody>
+      </p:sp>
+      <p:sp>
+        <p:nvSpPr>
+          <p:cNvPr id="682" name="" descr="{&quot;isTemplate&quot;:true,&quot;type&quot;:&quot;text&quot;}"/>
+          <p:cNvSpPr txBox="1"/>
+          <p:nvPr/>
+        </p:nvSpPr>
+        <p:spPr>
+          <a:xfrm rot="0" flipH="0" flipV="0">
+            <a:off x="923925" y="4324350"/>
+            <a:ext cx="3505200" cy="180975"/>
+          </a:xfrm>
+          <a:prstGeom prst="rect"/>
+        </p:spPr>
+        <p:txBody>
+          <a:bodyPr wrap="none" lIns="0" tIns="0" rIns="0" bIns="0"/>
+          <a:p>
+            <a:pPr>
+              <a:lnSpc>
+                <a:spcPct val="100000"/>
+              </a:lnSpc>
+            </a:pPr>
+            <a:r>
+              <a:rPr lang="en-US" sz="1163">
+                <a:solidFill>
+                  <a:srgbClr val="C5D4EA"/>
+                </a:solidFill>
+                <a:latin typeface="Microsoft YaHei"/>
+                <a:ea typeface="Microsoft YaHei"/>
+              </a:rPr>
+              <a:t>07 · M0 is due today — push, tag m0, read the output</a:t>
+            </a:r>
+            <a:endParaRPr/>
+          </a:p>
+        </p:txBody>
+      </p:sp>
+      <p:sp>
+        <p:nvSpPr>
+          <p:cNvPr id="683" name=""/>
+          <p:cNvSpPr/>
+          <p:nvPr/>
+        </p:nvSpPr>
+        <p:spPr>
+          <a:xfrm rot="0" flipH="0" flipV="0">
+            <a:off x="762000" y="4791075"/>
             <a:ext cx="10668000" cy="647700"/>
           </a:xfrm>
           <a:custGeom>
@@ -31635,13 +31094,13 @@
       </p:sp>
       <p:sp>
         <p:nvSpPr>
-          <p:cNvPr id="698" name="" descr="{&quot;isTemplate&quot;:true,&quot;type&quot;:&quot;text&quot;}"/>
-          <p:cNvSpPr txBox="1"/>
-          <p:nvPr/>
-        </p:nvSpPr>
-        <p:spPr>
-          <a:xfrm rot="0" flipH="0" flipV="0">
-            <a:off x="762000" y="4848225"/>
+          <p:cNvPr id="684" name="" descr="{&quot;isTemplate&quot;:true,&quot;type&quot;:&quot;text&quot;}"/>
+          <p:cNvSpPr txBox="1"/>
+          <p:nvPr/>
+        </p:nvSpPr>
+        <p:spPr>
+          <a:xfrm rot="0" flipH="0" flipV="0">
+            <a:off x="762000" y="4991100"/>
             <a:ext cx="9458325" cy="161925"/>
           </a:xfrm>
           <a:prstGeom prst="rect"/>
@@ -31670,13 +31129,13 @@
       </p:sp>
       <p:sp>
         <p:nvSpPr>
-          <p:cNvPr id="699" name="" descr="{&quot;isTemplate&quot;:true,&quot;type&quot;:&quot;text&quot;}"/>
-          <p:cNvSpPr txBox="1"/>
-          <p:nvPr/>
-        </p:nvSpPr>
-        <p:spPr>
-          <a:xfrm rot="0" flipH="0" flipV="0">
-            <a:off x="762000" y="5067300"/>
+          <p:cNvPr id="685" name="" descr="{&quot;isTemplate&quot;:true,&quot;type&quot;:&quot;text&quot;}"/>
+          <p:cNvSpPr txBox="1"/>
+          <p:nvPr/>
+        </p:nvSpPr>
+        <p:spPr>
+          <a:xfrm rot="0" flipH="0" flipV="0">
+            <a:off x="762000" y="5210175"/>
             <a:ext cx="9458325" cy="219075"/>
           </a:xfrm>
           <a:prstGeom prst="rect"/>
@@ -31705,13 +31164,13 @@
       </p:sp>
       <p:sp>
         <p:nvSpPr>
-          <p:cNvPr id="700" name=""/>
+          <p:cNvPr id="686" name=""/>
           <p:cNvSpPr/>
           <p:nvPr/>
         </p:nvSpPr>
         <p:spPr>
           <a:xfrm rot="0" flipH="0" flipV="0">
-            <a:off x="10220325" y="4886325"/>
+            <a:off x="10220325" y="5029200"/>
             <a:ext cx="1209675" cy="361950"/>
           </a:xfrm>
           <a:prstGeom prst="roundRect">
@@ -31731,13 +31190,13 @@
       </p:sp>
       <p:sp>
         <p:nvSpPr>
-          <p:cNvPr id="701" name="" descr="{&quot;isTemplate&quot;:true,&quot;type&quot;:&quot;text&quot;}"/>
-          <p:cNvSpPr txBox="1"/>
-          <p:nvPr/>
-        </p:nvSpPr>
-        <p:spPr>
-          <a:xfrm rot="0" flipH="0" flipV="0">
-            <a:off x="10429875" y="4981575"/>
+          <p:cNvPr id="687" name="" descr="{&quot;isTemplate&quot;:true,&quot;type&quot;:&quot;text&quot;}"/>
+          <p:cNvSpPr txBox="1"/>
+          <p:nvPr/>
+        </p:nvSpPr>
+        <p:spPr>
+          <a:xfrm rot="0" flipH="0" flipV="0">
+            <a:off x="10429875" y="5124450"/>
             <a:ext cx="790575" cy="171450"/>
           </a:xfrm>
           <a:prstGeom prst="rect"/>
@@ -31766,7 +31225,7 @@
       </p:sp>
       <p:sp>
         <p:nvSpPr>
-          <p:cNvPr id="702" name=""/>
+          <p:cNvPr id="688" name=""/>
           <p:cNvSpPr/>
           <p:nvPr/>
         </p:nvSpPr>
@@ -31793,12 +31252,12 @@
 </p:sld>
 </file>
 
-<file path=ppt/slides/slide4.xml><?xml version="1.0" encoding="utf-8"?>
+<file path=ppt/slides/slide39.xml><?xml version="1.0" encoding="utf-8"?>
 <p:sld xmlns:p="http://schemas.openxmlformats.org/presentationml/2006/main" xmlns:a="http://schemas.openxmlformats.org/drawingml/2006/main">
   <p:cSld>
     <p:spTree>
       <p:nvGrpSpPr>
-        <p:cNvPr id="703" name="" descr="&lt;Slide style={{ background: '#FFFFFF', padding: 0 }}&gt;&#10;  &lt;Box style={{ height: 72, background: '#1E4FA8', padding: '0 40px', flexDirection: 'row', alignItems: 'center', justifyContent: 'space-between' }}&gt;&#10;    &lt;Text style={{ fontSize: 15, color: '#B9CDF0', letterSpacing: 1 }}&gt;ISAD · INFORMATION SYSTEMS ANALYSIS &amp;amp; DESIGN&lt;/Text&gt;&#10;    &lt;Text style={{ fontSize: 15, color: '#B9CDF0' }}&gt;W06 · FROM SCENARIOS TO CLASSES&lt;/Text&gt;&#10;  &lt;/Box&gt;&#10;  &lt;Box style={{ padding: '13px 40px 0 40px', flexDirection: 'row', alignItems: 'center', justifyContent: 'space-between' }}&gt;&#10;    &lt;Text style={{ fontSize: 29, fontWeight: 'bold', color: '#0E3F8C' }}&gt;Last Week You Wrote Sentences&lt;/Text&gt;&#10;    &lt;Text style={{ fontSize: 14, color: '#1E4FA8', fontWeight: 'bold' }}&gt;04 / 38&lt;/Text&gt;&#10;  &lt;/Box&gt;&#10;  &lt;Box style={{ flex: 1, padding: '10px 40px 0 40px', flexDirection: 'row', gap: 26 }}&gt;&#10;    &lt;Box style={{ width: 560, justifyContent: 'center' }}&gt;&#10;      &lt;Box style={{ padding: '18px 20px', background: '#F7F9FC', borderRadius: 10, border: '1px solid #E5E7EB' }}&gt;&#10;        &lt;Text style={{ fontSize: 13, color: '#8B97A8', letterSpacing: 1, marginBottom: 12 }}&gt;MAIN SUCCESS SCENARIO — PLACE ORDER&lt;/Text&gt;&#10;        {[&#10;          ['1', 'Student reviews the cart total.'],&#10;          ['2', 'System displays the payable amount.'],&#10;          ['3', 'Student chooses a payment method.'],&#10;          ['4', 'System authorises the amount with the provider.'],&#10;          ['5', 'System creates the order in state Accepted.'],&#10;          ['6', 'System prints the kitchen ticket.'],&#10;          ['7', 'System notifies the student of the order time.'],&#10;        ].map((s) =&gt; (&#10;          &lt;Box key={s[0]} style={{ flexDirection: 'row', gap: 12, marginBottom: 9 }}&gt;&#10;            &lt;Box style={{ width: 22, height: 22, borderRadius: 4, background: '#1E4FA8', justifyContent: 'center', alignItems: 'center' }}&gt;&#10;              &lt;Text style={{ fontSize: 11, fontWeight: 'bold', color: '#FFFFFF' }}&gt;{s[0]}&lt;/Text&gt;&#10;            &lt;/Box&gt;&#10;            &lt;Text style={{ flex: 1, fontSize: 13.5, color: '#1A2230', lineHeight: 1.45 }}&gt;{s[1]}&lt;/Text&gt;&#10;          &lt;/Box&gt;&#10;        ))}&#10;      &lt;/Box&gt;&#10;    &lt;/Box&gt;&#10;    &lt;Box style={{ flex: 1, flexDirection: 'column', justifyContent: 'center', gap: 13 }}&gt;&#10;      &lt;Box style={{ padding: '15px 17px', background: '#F0F5FC', borderRadius: 9, borderLeft: '4px solid #1E4FA8' }}&gt;&#10;        &lt;Text style={{ fontSize: 16, fontWeight: 'bold', color: '#0E3F8C' }}&gt;Twelve nouns, no classes&lt;/Text&gt;&#10;        &lt;Text style={{ fontSize: 13, color: '#4A5568', lineHeight: 1.6, marginTop: 5 }}&gt;&#10;          cart · total · payment method · amount · provider · order · state Accepted · kitchen ticket · student · order time&#10;        &lt;/Text&gt;&#10;      &lt;/Box&gt;&#10;      &lt;Box style={{ padding: '15px 17px', background: '#FFFFFF', borderRadius: 9, border: '1px solid #D6DCE5' }}&gt;&#10;        &lt;Text style={{ fontSize: 16, fontWeight: 'bold', color: '#0E3F8C' }}&gt;Every one is either a class or an attribute&lt;/Text&gt;&#10;        &lt;Text style={{ fontSize: 13, color: '#4A5568', lineHeight: 1.6, marginTop: 5 }}&gt;&#10;          That decision is this week’s whole job. It looks trivial. It is the step at which most real projects go wrong.&#10;        &lt;/Text&gt;&#10;      &lt;/Box&gt;&#10;      &lt;Box style={{ padding: '15px 17px', background: '#FFF6E0', borderRadius: 9, borderLeft: '4px solid #FFC107' }}&gt;&#10;        &lt;Text style={{ fontSize: 16, fontWeight: 'bold', color: '#996F00' }}&gt;Two are already taken&lt;/Text&gt;&#10;        &lt;Text style={{ fontSize: 13, color: '#4A5568', lineHeight: 1.6, marginTop: 5 }}&gt;&#10;          Student and provider are actors. They were on your use case diagram, so they are not classes in this model.&#10;        &lt;/Text&gt;&#10;      &lt;/Box&gt;&#10;      &lt;Box style={{ padding: '12px 16px', background: '#F7F9FC', borderRadius: 8, border: '1px dashed #D6DCE5' }}&gt;&#10;        &lt;Text style={{ fontSize: 12.5, color: '#8B97A8', lineHeight: 1.55 }}&gt;&#10;          You already wrote the specification that produces this model. The hard reading is already done — this week is bookkeeping with consequences.&#10;        &lt;/Text&gt;&#10;      &lt;/Box&gt;&#10;    &lt;/Box&gt;&#10;  &lt;/Box&gt;&#10;  &lt;Box style={{ height: 34, padding: '0 40px', flexDirection: 'row', alignItems: 'center', justifyContent: 'space-between' }}&gt;&#10;    &lt;Text style={{ fontSize: 13, color: '#8B97A8' }}&gt;ISAD · Fall 2026 · The nouns were there all along. Last week you wrote sentences about them instead of drawing them&lt;/Text&gt;&#10;    &lt;Text style={{ fontSize: 14, color: '#1E4FA8', fontWeight: 'bold' }}&gt;04 / 38&lt;/Text&gt;&#10;  &lt;/Box&gt;&#10;&lt;/Slide&gt;&#10;"/>
+        <p:cNvPr id="689" name="" descr="&lt;Slide style={{ background: '#FFFFFF', padding: 0 }}&gt;&#10;  &lt;Box style={{ height: 72, background: '#1E4FA8', padding: '0 40px', flexDirection: 'row', alignItems: 'center', justifyContent: 'space-between' }}&gt;&#10;    &lt;Text style={{ fontSize: 15, color: '#B9CDF0', letterSpacing: 1 }}&gt;ISAD · INFORMATION SYSTEMS ANALYSIS &amp;amp; DESIGN&lt;/Text&gt;&#10;    &lt;Text style={{ fontSize: 15, color: '#B9CDF0' }}&gt;W06 · TODAY'S CHECKLIST&lt;/Text&gt;&#10;  &lt;/Box&gt;&#10;  &lt;Box style={{ padding: '13px 40px 0 40px', flexDirection: 'row', alignItems: 'center', justifyContent: 'space-between' }}&gt;&#10;    &lt;Text style={{ fontSize: 29, fontWeight: 'bold', color: '#0E3F8C' }}&gt;What You Finish Before You Leave&lt;/Text&gt;&#10;    &lt;Text style={{ fontSize: 14, color: '#1E4FA8', fontWeight: 'bold' }}&gt;39 / 39&lt;/Text&gt;&#10;  &lt;/Box&gt;&#10;  &lt;Box style={{ flex: 1, padding: '8px 40px 0 40px', flexDirection: 'row', gap: 20 }}&gt;&#10;    &lt;Box style={{ flex: 1, background: '#F7F9FC', border: '1px solid #E5E7EB', borderRadius: 10, padding: 16 }}&gt;&#10;      &lt;Box style={{ flexDirection: 'row', alignItems: 'center', gap: 9, marginBottom: 12 }}&gt;&#10;        &lt;Box style={{ width: 26, height: 26, borderRadius: 13, background: '#0E3F8C' }} /&gt;&#10;        &lt;Text style={{ fontSize: 15, color: '#0E3F8C', fontWeight: 'bold' }}&gt;1 · SCAN YOUR OWN NOUNS&lt;/Text&gt;&#10;      &lt;/Box&gt;&#10;      &lt;Text style={{ fontSize: 13.5, color: '#4A5568', lineHeight: 1.55 }}&gt;&#10;        About &lt;Text style={{ fontSize: 13.5, color: '#0E3F8C', fontWeight: 'bold' }}&gt;24 words&lt;/Text&gt; from your own FR-1…FR-12, into four buckets:&#10;      &lt;/Text&gt;&#10;      &lt;Box style={{ flexDirection: 'row', gap: 7, marginTop: 9, marginBottom: 9, flexWrap: 'wrap' }}&gt;&#10;        &lt;Box style={{ background: '#FFFFFF', border: '1px solid #D6DCE5', borderRadius: 4, padding: '4px 9px' }}&gt;&#10;          &lt;Text style={{ fontSize: 12.5, color: '#0E3F8C', fontWeight: 'bold' }}&gt;class&lt;/Text&gt;&#10;        &lt;/Box&gt;&#10;        &lt;Box style={{ background: '#FFFFFF', border: '1px solid #D6DCE5', borderRadius: 4, padding: '4px 9px' }}&gt;&#10;          &lt;Text style={{ fontSize: 12.5, color: '#0E3F8C', fontWeight: 'bold' }}&gt;attribute&lt;/Text&gt;&#10;        &lt;/Box&gt;&#10;        &lt;Box style={{ background: '#FFFFFF', border: '1px solid #D6DCE5', borderRadius: 4, padding: '4px 9px' }}&gt;&#10;          &lt;Text style={{ fontSize: 12.5, color: '#0E3F8C', fontWeight: 'bold' }}&gt;external actor&lt;/Text&gt;&#10;        &lt;/Box&gt;&#10;        &lt;Box style={{ background: '#FFFFFF', border: '1px solid #D6DCE5', borderRadius: 4, padding: '4px 9px' }}&gt;&#10;          &lt;Text style={{ fontSize: 12.5, color: '#0E3F8C', fontWeight: 'bold' }}&gt;discard&lt;/Text&gt;&#10;        &lt;/Box&gt;&#10;      &lt;/Box&gt;&#10;      &lt;Text style={{ fontSize: 13, color: '#4A5568', lineHeight: 1.55 }}&gt;&#10;        Every word needs a reason that &lt;Text style={{ fontSize: 13, color: '#0E3F8C', fontWeight: 'bold' }}&gt;cites a requirement line&lt;/Text&gt; — or says that no&#10;        requirement mentions it.&#10;      &lt;/Text&gt;&#10;      &lt;Text style={{ fontSize: 12, color: '#8B97A8', marginTop: 9 }}&gt;&#10;        → docs/analysis/noun-scan.md&#10;      &lt;/Text&gt;&#10;    &lt;/Box&gt;&#10;    &lt;Box style={{ flex: 1, background: '#F7F9FC', border: '1px solid #E5E7EB', borderRadius: 10, padding: 16 }}&gt;&#10;      &lt;Box style={{ flexDirection: 'row', alignItems: 'center', gap: 9, marginBottom: 12 }}&gt;&#10;        &lt;Box style={{ width: 26, height: 26, borderRadius: 13, background: '#0E3F8C' }} /&gt;&#10;        &lt;Text style={{ fontSize: 15, color: '#0E3F8C', fontWeight: 'bold' }}&gt;2 · CLASSIFY, THEN DRAW&lt;/Text&gt;&#10;      &lt;/Box&gt;&#10;      &lt;Text style={{ fontSize: 13.5, color: '#4A5568', lineHeight: 1.55 }}&gt;&#10;        Mark every class &lt;Text style={{ fontSize: 13.5, color: '#0E3F8C', fontWeight: 'bold' }}&gt;E&lt;/Text&gt;, &lt;Text style={{ fontSize: 13.5, color: '#0E3F8C', fontWeight: 'bold' }}&gt;B&lt;/Text&gt; or &lt;Text style={{ fontSize: 13.5, color: '#0E3F8C', fontWeight: 'bold' }}&gt;C&lt;/Text&gt;, then draw the first domain model.&#10;      &lt;/Text&gt;&#10;      &lt;Text style={{ fontSize: 13, color: '#4A5568', lineHeight: 1.55, marginTop: 8 }}&gt;&#10;        Target &lt;Text style={{ fontSize: 13, color: '#0E3F8C', fontWeight: 'bold' }}&gt;eight classes or more&lt;/Text&gt;. Associations only — no multiplicities, no&#10;        attributes, no methods.&#10;      &lt;/Text&gt;&#10;      &lt;Box style={{ borderLeft: '3px solid #FFC107', paddingLeft: 10, marginTop: 10 }}&gt;&#10;        &lt;Text style={{ fontSize: 12.5, color: '#4A5568', lineHeight: 1.5 }}&gt;&#10;          Two arguments you must write down: &lt;Text style={{ fontSize: 12.5, color: '#0E3F8C', fontWeight: 'bold' }}&gt;Contraindication&lt;/Text&gt; (FR-1 attaches it to&#10;          the client, not to a product) and &lt;Text style={{ fontSize: 12.5, color: '#0E3F8C', fontWeight: 'bold' }}&gt;AllergyHistory&lt;/Text&gt;.&#10;        &lt;/Text&gt;&#10;      &lt;/Box&gt;&#10;      &lt;Text style={{ fontSize: 12, color: '#8B97A8', marginTop: 9 }}&gt;&#10;        → docs/diagrams/domain-model-v1.puml + PNG&#10;      &lt;/Text&gt;&#10;    &lt;/Box&gt;&#10;  &lt;/Box&gt;&#10;  &lt;Box style={{ flex: 1, padding: '16px 40px 0 40px', flexDirection: 'row', gap: 20 }}&gt;&#10;    &lt;Box style={{ flex: 1, background: '#F0F5FC', border: '1px solid #C8D8EE', borderRadius: 10, padding: 16 }}&gt;&#10;      &lt;Box style={{ flexDirection: 'row', alignItems: 'center', gap: 9, marginBottom: 12 }}&gt;&#10;        &lt;Box style={{ width: 26, height: 26, borderRadius: 13, background: '#1E4FA8' }} /&gt;&#10;        &lt;Text style={{ fontSize: 15, color: '#0E3F8C', fontWeight: 'bold' }}&gt;3 · MAKE ONE OPEN DECISION&lt;/Text&gt;&#10;      &lt;/Box&gt;&#10;      &lt;Text style={{ fontSize: 13.5, color: '#4A5568', lineHeight: 1.55 }}&gt;&#10;        Your requirements left &lt;Text style={{ fontSize: 13.5, color: '#0E3F8C', fontWeight: 'bold' }}&gt;six things unspecified&lt;/Text&gt;. Pick one, decide it,&#10;        &lt;Text style={{ fontSize: 13.5, color: '#0E3F8C', fontWeight: 'bold' }}&gt; model it&lt;/Text&gt;, and say why.&#10;      &lt;/Text&gt;&#10;      &lt;Text style={{ fontSize: 13.5, color: '#D9534F', fontWeight: 'bold', marginTop: 9 }}&gt;&#10;        &quot;We haven't decided&quot; is not a model.&#10;      &lt;/Text&gt;&#10;      &lt;Text style={{ fontSize: 12.5, color: '#4A5568', lineHeight: 1.5, marginTop: 6 }}&gt;&#10;        Does the client see findings before review? What happens on a low-confidence finding? Who may&#10;        correct a client's own concern? Segments? Photo retention? What the client sees when an&#10;        analysis is rejected?&#10;      &lt;/Text&gt;&#10;    &lt;/Box&gt;&#10;    &lt;Box style={{ flex: 1, background: '#F0F5FC', border: '1px solid #C8D8EE', borderRadius: 10, padding: 16 }}&gt;&#10;      &lt;Box style={{ flexDirection: 'row', alignItems: 'center', gap: 9, marginBottom: 12 }}&gt;&#10;        &lt;Box style={{ width: 26, height: 26, borderRadius: 13, background: '#D9534F' }} /&gt;&#10;        &lt;Text style={{ fontSize: 15, color: '#0E3F8C', fontWeight: 'bold' }}&gt;4 · CLOSE OUT M0 — TAG `m0`&lt;/Text&gt;&#10;      &lt;/Box&gt;&#10;      &lt;Text style={{ fontSize: 13.5, color: '#4A5568', lineHeight: 1.55 }}&gt;&#10;        Four artefacts, then one tag, then one command whose output you read.&#10;      &lt;/Text&gt;&#10;      &lt;Box style={{ marginTop: 9 }}&gt;&#10;        &lt;Text style={{ fontSize: 12.5, color: '#4A5568', lineHeight: 1.6 }}&gt;· docs/m0/team-charter.md — four names, four roles&lt;/Text&gt;&#10;        &lt;Text style={{ fontSize: 12.5, color: '#4A5568', lineHeight: 1.6 }}&gt;· docs/m0/stakeholders.md — inside or outside&lt;/Text&gt;&#10;        &lt;Text style={{ fontSize: 12.5, color: '#4A5568', lineHeight: 1.6 }}&gt;· docs/m0/vision.md — including the safety boundary&lt;/Text&gt;&#10;      &lt;/Box&gt;&#10;      &lt;Box style={{ background: '#0E3F8C', borderRadius: 5, padding: '8px 10px', marginTop: 9 }}&gt;&#10;        &lt;Text style={{ fontSize: 11, color: '#C5D4EA', fontFamily: 'Menlo, monospace' }}&gt;git tag -a m0 -m &quot;M0: charter, stakeholders, vision&quot;&lt;/Text&gt;&#10;        &lt;Text style={{ fontSize: 11, color: '#C5D4EA', fontFamily: 'Menlo, monospace' }}&gt;git push origin m0&lt;/Text&gt;&#10;        &lt;Text style={{ fontSize: 11, color: '#FFC107', fontFamily: 'Menlo, monospace' }}&gt;git ls-remote --tags origin&lt;/Text&gt;&#10;      &lt;/Box&gt;&#10;      &lt;Text style={{ fontSize: 12, color: '#8B97A8', marginTop: 8 }}&gt;&#10;        You must see refs/tags/m0. No line = not submitted.&#10;      &lt;/Text&gt;&#10;    &lt;/Box&gt;&#10;  &lt;/Box&gt;&#10;  &lt;Box style={{ height: 54, background: '#0E3F8C', padding: '0 40px', flexDirection: 'row', alignItems: 'center', justifyContent: 'space-between', marginTop: 14 }}&gt;&#10;    &lt;Text style={{ fontSize: 15, color: '#FFFFFF' }}&gt;&#10;      Four people, four lines of evidence. The &lt;Text style={{ fontSize: 15, color: '#FFC107', fontWeight: 'bold' }}&gt;.puml&lt;/Text&gt; is owned by the Recorder — every member defends one class.&#10;    &lt;/Text&gt;&#10;    &lt;Text style={{ fontSize: 14, color: '#7FA2D6' }}&gt;M1 due Sun Nov 01&lt;/Text&gt;&#10;  &lt;/Box&gt;&#10;&lt;/Slide&gt;&#10;"/>
         <p:cNvGrpSpPr/>
         <p:nvPr/>
       </p:nvGrpSpPr>
@@ -31812,7 +31271,7 @@
       </p:grpSpPr>
       <p:sp>
         <p:nvSpPr>
-          <p:cNvPr id="704" name=""/>
+          <p:cNvPr id="690" name=""/>
           <p:cNvSpPr/>
           <p:nvPr/>
         </p:nvSpPr>
@@ -31836,7 +31295,7 @@
       </p:sp>
       <p:sp>
         <p:nvSpPr>
-          <p:cNvPr id="705" name=""/>
+          <p:cNvPr id="691" name=""/>
           <p:cNvSpPr/>
           <p:nvPr/>
         </p:nvSpPr>
@@ -31860,7 +31319,7 @@
       </p:sp>
       <p:sp>
         <p:nvSpPr>
-          <p:cNvPr id="706" name="" descr="{&quot;isTemplate&quot;:true,&quot;type&quot;:&quot;text&quot;}"/>
+          <p:cNvPr id="692" name="" descr="{&quot;isTemplate&quot;:true,&quot;type&quot;:&quot;text&quot;}"/>
           <p:cNvSpPr txBox="1"/>
           <p:nvPr/>
         </p:nvSpPr>
@@ -31895,7 +31354,1865 @@
       </p:sp>
       <p:sp>
         <p:nvSpPr>
+          <p:cNvPr id="693" name="" descr="{&quot;isTemplate&quot;:true,&quot;type&quot;:&quot;text&quot;}"/>
+          <p:cNvSpPr txBox="1"/>
+          <p:nvPr/>
+        </p:nvSpPr>
+        <p:spPr>
+          <a:xfrm rot="0" flipH="0" flipV="0">
+            <a:off x="9944100" y="257175"/>
+            <a:ext cx="1866900" cy="171450"/>
+          </a:xfrm>
+          <a:prstGeom prst="rect"/>
+        </p:spPr>
+        <p:txBody>
+          <a:bodyPr wrap="none" lIns="0" tIns="0" rIns="0" bIns="0"/>
+          <a:p>
+            <a:pPr>
+              <a:lnSpc>
+                <a:spcPct val="100000"/>
+              </a:lnSpc>
+            </a:pPr>
+            <a:r>
+              <a:rPr lang="en-US" sz="1125">
+                <a:solidFill>
+                  <a:srgbClr val="B9CDF0"/>
+                </a:solidFill>
+                <a:latin typeface="Microsoft YaHei"/>
+                <a:ea typeface="Microsoft YaHei"/>
+              </a:rPr>
+              <a:t>W06 · TODAY'S CHECKLIST</a:t>
+            </a:r>
+            <a:endParaRPr/>
+          </a:p>
+        </p:txBody>
+      </p:sp>
+      <p:sp>
+        <p:nvSpPr>
+          <p:cNvPr id="694" name="" descr="{&quot;isTemplate&quot;:true,&quot;type&quot;:&quot;text&quot;}"/>
+          <p:cNvSpPr txBox="1"/>
+          <p:nvPr/>
+        </p:nvSpPr>
+        <p:spPr>
+          <a:xfrm rot="0" flipH="0" flipV="0">
+            <a:off x="381000" y="809625"/>
+            <a:ext cx="4533900" cy="333375"/>
+          </a:xfrm>
+          <a:prstGeom prst="rect"/>
+        </p:spPr>
+        <p:txBody>
+          <a:bodyPr wrap="none" lIns="0" tIns="0" rIns="0" bIns="0"/>
+          <a:p>
+            <a:pPr>
+              <a:lnSpc>
+                <a:spcPct val="100000"/>
+              </a:lnSpc>
+            </a:pPr>
+            <a:r>
+              <a:rPr lang="en-US" sz="2175" b="1">
+                <a:solidFill>
+                  <a:srgbClr val="0E3F8C"/>
+                </a:solidFill>
+                <a:latin typeface="Microsoft YaHei"/>
+                <a:ea typeface="Microsoft YaHei"/>
+              </a:rPr>
+              <a:t>What You Finish Before You Leave</a:t>
+            </a:r>
+            <a:endParaRPr/>
+          </a:p>
+        </p:txBody>
+      </p:sp>
+      <p:sp>
+        <p:nvSpPr>
+          <p:cNvPr id="695" name="" descr="{&quot;isTemplate&quot;:true,&quot;type&quot;:&quot;text&quot;}"/>
+          <p:cNvSpPr txBox="1"/>
+          <p:nvPr/>
+        </p:nvSpPr>
+        <p:spPr>
+          <a:xfrm rot="0" flipH="0" flipV="0">
+            <a:off x="11401425" y="895350"/>
+            <a:ext cx="409575" cy="161925"/>
+          </a:xfrm>
+          <a:prstGeom prst="rect"/>
+        </p:spPr>
+        <p:txBody>
+          <a:bodyPr wrap="none" lIns="0" tIns="0" rIns="0" bIns="0"/>
+          <a:p>
+            <a:pPr>
+              <a:lnSpc>
+                <a:spcPct val="100000"/>
+              </a:lnSpc>
+            </a:pPr>
+            <a:r>
+              <a:rPr lang="en-US" sz="1050" b="1">
+                <a:solidFill>
+                  <a:srgbClr val="1E4FA8"/>
+                </a:solidFill>
+                <a:latin typeface="Microsoft YaHei"/>
+                <a:ea typeface="Microsoft YaHei"/>
+              </a:rPr>
+              <a:t>39 / 39</a:t>
+            </a:r>
+            <a:endParaRPr/>
+          </a:p>
+        </p:txBody>
+      </p:sp>
+      <p:sp>
+        <p:nvSpPr>
+          <p:cNvPr id="696" name=""/>
+          <p:cNvSpPr/>
+          <p:nvPr/>
+        </p:nvSpPr>
+        <p:spPr>
+          <a:xfrm rot="0" flipH="0" flipV="0">
+            <a:off x="381000" y="1219200"/>
+            <a:ext cx="5619750" cy="2152650"/>
+          </a:xfrm>
+          <a:prstGeom prst="roundRect">
+            <a:avLst>
+              <a:gd name="adj" fmla="val 4425"/>
+            </a:avLst>
+          </a:prstGeom>
+          <a:solidFill>
+            <a:srgbClr val="F7F9FC"/>
+          </a:solidFill>
+          <a:ln w="12700">
+            <a:solidFill>
+              <a:srgbClr val="E5E7EB"/>
+            </a:solidFill>
+            <a:prstDash val="solid"/>
+          </a:ln>
+        </p:spPr>
+        <p:txBody>
+          <a:bodyPr/>
+          <a:p/>
+        </p:txBody>
+      </p:sp>
+      <p:sp>
+        <p:nvSpPr>
+          <p:cNvPr id="697" name=""/>
+          <p:cNvSpPr/>
+          <p:nvPr/>
+        </p:nvSpPr>
+        <p:spPr>
+          <a:xfrm rot="0" flipH="0" flipV="0">
+            <a:off x="533400" y="1371600"/>
+            <a:ext cx="247650" cy="247650"/>
+          </a:xfrm>
+          <a:prstGeom prst="roundRect">
+            <a:avLst>
+              <a:gd name="adj" fmla="val 50000"/>
+            </a:avLst>
+          </a:prstGeom>
+          <a:solidFill>
+            <a:srgbClr val="0E3F8C"/>
+          </a:solidFill>
+          <a:ln/>
+        </p:spPr>
+        <p:txBody>
+          <a:bodyPr/>
+          <a:p/>
+        </p:txBody>
+      </p:sp>
+      <p:sp>
+        <p:nvSpPr>
+          <p:cNvPr id="698" name="" descr="{&quot;isTemplate&quot;:true,&quot;type&quot;:&quot;text&quot;}"/>
+          <p:cNvSpPr txBox="1"/>
+          <p:nvPr/>
+        </p:nvSpPr>
+        <p:spPr>
+          <a:xfrm rot="0" flipH="0" flipV="0">
+            <a:off x="866775" y="1409700"/>
+            <a:ext cx="2009775" cy="171450"/>
+          </a:xfrm>
+          <a:prstGeom prst="rect"/>
+        </p:spPr>
+        <p:txBody>
+          <a:bodyPr wrap="none" lIns="0" tIns="0" rIns="0" bIns="0"/>
+          <a:p>
+            <a:pPr>
+              <a:lnSpc>
+                <a:spcPct val="100000"/>
+              </a:lnSpc>
+            </a:pPr>
+            <a:r>
+              <a:rPr lang="en-US" sz="1125" b="1">
+                <a:solidFill>
+                  <a:srgbClr val="0E3F8C"/>
+                </a:solidFill>
+                <a:latin typeface="Microsoft YaHei"/>
+                <a:ea typeface="Microsoft YaHei"/>
+              </a:rPr>
+              <a:t>1 · SCAN YOUR OWN NOUNS</a:t>
+            </a:r>
+            <a:endParaRPr/>
+          </a:p>
+        </p:txBody>
+      </p:sp>
+      <p:sp>
+        <p:nvSpPr>
+          <p:cNvPr id="699" name="" descr="{&quot;isTemplate&quot;:true,&quot;type&quot;:&quot;text&quot;}"/>
+          <p:cNvSpPr txBox="1"/>
+          <p:nvPr/>
+        </p:nvSpPr>
+        <p:spPr>
+          <a:xfrm rot="0" flipH="0" flipV="0">
+            <a:off x="533400" y="1733550"/>
+            <a:ext cx="5314950" cy="247650"/>
+          </a:xfrm>
+          <a:prstGeom prst="rect"/>
+        </p:spPr>
+        <p:txBody>
+          <a:bodyPr wrap="none" lIns="0" tIns="0" rIns="0" bIns="0"/>
+          <a:p>
+            <a:pPr>
+              <a:lnSpc>
+                <a:spcPct val="155000"/>
+              </a:lnSpc>
+            </a:pPr>
+            <a:r>
+              <a:rPr lang="en-US" sz="1013">
+                <a:solidFill>
+                  <a:srgbClr val="4A5568"/>
+                </a:solidFill>
+                <a:latin typeface="Microsoft YaHei"/>
+                <a:ea typeface="Microsoft YaHei"/>
+              </a:rPr>
+              <a:t xml:space="preserve">About </a:t>
+            </a:r>
+            <a:r>
+              <a:rPr lang="en-US" sz="1013">
+                <a:solidFill>
+                  <a:srgbClr val="4A5568"/>
+                </a:solidFill>
+                <a:latin typeface="Microsoft YaHei"/>
+                <a:ea typeface="Microsoft YaHei"/>
+              </a:rPr>
+              <a:t>24 words</a:t>
+            </a:r>
+            <a:r>
+              <a:rPr lang="en-US" sz="1013">
+                <a:solidFill>
+                  <a:srgbClr val="4A5568"/>
+                </a:solidFill>
+                <a:latin typeface="Microsoft YaHei"/>
+                <a:ea typeface="Microsoft YaHei"/>
+              </a:rPr>
+              <a:t xml:space="preserve"> from your own FR-1…FR-12, into four buckets:</a:t>
+            </a:r>
+            <a:endParaRPr/>
+          </a:p>
+        </p:txBody>
+      </p:sp>
+      <p:sp>
+        <p:nvSpPr>
+          <p:cNvPr id="700" name=""/>
+          <p:cNvSpPr/>
+          <p:nvPr/>
+        </p:nvSpPr>
+        <p:spPr>
+          <a:xfrm rot="0" flipH="0" flipV="0">
+            <a:off x="533400" y="2066925"/>
+            <a:ext cx="476250" cy="219075"/>
+          </a:xfrm>
+          <a:prstGeom prst="roundRect">
+            <a:avLst>
+              <a:gd name="adj" fmla="val 17391"/>
+            </a:avLst>
+          </a:prstGeom>
+          <a:solidFill>
+            <a:srgbClr val="FFFFFF"/>
+          </a:solidFill>
+          <a:ln w="12700">
+            <a:solidFill>
+              <a:srgbClr val="D6DCE5"/>
+            </a:solidFill>
+            <a:prstDash val="solid"/>
+          </a:ln>
+        </p:spPr>
+        <p:txBody>
+          <a:bodyPr/>
+          <a:p/>
+        </p:txBody>
+      </p:sp>
+      <p:sp>
+        <p:nvSpPr>
+          <p:cNvPr id="701" name="" descr="{&quot;isTemplate&quot;:true,&quot;type&quot;:&quot;text&quot;}"/>
+          <p:cNvSpPr txBox="1"/>
+          <p:nvPr/>
+        </p:nvSpPr>
+        <p:spPr>
+          <a:xfrm rot="0" flipH="0" flipV="0">
+            <a:off x="619125" y="2105025"/>
+            <a:ext cx="304800" cy="142875"/>
+          </a:xfrm>
+          <a:prstGeom prst="rect"/>
+        </p:spPr>
+        <p:txBody>
+          <a:bodyPr wrap="none" lIns="0" tIns="0" rIns="0" bIns="0"/>
+          <a:p>
+            <a:pPr>
+              <a:lnSpc>
+                <a:spcPct val="100000"/>
+              </a:lnSpc>
+            </a:pPr>
+            <a:r>
+              <a:rPr lang="en-US" sz="938" b="1">
+                <a:solidFill>
+                  <a:srgbClr val="0E3F8C"/>
+                </a:solidFill>
+                <a:latin typeface="Microsoft YaHei"/>
+                <a:ea typeface="Microsoft YaHei"/>
+              </a:rPr>
+              <a:t>class</a:t>
+            </a:r>
+            <a:endParaRPr/>
+          </a:p>
+        </p:txBody>
+      </p:sp>
+      <p:sp>
+        <p:nvSpPr>
+          <p:cNvPr id="702" name=""/>
+          <p:cNvSpPr/>
+          <p:nvPr/>
+        </p:nvSpPr>
+        <p:spPr>
+          <a:xfrm rot="0" flipH="0" flipV="0">
+            <a:off x="1076325" y="2066925"/>
+            <a:ext cx="657225" cy="219075"/>
+          </a:xfrm>
+          <a:prstGeom prst="roundRect">
+            <a:avLst>
+              <a:gd name="adj" fmla="val 17391"/>
+            </a:avLst>
+          </a:prstGeom>
+          <a:solidFill>
+            <a:srgbClr val="FFFFFF"/>
+          </a:solidFill>
+          <a:ln w="12700">
+            <a:solidFill>
+              <a:srgbClr val="D6DCE5"/>
+            </a:solidFill>
+            <a:prstDash val="solid"/>
+          </a:ln>
+        </p:spPr>
+        <p:txBody>
+          <a:bodyPr/>
+          <a:p/>
+        </p:txBody>
+      </p:sp>
+      <p:sp>
+        <p:nvSpPr>
+          <p:cNvPr id="703" name="" descr="{&quot;isTemplate&quot;:true,&quot;type&quot;:&quot;text&quot;}"/>
+          <p:cNvSpPr txBox="1"/>
+          <p:nvPr/>
+        </p:nvSpPr>
+        <p:spPr>
+          <a:xfrm rot="0" flipH="0" flipV="0">
+            <a:off x="1162050" y="2105025"/>
+            <a:ext cx="485775" cy="142875"/>
+          </a:xfrm>
+          <a:prstGeom prst="rect"/>
+        </p:spPr>
+        <p:txBody>
+          <a:bodyPr wrap="none" lIns="0" tIns="0" rIns="0" bIns="0"/>
+          <a:p>
+            <a:pPr>
+              <a:lnSpc>
+                <a:spcPct val="100000"/>
+              </a:lnSpc>
+            </a:pPr>
+            <a:r>
+              <a:rPr lang="en-US" sz="938" b="1">
+                <a:solidFill>
+                  <a:srgbClr val="0E3F8C"/>
+                </a:solidFill>
+                <a:latin typeface="Microsoft YaHei"/>
+                <a:ea typeface="Microsoft YaHei"/>
+              </a:rPr>
+              <a:t>attribute</a:t>
+            </a:r>
+            <a:endParaRPr/>
+          </a:p>
+        </p:txBody>
+      </p:sp>
+      <p:sp>
+        <p:nvSpPr>
+          <p:cNvPr id="704" name=""/>
+          <p:cNvSpPr/>
+          <p:nvPr/>
+        </p:nvSpPr>
+        <p:spPr>
+          <a:xfrm rot="0" flipH="0" flipV="0">
+            <a:off x="1800225" y="2066925"/>
+            <a:ext cx="952500" cy="219075"/>
+          </a:xfrm>
+          <a:prstGeom prst="roundRect">
+            <a:avLst>
+              <a:gd name="adj" fmla="val 17391"/>
+            </a:avLst>
+          </a:prstGeom>
+          <a:solidFill>
+            <a:srgbClr val="FFFFFF"/>
+          </a:solidFill>
+          <a:ln w="12700">
+            <a:solidFill>
+              <a:srgbClr val="D6DCE5"/>
+            </a:solidFill>
+            <a:prstDash val="solid"/>
+          </a:ln>
+        </p:spPr>
+        <p:txBody>
+          <a:bodyPr/>
+          <a:p/>
+        </p:txBody>
+      </p:sp>
+      <p:sp>
+        <p:nvSpPr>
+          <p:cNvPr id="705" name="" descr="{&quot;isTemplate&quot;:true,&quot;type&quot;:&quot;text&quot;}"/>
+          <p:cNvSpPr txBox="1"/>
+          <p:nvPr/>
+        </p:nvSpPr>
+        <p:spPr>
+          <a:xfrm rot="0" flipH="0" flipV="0">
+            <a:off x="1885950" y="2105025"/>
+            <a:ext cx="781050" cy="142875"/>
+          </a:xfrm>
+          <a:prstGeom prst="rect"/>
+        </p:spPr>
+        <p:txBody>
+          <a:bodyPr wrap="none" lIns="0" tIns="0" rIns="0" bIns="0"/>
+          <a:p>
+            <a:pPr>
+              <a:lnSpc>
+                <a:spcPct val="100000"/>
+              </a:lnSpc>
+            </a:pPr>
+            <a:r>
+              <a:rPr lang="en-US" sz="938" b="1">
+                <a:solidFill>
+                  <a:srgbClr val="0E3F8C"/>
+                </a:solidFill>
+                <a:latin typeface="Microsoft YaHei"/>
+                <a:ea typeface="Microsoft YaHei"/>
+              </a:rPr>
+              <a:t>external actor</a:t>
+            </a:r>
+            <a:endParaRPr/>
+          </a:p>
+        </p:txBody>
+      </p:sp>
+      <p:sp>
+        <p:nvSpPr>
+          <p:cNvPr id="706" name=""/>
+          <p:cNvSpPr/>
+          <p:nvPr/>
+        </p:nvSpPr>
+        <p:spPr>
+          <a:xfrm rot="0" flipH="0" flipV="0">
+            <a:off x="2819400" y="2066925"/>
+            <a:ext cx="600075" cy="219075"/>
+          </a:xfrm>
+          <a:prstGeom prst="roundRect">
+            <a:avLst>
+              <a:gd name="adj" fmla="val 17391"/>
+            </a:avLst>
+          </a:prstGeom>
+          <a:solidFill>
+            <a:srgbClr val="FFFFFF"/>
+          </a:solidFill>
+          <a:ln w="12700">
+            <a:solidFill>
+              <a:srgbClr val="D6DCE5"/>
+            </a:solidFill>
+            <a:prstDash val="solid"/>
+          </a:ln>
+        </p:spPr>
+        <p:txBody>
+          <a:bodyPr/>
+          <a:p/>
+        </p:txBody>
+      </p:sp>
+      <p:sp>
+        <p:nvSpPr>
           <p:cNvPr id="707" name="" descr="{&quot;isTemplate&quot;:true,&quot;type&quot;:&quot;text&quot;}"/>
+          <p:cNvSpPr txBox="1"/>
+          <p:nvPr/>
+        </p:nvSpPr>
+        <p:spPr>
+          <a:xfrm rot="0" flipH="0" flipV="0">
+            <a:off x="2905125" y="2105025"/>
+            <a:ext cx="428625" cy="142875"/>
+          </a:xfrm>
+          <a:prstGeom prst="rect"/>
+        </p:spPr>
+        <p:txBody>
+          <a:bodyPr wrap="none" lIns="0" tIns="0" rIns="0" bIns="0"/>
+          <a:p>
+            <a:pPr>
+              <a:lnSpc>
+                <a:spcPct val="100000"/>
+              </a:lnSpc>
+            </a:pPr>
+            <a:r>
+              <a:rPr lang="en-US" sz="938" b="1">
+                <a:solidFill>
+                  <a:srgbClr val="0E3F8C"/>
+                </a:solidFill>
+                <a:latin typeface="Microsoft YaHei"/>
+                <a:ea typeface="Microsoft YaHei"/>
+              </a:rPr>
+              <a:t>discard</a:t>
+            </a:r>
+            <a:endParaRPr/>
+          </a:p>
+        </p:txBody>
+      </p:sp>
+      <p:sp>
+        <p:nvSpPr>
+          <p:cNvPr id="708" name="" descr="{&quot;isTemplate&quot;:true,&quot;type&quot;:&quot;text&quot;}"/>
+          <p:cNvSpPr txBox="1"/>
+          <p:nvPr/>
+        </p:nvSpPr>
+        <p:spPr>
+          <a:xfrm rot="0" flipH="0" flipV="0">
+            <a:off x="533400" y="2371725"/>
+            <a:ext cx="5314950" cy="466725"/>
+          </a:xfrm>
+          <a:prstGeom prst="rect"/>
+        </p:spPr>
+        <p:txBody>
+          <a:bodyPr wrap="square" lIns="0" tIns="0" rIns="0" bIns="0">
+            <a:normAutofit/>
+          </a:bodyPr>
+          <a:p>
+            <a:pPr>
+              <a:lnSpc>
+                <a:spcPct val="155000"/>
+              </a:lnSpc>
+            </a:pPr>
+            <a:r>
+              <a:rPr lang="en-US" sz="975">
+                <a:solidFill>
+                  <a:srgbClr val="4A5568"/>
+                </a:solidFill>
+                <a:latin typeface="Microsoft YaHei"/>
+                <a:ea typeface="Microsoft YaHei"/>
+              </a:rPr>
+              <a:t xml:space="preserve">Every word needs a reason that </a:t>
+            </a:r>
+            <a:r>
+              <a:rPr lang="en-US" sz="975">
+                <a:solidFill>
+                  <a:srgbClr val="4A5568"/>
+                </a:solidFill>
+                <a:latin typeface="Microsoft YaHei"/>
+                <a:ea typeface="Microsoft YaHei"/>
+              </a:rPr>
+              <a:t>cites a requirement line</a:t>
+            </a:r>
+            <a:r>
+              <a:rPr lang="en-US" sz="975">
+                <a:solidFill>
+                  <a:srgbClr val="4A5568"/>
+                </a:solidFill>
+                <a:latin typeface="Microsoft YaHei"/>
+                <a:ea typeface="Microsoft YaHei"/>
+              </a:rPr>
+              <a:t xml:space="preserve"> — or says that no requirement mentions it.</a:t>
+            </a:r>
+            <a:endParaRPr/>
+          </a:p>
+        </p:txBody>
+      </p:sp>
+      <p:sp>
+        <p:nvSpPr>
+          <p:cNvPr id="709" name="" descr="{&quot;isTemplate&quot;:true,&quot;type&quot;:&quot;text&quot;}"/>
+          <p:cNvSpPr txBox="1"/>
+          <p:nvPr/>
+        </p:nvSpPr>
+        <p:spPr>
+          <a:xfrm rot="0" flipH="0" flipV="0">
+            <a:off x="533400" y="2924175"/>
+            <a:ext cx="5314950" cy="142875"/>
+          </a:xfrm>
+          <a:prstGeom prst="rect"/>
+        </p:spPr>
+        <p:txBody>
+          <a:bodyPr wrap="none" lIns="0" tIns="0" rIns="0" bIns="0"/>
+          <a:p>
+            <a:pPr>
+              <a:lnSpc>
+                <a:spcPct val="100000"/>
+              </a:lnSpc>
+            </a:pPr>
+            <a:r>
+              <a:rPr lang="en-US" sz="900">
+                <a:solidFill>
+                  <a:srgbClr val="8B97A8"/>
+                </a:solidFill>
+                <a:latin typeface="Microsoft YaHei"/>
+                <a:ea typeface="Microsoft YaHei"/>
+              </a:rPr>
+              <a:t>→ docs/analysis/noun-scan.md</a:t>
+            </a:r>
+            <a:endParaRPr/>
+          </a:p>
+        </p:txBody>
+      </p:sp>
+      <p:sp>
+        <p:nvSpPr>
+          <p:cNvPr id="710" name=""/>
+          <p:cNvSpPr/>
+          <p:nvPr/>
+        </p:nvSpPr>
+        <p:spPr>
+          <a:xfrm rot="0" flipH="0" flipV="0">
+            <a:off x="6191250" y="1219200"/>
+            <a:ext cx="5619750" cy="2152650"/>
+          </a:xfrm>
+          <a:prstGeom prst="roundRect">
+            <a:avLst>
+              <a:gd name="adj" fmla="val 4425"/>
+            </a:avLst>
+          </a:prstGeom>
+          <a:solidFill>
+            <a:srgbClr val="F7F9FC"/>
+          </a:solidFill>
+          <a:ln w="12700">
+            <a:solidFill>
+              <a:srgbClr val="E5E7EB"/>
+            </a:solidFill>
+            <a:prstDash val="solid"/>
+          </a:ln>
+        </p:spPr>
+        <p:txBody>
+          <a:bodyPr/>
+          <a:p/>
+        </p:txBody>
+      </p:sp>
+      <p:sp>
+        <p:nvSpPr>
+          <p:cNvPr id="711" name=""/>
+          <p:cNvSpPr/>
+          <p:nvPr/>
+        </p:nvSpPr>
+        <p:spPr>
+          <a:xfrm rot="0" flipH="0" flipV="0">
+            <a:off x="6343650" y="1371600"/>
+            <a:ext cx="247650" cy="247650"/>
+          </a:xfrm>
+          <a:prstGeom prst="roundRect">
+            <a:avLst>
+              <a:gd name="adj" fmla="val 50000"/>
+            </a:avLst>
+          </a:prstGeom>
+          <a:solidFill>
+            <a:srgbClr val="0E3F8C"/>
+          </a:solidFill>
+          <a:ln/>
+        </p:spPr>
+        <p:txBody>
+          <a:bodyPr/>
+          <a:p/>
+        </p:txBody>
+      </p:sp>
+      <p:sp>
+        <p:nvSpPr>
+          <p:cNvPr id="712" name="" descr="{&quot;isTemplate&quot;:true,&quot;type&quot;:&quot;text&quot;}"/>
+          <p:cNvSpPr txBox="1"/>
+          <p:nvPr/>
+        </p:nvSpPr>
+        <p:spPr>
+          <a:xfrm rot="0" flipH="0" flipV="0">
+            <a:off x="6677025" y="1409700"/>
+            <a:ext cx="1847850" cy="171450"/>
+          </a:xfrm>
+          <a:prstGeom prst="rect"/>
+        </p:spPr>
+        <p:txBody>
+          <a:bodyPr wrap="none" lIns="0" tIns="0" rIns="0" bIns="0"/>
+          <a:p>
+            <a:pPr>
+              <a:lnSpc>
+                <a:spcPct val="100000"/>
+              </a:lnSpc>
+            </a:pPr>
+            <a:r>
+              <a:rPr lang="en-US" sz="1125" b="1">
+                <a:solidFill>
+                  <a:srgbClr val="0E3F8C"/>
+                </a:solidFill>
+                <a:latin typeface="Microsoft YaHei"/>
+                <a:ea typeface="Microsoft YaHei"/>
+              </a:rPr>
+              <a:t>2 · CLASSIFY, THEN DRAW</a:t>
+            </a:r>
+            <a:endParaRPr/>
+          </a:p>
+        </p:txBody>
+      </p:sp>
+      <p:sp>
+        <p:nvSpPr>
+          <p:cNvPr id="713" name="" descr="{&quot;isTemplate&quot;:true,&quot;type&quot;:&quot;text&quot;}"/>
+          <p:cNvSpPr txBox="1"/>
+          <p:nvPr/>
+        </p:nvSpPr>
+        <p:spPr>
+          <a:xfrm rot="0" flipH="0" flipV="0">
+            <a:off x="6343650" y="1733550"/>
+            <a:ext cx="5314950" cy="247650"/>
+          </a:xfrm>
+          <a:prstGeom prst="rect"/>
+        </p:spPr>
+        <p:txBody>
+          <a:bodyPr wrap="none" lIns="0" tIns="0" rIns="0" bIns="0"/>
+          <a:p>
+            <a:pPr>
+              <a:lnSpc>
+                <a:spcPct val="155000"/>
+              </a:lnSpc>
+            </a:pPr>
+            <a:r>
+              <a:rPr lang="en-US" sz="1013">
+                <a:solidFill>
+                  <a:srgbClr val="4A5568"/>
+                </a:solidFill>
+                <a:latin typeface="Microsoft YaHei"/>
+                <a:ea typeface="Microsoft YaHei"/>
+              </a:rPr>
+              <a:t xml:space="preserve">Mark every class </a:t>
+            </a:r>
+            <a:r>
+              <a:rPr lang="en-US" sz="1013">
+                <a:solidFill>
+                  <a:srgbClr val="4A5568"/>
+                </a:solidFill>
+                <a:latin typeface="Microsoft YaHei"/>
+                <a:ea typeface="Microsoft YaHei"/>
+              </a:rPr>
+              <a:t>E</a:t>
+            </a:r>
+            <a:r>
+              <a:rPr lang="en-US" sz="1013">
+                <a:solidFill>
+                  <a:srgbClr val="4A5568"/>
+                </a:solidFill>
+                <a:latin typeface="Microsoft YaHei"/>
+                <a:ea typeface="Microsoft YaHei"/>
+              </a:rPr>
+              <a:t xml:space="preserve">, </a:t>
+            </a:r>
+            <a:r>
+              <a:rPr lang="en-US" sz="1013">
+                <a:solidFill>
+                  <a:srgbClr val="4A5568"/>
+                </a:solidFill>
+                <a:latin typeface="Microsoft YaHei"/>
+                <a:ea typeface="Microsoft YaHei"/>
+              </a:rPr>
+              <a:t>B</a:t>
+            </a:r>
+            <a:r>
+              <a:rPr lang="en-US" sz="1013">
+                <a:solidFill>
+                  <a:srgbClr val="4A5568"/>
+                </a:solidFill>
+                <a:latin typeface="Microsoft YaHei"/>
+                <a:ea typeface="Microsoft YaHei"/>
+              </a:rPr>
+              <a:t xml:space="preserve"> or </a:t>
+            </a:r>
+            <a:r>
+              <a:rPr lang="en-US" sz="1013">
+                <a:solidFill>
+                  <a:srgbClr val="4A5568"/>
+                </a:solidFill>
+                <a:latin typeface="Microsoft YaHei"/>
+                <a:ea typeface="Microsoft YaHei"/>
+              </a:rPr>
+              <a:t>C</a:t>
+            </a:r>
+            <a:r>
+              <a:rPr lang="en-US" sz="1013">
+                <a:solidFill>
+                  <a:srgbClr val="4A5568"/>
+                </a:solidFill>
+                <a:latin typeface="Microsoft YaHei"/>
+                <a:ea typeface="Microsoft YaHei"/>
+              </a:rPr>
+              <a:t>, then draw the first domain model.</a:t>
+            </a:r>
+            <a:endParaRPr/>
+          </a:p>
+        </p:txBody>
+      </p:sp>
+      <p:sp>
+        <p:nvSpPr>
+          <p:cNvPr id="714" name="" descr="{&quot;isTemplate&quot;:true,&quot;type&quot;:&quot;text&quot;}"/>
+          <p:cNvSpPr txBox="1"/>
+          <p:nvPr/>
+        </p:nvSpPr>
+        <p:spPr>
+          <a:xfrm rot="0" flipH="0" flipV="0">
+            <a:off x="6343650" y="2057400"/>
+            <a:ext cx="5314950" cy="238125"/>
+          </a:xfrm>
+          <a:prstGeom prst="rect"/>
+        </p:spPr>
+        <p:txBody>
+          <a:bodyPr wrap="none" lIns="0" tIns="0" rIns="0" bIns="0"/>
+          <a:p>
+            <a:pPr>
+              <a:lnSpc>
+                <a:spcPct val="155000"/>
+              </a:lnSpc>
+            </a:pPr>
+            <a:r>
+              <a:rPr lang="en-US" sz="975">
+                <a:solidFill>
+                  <a:srgbClr val="4A5568"/>
+                </a:solidFill>
+                <a:latin typeface="Microsoft YaHei"/>
+                <a:ea typeface="Microsoft YaHei"/>
+              </a:rPr>
+              <a:t xml:space="preserve">Target </a:t>
+            </a:r>
+            <a:r>
+              <a:rPr lang="en-US" sz="975">
+                <a:solidFill>
+                  <a:srgbClr val="4A5568"/>
+                </a:solidFill>
+                <a:latin typeface="Microsoft YaHei"/>
+                <a:ea typeface="Microsoft YaHei"/>
+              </a:rPr>
+              <a:t>eight classes or more</a:t>
+            </a:r>
+            <a:r>
+              <a:rPr lang="en-US" sz="975">
+                <a:solidFill>
+                  <a:srgbClr val="4A5568"/>
+                </a:solidFill>
+                <a:latin typeface="Microsoft YaHei"/>
+                <a:ea typeface="Microsoft YaHei"/>
+              </a:rPr>
+              <a:t>. Associations only — no multiplicities, no attributes, no methods.</a:t>
+            </a:r>
+            <a:endParaRPr/>
+          </a:p>
+        </p:txBody>
+      </p:sp>
+      <p:sp>
+        <p:nvSpPr>
+          <p:cNvPr id="715" name=""/>
+          <p:cNvSpPr/>
+          <p:nvPr/>
+        </p:nvSpPr>
+        <p:spPr>
+          <a:xfrm rot="0" flipH="0" flipV="0">
+            <a:off x="6343650" y="2390775"/>
+            <a:ext cx="5343525" cy="428625"/>
+          </a:xfrm>
+          <a:custGeom>
+            <a:pathLst>
+              <a:path w="561" h="45">
+                <a:moveTo>
+                  <a:pt x="0" y="0"/>
+                </a:moveTo>
+                <a:lnTo>
+                  <a:pt x="3" y="0"/>
+                </a:lnTo>
+                <a:lnTo>
+                  <a:pt x="3" y="45"/>
+                </a:lnTo>
+                <a:lnTo>
+                  <a:pt x="0" y="45"/>
+                </a:lnTo>
+                <a:close/>
+              </a:path>
+            </a:pathLst>
+          </a:custGeom>
+          <a:solidFill>
+            <a:srgbClr val="FFC107"/>
+          </a:solidFill>
+          <a:ln/>
+        </p:spPr>
+        <p:txBody>
+          <a:bodyPr/>
+          <a:p/>
+        </p:txBody>
+      </p:sp>
+      <p:sp>
+        <p:nvSpPr>
+          <p:cNvPr id="716" name="" descr="{&quot;isTemplate&quot;:true,&quot;type&quot;:&quot;text&quot;}"/>
+          <p:cNvSpPr txBox="1"/>
+          <p:nvPr/>
+        </p:nvSpPr>
+        <p:spPr>
+          <a:xfrm rot="0" flipH="0" flipV="0">
+            <a:off x="6467475" y="2390775"/>
+            <a:ext cx="5191125" cy="428625"/>
+          </a:xfrm>
+          <a:prstGeom prst="rect"/>
+        </p:spPr>
+        <p:txBody>
+          <a:bodyPr wrap="square" lIns="0" tIns="0" rIns="0" bIns="0">
+            <a:normAutofit/>
+          </a:bodyPr>
+          <a:p>
+            <a:pPr>
+              <a:lnSpc>
+                <a:spcPct val="150000"/>
+              </a:lnSpc>
+            </a:pPr>
+            <a:r>
+              <a:rPr lang="en-US" sz="938">
+                <a:solidFill>
+                  <a:srgbClr val="4A5568"/>
+                </a:solidFill>
+                <a:latin typeface="Microsoft YaHei"/>
+                <a:ea typeface="Microsoft YaHei"/>
+              </a:rPr>
+              <a:t xml:space="preserve">Two arguments you must write down: </a:t>
+            </a:r>
+            <a:r>
+              <a:rPr lang="en-US" sz="938">
+                <a:solidFill>
+                  <a:srgbClr val="4A5568"/>
+                </a:solidFill>
+                <a:latin typeface="Microsoft YaHei"/>
+                <a:ea typeface="Microsoft YaHei"/>
+              </a:rPr>
+              <a:t>Contraindication</a:t>
+            </a:r>
+            <a:r>
+              <a:rPr lang="en-US" sz="938">
+                <a:solidFill>
+                  <a:srgbClr val="4A5568"/>
+                </a:solidFill>
+                <a:latin typeface="Microsoft YaHei"/>
+                <a:ea typeface="Microsoft YaHei"/>
+              </a:rPr>
+              <a:t xml:space="preserve"> (FR-1 attaches it to the client, not to a product) and </a:t>
+            </a:r>
+            <a:r>
+              <a:rPr lang="en-US" sz="938">
+                <a:solidFill>
+                  <a:srgbClr val="4A5568"/>
+                </a:solidFill>
+                <a:latin typeface="Microsoft YaHei"/>
+                <a:ea typeface="Microsoft YaHei"/>
+              </a:rPr>
+              <a:t>AllergyHistory</a:t>
+            </a:r>
+            <a:r>
+              <a:rPr lang="en-US" sz="938">
+                <a:solidFill>
+                  <a:srgbClr val="4A5568"/>
+                </a:solidFill>
+                <a:latin typeface="Microsoft YaHei"/>
+                <a:ea typeface="Microsoft YaHei"/>
+              </a:rPr>
+              <a:t>.</a:t>
+            </a:r>
+            <a:endParaRPr/>
+          </a:p>
+        </p:txBody>
+      </p:sp>
+      <p:sp>
+        <p:nvSpPr>
+          <p:cNvPr id="717" name="" descr="{&quot;isTemplate&quot;:true,&quot;type&quot;:&quot;text&quot;}"/>
+          <p:cNvSpPr txBox="1"/>
+          <p:nvPr/>
+        </p:nvSpPr>
+        <p:spPr>
+          <a:xfrm rot="0" flipH="0" flipV="0">
+            <a:off x="6343650" y="2905125"/>
+            <a:ext cx="5314950" cy="142875"/>
+          </a:xfrm>
+          <a:prstGeom prst="rect"/>
+        </p:spPr>
+        <p:txBody>
+          <a:bodyPr wrap="none" lIns="0" tIns="0" rIns="0" bIns="0"/>
+          <a:p>
+            <a:pPr>
+              <a:lnSpc>
+                <a:spcPct val="100000"/>
+              </a:lnSpc>
+            </a:pPr>
+            <a:r>
+              <a:rPr lang="en-US" sz="900">
+                <a:solidFill>
+                  <a:srgbClr val="8B97A8"/>
+                </a:solidFill>
+                <a:latin typeface="Microsoft YaHei"/>
+                <a:ea typeface="Microsoft YaHei"/>
+              </a:rPr>
+              <a:t>→ docs/diagrams/domain-model-v1.puml + PNG</a:t>
+            </a:r>
+            <a:endParaRPr/>
+          </a:p>
+        </p:txBody>
+      </p:sp>
+      <p:sp>
+        <p:nvSpPr>
+          <p:cNvPr id="718" name=""/>
+          <p:cNvSpPr/>
+          <p:nvPr/>
+        </p:nvSpPr>
+        <p:spPr>
+          <a:xfrm rot="0" flipH="0" flipV="0">
+            <a:off x="381000" y="3524250"/>
+            <a:ext cx="5619750" cy="2686050"/>
+          </a:xfrm>
+          <a:prstGeom prst="roundRect">
+            <a:avLst>
+              <a:gd name="adj" fmla="val 3546"/>
+            </a:avLst>
+          </a:prstGeom>
+          <a:solidFill>
+            <a:srgbClr val="F0F5FC"/>
+          </a:solidFill>
+          <a:ln w="12700">
+            <a:solidFill>
+              <a:srgbClr val="C8D8EE"/>
+            </a:solidFill>
+            <a:prstDash val="solid"/>
+          </a:ln>
+        </p:spPr>
+        <p:txBody>
+          <a:bodyPr/>
+          <a:p/>
+        </p:txBody>
+      </p:sp>
+      <p:sp>
+        <p:nvSpPr>
+          <p:cNvPr id="719" name=""/>
+          <p:cNvSpPr/>
+          <p:nvPr/>
+        </p:nvSpPr>
+        <p:spPr>
+          <a:xfrm rot="0" flipH="0" flipV="0">
+            <a:off x="533400" y="3676650"/>
+            <a:ext cx="247650" cy="247650"/>
+          </a:xfrm>
+          <a:prstGeom prst="roundRect">
+            <a:avLst>
+              <a:gd name="adj" fmla="val 50000"/>
+            </a:avLst>
+          </a:prstGeom>
+          <a:solidFill>
+            <a:srgbClr val="1E4FA8"/>
+          </a:solidFill>
+          <a:ln/>
+        </p:spPr>
+        <p:txBody>
+          <a:bodyPr/>
+          <a:p/>
+        </p:txBody>
+      </p:sp>
+      <p:sp>
+        <p:nvSpPr>
+          <p:cNvPr id="720" name="" descr="{&quot;isTemplate&quot;:true,&quot;type&quot;:&quot;text&quot;}"/>
+          <p:cNvSpPr txBox="1"/>
+          <p:nvPr/>
+        </p:nvSpPr>
+        <p:spPr>
+          <a:xfrm rot="0" flipH="0" flipV="0">
+            <a:off x="866775" y="3714750"/>
+            <a:ext cx="2152650" cy="171450"/>
+          </a:xfrm>
+          <a:prstGeom prst="rect"/>
+        </p:spPr>
+        <p:txBody>
+          <a:bodyPr wrap="none" lIns="0" tIns="0" rIns="0" bIns="0"/>
+          <a:p>
+            <a:pPr>
+              <a:lnSpc>
+                <a:spcPct val="100000"/>
+              </a:lnSpc>
+            </a:pPr>
+            <a:r>
+              <a:rPr lang="en-US" sz="1125" b="1">
+                <a:solidFill>
+                  <a:srgbClr val="0E3F8C"/>
+                </a:solidFill>
+                <a:latin typeface="Microsoft YaHei"/>
+                <a:ea typeface="Microsoft YaHei"/>
+              </a:rPr>
+              <a:t>3 · MAKE ONE OPEN DECISION</a:t>
+            </a:r>
+            <a:endParaRPr/>
+          </a:p>
+        </p:txBody>
+      </p:sp>
+      <p:sp>
+        <p:nvSpPr>
+          <p:cNvPr id="721" name="" descr="{&quot;isTemplate&quot;:true,&quot;type&quot;:&quot;text&quot;}"/>
+          <p:cNvSpPr txBox="1"/>
+          <p:nvPr/>
+        </p:nvSpPr>
+        <p:spPr>
+          <a:xfrm rot="0" flipH="0" flipV="0">
+            <a:off x="533400" y="4038600"/>
+            <a:ext cx="5314950" cy="247650"/>
+          </a:xfrm>
+          <a:prstGeom prst="rect"/>
+        </p:spPr>
+        <p:txBody>
+          <a:bodyPr wrap="none" lIns="0" tIns="0" rIns="0" bIns="0"/>
+          <a:p>
+            <a:pPr>
+              <a:lnSpc>
+                <a:spcPct val="155000"/>
+              </a:lnSpc>
+            </a:pPr>
+            <a:r>
+              <a:rPr lang="en-US" sz="1013">
+                <a:solidFill>
+                  <a:srgbClr val="4A5568"/>
+                </a:solidFill>
+                <a:latin typeface="Microsoft YaHei"/>
+                <a:ea typeface="Microsoft YaHei"/>
+              </a:rPr>
+              <a:t xml:space="preserve">Your requirements left </a:t>
+            </a:r>
+            <a:r>
+              <a:rPr lang="en-US" sz="1013">
+                <a:solidFill>
+                  <a:srgbClr val="4A5568"/>
+                </a:solidFill>
+                <a:latin typeface="Microsoft YaHei"/>
+                <a:ea typeface="Microsoft YaHei"/>
+              </a:rPr>
+              <a:t>six things unspecified</a:t>
+            </a:r>
+            <a:r>
+              <a:rPr lang="en-US" sz="1013">
+                <a:solidFill>
+                  <a:srgbClr val="4A5568"/>
+                </a:solidFill>
+                <a:latin typeface="Microsoft YaHei"/>
+                <a:ea typeface="Microsoft YaHei"/>
+              </a:rPr>
+              <a:t>. Pick one, decide it,</a:t>
+            </a:r>
+            <a:r>
+              <a:rPr lang="en-US" sz="1013">
+                <a:solidFill>
+                  <a:srgbClr val="4A5568"/>
+                </a:solidFill>
+                <a:latin typeface="Microsoft YaHei"/>
+                <a:ea typeface="Microsoft YaHei"/>
+              </a:rPr>
+              <a:t xml:space="preserve"> model it</a:t>
+            </a:r>
+            <a:r>
+              <a:rPr lang="en-US" sz="1013">
+                <a:solidFill>
+                  <a:srgbClr val="4A5568"/>
+                </a:solidFill>
+                <a:latin typeface="Microsoft YaHei"/>
+                <a:ea typeface="Microsoft YaHei"/>
+              </a:rPr>
+              <a:t>, and say why.</a:t>
+            </a:r>
+            <a:endParaRPr/>
+          </a:p>
+        </p:txBody>
+      </p:sp>
+      <p:sp>
+        <p:nvSpPr>
+          <p:cNvPr id="722" name="" descr="{&quot;isTemplate&quot;:true,&quot;type&quot;:&quot;text&quot;}"/>
+          <p:cNvSpPr txBox="1"/>
+          <p:nvPr/>
+        </p:nvSpPr>
+        <p:spPr>
+          <a:xfrm rot="0" flipH="0" flipV="0">
+            <a:off x="533400" y="4371975"/>
+            <a:ext cx="5314950" cy="161925"/>
+          </a:xfrm>
+          <a:prstGeom prst="rect"/>
+        </p:spPr>
+        <p:txBody>
+          <a:bodyPr wrap="none" lIns="0" tIns="0" rIns="0" bIns="0"/>
+          <a:p>
+            <a:pPr>
+              <a:lnSpc>
+                <a:spcPct val="100000"/>
+              </a:lnSpc>
+            </a:pPr>
+            <a:r>
+              <a:rPr lang="en-US" sz="1013" b="1">
+                <a:solidFill>
+                  <a:srgbClr val="D9534F"/>
+                </a:solidFill>
+                <a:latin typeface="Microsoft YaHei"/>
+                <a:ea typeface="Microsoft YaHei"/>
+              </a:rPr>
+              <a:t>"We haven't decided" is not a model.</a:t>
+            </a:r>
+            <a:endParaRPr/>
+          </a:p>
+        </p:txBody>
+      </p:sp>
+      <p:sp>
+        <p:nvSpPr>
+          <p:cNvPr id="723" name="" descr="{&quot;isTemplate&quot;:true,&quot;type&quot;:&quot;text&quot;}"/>
+          <p:cNvSpPr txBox="1"/>
+          <p:nvPr/>
+        </p:nvSpPr>
+        <p:spPr>
+          <a:xfrm rot="0" flipH="0" flipV="0">
+            <a:off x="533400" y="4591050"/>
+            <a:ext cx="5314950" cy="647700"/>
+          </a:xfrm>
+          <a:prstGeom prst="rect"/>
+        </p:spPr>
+        <p:txBody>
+          <a:bodyPr wrap="square" lIns="0" tIns="0" rIns="0" bIns="0">
+            <a:normAutofit/>
+          </a:bodyPr>
+          <a:p>
+            <a:pPr>
+              <a:lnSpc>
+                <a:spcPct val="150000"/>
+              </a:lnSpc>
+            </a:pPr>
+            <a:r>
+              <a:rPr lang="en-US" sz="938">
+                <a:solidFill>
+                  <a:srgbClr val="4A5568"/>
+                </a:solidFill>
+                <a:latin typeface="Microsoft YaHei"/>
+                <a:ea typeface="Microsoft YaHei"/>
+              </a:rPr>
+              <a:t>Does the client see findings before review? What happens on a low-confidence finding? Who may correct a client's own concern? Segments? Photo retention? What the client sees when an analysis is rejected?</a:t>
+            </a:r>
+            <a:endParaRPr/>
+          </a:p>
+        </p:txBody>
+      </p:sp>
+      <p:sp>
+        <p:nvSpPr>
+          <p:cNvPr id="724" name=""/>
+          <p:cNvSpPr/>
+          <p:nvPr/>
+        </p:nvSpPr>
+        <p:spPr>
+          <a:xfrm rot="0" flipH="0" flipV="0">
+            <a:off x="6191250" y="3524250"/>
+            <a:ext cx="5619750" cy="2686050"/>
+          </a:xfrm>
+          <a:prstGeom prst="roundRect">
+            <a:avLst>
+              <a:gd name="adj" fmla="val 3546"/>
+            </a:avLst>
+          </a:prstGeom>
+          <a:solidFill>
+            <a:srgbClr val="F0F5FC"/>
+          </a:solidFill>
+          <a:ln w="12700">
+            <a:solidFill>
+              <a:srgbClr val="C8D8EE"/>
+            </a:solidFill>
+            <a:prstDash val="solid"/>
+          </a:ln>
+        </p:spPr>
+        <p:txBody>
+          <a:bodyPr/>
+          <a:p/>
+        </p:txBody>
+      </p:sp>
+      <p:sp>
+        <p:nvSpPr>
+          <p:cNvPr id="725" name=""/>
+          <p:cNvSpPr/>
+          <p:nvPr/>
+        </p:nvSpPr>
+        <p:spPr>
+          <a:xfrm rot="0" flipH="0" flipV="0">
+            <a:off x="6343650" y="3676650"/>
+            <a:ext cx="247650" cy="247650"/>
+          </a:xfrm>
+          <a:prstGeom prst="roundRect">
+            <a:avLst>
+              <a:gd name="adj" fmla="val 50000"/>
+            </a:avLst>
+          </a:prstGeom>
+          <a:solidFill>
+            <a:srgbClr val="D9534F"/>
+          </a:solidFill>
+          <a:ln/>
+        </p:spPr>
+        <p:txBody>
+          <a:bodyPr/>
+          <a:p/>
+        </p:txBody>
+      </p:sp>
+      <p:sp>
+        <p:nvSpPr>
+          <p:cNvPr id="726" name="" descr="{&quot;isTemplate&quot;:true,&quot;type&quot;:&quot;text&quot;}"/>
+          <p:cNvSpPr txBox="1"/>
+          <p:nvPr/>
+        </p:nvSpPr>
+        <p:spPr>
+          <a:xfrm rot="0" flipH="0" flipV="0">
+            <a:off x="6677025" y="3714750"/>
+            <a:ext cx="2133600" cy="171450"/>
+          </a:xfrm>
+          <a:prstGeom prst="rect"/>
+        </p:spPr>
+        <p:txBody>
+          <a:bodyPr wrap="none" lIns="0" tIns="0" rIns="0" bIns="0"/>
+          <a:p>
+            <a:pPr>
+              <a:lnSpc>
+                <a:spcPct val="100000"/>
+              </a:lnSpc>
+            </a:pPr>
+            <a:r>
+              <a:rPr lang="en-US" sz="1125" b="1">
+                <a:solidFill>
+                  <a:srgbClr val="0E3F8C"/>
+                </a:solidFill>
+                <a:latin typeface="Microsoft YaHei"/>
+                <a:ea typeface="Microsoft YaHei"/>
+              </a:rPr>
+              <a:t>4 · CLOSE OUT M0 — TAG `m0`</a:t>
+            </a:r>
+            <a:endParaRPr/>
+          </a:p>
+        </p:txBody>
+      </p:sp>
+      <p:sp>
+        <p:nvSpPr>
+          <p:cNvPr id="727" name="" descr="{&quot;isTemplate&quot;:true,&quot;type&quot;:&quot;text&quot;}"/>
+          <p:cNvSpPr txBox="1"/>
+          <p:nvPr/>
+        </p:nvSpPr>
+        <p:spPr>
+          <a:xfrm rot="0" flipH="0" flipV="0">
+            <a:off x="6343650" y="4038600"/>
+            <a:ext cx="5314950" cy="247650"/>
+          </a:xfrm>
+          <a:prstGeom prst="rect"/>
+        </p:spPr>
+        <p:txBody>
+          <a:bodyPr wrap="none" lIns="0" tIns="0" rIns="0" bIns="0"/>
+          <a:p>
+            <a:pPr>
+              <a:lnSpc>
+                <a:spcPct val="155000"/>
+              </a:lnSpc>
+            </a:pPr>
+            <a:r>
+              <a:rPr lang="en-US" sz="1013">
+                <a:solidFill>
+                  <a:srgbClr val="4A5568"/>
+                </a:solidFill>
+                <a:latin typeface="Microsoft YaHei"/>
+                <a:ea typeface="Microsoft YaHei"/>
+              </a:rPr>
+              <a:t>Four artefacts, then one tag, then one command whose output you read.</a:t>
+            </a:r>
+            <a:endParaRPr/>
+          </a:p>
+        </p:txBody>
+      </p:sp>
+      <p:sp>
+        <p:nvSpPr>
+          <p:cNvPr id="728" name="" descr="{&quot;isTemplate&quot;:true,&quot;type&quot;:&quot;text&quot;}"/>
+          <p:cNvSpPr txBox="1"/>
+          <p:nvPr/>
+        </p:nvSpPr>
+        <p:spPr>
+          <a:xfrm rot="0" flipH="0" flipV="0">
+            <a:off x="6343650" y="4371975"/>
+            <a:ext cx="5314950" cy="228600"/>
+          </a:xfrm>
+          <a:prstGeom prst="rect"/>
+        </p:spPr>
+        <p:txBody>
+          <a:bodyPr wrap="none" lIns="0" tIns="0" rIns="0" bIns="0"/>
+          <a:p>
+            <a:pPr>
+              <a:lnSpc>
+                <a:spcPct val="160000"/>
+              </a:lnSpc>
+            </a:pPr>
+            <a:r>
+              <a:rPr lang="en-US" sz="938">
+                <a:solidFill>
+                  <a:srgbClr val="4A5568"/>
+                </a:solidFill>
+                <a:latin typeface="Microsoft YaHei"/>
+                <a:ea typeface="Microsoft YaHei"/>
+              </a:rPr>
+              <a:t>· docs/m0/team-charter.md — four names, four roles</a:t>
+            </a:r>
+            <a:endParaRPr/>
+          </a:p>
+        </p:txBody>
+      </p:sp>
+      <p:sp>
+        <p:nvSpPr>
+          <p:cNvPr id="729" name="" descr="{&quot;isTemplate&quot;:true,&quot;type&quot;:&quot;text&quot;}"/>
+          <p:cNvSpPr txBox="1"/>
+          <p:nvPr/>
+        </p:nvSpPr>
+        <p:spPr>
+          <a:xfrm rot="0" flipH="0" flipV="0">
+            <a:off x="6343650" y="4600575"/>
+            <a:ext cx="5314950" cy="228600"/>
+          </a:xfrm>
+          <a:prstGeom prst="rect"/>
+        </p:spPr>
+        <p:txBody>
+          <a:bodyPr wrap="none" lIns="0" tIns="0" rIns="0" bIns="0"/>
+          <a:p>
+            <a:pPr>
+              <a:lnSpc>
+                <a:spcPct val="160000"/>
+              </a:lnSpc>
+            </a:pPr>
+            <a:r>
+              <a:rPr lang="en-US" sz="938">
+                <a:solidFill>
+                  <a:srgbClr val="4A5568"/>
+                </a:solidFill>
+                <a:latin typeface="Microsoft YaHei"/>
+                <a:ea typeface="Microsoft YaHei"/>
+              </a:rPr>
+              <a:t>· docs/m0/stakeholders.md — inside or outside</a:t>
+            </a:r>
+            <a:endParaRPr/>
+          </a:p>
+        </p:txBody>
+      </p:sp>
+      <p:sp>
+        <p:nvSpPr>
+          <p:cNvPr id="730" name="" descr="{&quot;isTemplate&quot;:true,&quot;type&quot;:&quot;text&quot;}"/>
+          <p:cNvSpPr txBox="1"/>
+          <p:nvPr/>
+        </p:nvSpPr>
+        <p:spPr>
+          <a:xfrm rot="0" flipH="0" flipV="0">
+            <a:off x="6343650" y="4829175"/>
+            <a:ext cx="5314950" cy="228600"/>
+          </a:xfrm>
+          <a:prstGeom prst="rect"/>
+        </p:spPr>
+        <p:txBody>
+          <a:bodyPr wrap="none" lIns="0" tIns="0" rIns="0" bIns="0"/>
+          <a:p>
+            <a:pPr>
+              <a:lnSpc>
+                <a:spcPct val="160000"/>
+              </a:lnSpc>
+            </a:pPr>
+            <a:r>
+              <a:rPr lang="en-US" sz="938">
+                <a:solidFill>
+                  <a:srgbClr val="4A5568"/>
+                </a:solidFill>
+                <a:latin typeface="Microsoft YaHei"/>
+                <a:ea typeface="Microsoft YaHei"/>
+              </a:rPr>
+              <a:t>· docs/m0/vision.md — including the safety boundary</a:t>
+            </a:r>
+            <a:endParaRPr/>
+          </a:p>
+        </p:txBody>
+      </p:sp>
+      <p:sp>
+        <p:nvSpPr>
+          <p:cNvPr id="731" name=""/>
+          <p:cNvSpPr/>
+          <p:nvPr/>
+        </p:nvSpPr>
+        <p:spPr>
+          <a:xfrm rot="0" flipH="0" flipV="0">
+            <a:off x="6343650" y="5143500"/>
+            <a:ext cx="5314950" cy="552450"/>
+          </a:xfrm>
+          <a:prstGeom prst="roundRect">
+            <a:avLst>
+              <a:gd name="adj" fmla="val 8621"/>
+            </a:avLst>
+          </a:prstGeom>
+          <a:solidFill>
+            <a:srgbClr val="0E3F8C"/>
+          </a:solidFill>
+          <a:ln/>
+        </p:spPr>
+        <p:txBody>
+          <a:bodyPr/>
+          <a:p/>
+        </p:txBody>
+      </p:sp>
+      <p:sp>
+        <p:nvSpPr>
+          <p:cNvPr id="732" name="" descr="{&quot;isTemplate&quot;:true,&quot;type&quot;:&quot;text&quot;}"/>
+          <p:cNvSpPr txBox="1"/>
+          <p:nvPr/>
+        </p:nvSpPr>
+        <p:spPr>
+          <a:xfrm rot="0" flipH="0" flipV="0">
+            <a:off x="6438900" y="5219700"/>
+            <a:ext cx="5124450" cy="133350"/>
+          </a:xfrm>
+          <a:prstGeom prst="rect"/>
+        </p:spPr>
+        <p:txBody>
+          <a:bodyPr wrap="none" lIns="0" tIns="0" rIns="0" bIns="0"/>
+          <a:p>
+            <a:pPr>
+              <a:lnSpc>
+                <a:spcPct val="100000"/>
+              </a:lnSpc>
+            </a:pPr>
+            <a:r>
+              <a:rPr lang="en-US" sz="825">
+                <a:solidFill>
+                  <a:srgbClr val="C5D4EA"/>
+                </a:solidFill>
+                <a:latin typeface="Menlo"/>
+                <a:ea typeface="Menlo"/>
+              </a:rPr>
+              <a:t>git tag -a m0 -m "M0: charter, stakeholders, vision"</a:t>
+            </a:r>
+            <a:endParaRPr/>
+          </a:p>
+        </p:txBody>
+      </p:sp>
+      <p:sp>
+        <p:nvSpPr>
+          <p:cNvPr id="733" name="" descr="{&quot;isTemplate&quot;:true,&quot;type&quot;:&quot;text&quot;}"/>
+          <p:cNvSpPr txBox="1"/>
+          <p:nvPr/>
+        </p:nvSpPr>
+        <p:spPr>
+          <a:xfrm rot="0" flipH="0" flipV="0">
+            <a:off x="6438900" y="5353050"/>
+            <a:ext cx="5124450" cy="133350"/>
+          </a:xfrm>
+          <a:prstGeom prst="rect"/>
+        </p:spPr>
+        <p:txBody>
+          <a:bodyPr wrap="none" lIns="0" tIns="0" rIns="0" bIns="0"/>
+          <a:p>
+            <a:pPr>
+              <a:lnSpc>
+                <a:spcPct val="100000"/>
+              </a:lnSpc>
+            </a:pPr>
+            <a:r>
+              <a:rPr lang="en-US" sz="825">
+                <a:solidFill>
+                  <a:srgbClr val="C5D4EA"/>
+                </a:solidFill>
+                <a:latin typeface="Menlo"/>
+                <a:ea typeface="Menlo"/>
+              </a:rPr>
+              <a:t>git push origin m0</a:t>
+            </a:r>
+            <a:endParaRPr/>
+          </a:p>
+        </p:txBody>
+      </p:sp>
+      <p:sp>
+        <p:nvSpPr>
+          <p:cNvPr id="734" name="" descr="{&quot;isTemplate&quot;:true,&quot;type&quot;:&quot;text&quot;}"/>
+          <p:cNvSpPr txBox="1"/>
+          <p:nvPr/>
+        </p:nvSpPr>
+        <p:spPr>
+          <a:xfrm rot="0" flipH="0" flipV="0">
+            <a:off x="6438900" y="5486400"/>
+            <a:ext cx="5124450" cy="133350"/>
+          </a:xfrm>
+          <a:prstGeom prst="rect"/>
+        </p:spPr>
+        <p:txBody>
+          <a:bodyPr wrap="none" lIns="0" tIns="0" rIns="0" bIns="0"/>
+          <a:p>
+            <a:pPr>
+              <a:lnSpc>
+                <a:spcPct val="100000"/>
+              </a:lnSpc>
+            </a:pPr>
+            <a:r>
+              <a:rPr lang="en-US" sz="825">
+                <a:solidFill>
+                  <a:srgbClr val="FFC107"/>
+                </a:solidFill>
+                <a:latin typeface="Menlo"/>
+                <a:ea typeface="Menlo"/>
+              </a:rPr>
+              <a:t>git ls-remote --tags origin</a:t>
+            </a:r>
+            <a:endParaRPr/>
+          </a:p>
+        </p:txBody>
+      </p:sp>
+      <p:sp>
+        <p:nvSpPr>
+          <p:cNvPr id="735" name="" descr="{&quot;isTemplate&quot;:true,&quot;type&quot;:&quot;text&quot;}"/>
+          <p:cNvSpPr txBox="1"/>
+          <p:nvPr/>
+        </p:nvSpPr>
+        <p:spPr>
+          <a:xfrm rot="0" flipH="0" flipV="0">
+            <a:off x="6343650" y="5772150"/>
+            <a:ext cx="5314950" cy="142875"/>
+          </a:xfrm>
+          <a:prstGeom prst="rect"/>
+        </p:spPr>
+        <p:txBody>
+          <a:bodyPr wrap="none" lIns="0" tIns="0" rIns="0" bIns="0"/>
+          <a:p>
+            <a:pPr>
+              <a:lnSpc>
+                <a:spcPct val="100000"/>
+              </a:lnSpc>
+            </a:pPr>
+            <a:r>
+              <a:rPr lang="en-US" sz="900">
+                <a:solidFill>
+                  <a:srgbClr val="8B97A8"/>
+                </a:solidFill>
+                <a:latin typeface="Microsoft YaHei"/>
+                <a:ea typeface="Microsoft YaHei"/>
+              </a:rPr>
+              <a:t>You must see refs/tags/m0. No line = not submitted.</a:t>
+            </a:r>
+            <a:endParaRPr/>
+          </a:p>
+        </p:txBody>
+      </p:sp>
+      <p:sp>
+        <p:nvSpPr>
+          <p:cNvPr id="736" name=""/>
+          <p:cNvSpPr/>
+          <p:nvPr/>
+        </p:nvSpPr>
+        <p:spPr>
+          <a:xfrm rot="0" flipH="0" flipV="0">
+            <a:off x="0" y="6343650"/>
+            <a:ext cx="12192000" cy="514350"/>
+          </a:xfrm>
+          <a:prstGeom prst="rect">
+            <a:avLst/>
+          </a:prstGeom>
+          <a:solidFill>
+            <a:srgbClr val="0E3F8C"/>
+          </a:solidFill>
+          <a:ln/>
+        </p:spPr>
+        <p:txBody>
+          <a:bodyPr/>
+          <a:p/>
+        </p:txBody>
+      </p:sp>
+      <p:sp>
+        <p:nvSpPr>
+          <p:cNvPr id="737" name="" descr="{&quot;isTemplate&quot;:true,&quot;type&quot;:&quot;text&quot;}"/>
+          <p:cNvSpPr txBox="1"/>
+          <p:nvPr/>
+        </p:nvSpPr>
+        <p:spPr>
+          <a:xfrm rot="0" flipH="0" flipV="0">
+            <a:off x="381000" y="6515100"/>
+            <a:ext cx="6934200" cy="171450"/>
+          </a:xfrm>
+          <a:prstGeom prst="rect"/>
+        </p:spPr>
+        <p:txBody>
+          <a:bodyPr wrap="none" lIns="0" tIns="0" rIns="0" bIns="0"/>
+          <a:p>
+            <a:pPr>
+              <a:lnSpc>
+                <a:spcPct val="100000"/>
+              </a:lnSpc>
+            </a:pPr>
+            <a:r>
+              <a:rPr lang="en-US" sz="1125">
+                <a:solidFill>
+                  <a:srgbClr val="FFFFFF"/>
+                </a:solidFill>
+                <a:latin typeface="Microsoft YaHei"/>
+                <a:ea typeface="Microsoft YaHei"/>
+              </a:rPr>
+              <a:t xml:space="preserve">Four people, four lines of evidence. The </a:t>
+            </a:r>
+            <a:r>
+              <a:rPr lang="en-US" sz="1125">
+                <a:solidFill>
+                  <a:srgbClr val="FFFFFF"/>
+                </a:solidFill>
+                <a:latin typeface="Microsoft YaHei"/>
+                <a:ea typeface="Microsoft YaHei"/>
+              </a:rPr>
+              <a:t>.puml</a:t>
+            </a:r>
+            <a:r>
+              <a:rPr lang="en-US" sz="1125">
+                <a:solidFill>
+                  <a:srgbClr val="FFFFFF"/>
+                </a:solidFill>
+                <a:latin typeface="Microsoft YaHei"/>
+                <a:ea typeface="Microsoft YaHei"/>
+              </a:rPr>
+              <a:t xml:space="preserve"> is owned by the Recorder — every member defends one class.</a:t>
+            </a:r>
+            <a:endParaRPr/>
+          </a:p>
+        </p:txBody>
+      </p:sp>
+      <p:sp>
+        <p:nvSpPr>
+          <p:cNvPr id="738" name="" descr="{&quot;isTemplate&quot;:true,&quot;type&quot;:&quot;text&quot;}"/>
+          <p:cNvSpPr txBox="1"/>
+          <p:nvPr/>
+        </p:nvSpPr>
+        <p:spPr>
+          <a:xfrm rot="0" flipH="0" flipV="0">
+            <a:off x="10629900" y="6524625"/>
+            <a:ext cx="1181100" cy="161925"/>
+          </a:xfrm>
+          <a:prstGeom prst="rect"/>
+        </p:spPr>
+        <p:txBody>
+          <a:bodyPr wrap="none" lIns="0" tIns="0" rIns="0" bIns="0"/>
+          <a:p>
+            <a:pPr>
+              <a:lnSpc>
+                <a:spcPct val="100000"/>
+              </a:lnSpc>
+            </a:pPr>
+            <a:r>
+              <a:rPr lang="en-US" sz="1050">
+                <a:solidFill>
+                  <a:srgbClr val="7FA2D6"/>
+                </a:solidFill>
+                <a:latin typeface="Microsoft YaHei"/>
+                <a:ea typeface="Microsoft YaHei"/>
+              </a:rPr>
+              <a:t>M1 due Sun Nov 01</a:t>
+            </a:r>
+            <a:endParaRPr/>
+          </a:p>
+        </p:txBody>
+      </p:sp>
+    </p:spTree>
+  </p:cSld>
+</p:sld>
+</file>
+
+<file path=ppt/slides/slide4.xml><?xml version="1.0" encoding="utf-8"?>
+<p:sld xmlns:p="http://schemas.openxmlformats.org/presentationml/2006/main" xmlns:a="http://schemas.openxmlformats.org/drawingml/2006/main">
+  <p:cSld>
+    <p:spTree>
+      <p:nvGrpSpPr>
+        <p:cNvPr id="739" name="" descr="&lt;Slide style={{ background: '#FFFFFF', padding: 0 }}&gt;&#10;  &lt;Box style={{ height: 72, background: '#1E4FA8', padding: '0 40px', flexDirection: 'row', alignItems: 'center', justifyContent: 'space-between' }}&gt;&#10;    &lt;Text style={{ fontSize: 15, color: '#B9CDF0', letterSpacing: 1 }}&gt;ISAD · INFORMATION SYSTEMS ANALYSIS &amp;amp; DESIGN&lt;/Text&gt;&#10;    &lt;Text style={{ fontSize: 15, color: '#B9CDF0' }}&gt;W06 · FROM SCENARIOS TO CLASSES&lt;/Text&gt;&#10;  &lt;/Box&gt;&#10;  &lt;Box style={{ padding: '13px 40px 0 40px', flexDirection: 'row', alignItems: 'center', justifyContent: 'space-between' }}&gt;&#10;    &lt;Text style={{ fontSize: 29, fontWeight: 'bold', color: '#0E3F8C' }}&gt;Last Week You Wrote Sentences&lt;/Text&gt;&#10;    &lt;Text style={{ fontSize: 14, color: '#1E4FA8', fontWeight: 'bold' }}&gt;04 / 39&lt;/Text&gt;&#10;  &lt;/Box&gt;&#10;  &lt;Box style={{ flex: 1, padding: '10px 40px 0 40px', flexDirection: 'row', gap: 26 }}&gt;&#10;    &lt;Box style={{ width: 560, justifyContent: 'center' }}&gt;&#10;      &lt;Box style={{ padding: '18px 20px', background: '#F7F9FC', borderRadius: 10, border: '1px solid #E5E7EB' }}&gt;&#10;        &lt;Text style={{ fontSize: 13, color: '#8B97A8', letterSpacing: 1, marginBottom: 12 }}&gt;MAIN SUCCESS SCENARIO — PLACE ORDER&lt;/Text&gt;&#10;        {[&#10;          ['1', 'Student reviews the cart total.'],&#10;          ['2', 'System displays the payable amount.'],&#10;          ['3', 'Student chooses a payment method.'],&#10;          ['4', 'System authorises the amount with the provider.'],&#10;          ['5', 'System creates the order in state Accepted.'],&#10;          ['6', 'System prints the kitchen ticket.'],&#10;          ['7', 'System notifies the student of the order time.'],&#10;        ].map((s) =&gt; (&#10;          &lt;Box key={s[0]} style={{ flexDirection: 'row', gap: 12, marginBottom: 9 }}&gt;&#10;            &lt;Box style={{ width: 22, height: 22, borderRadius: 4, background: '#1E4FA8', justifyContent: 'center', alignItems: 'center' }}&gt;&#10;              &lt;Text style={{ fontSize: 11, fontWeight: 'bold', color: '#FFFFFF' }}&gt;{s[0]}&lt;/Text&gt;&#10;            &lt;/Box&gt;&#10;            &lt;Text style={{ flex: 1, fontSize: 13.5, color: '#1A2230', lineHeight: 1.45 }}&gt;{s[1]}&lt;/Text&gt;&#10;          &lt;/Box&gt;&#10;        ))}&#10;      &lt;/Box&gt;&#10;    &lt;/Box&gt;&#10;    &lt;Box style={{ flex: 1, flexDirection: 'column', justifyContent: 'center', gap: 13 }}&gt;&#10;      &lt;Box style={{ padding: '15px 17px', background: '#F0F5FC', borderRadius: 9, borderLeft: '4px solid #1E4FA8' }}&gt;&#10;        &lt;Text style={{ fontSize: 16, fontWeight: 'bold', color: '#0E3F8C' }}&gt;Twelve nouns, no classes&lt;/Text&gt;&#10;        &lt;Text style={{ fontSize: 13, color: '#4A5568', lineHeight: 1.6, marginTop: 5 }}&gt;&#10;          cart · total · payment method · amount · provider · order · state Accepted · kitchen ticket · student · order time&#10;        &lt;/Text&gt;&#10;      &lt;/Box&gt;&#10;      &lt;Box style={{ padding: '15px 17px', background: '#FFFFFF', borderRadius: 9, border: '1px solid #D6DCE5' }}&gt;&#10;        &lt;Text style={{ fontSize: 16, fontWeight: 'bold', color: '#0E3F8C' }}&gt;Every one is either a class or an attribute&lt;/Text&gt;&#10;        &lt;Text style={{ fontSize: 13, color: '#4A5568', lineHeight: 1.6, marginTop: 5 }}&gt;&#10;          That decision is this week’s whole job. It looks trivial. It is the step at which most real projects go wrong.&#10;        &lt;/Text&gt;&#10;      &lt;/Box&gt;&#10;      &lt;Box style={{ padding: '15px 17px', background: '#FFF6E0', borderRadius: 9, borderLeft: '4px solid #FFC107' }}&gt;&#10;        &lt;Text style={{ fontSize: 16, fontWeight: 'bold', color: '#996F00' }}&gt;Two are already taken&lt;/Text&gt;&#10;        &lt;Text style={{ fontSize: 13, color: '#4A5568', lineHeight: 1.6, marginTop: 5 }}&gt;&#10;          Student and provider are actors. They were on your use case diagram, so they are not classes in this model.&#10;        &lt;/Text&gt;&#10;      &lt;/Box&gt;&#10;      &lt;Box style={{ padding: '12px 16px', background: '#F7F9FC', borderRadius: 8, border: '1px dashed #D6DCE5' }}&gt;&#10;        &lt;Text style={{ fontSize: 12.5, color: '#8B97A8', lineHeight: 1.55 }}&gt;&#10;          You already wrote the specification that produces this model. The hard reading is already done — this week is bookkeeping with consequences.&#10;        &lt;/Text&gt;&#10;      &lt;/Box&gt;&#10;    &lt;/Box&gt;&#10;  &lt;/Box&gt;&#10;  &lt;Box style={{ height: 34, padding: '0 40px', flexDirection: 'row', alignItems: 'center', justifyContent: 'space-between' }}&gt;&#10;    &lt;Text style={{ fontSize: 13, color: '#8B97A8' }}&gt;ISAD · Fall 2026 · The nouns were there all along. Last week you wrote sentences about them instead of drawing them&lt;/Text&gt;&#10;    &lt;Text style={{ fontSize: 14, color: '#1E4FA8', fontWeight: 'bold' }}&gt;04 / 39&lt;/Text&gt;&#10;  &lt;/Box&gt;&#10;&lt;/Slide&gt;&#10;"/>
+        <p:cNvGrpSpPr/>
+        <p:nvPr/>
+      </p:nvGrpSpPr>
+      <p:grpSpPr>
+        <a:xfrm>
+          <a:off x="0" y="0"/>
+          <a:ext cx="0" cy="0"/>
+          <a:chOff x="0" y="0"/>
+          <a:chExt cx="0" cy="0"/>
+        </a:xfrm>
+      </p:grpSpPr>
+      <p:sp>
+        <p:nvSpPr>
+          <p:cNvPr id="740" name=""/>
+          <p:cNvSpPr/>
+          <p:nvPr/>
+        </p:nvSpPr>
+        <p:spPr>
+          <a:xfrm rot="0" flipH="0" flipV="0">
+            <a:off x="0" y="0"/>
+            <a:ext cx="12192000" cy="6858000"/>
+          </a:xfrm>
+          <a:prstGeom prst="rect">
+            <a:avLst/>
+          </a:prstGeom>
+          <a:solidFill>
+            <a:srgbClr val="FFFFFF"/>
+          </a:solidFill>
+          <a:ln/>
+        </p:spPr>
+        <p:txBody>
+          <a:bodyPr/>
+          <a:p/>
+        </p:txBody>
+      </p:sp>
+      <p:sp>
+        <p:nvSpPr>
+          <p:cNvPr id="741" name=""/>
+          <p:cNvSpPr/>
+          <p:nvPr/>
+        </p:nvSpPr>
+        <p:spPr>
+          <a:xfrm rot="0" flipH="0" flipV="0">
+            <a:off x="0" y="0"/>
+            <a:ext cx="12192000" cy="685800"/>
+          </a:xfrm>
+          <a:prstGeom prst="rect">
+            <a:avLst/>
+          </a:prstGeom>
+          <a:solidFill>
+            <a:srgbClr val="1E4FA8"/>
+          </a:solidFill>
+          <a:ln/>
+        </p:spPr>
+        <p:txBody>
+          <a:bodyPr/>
+          <a:p/>
+        </p:txBody>
+      </p:sp>
+      <p:sp>
+        <p:nvSpPr>
+          <p:cNvPr id="742" name="" descr="{&quot;isTemplate&quot;:true,&quot;type&quot;:&quot;text&quot;}"/>
+          <p:cNvSpPr txBox="1"/>
+          <p:nvPr/>
+        </p:nvSpPr>
+        <p:spPr>
+          <a:xfrm rot="0" flipH="0" flipV="0">
+            <a:off x="381000" y="257175"/>
+            <a:ext cx="4067175" cy="171450"/>
+          </a:xfrm>
+          <a:prstGeom prst="rect"/>
+        </p:spPr>
+        <p:txBody>
+          <a:bodyPr wrap="none" lIns="0" tIns="0" rIns="0" bIns="0"/>
+          <a:p>
+            <a:pPr>
+              <a:lnSpc>
+                <a:spcPct val="100000"/>
+              </a:lnSpc>
+            </a:pPr>
+            <a:r>
+              <a:rPr lang="en-US" sz="1125" spc="75">
+                <a:solidFill>
+                  <a:srgbClr val="B9CDF0"/>
+                </a:solidFill>
+                <a:latin typeface="Microsoft YaHei"/>
+                <a:ea typeface="Microsoft YaHei"/>
+              </a:rPr>
+              <a:t>ISAD · INFORMATION SYSTEMS ANALYSIS &amp; DESIGN</a:t>
+            </a:r>
+            <a:endParaRPr/>
+          </a:p>
+        </p:txBody>
+      </p:sp>
+      <p:sp>
+        <p:nvSpPr>
+          <p:cNvPr id="743" name="" descr="{&quot;isTemplate&quot;:true,&quot;type&quot;:&quot;text&quot;}"/>
           <p:cNvSpPr txBox="1"/>
           <p:nvPr/>
         </p:nvSpPr>
@@ -31930,7 +33247,7 @@
       </p:sp>
       <p:sp>
         <p:nvSpPr>
-          <p:cNvPr id="708" name="" descr="{&quot;isTemplate&quot;:true,&quot;type&quot;:&quot;text&quot;}"/>
+          <p:cNvPr id="744" name="" descr="{&quot;isTemplate&quot;:true,&quot;type&quot;:&quot;text&quot;}"/>
           <p:cNvSpPr txBox="1"/>
           <p:nvPr/>
         </p:nvSpPr>
@@ -31965,7 +33282,7 @@
       </p:sp>
       <p:sp>
         <p:nvSpPr>
-          <p:cNvPr id="709" name="" descr="{&quot;isTemplate&quot;:true,&quot;type&quot;:&quot;text&quot;}"/>
+          <p:cNvPr id="745" name="" descr="{&quot;isTemplate&quot;:true,&quot;type&quot;:&quot;text&quot;}"/>
           <p:cNvSpPr txBox="1"/>
           <p:nvPr/>
         </p:nvSpPr>
@@ -31992,15 +33309,15 @@
                 <a:latin typeface="Microsoft YaHei"/>
                 <a:ea typeface="Microsoft YaHei"/>
               </a:rPr>
-              <a:t>04 / 38</a:t>
-            </a:r>
-            <a:endParaRPr/>
-          </a:p>
-        </p:txBody>
-      </p:sp>
-      <p:sp>
-        <p:nvSpPr>
-          <p:cNvPr id="710" name=""/>
+              <a:t>04 / 39</a:t>
+            </a:r>
+            <a:endParaRPr/>
+          </a:p>
+        </p:txBody>
+      </p:sp>
+      <p:sp>
+        <p:nvSpPr>
+          <p:cNvPr id="746" name=""/>
           <p:cNvSpPr/>
           <p:nvPr/>
         </p:nvSpPr>
@@ -32031,7 +33348,7 @@
       </p:sp>
       <p:sp>
         <p:nvSpPr>
-          <p:cNvPr id="711" name="" descr="{&quot;isTemplate&quot;:true,&quot;type&quot;:&quot;text&quot;}"/>
+          <p:cNvPr id="747" name="" descr="{&quot;isTemplate&quot;:true,&quot;type&quot;:&quot;text&quot;}"/>
           <p:cNvSpPr txBox="1"/>
           <p:nvPr/>
         </p:nvSpPr>
@@ -32066,7 +33383,7 @@
       </p:sp>
       <p:sp>
         <p:nvSpPr>
-          <p:cNvPr id="712" name=""/>
+          <p:cNvPr id="748" name=""/>
           <p:cNvSpPr/>
           <p:nvPr/>
         </p:nvSpPr>
@@ -32092,7 +33409,7 @@
       </p:sp>
       <p:sp>
         <p:nvSpPr>
-          <p:cNvPr id="713" name="" descr="{&quot;isTemplate&quot;:true,&quot;type&quot;:&quot;text&quot;}"/>
+          <p:cNvPr id="749" name="" descr="{&quot;isTemplate&quot;:true,&quot;type&quot;:&quot;text&quot;}"/>
           <p:cNvSpPr txBox="1"/>
           <p:nvPr/>
         </p:nvSpPr>
@@ -32127,7 +33444,7 @@
       </p:sp>
       <p:sp>
         <p:nvSpPr>
-          <p:cNvPr id="714" name="" descr="{&quot;isTemplate&quot;:true,&quot;type&quot;:&quot;text&quot;}"/>
+          <p:cNvPr id="750" name="" descr="{&quot;isTemplate&quot;:true,&quot;type&quot;:&quot;text&quot;}"/>
           <p:cNvSpPr txBox="1"/>
           <p:nvPr/>
         </p:nvSpPr>
@@ -32162,7 +33479,7 @@
       </p:sp>
       <p:sp>
         <p:nvSpPr>
-          <p:cNvPr id="715" name=""/>
+          <p:cNvPr id="751" name=""/>
           <p:cNvSpPr/>
           <p:nvPr/>
         </p:nvSpPr>
@@ -32188,7 +33505,7 @@
       </p:sp>
       <p:sp>
         <p:nvSpPr>
-          <p:cNvPr id="716" name="" descr="{&quot;isTemplate&quot;:true,&quot;type&quot;:&quot;text&quot;}"/>
+          <p:cNvPr id="752" name="" descr="{&quot;isTemplate&quot;:true,&quot;type&quot;:&quot;text&quot;}"/>
           <p:cNvSpPr txBox="1"/>
           <p:nvPr/>
         </p:nvSpPr>
@@ -32223,7 +33540,7 @@
       </p:sp>
       <p:sp>
         <p:nvSpPr>
-          <p:cNvPr id="717" name="" descr="{&quot;isTemplate&quot;:true,&quot;type&quot;:&quot;text&quot;}"/>
+          <p:cNvPr id="753" name="" descr="{&quot;isTemplate&quot;:true,&quot;type&quot;:&quot;text&quot;}"/>
           <p:cNvSpPr txBox="1"/>
           <p:nvPr/>
         </p:nvSpPr>
@@ -32258,7 +33575,7 @@
       </p:sp>
       <p:sp>
         <p:nvSpPr>
-          <p:cNvPr id="718" name=""/>
+          <p:cNvPr id="754" name=""/>
           <p:cNvSpPr/>
           <p:nvPr/>
         </p:nvSpPr>
@@ -32284,7 +33601,7 @@
       </p:sp>
       <p:sp>
         <p:nvSpPr>
-          <p:cNvPr id="719" name="" descr="{&quot;isTemplate&quot;:true,&quot;type&quot;:&quot;text&quot;}"/>
+          <p:cNvPr id="755" name="" descr="{&quot;isTemplate&quot;:true,&quot;type&quot;:&quot;text&quot;}"/>
           <p:cNvSpPr txBox="1"/>
           <p:nvPr/>
         </p:nvSpPr>
@@ -32319,7 +33636,7 @@
       </p:sp>
       <p:sp>
         <p:nvSpPr>
-          <p:cNvPr id="720" name="" descr="{&quot;isTemplate&quot;:true,&quot;type&quot;:&quot;text&quot;}"/>
+          <p:cNvPr id="756" name="" descr="{&quot;isTemplate&quot;:true,&quot;type&quot;:&quot;text&quot;}"/>
           <p:cNvSpPr txBox="1"/>
           <p:nvPr/>
         </p:nvSpPr>
@@ -32354,7 +33671,7 @@
       </p:sp>
       <p:sp>
         <p:nvSpPr>
-          <p:cNvPr id="721" name=""/>
+          <p:cNvPr id="757" name=""/>
           <p:cNvSpPr/>
           <p:nvPr/>
         </p:nvSpPr>
@@ -32380,7 +33697,7 @@
       </p:sp>
       <p:sp>
         <p:nvSpPr>
-          <p:cNvPr id="722" name="" descr="{&quot;isTemplate&quot;:true,&quot;type&quot;:&quot;text&quot;}"/>
+          <p:cNvPr id="758" name="" descr="{&quot;isTemplate&quot;:true,&quot;type&quot;:&quot;text&quot;}"/>
           <p:cNvSpPr txBox="1"/>
           <p:nvPr/>
         </p:nvSpPr>
@@ -32415,7 +33732,7 @@
       </p:sp>
       <p:sp>
         <p:nvSpPr>
-          <p:cNvPr id="723" name="" descr="{&quot;isTemplate&quot;:true,&quot;type&quot;:&quot;text&quot;}"/>
+          <p:cNvPr id="759" name="" descr="{&quot;isTemplate&quot;:true,&quot;type&quot;:&quot;text&quot;}"/>
           <p:cNvSpPr txBox="1"/>
           <p:nvPr/>
         </p:nvSpPr>
@@ -32450,7 +33767,7 @@
       </p:sp>
       <p:sp>
         <p:nvSpPr>
-          <p:cNvPr id="724" name=""/>
+          <p:cNvPr id="760" name=""/>
           <p:cNvSpPr/>
           <p:nvPr/>
         </p:nvSpPr>
@@ -32476,7 +33793,7 @@
       </p:sp>
       <p:sp>
         <p:nvSpPr>
-          <p:cNvPr id="725" name="" descr="{&quot;isTemplate&quot;:true,&quot;type&quot;:&quot;text&quot;}"/>
+          <p:cNvPr id="761" name="" descr="{&quot;isTemplate&quot;:true,&quot;type&quot;:&quot;text&quot;}"/>
           <p:cNvSpPr txBox="1"/>
           <p:nvPr/>
         </p:nvSpPr>
@@ -32511,7 +33828,7 @@
       </p:sp>
       <p:sp>
         <p:nvSpPr>
-          <p:cNvPr id="726" name="" descr="{&quot;isTemplate&quot;:true,&quot;type&quot;:&quot;text&quot;}"/>
+          <p:cNvPr id="762" name="" descr="{&quot;isTemplate&quot;:true,&quot;type&quot;:&quot;text&quot;}"/>
           <p:cNvSpPr txBox="1"/>
           <p:nvPr/>
         </p:nvSpPr>
@@ -32546,7 +33863,7 @@
       </p:sp>
       <p:sp>
         <p:nvSpPr>
-          <p:cNvPr id="727" name=""/>
+          <p:cNvPr id="763" name=""/>
           <p:cNvSpPr/>
           <p:nvPr/>
         </p:nvSpPr>
@@ -32572,7 +33889,7 @@
       </p:sp>
       <p:sp>
         <p:nvSpPr>
-          <p:cNvPr id="728" name="" descr="{&quot;isTemplate&quot;:true,&quot;type&quot;:&quot;text&quot;}"/>
+          <p:cNvPr id="764" name="" descr="{&quot;isTemplate&quot;:true,&quot;type&quot;:&quot;text&quot;}"/>
           <p:cNvSpPr txBox="1"/>
           <p:nvPr/>
         </p:nvSpPr>
@@ -32607,7 +33924,7 @@
       </p:sp>
       <p:sp>
         <p:nvSpPr>
-          <p:cNvPr id="729" name="" descr="{&quot;isTemplate&quot;:true,&quot;type&quot;:&quot;text&quot;}"/>
+          <p:cNvPr id="765" name="" descr="{&quot;isTemplate&quot;:true,&quot;type&quot;:&quot;text&quot;}"/>
           <p:cNvSpPr txBox="1"/>
           <p:nvPr/>
         </p:nvSpPr>
@@ -32642,7 +33959,7 @@
       </p:sp>
       <p:sp>
         <p:nvSpPr>
-          <p:cNvPr id="730" name=""/>
+          <p:cNvPr id="766" name=""/>
           <p:cNvSpPr/>
           <p:nvPr/>
         </p:nvSpPr>
@@ -32668,7 +33985,7 @@
       </p:sp>
       <p:sp>
         <p:nvSpPr>
-          <p:cNvPr id="731" name="" descr="{&quot;isTemplate&quot;:true,&quot;type&quot;:&quot;text&quot;}"/>
+          <p:cNvPr id="767" name="" descr="{&quot;isTemplate&quot;:true,&quot;type&quot;:&quot;text&quot;}"/>
           <p:cNvSpPr txBox="1"/>
           <p:nvPr/>
         </p:nvSpPr>
@@ -32703,7 +34020,7 @@
       </p:sp>
       <p:sp>
         <p:nvSpPr>
-          <p:cNvPr id="732" name="" descr="{&quot;isTemplate&quot;:true,&quot;type&quot;:&quot;text&quot;}"/>
+          <p:cNvPr id="768" name="" descr="{&quot;isTemplate&quot;:true,&quot;type&quot;:&quot;text&quot;}"/>
           <p:cNvSpPr txBox="1"/>
           <p:nvPr/>
         </p:nvSpPr>
@@ -32738,7 +34055,7 @@
       </p:sp>
       <p:sp>
         <p:nvSpPr>
-          <p:cNvPr id="733" name=""/>
+          <p:cNvPr id="769" name=""/>
           <p:cNvSpPr/>
           <p:nvPr/>
         </p:nvSpPr>
@@ -32764,7 +34081,7 @@
       </p:sp>
       <p:sp>
         <p:nvSpPr>
-          <p:cNvPr id="734" name=""/>
+          <p:cNvPr id="770" name=""/>
           <p:cNvSpPr/>
           <p:nvPr/>
         </p:nvSpPr>
@@ -32821,7 +34138,7 @@
       </p:sp>
       <p:sp>
         <p:nvSpPr>
-          <p:cNvPr id="735" name="" descr="{&quot;isTemplate&quot;:true,&quot;type&quot;:&quot;text&quot;}"/>
+          <p:cNvPr id="771" name="" descr="{&quot;isTemplate&quot;:true,&quot;type&quot;:&quot;text&quot;}"/>
           <p:cNvSpPr txBox="1"/>
           <p:nvPr/>
         </p:nvSpPr>
@@ -32856,7 +34173,7 @@
       </p:sp>
       <p:sp>
         <p:nvSpPr>
-          <p:cNvPr id="736" name="" descr="{&quot;isTemplate&quot;:true,&quot;type&quot;:&quot;text&quot;}"/>
+          <p:cNvPr id="772" name="" descr="{&quot;isTemplate&quot;:true,&quot;type&quot;:&quot;text&quot;}"/>
           <p:cNvSpPr txBox="1"/>
           <p:nvPr/>
         </p:nvSpPr>
@@ -32893,7 +34210,7 @@
       </p:sp>
       <p:sp>
         <p:nvSpPr>
-          <p:cNvPr id="737" name=""/>
+          <p:cNvPr id="773" name=""/>
           <p:cNvSpPr/>
           <p:nvPr/>
         </p:nvSpPr>
@@ -32924,7 +34241,7 @@
       </p:sp>
       <p:sp>
         <p:nvSpPr>
-          <p:cNvPr id="738" name="" descr="{&quot;isTemplate&quot;:true,&quot;type&quot;:&quot;text&quot;}"/>
+          <p:cNvPr id="774" name="" descr="{&quot;isTemplate&quot;:true,&quot;type&quot;:&quot;text&quot;}"/>
           <p:cNvSpPr txBox="1"/>
           <p:nvPr/>
         </p:nvSpPr>
@@ -32959,7 +34276,7 @@
       </p:sp>
       <p:sp>
         <p:nvSpPr>
-          <p:cNvPr id="739" name="" descr="{&quot;isTemplate&quot;:true,&quot;type&quot;:&quot;text&quot;}"/>
+          <p:cNvPr id="775" name="" descr="{&quot;isTemplate&quot;:true,&quot;type&quot;:&quot;text&quot;}"/>
           <p:cNvSpPr txBox="1"/>
           <p:nvPr/>
         </p:nvSpPr>
@@ -32996,7 +34313,7 @@
       </p:sp>
       <p:sp>
         <p:nvSpPr>
-          <p:cNvPr id="740" name=""/>
+          <p:cNvPr id="776" name=""/>
           <p:cNvSpPr/>
           <p:nvPr/>
         </p:nvSpPr>
@@ -33022,7 +34339,7 @@
       </p:sp>
       <p:sp>
         <p:nvSpPr>
-          <p:cNvPr id="741" name=""/>
+          <p:cNvPr id="777" name=""/>
           <p:cNvSpPr/>
           <p:nvPr/>
         </p:nvSpPr>
@@ -33079,7 +34396,7 @@
       </p:sp>
       <p:sp>
         <p:nvSpPr>
-          <p:cNvPr id="742" name="" descr="{&quot;isTemplate&quot;:true,&quot;type&quot;:&quot;text&quot;}"/>
+          <p:cNvPr id="778" name="" descr="{&quot;isTemplate&quot;:true,&quot;type&quot;:&quot;text&quot;}"/>
           <p:cNvSpPr txBox="1"/>
           <p:nvPr/>
         </p:nvSpPr>
@@ -33114,7 +34431,7 @@
       </p:sp>
       <p:sp>
         <p:nvSpPr>
-          <p:cNvPr id="743" name="" descr="{&quot;isTemplate&quot;:true,&quot;type&quot;:&quot;text&quot;}"/>
+          <p:cNvPr id="779" name="" descr="{&quot;isTemplate&quot;:true,&quot;type&quot;:&quot;text&quot;}"/>
           <p:cNvSpPr txBox="1"/>
           <p:nvPr/>
         </p:nvSpPr>
@@ -33151,7 +34468,7 @@
       </p:sp>
       <p:sp>
         <p:nvSpPr>
-          <p:cNvPr id="744" name=""/>
+          <p:cNvPr id="780" name=""/>
           <p:cNvSpPr/>
           <p:nvPr/>
         </p:nvSpPr>
@@ -33182,7 +34499,7 @@
       </p:sp>
       <p:sp>
         <p:nvSpPr>
-          <p:cNvPr id="745" name="" descr="{&quot;isTemplate&quot;:true,&quot;type&quot;:&quot;text&quot;}"/>
+          <p:cNvPr id="781" name="" descr="{&quot;isTemplate&quot;:true,&quot;type&quot;:&quot;text&quot;}"/>
           <p:cNvSpPr txBox="1"/>
           <p:nvPr/>
         </p:nvSpPr>
@@ -33219,7 +34536,7 @@
       </p:sp>
       <p:sp>
         <p:nvSpPr>
-          <p:cNvPr id="746" name="" descr="{&quot;isTemplate&quot;:true,&quot;type&quot;:&quot;text&quot;}"/>
+          <p:cNvPr id="782" name="" descr="{&quot;isTemplate&quot;:true,&quot;type&quot;:&quot;text&quot;}"/>
           <p:cNvSpPr txBox="1"/>
           <p:nvPr/>
         </p:nvSpPr>
@@ -33254,7 +34571,7 @@
       </p:sp>
       <p:sp>
         <p:nvSpPr>
-          <p:cNvPr id="747" name="" descr="{&quot;isTemplate&quot;:true,&quot;type&quot;:&quot;text&quot;}"/>
+          <p:cNvPr id="783" name="" descr="{&quot;isTemplate&quot;:true,&quot;type&quot;:&quot;text&quot;}"/>
           <p:cNvSpPr txBox="1"/>
           <p:nvPr/>
         </p:nvSpPr>
@@ -33281,7 +34598,7 @@
                 <a:latin typeface="Microsoft YaHei"/>
                 <a:ea typeface="Microsoft YaHei"/>
               </a:rPr>
-              <a:t>04 / 38</a:t>
+              <a:t>04 / 39</a:t>
             </a:r>
             <a:endParaRPr/>
           </a:p>
@@ -33297,7 +34614,7 @@
   <p:cSld>
     <p:spTree>
       <p:nvGrpSpPr>
-        <p:cNvPr id="748" name="" descr="&lt;Slide style={{ background: '#FFFFFF', padding: 0 }}&gt;&#10;  &lt;Box style={{ height: 72, background: '#1E4FA8', padding: '0 40px', flexDirection: 'row', alignItems: 'center', justifyContent: 'space-between' }}&gt;&#10;    &lt;Text style={{ fontSize: 15, color: '#B9CDF0', letterSpacing: 1 }}&gt;ISAD · INFORMATION SYSTEMS ANALYSIS &amp;amp; DESIGN&lt;/Text&gt;&#10;    &lt;Text style={{ fontSize: 15, color: '#B9CDF0' }}&gt;W06 · FROM SCENARIOS TO CLASSES&lt;/Text&gt;&#10;  &lt;/Box&gt;&#10;  &lt;Box style={{ padding: '13px 40px 0 40px', flexDirection: 'row', alignItems: 'center', justifyContent: 'space-between' }}&gt;&#10;    &lt;Text style={{ fontSize: 29, fontWeight: 'bold', color: '#0E3F8C' }}&gt;The Noun Scan, Done Properly&lt;/Text&gt;&#10;    &lt;Text style={{ fontSize: 14, color: '#1E4FA8', fontWeight: 'bold' }}&gt;05 / 38&lt;/Text&gt;&#10;  &lt;/Box&gt;&#10;  &lt;Box style={{ flex: 1, padding: '6px 40px 0 40px', justifyContent: 'center', alignItems: 'center' }}&gt;&#10;    &lt;svg width={1180} height={392} viewBox='0 0 1180 392'&gt;&#10;      &lt;text x='10' y='16' fill='#8B97A8' fontSize='13'&gt;One sentence from your specification. Four nouns. Each one lands in a different place.&lt;/text&gt;&#10;&#10;      &lt;rect x='0' y='32' width='1180' height='64' rx='8' fill='#F7F9FC' stroke='#D6DCE5' strokeWidth='1.4' /&gt;&#10;      &lt;text x='24' y='72' fill='#1A2230' fontSize='19' fontWeight='bold'&gt;System creates the order in state Accepted.&lt;/text&gt;&#10;&#10;      &lt;g transform='translate(20,120)'&gt;&#10;        &lt;rect x='0' y='0' width='272' height='150' rx='8' fill='#F0F5FC' stroke='#1E4FA8' strokeWidth='2' /&gt;&#10;        &lt;circle cx='26' cy='26' r='13' fill='#1E4FA8' /&gt;&#10;        &lt;text x='26' y='32' textAnchor='middle' fill='#FFFFFF' fontSize='14' fontWeight='bold'&gt;1&lt;/text&gt;&#10;        &lt;text x='48' y='31' fill='#0E3F8C' fontSize='14' fontWeight='bold'&gt;System&lt;/text&gt;&#10;        &lt;text x='16' y='64' fill='#4A5568' fontSize='12'&gt;Already known: it is the actor&lt;/text&gt;&#10;        &lt;text x='16' y='81' fill='#4A5568' fontSize='12'&gt;on the use case diagram.&lt;/text&gt;&#10;        &lt;line x1='16' y1='96' x2='256' y2='96' stroke='#D6DCE5' strokeWidth='1' /&gt;&#10;        &lt;text x='16' y='118' fill='#D9534F' fontSize='11.5' fontWeight='bold'&gt;NOT a class.&lt;/text&gt;&#10;        &lt;text x='16' y='137' fill='#8B97A8' fontSize='11'&gt;It is the box everything sits in.&lt;/text&gt;&#10;      &lt;/g&gt;&#10;&#10;      &lt;g transform='translate(308,120)'&gt;&#10;        &lt;rect x='0' y='0' width='272' height='150' rx='8' fill='#EAF6EC' stroke='#2B7A3D' strokeWidth='2' /&gt;&#10;        &lt;circle cx='26' cy='26' r='13' fill='#2B7A3D' /&gt;&#10;        &lt;text x='26' y='32' textAnchor='middle' fill='#FFFFFF' fontSize='14' fontWeight='bold'&gt;2&lt;/text&gt;&#10;        &lt;text x='48' y='31' fill='#2B7A3D' fontSize='14' fontWeight='bold'&gt;order&lt;/text&gt;&#10;        &lt;text x='16' y='64' fill='#4A5568' fontSize='12'&gt;It has identity: we can point at&lt;/text&gt;&#10;        &lt;text x='16' y='81' fill='#4A5568' fontSize='12'&gt;one order and say which.&lt;/text&gt;&#10;        &lt;line x1='16' y1='96' x2='256' y2='96' stroke='#C9E0CD' strokeWidth='1' /&gt;&#10;        &lt;text x='16' y='118' fill='#2B7A3D' fontSize='11.5' fontWeight='bold'&gt;A conceptual class.&lt;/text&gt;&#10;        &lt;text x='16' y='137' fill='#8B97A8' fontSize='11'&gt;Even though “an order” also&lt;/text&gt;&#10;        &lt;text x='16' y='152' fill='#8B97A8' fontSize='11'&gt;means a verb.&lt;/text&gt;&#10;      &lt;/g&gt;&#10;&#10;      &lt;g transform='translate(596,120)'&gt;&#10;        &lt;rect x='0' y='0' width='272' height='150' rx='8' fill='#FFF6E0' stroke='#FFC107' strokeWidth='2' /&gt;&#10;        &lt;circle cx='26' cy='26' r='13' fill='#996F00' /&gt;&#10;        &lt;text x='26' y='32' textAnchor='middle' fill='#FFFFFF' fontSize='14' fontWeight='bold'&gt;3&lt;/text&gt;&#10;        &lt;text x='48' y='31' fill='#996F00' fontSize='14' fontWeight='bold'&gt;state&lt;/text&gt;&#10;        &lt;text x='16' y='64' fill='#4A5568' fontSize='12'&gt;One value of one order. It has&lt;/text&gt;&#10;        &lt;text x='16' y='81' fill='#4A5568' fontSize='12'&gt;no identity of its own.&lt;/text&gt;&#10;        &lt;line x1='16' y1='96' x2='256' y2='96' stroke='#E8D9A8' strokeWidth='1' /&gt;&#10;        &lt;text x='16' y='118' fill='#996F00' fontSize='11.5' fontWeight='bold'&gt;An attribute.&lt;/text&gt;&#10;        &lt;text x='16' y='137' fill='#8B97A8' fontSize='11'&gt;Becomes an attribute of Order.&lt;/text&gt;&#10;      &lt;/g&gt;&#10;&#10;      &lt;g transform='translate(884,120)'&gt;&#10;        &lt;rect x='0' y='0' width='276' height='150' rx='8' fill='#FDF3F3' stroke='#D9534F' strokeWidth='2' /&gt;&#10;        &lt;circle cx='26' cy='26' r='13' fill='#D9534F' /&gt;&#10;        &lt;text x='26' y='32' textAnchor='middle' fill='#FFFFFF' fontSize='14' fontWeight='bold'&gt;4&lt;/text&gt;&#10;        &lt;text x='48' y='31' fill='#D9534F' fontSize='14' fontWeight='bold'&gt;Accepted&lt;/text&gt;&#10;        &lt;text x='16' y='64' fill='#4A5568' fontSize='12'&gt;Not a noun at all. It is one&lt;/text&gt;&#10;        &lt;text x='16' y='81' fill='#4A5568' fontSize='12'&gt;member of a fixed list.&lt;/text&gt;&#10;        &lt;line x1='16' y1='96' x2='260' y2='96' stroke='#EFC9C7' strokeWidth='1' /&gt;&#10;        &lt;text x='16' y='118' fill='#D9534F' fontSize='11.5' fontWeight='bold'&gt;A possible value.&lt;/text&gt;&#10;        &lt;text x='16' y='137' fill='#8B97A8' fontSize='11'&gt;W09 turns it into a state machine.&lt;/text&gt;&#10;      &lt;/g&gt;&#10;&#10;      &lt;g transform='translate(20,296)'&gt;&#10;        &lt;rect x='0' y='0' width='1140' height='82' rx='8' fill='#0E3F8C' /&gt;&#10;        &lt;text x='20' y='30' fill='#FFFFFF' fontSize='14.5' fontWeight='bold'&gt;The test that separates them: can you point at this thing and say “that one”?&lt;/text&gt;&#10;        &lt;text x='20' y='56' fill='#C5D4EA' fontSize='12.5'&gt;Point at the order — yes, so it is a class. Point at “Accepted” — no, you can only read it off an order, so it is an attribute value.&lt;/text&gt;&#10;        &lt;text x='20' y='74' fill='#7FA2D6' fontSize='11.5'&gt;If your team argues for ten minutes about whether something is a class, ask this question. It usually settles it in one.&lt;/text&gt;&#10;      &lt;/g&gt;&#10;    &lt;/svg&gt;&#10;  &lt;/Box&gt;&#10;  &lt;Box style={{ height: 34, padding: '0 40px', flexDirection: 'row', alignItems: 'center', justifyContent: 'space-between' }}&gt;&#10;    &lt;Text style={{ fontSize: 13, color: '#8B97A8' }}&gt;ISAD · Fall 2026 · Identity is the test. If you can point at it, it is a class; if you can only read it off something else, it is an attribute&lt;/Text&gt;&#10;    &lt;Text style={{ fontSize: 14, color: '#1E4FA8', fontWeight: 'bold' }}&gt;05 / 38&lt;/Text&gt;&#10;  &lt;/Box&gt;&#10;&lt;/Slide&gt;&#10;"/>
+        <p:cNvPr id="784" name="" descr="&lt;Slide style={{ background: '#FFFFFF', padding: 0 }}&gt;&#10;  &lt;Box style={{ height: 72, background: '#1E4FA8', padding: '0 40px', flexDirection: 'row', alignItems: 'center', justifyContent: 'space-between' }}&gt;&#10;    &lt;Text style={{ fontSize: 15, color: '#B9CDF0', letterSpacing: 1 }}&gt;ISAD · INFORMATION SYSTEMS ANALYSIS &amp;amp; DESIGN&lt;/Text&gt;&#10;    &lt;Text style={{ fontSize: 15, color: '#B9CDF0' }}&gt;W06 · FROM SCENARIOS TO CLASSES&lt;/Text&gt;&#10;  &lt;/Box&gt;&#10;  &lt;Box style={{ padding: '13px 40px 0 40px', flexDirection: 'row', alignItems: 'center', justifyContent: 'space-between' }}&gt;&#10;    &lt;Text style={{ fontSize: 29, fontWeight: 'bold', color: '#0E3F8C' }}&gt;The Noun Scan, Done Properly&lt;/Text&gt;&#10;    &lt;Text style={{ fontSize: 14, color: '#1E4FA8', fontWeight: 'bold' }}&gt;05 / 39&lt;/Text&gt;&#10;  &lt;/Box&gt;&#10;  &lt;Box style={{ flex: 1, padding: '6px 40px 0 40px', justifyContent: 'center', alignItems: 'center' }}&gt;&#10;    &lt;svg width={1180} height={392} viewBox='0 0 1180 392'&gt;&#10;      &lt;text x='10' y='16' fill='#8B97A8' fontSize='13'&gt;One sentence from your specification. Four nouns. Each one lands in a different place.&lt;/text&gt;&#10;&#10;      &lt;rect x='0' y='32' width='1180' height='64' rx='8' fill='#F7F9FC' stroke='#D6DCE5' strokeWidth='1.4' /&gt;&#10;      &lt;text x='24' y='72' fill='#1A2230' fontSize='19' fontWeight='bold'&gt;System creates the order in state Accepted.&lt;/text&gt;&#10;&#10;      &lt;g transform='translate(20,120)'&gt;&#10;        &lt;rect x='0' y='0' width='272' height='150' rx='8' fill='#F0F5FC' stroke='#1E4FA8' strokeWidth='2' /&gt;&#10;        &lt;circle cx='26' cy='26' r='13' fill='#1E4FA8' /&gt;&#10;        &lt;text x='26' y='32' textAnchor='middle' fill='#FFFFFF' fontSize='14' fontWeight='bold'&gt;1&lt;/text&gt;&#10;        &lt;text x='48' y='31' fill='#0E3F8C' fontSize='14' fontWeight='bold'&gt;System&lt;/text&gt;&#10;        &lt;text x='16' y='64' fill='#4A5568' fontSize='12'&gt;Already known: it is the actor&lt;/text&gt;&#10;        &lt;text x='16' y='81' fill='#4A5568' fontSize='12'&gt;on the use case diagram.&lt;/text&gt;&#10;        &lt;line x1='16' y1='96' x2='256' y2='96' stroke='#D6DCE5' strokeWidth='1' /&gt;&#10;        &lt;text x='16' y='118' fill='#D9534F' fontSize='11.5' fontWeight='bold'&gt;NOT a class.&lt;/text&gt;&#10;        &lt;text x='16' y='137' fill='#8B97A8' fontSize='11'&gt;It is the box everything sits in.&lt;/text&gt;&#10;      &lt;/g&gt;&#10;&#10;      &lt;g transform='translate(308,120)'&gt;&#10;        &lt;rect x='0' y='0' width='272' height='150' rx='8' fill='#EAF6EC' stroke='#2B7A3D' strokeWidth='2' /&gt;&#10;        &lt;circle cx='26' cy='26' r='13' fill='#2B7A3D' /&gt;&#10;        &lt;text x='26' y='32' textAnchor='middle' fill='#FFFFFF' fontSize='14' fontWeight='bold'&gt;2&lt;/text&gt;&#10;        &lt;text x='48' y='31' fill='#2B7A3D' fontSize='14' fontWeight='bold'&gt;order&lt;/text&gt;&#10;        &lt;text x='16' y='64' fill='#4A5568' fontSize='12'&gt;It has identity: we can point at&lt;/text&gt;&#10;        &lt;text x='16' y='81' fill='#4A5568' fontSize='12'&gt;one order and say which.&lt;/text&gt;&#10;        &lt;line x1='16' y1='96' x2='256' y2='96' stroke='#C9E0CD' strokeWidth='1' /&gt;&#10;        &lt;text x='16' y='118' fill='#2B7A3D' fontSize='11.5' fontWeight='bold'&gt;A conceptual class.&lt;/text&gt;&#10;        &lt;text x='16' y='137' fill='#8B97A8' fontSize='11'&gt;Even though “an order” also&lt;/text&gt;&#10;        &lt;text x='16' y='152' fill='#8B97A8' fontSize='11'&gt;means a verb.&lt;/text&gt;&#10;      &lt;/g&gt;&#10;&#10;      &lt;g transform='translate(596,120)'&gt;&#10;        &lt;rect x='0' y='0' width='272' height='150' rx='8' fill='#FFF6E0' stroke='#FFC107' strokeWidth='2' /&gt;&#10;        &lt;circle cx='26' cy='26' r='13' fill='#996F00' /&gt;&#10;        &lt;text x='26' y='32' textAnchor='middle' fill='#FFFFFF' fontSize='14' fontWeight='bold'&gt;3&lt;/text&gt;&#10;        &lt;text x='48' y='31' fill='#996F00' fontSize='14' fontWeight='bold'&gt;state&lt;/text&gt;&#10;        &lt;text x='16' y='64' fill='#4A5568' fontSize='12'&gt;One value of one order. It has&lt;/text&gt;&#10;        &lt;text x='16' y='81' fill='#4A5568' fontSize='12'&gt;no identity of its own.&lt;/text&gt;&#10;        &lt;line x1='16' y1='96' x2='256' y2='96' stroke='#E8D9A8' strokeWidth='1' /&gt;&#10;        &lt;text x='16' y='118' fill='#996F00' fontSize='11.5' fontWeight='bold'&gt;An attribute.&lt;/text&gt;&#10;        &lt;text x='16' y='137' fill='#8B97A8' fontSize='11'&gt;Becomes an attribute of Order.&lt;/text&gt;&#10;      &lt;/g&gt;&#10;&#10;      &lt;g transform='translate(884,120)'&gt;&#10;        &lt;rect x='0' y='0' width='276' height='150' rx='8' fill='#FDF3F3' stroke='#D9534F' strokeWidth='2' /&gt;&#10;        &lt;circle cx='26' cy='26' r='13' fill='#D9534F' /&gt;&#10;        &lt;text x='26' y='32' textAnchor='middle' fill='#FFFFFF' fontSize='14' fontWeight='bold'&gt;4&lt;/text&gt;&#10;        &lt;text x='48' y='31' fill='#D9534F' fontSize='14' fontWeight='bold'&gt;Accepted&lt;/text&gt;&#10;        &lt;text x='16' y='64' fill='#4A5568' fontSize='12'&gt;Not a noun at all. It is one&lt;/text&gt;&#10;        &lt;text x='16' y='81' fill='#4A5568' fontSize='12'&gt;member of a fixed list.&lt;/text&gt;&#10;        &lt;line x1='16' y1='96' x2='260' y2='96' stroke='#EFC9C7' strokeWidth='1' /&gt;&#10;        &lt;text x='16' y='118' fill='#D9534F' fontSize='11.5' fontWeight='bold'&gt;A possible value.&lt;/text&gt;&#10;        &lt;text x='16' y='137' fill='#8B97A8' fontSize='11'&gt;W09 turns it into a state machine.&lt;/text&gt;&#10;      &lt;/g&gt;&#10;&#10;      &lt;g transform='translate(20,296)'&gt;&#10;        &lt;rect x='0' y='0' width='1140' height='82' rx='8' fill='#0E3F8C' /&gt;&#10;        &lt;text x='20' y='30' fill='#FFFFFF' fontSize='14.5' fontWeight='bold'&gt;The test that separates them: can you point at this thing and say “that one”?&lt;/text&gt;&#10;        &lt;text x='20' y='56' fill='#C5D4EA' fontSize='12.5'&gt;Point at the order — yes, so it is a class. Point at “Accepted” — no, you can only read it off an order, so it is an attribute value.&lt;/text&gt;&#10;        &lt;text x='20' y='74' fill='#7FA2D6' fontSize='11.5'&gt;If your team argues for ten minutes about whether something is a class, ask this question. It usually settles it in one.&lt;/text&gt;&#10;      &lt;/g&gt;&#10;    &lt;/svg&gt;&#10;  &lt;/Box&gt;&#10;  &lt;Box style={{ height: 34, padding: '0 40px', flexDirection: 'row', alignItems: 'center', justifyContent: 'space-between' }}&gt;&#10;    &lt;Text style={{ fontSize: 13, color: '#8B97A8' }}&gt;ISAD · Fall 2026 · Identity is the test. If you can point at it, it is a class; if you can only read it off something else, it is an attribute&lt;/Text&gt;&#10;    &lt;Text style={{ fontSize: 14, color: '#1E4FA8', fontWeight: 'bold' }}&gt;05 / 39&lt;/Text&gt;&#10;  &lt;/Box&gt;&#10;&lt;/Slide&gt;&#10;"/>
         <p:cNvGrpSpPr/>
         <p:nvPr/>
       </p:nvGrpSpPr>
@@ -33311,7 +34628,7 @@
       </p:grpSpPr>
       <p:sp>
         <p:nvSpPr>
-          <p:cNvPr id="749" name=""/>
+          <p:cNvPr id="785" name=""/>
           <p:cNvSpPr/>
           <p:nvPr/>
         </p:nvSpPr>
@@ -33335,7 +34652,7 @@
       </p:sp>
       <p:sp>
         <p:nvSpPr>
-          <p:cNvPr id="750" name=""/>
+          <p:cNvPr id="786" name=""/>
           <p:cNvSpPr/>
           <p:nvPr/>
         </p:nvSpPr>
@@ -33359,7 +34676,7 @@
       </p:sp>
       <p:sp>
         <p:nvSpPr>
-          <p:cNvPr id="751" name="" descr="{&quot;isTemplate&quot;:true,&quot;type&quot;:&quot;text&quot;}"/>
+          <p:cNvPr id="787" name="" descr="{&quot;isTemplate&quot;:true,&quot;type&quot;:&quot;text&quot;}"/>
           <p:cNvSpPr txBox="1"/>
           <p:nvPr/>
         </p:nvSpPr>
@@ -33394,7 +34711,7 @@
       </p:sp>
       <p:sp>
         <p:nvSpPr>
-          <p:cNvPr id="752" name="" descr="{&quot;isTemplate&quot;:true,&quot;type&quot;:&quot;text&quot;}"/>
+          <p:cNvPr id="788" name="" descr="{&quot;isTemplate&quot;:true,&quot;type&quot;:&quot;text&quot;}"/>
           <p:cNvSpPr txBox="1"/>
           <p:nvPr/>
         </p:nvSpPr>
@@ -33429,7 +34746,7 @@
       </p:sp>
       <p:sp>
         <p:nvSpPr>
-          <p:cNvPr id="753" name="" descr="{&quot;isTemplate&quot;:true,&quot;type&quot;:&quot;text&quot;}"/>
+          <p:cNvPr id="789" name="" descr="{&quot;isTemplate&quot;:true,&quot;type&quot;:&quot;text&quot;}"/>
           <p:cNvSpPr txBox="1"/>
           <p:nvPr/>
         </p:nvSpPr>
@@ -33464,7 +34781,7 @@
       </p:sp>
       <p:sp>
         <p:nvSpPr>
-          <p:cNvPr id="754" name="" descr="{&quot;isTemplate&quot;:true,&quot;type&quot;:&quot;text&quot;}"/>
+          <p:cNvPr id="790" name="" descr="{&quot;isTemplate&quot;:true,&quot;type&quot;:&quot;text&quot;}"/>
           <p:cNvSpPr txBox="1"/>
           <p:nvPr/>
         </p:nvSpPr>
@@ -33491,7 +34808,7 @@
                 <a:latin typeface="Microsoft YaHei"/>
                 <a:ea typeface="Microsoft YaHei"/>
               </a:rPr>
-              <a:t>05 / 38</a:t>
+              <a:t>05 / 39</a:t>
             </a:r>
             <a:endParaRPr/>
           </a:p>
@@ -33499,7 +34816,7 @@
       </p:sp>
       <p:pic>
         <p:nvPicPr>
-          <p:cNvPr id="755" name=""/>
+          <p:cNvPr id="791" name=""/>
           <p:cNvPicPr>
             <a:picLocks noChangeAspect="1"/>
           </p:cNvPicPr>
@@ -33530,7 +34847,7 @@
       </p:pic>
       <p:sp>
         <p:nvSpPr>
-          <p:cNvPr id="756" name="" descr="{&quot;isTemplate&quot;:true,&quot;type&quot;:&quot;text&quot;}"/>
+          <p:cNvPr id="792" name="" descr="{&quot;isTemplate&quot;:true,&quot;type&quot;:&quot;text&quot;}"/>
           <p:cNvSpPr txBox="1"/>
           <p:nvPr/>
         </p:nvSpPr>
@@ -33565,7 +34882,7 @@
       </p:sp>
       <p:sp>
         <p:nvSpPr>
-          <p:cNvPr id="757" name="" descr="{&quot;isTemplate&quot;:true,&quot;type&quot;:&quot;text&quot;}"/>
+          <p:cNvPr id="793" name="" descr="{&quot;isTemplate&quot;:true,&quot;type&quot;:&quot;text&quot;}"/>
           <p:cNvSpPr txBox="1"/>
           <p:nvPr/>
         </p:nvSpPr>
@@ -33592,7 +34909,7 @@
                 <a:latin typeface="Microsoft YaHei"/>
                 <a:ea typeface="Microsoft YaHei"/>
               </a:rPr>
-              <a:t>05 / 38</a:t>
+              <a:t>05 / 39</a:t>
             </a:r>
             <a:endParaRPr/>
           </a:p>
@@ -33608,7 +34925,7 @@
   <p:cSld>
     <p:spTree>
       <p:nvGrpSpPr>
-        <p:cNvPr id="758" name="" descr="&lt;Slide style={{ background: '#FFFFFF', padding: 0 }}&gt;&#10;  &lt;Box style={{ height: 72, background: '#1E4FA8', padding: '0 40px', flexDirection: 'row', alignItems: 'center', justifyContent: 'space-between' }}&gt;&#10;    &lt;Text style={{ fontSize: 15, color: '#B9CDF0', letterSpacing: 1 }}&gt;ISAD · INFORMATION SYSTEMS ANALYSIS &amp;amp; DESIGN&lt;/Text&gt;&#10;    &lt;Text style={{ fontSize: 15, color: '#B9CDF0' }}&gt;W06 · FROM SCENARIOS TO CLASSES&lt;/Text&gt;&#10;  &lt;/Box&gt;&#10;  &lt;Box style={{ padding: '13px 40px 0 40px', flexDirection: 'row', alignItems: 'center', justifyContent: 'space-between' }}&gt;&#10;    &lt;Text style={{ fontSize: 29, fontWeight: 'bold', color: '#0E3F8C' }}&gt;Three Questions Before You Draw&lt;/Text&gt;&#10;    &lt;Text style={{ fontSize: 14, color: '#1E4FA8', fontWeight: 'bold' }}&gt;06 / 38&lt;/Text&gt;&#10;  &lt;/Box&gt;&#10;  &lt;Box style={{ flex: 1, padding: '10px 40px 0 40px' }}&gt;&#10;    &lt;Table&#10;      style={{ width: '100%', height: '100%' }}&#10;      defaultTextStyle={{ fontSize: 13.5, textAlign: 'left', color: '#1A2230' }}&#10;      defaultCellStyle={{&#10;        border: {&#10;          left: { width: 1, color: '#E5E7EB' },&#10;          right: { width: 1, color: '#E5E7EB' },&#10;          top: { width: 1, color: '#E5E7EB' },&#10;          bottom: { width: 1, color: '#E5E7EB' },&#10;        },&#10;      }}&#10;      cells={[&#10;        [&#10;          { text: 'Question', textStyle: { bold: true, color: '#FFFFFF', fontSize: 15 }, cellStyle: { background: { color: '#0E3F8C' } } },&#10;          { text: 'Ask it like this', textStyle: { bold: true, color: '#FFFFFF', fontSize: 15 }, cellStyle: { background: { color: '#1E4FA8' } } },&#10;          { text: 'If the answer is NO', textStyle: { bold: true, color: '#FFFFFF', fontSize: 15 }, cellStyle: { background: { color: '#8B3230' } } },&#10;        ],&#10;        [&#10;          { text: 'Is it a concept, or an actor?', textStyle: { bold: true, color: '#0E3F8C' }, cellStyle: { background: { color: '#F7F9FC' } } },&#10;          { text: 'Does it stand outside the system and use it? Then it is on the use case diagram.', textStyle: { color: '#4A5568' }, cellStyle: { background: { color: '#F7F9FC' } } },&#10;          { text: 'Drop it from the model. It was never a class.', textStyle: { color: '#4A5568' }, cellStyle: { background: { color: '#F7F9FC' } } },&#10;        ],&#10;        [&#10;          { text: 'Does it have identity?', textStyle: { bold: true, color: '#0E3F8C' } },&#10;          { text: 'Can I point at one and say “that one”?', textStyle: { color: '#4A5568' } },&#10;          { text: 'It is an attribute of something else. Make it a line in that box.', textStyle: { color: '#4A5568' } },&#10;        ],&#10;        [&#10;          { text: 'Did it earn its place?', textStyle: { bold: true, color: '#0E3F8C' }, cellStyle: { background: { color: '#F7F9FC' } } },&#10;          { text: 'Did it appear in a W05 specification sentence? Trace it.', textStyle: { color: '#4A5568' }, cellStyle: { background: { color: '#F7F9FC' } } },&#10;          { text: 'Delete it. A class with no sentence behind it is a guess.', textStyle: { color: '#4A5568' }, cellStyle: { background: { color: '#F7F9FC' } } },&#10;        ],&#10;        [&#10;          { text: 'Bonus: can it be its own class later?', textStyle: { bold: true, color: '#0E3F8C' } },&#10;          { text: 'Will the client ask for history, rules or thresholds about it?', textStyle: { color: '#4A5568' } },&#10;          { text: 'Keep it as an attribute for now. W06 is analysis, not speculation.', textStyle: { color: '#4A5568' } },&#10;        ],&#10;        [&#10;          { text: 'The one that is not a question', textStyle: { bold: true, color: '#0E3F8C' }, cellStyle: { background: { color: '#F7F9FC' } } },&#10;          { text: '“Is this class useful?” — usefulness is not a modelling criterion.', textStyle: { color: '#4A5568' }, cellStyle: { background: { color: '#F7F9FC' } } },&#10;          { text: 'The criteria are identity, traceability, and staying inside the boundary.', textStyle: { color: '#4A5568' }, cellStyle: { background: { color: '#F7F9FC' } } },&#10;        ],&#10;      ]}&#10;    /&gt;&#10;  &lt;/Box&gt;&#10;  &lt;Box style={{ height: 46, background: '#0E3F8C', padding: '0 40px', flexDirection: 'row', alignItems: 'center', justifyContent: 'center' }}&gt;&#10;    &lt;Text style={{ fontSize: 16.5, color: '#FFFFFF', fontWeight: '600' }}&gt;A class with no sentence behind it is a guess, and guesses become schema you cannot change.&lt;/Text&gt;&#10;  &lt;/Box&gt;&#10;&lt;/Slide&gt;&#10;"/>
+        <p:cNvPr id="794" name="" descr="&lt;Slide style={{ background: '#FFFFFF', padding: 0 }}&gt;&#10;  &lt;Box style={{ height: 72, background: '#1E4FA8', padding: '0 40px', flexDirection: 'row', alignItems: 'center', justifyContent: 'space-between' }}&gt;&#10;    &lt;Text style={{ fontSize: 15, color: '#B9CDF0', letterSpacing: 1 }}&gt;ISAD · INFORMATION SYSTEMS ANALYSIS &amp;amp; DESIGN&lt;/Text&gt;&#10;    &lt;Text style={{ fontSize: 15, color: '#B9CDF0' }}&gt;W06 · FROM SCENARIOS TO CLASSES&lt;/Text&gt;&#10;  &lt;/Box&gt;&#10;  &lt;Box style={{ padding: '13px 40px 0 40px', flexDirection: 'row', alignItems: 'center', justifyContent: 'space-between' }}&gt;&#10;    &lt;Text style={{ fontSize: 29, fontWeight: 'bold', color: '#0E3F8C' }}&gt;Three Questions Before You Draw&lt;/Text&gt;&#10;    &lt;Text style={{ fontSize: 14, color: '#1E4FA8', fontWeight: 'bold' }}&gt;06 / 39&lt;/Text&gt;&#10;  &lt;/Box&gt;&#10;  &lt;Box style={{ flex: 1, padding: '10px 40px 0 40px' }}&gt;&#10;    &lt;Table&#10;      style={{ width: '100%', height: '100%' }}&#10;      defaultTextStyle={{ fontSize: 13.5, textAlign: 'left', color: '#1A2230' }}&#10;      defaultCellStyle={{&#10;        border: {&#10;          left: { width: 1, color: '#E5E7EB' },&#10;          right: { width: 1, color: '#E5E7EB' },&#10;          top: { width: 1, color: '#E5E7EB' },&#10;          bottom: { width: 1, color: '#E5E7EB' },&#10;        },&#10;      }}&#10;      cells={[&#10;        [&#10;          { text: 'Question', textStyle: { bold: true, color: '#FFFFFF', fontSize: 15 }, cellStyle: { background: { color: '#0E3F8C' } } },&#10;          { text: 'Ask it like this', textStyle: { bold: true, color: '#FFFFFF', fontSize: 15 }, cellStyle: { background: { color: '#1E4FA8' } } },&#10;          { text: 'If the answer is NO', textStyle: { bold: true, color: '#FFFFFF', fontSize: 15 }, cellStyle: { background: { color: '#8B3230' } } },&#10;        ],&#10;        [&#10;          { text: 'Is it a concept, or an actor?', textStyle: { bold: true, color: '#0E3F8C' }, cellStyle: { background: { color: '#F7F9FC' } } },&#10;          { text: 'Does it stand outside the system and use it? Then it is on the use case diagram.', textStyle: { color: '#4A5568' }, cellStyle: { background: { color: '#F7F9FC' } } },&#10;          { text: 'Drop it from the model. It was never a class.', textStyle: { color: '#4A5568' }, cellStyle: { background: { color: '#F7F9FC' } } },&#10;        ],&#10;        [&#10;          { text: 'Does it have identity?', textStyle: { bold: true, color: '#0E3F8C' } },&#10;          { text: 'Can I point at one and say “that one”?', textStyle: { color: '#4A5568' } },&#10;          { text: 'It is an attribute of something else. Make it a line in that box.', textStyle: { color: '#4A5568' } },&#10;        ],&#10;        [&#10;          { text: 'Did it earn its place?', textStyle: { bold: true, color: '#0E3F8C' }, cellStyle: { background: { color: '#F7F9FC' } } },&#10;          { text: 'Did it appear in a W05 specification sentence? Trace it.', textStyle: { color: '#4A5568' }, cellStyle: { background: { color: '#F7F9FC' } } },&#10;          { text: 'Delete it. A class with no sentence behind it is a guess.', textStyle: { color: '#4A5568' }, cellStyle: { background: { color: '#F7F9FC' } } },&#10;        ],&#10;        [&#10;          { text: 'Bonus: can it be its own class later?', textStyle: { bold: true, color: '#0E3F8C' } },&#10;          { text: 'Will the client ask for history, rules or thresholds about it?', textStyle: { color: '#4A5568' } },&#10;          { text: 'Keep it as an attribute for now. W06 is analysis, not speculation.', textStyle: { color: '#4A5568' } },&#10;        ],&#10;        [&#10;          { text: 'The one that is not a question', textStyle: { bold: true, color: '#0E3F8C' }, cellStyle: { background: { color: '#F7F9FC' } } },&#10;          { text: '“Is this class useful?” — usefulness is not a modelling criterion.', textStyle: { color: '#4A5568' }, cellStyle: { background: { color: '#F7F9FC' } } },&#10;          { text: 'The criteria are identity, traceability, and staying inside the boundary.', textStyle: { color: '#4A5568' }, cellStyle: { background: { color: '#F7F9FC' } } },&#10;        ],&#10;      ]}&#10;    /&gt;&#10;  &lt;/Box&gt;&#10;  &lt;Box style={{ height: 46, background: '#0E3F8C', padding: '0 40px', flexDirection: 'row', alignItems: 'center', justifyContent: 'center' }}&gt;&#10;    &lt;Text style={{ fontSize: 16.5, color: '#FFFFFF', fontWeight: '600' }}&gt;A class with no sentence behind it is a guess, and guesses become schema you cannot change.&lt;/Text&gt;&#10;  &lt;/Box&gt;&#10;&lt;/Slide&gt;&#10;"/>
         <p:cNvGrpSpPr/>
         <p:nvPr/>
       </p:nvGrpSpPr>
@@ -33622,7 +34939,7 @@
       </p:grpSpPr>
       <p:sp>
         <p:nvSpPr>
-          <p:cNvPr id="759" name=""/>
+          <p:cNvPr id="795" name=""/>
           <p:cNvSpPr/>
           <p:nvPr/>
         </p:nvSpPr>
@@ -33646,7 +34963,7 @@
       </p:sp>
       <p:sp>
         <p:nvSpPr>
-          <p:cNvPr id="760" name=""/>
+          <p:cNvPr id="796" name=""/>
           <p:cNvSpPr/>
           <p:nvPr/>
         </p:nvSpPr>
@@ -33670,7 +34987,7 @@
       </p:sp>
       <p:sp>
         <p:nvSpPr>
-          <p:cNvPr id="761" name="" descr="{&quot;isTemplate&quot;:true,&quot;type&quot;:&quot;text&quot;}"/>
+          <p:cNvPr id="797" name="" descr="{&quot;isTemplate&quot;:true,&quot;type&quot;:&quot;text&quot;}"/>
           <p:cNvSpPr txBox="1"/>
           <p:nvPr/>
         </p:nvSpPr>
@@ -33705,7 +35022,7 @@
       </p:sp>
       <p:sp>
         <p:nvSpPr>
-          <p:cNvPr id="762" name="" descr="{&quot;isTemplate&quot;:true,&quot;type&quot;:&quot;text&quot;}"/>
+          <p:cNvPr id="798" name="" descr="{&quot;isTemplate&quot;:true,&quot;type&quot;:&quot;text&quot;}"/>
           <p:cNvSpPr txBox="1"/>
           <p:nvPr/>
         </p:nvSpPr>
@@ -33740,7 +35057,7 @@
       </p:sp>
       <p:sp>
         <p:nvSpPr>
-          <p:cNvPr id="763" name="" descr="{&quot;isTemplate&quot;:true,&quot;type&quot;:&quot;text&quot;}"/>
+          <p:cNvPr id="799" name="" descr="{&quot;isTemplate&quot;:true,&quot;type&quot;:&quot;text&quot;}"/>
           <p:cNvSpPr txBox="1"/>
           <p:nvPr/>
         </p:nvSpPr>
@@ -33775,7 +35092,7 @@
       </p:sp>
       <p:sp>
         <p:nvSpPr>
-          <p:cNvPr id="764" name="" descr="{&quot;isTemplate&quot;:true,&quot;type&quot;:&quot;text&quot;}"/>
+          <p:cNvPr id="800" name="" descr="{&quot;isTemplate&quot;:true,&quot;type&quot;:&quot;text&quot;}"/>
           <p:cNvSpPr txBox="1"/>
           <p:nvPr/>
         </p:nvSpPr>
@@ -33802,7 +35119,7 @@
                 <a:latin typeface="Microsoft YaHei"/>
                 <a:ea typeface="Microsoft YaHei"/>
               </a:rPr>
-              <a:t>06 / 38</a:t>
+              <a:t>06 / 39</a:t>
             </a:r>
             <a:endParaRPr/>
           </a:p>
@@ -33810,7 +35127,7 @@
       </p:sp>
       <p:graphicFrame>
         <p:nvGraphicFramePr>
-          <p:cNvPr id="765" name=""/>
+          <p:cNvPr id="801" name=""/>
           <p:cNvGraphicFramePr/>
           <p:nvPr/>
         </p:nvGraphicFramePr>
@@ -34630,7 +35947,7 @@
       </p:graphicFrame>
       <p:sp>
         <p:nvSpPr>
-          <p:cNvPr id="766" name=""/>
+          <p:cNvPr id="802" name=""/>
           <p:cNvSpPr/>
           <p:nvPr/>
         </p:nvSpPr>
@@ -34654,7 +35971,7 @@
       </p:sp>
       <p:sp>
         <p:nvSpPr>
-          <p:cNvPr id="767" name="" descr="{&quot;isTemplate&quot;:true,&quot;type&quot;:&quot;text&quot;}"/>
+          <p:cNvPr id="803" name="" descr="{&quot;isTemplate&quot;:true,&quot;type&quot;:&quot;text&quot;}"/>
           <p:cNvSpPr txBox="1"/>
           <p:nvPr/>
         </p:nvSpPr>
@@ -34697,7 +36014,7 @@
   <p:cSld>
     <p:spTree>
       <p:nvGrpSpPr>
-        <p:cNvPr id="768" name="" descr="&lt;Slide style={{ background: '#FFFFFF', padding: 0 }}&gt;&#10;  &lt;Box style={{ height: 72, background: '#1E4FA8', padding: '0 40px', flexDirection: 'row', alignItems: 'center', justifyContent: 'space-between' }}&gt;&#10;    &lt;Text style={{ fontSize: 15, color: '#B9CDF0', letterSpacing: 1 }}&gt;ISAD · INFORMATION SYSTEMS ANALYSIS &amp;amp; DESIGN&lt;/Text&gt;&#10;    &lt;Text style={{ fontSize: 15, color: '#B9CDF0' }}&gt;W06 · FROM SCENARIOS TO CLASSES&lt;/Text&gt;&#10;  &lt;/Box&gt;&#10;  &lt;Box style={{ padding: '13px 40px 0 40px', flexDirection: 'row', alignItems: 'center', justifyContent: 'space-between' }}&gt;&#10;    &lt;Text style={{ fontSize: 29, fontWeight: 'bold', color: '#0E3F8C' }}&gt;Candidate Classes of CampusBites&lt;/Text&gt;&#10;    &lt;Text style={{ fontSize: 14, color: '#1E4FA8', fontWeight: 'bold' }}&gt;07 / 38&lt;/Text&gt;&#10;  &lt;/Box&gt;&#10;  &lt;Box style={{ flex: 1, padding: '10px 40px 0 40px', flexDirection: 'column', gap: 11 }}&gt;&#10;    {[&#10;      { n: 'Order', g: 'entity', d: 'The thing the student wants. Has an order number, a state, a time. Appears in steps 5 and 8.' },&#10;      { n: 'OrderLine', g: 'entity', d: 'One line of one order: a menu item and a quantity. Without it, “how many burgers” has nowhere to live.' },&#10;      { n: 'MenuItem', g: 'entity', d: 'What is sold. Has a name, a price, an availability flag. Marked sold out at 4b.' },&#10;      { n: 'Restaurant', g: 'entity', d: 'Who sells. Has a name and an opening window. Owns the menu.' },&#10;      { n: 'Courier', g: 'entity', d: 'Who delivers. Has an availability flag — this is what 4b fails to find.' },&#10;      { n: 'Payment', g: 'entity', d: 'A record of one attempt. Has an amount, a method, a result. Not the provider — that is an actor.' },&#10;    ].map((c) =&gt; (&#10;      &lt;Box key={c.n} style={{ flex: 1, flexDirection: 'row', alignItems: 'center', padding: '10px 18px', background: '#F7F9FC', borderRadius: 9, border: '1px solid #E5E7EB' }}&gt;&#10;        &lt;Box style={{ width: 170, flexDirection: 'row', alignItems: 'center', gap: 10 }}&gt;&#10;          &lt;Box style={{ width: 10, height: 10, borderRadius: 5, background: '#2B7A3D' }} /&gt;&#10;          &lt;Text style={{ fontSize: 16, fontWeight: 'bold', color: '#0E3F8C' }}&gt;{c.n}&lt;/Text&gt;&#10;        &lt;/Box&gt;&#10;        &lt;Text style={{ width: 90, fontSize: 12.5, color: '#2B7A3D', fontWeight: 'bold' }}&gt;{c.g}&lt;/Text&gt;&#10;        &lt;Text style={{ flex: 1, fontSize: 13, color: '#4A5568', lineHeight: 1.5 }}&gt;{c.d}&lt;/Text&gt;&#10;      &lt;/Box&gt;&#10;    ))}&#10;  &lt;/Box&gt;&#10;  &lt;Box style={{ height: 46, background: '#0E3F8C', padding: '0 40px', flexDirection: 'row', alignItems: 'center', justifyContent: 'center' }}&gt;&#10;    &lt;Text style={{ fontSize: 16.5, color: '#FFFFFF', fontWeight: '600' }}&gt;Six so far. Six more arrive on page 19 — and only after you have classified these.&lt;/Text&gt;&#10;  &lt;/Box&gt;&#10;&lt;/Slide&gt;&#10;"/>
+        <p:cNvPr id="804" name="" descr="&lt;Slide style={{ background: '#FFFFFF', padding: 0 }}&gt;&#10;  &lt;Box style={{ height: 72, background: '#1E4FA8', padding: '0 40px', flexDirection: 'row', alignItems: 'center', justifyContent: 'space-between' }}&gt;&#10;    &lt;Text style={{ fontSize: 15, color: '#B9CDF0', letterSpacing: 1 }}&gt;ISAD · INFORMATION SYSTEMS ANALYSIS &amp;amp; DESIGN&lt;/Text&gt;&#10;    &lt;Text style={{ fontSize: 15, color: '#B9CDF0' }}&gt;W06 · FROM SCENARIOS TO CLASSES&lt;/Text&gt;&#10;  &lt;/Box&gt;&#10;  &lt;Box style={{ padding: '13px 40px 0 40px', flexDirection: 'row', alignItems: 'center', justifyContent: 'space-between' }}&gt;&#10;    &lt;Text style={{ fontSize: 29, fontWeight: 'bold', color: '#0E3F8C' }}&gt;A Worked Example — Take the Criterion, Not the List&lt;/Text&gt;&#10;    &lt;Text style={{ fontSize: 14, color: '#1E4FA8', fontWeight: 'bold' }}&gt;07 / 39&lt;/Text&gt;&#10;  &lt;/Box&gt;&#10;  &lt;Box style={{ flex: 1, padding: '10px 40px 0 40px', flexDirection: 'column', gap: 11 }}&gt;&#10;    {[&#10;      { n: 'Order', g: 'entity', d: 'The thing the student wants. Has an order number, a state, a time. Appears in steps 5 and 8.' },&#10;      { n: 'OrderLine', g: 'entity', d: 'One line of one order: a menu item and a quantity. Without it, “how many burgers” has nowhere to live.' },&#10;      { n: 'MenuItem', g: 'entity', d: 'What is sold. Has a name, a price, an availability flag. Marked sold out at 4b.' },&#10;      { n: 'Restaurant', g: 'entity', d: 'Who sells. Has a name and an opening window. Owns the menu.' },&#10;      { n: 'Courier', g: 'entity', d: 'Who delivers. Has an availability flag — this is what 4b fails to find.' },&#10;      { n: 'Payment', g: 'entity', d: 'A record of one attempt. Has an amount, a method, a result. Not the provider — that is an actor.' },&#10;    ].map((c) =&gt; (&#10;      &lt;Box key={c.n} style={{ flex: 1, flexDirection: 'row', alignItems: 'center', padding: '10px 18px', background: '#F7F9FC', borderRadius: 9, border: '1px solid #E5E7EB' }}&gt;&#10;        &lt;Box style={{ width: 170, flexDirection: 'row', alignItems: 'center', gap: 10 }}&gt;&#10;          &lt;Box style={{ width: 10, height: 10, borderRadius: 5, background: '#2B7A3D' }} /&gt;&#10;          &lt;Text style={{ fontSize: 16, fontWeight: 'bold', color: '#0E3F8C' }}&gt;{c.n}&lt;/Text&gt;&#10;        &lt;/Box&gt;&#10;        &lt;Text style={{ width: 90, fontSize: 12.5, color: '#2B7A3D', fontWeight: 'bold' }}&gt;{c.g}&lt;/Text&gt;&#10;        &lt;Text style={{ flex: 1, fontSize: 13, color: '#4A5568', lineHeight: 1.5 }}&gt;{c.d}&lt;/Text&gt;&#10;      &lt;/Box&gt;&#10;    ))}&#10;  &lt;/Box&gt;&#10;  &lt;Box style={{ height: 46, background: '#0E3F8C', padding: '0 40px', flexDirection: 'row', alignItems: 'center', justifyContent: 'center' }}&gt;&#10;    &lt;Text style={{ fontSize: 16.5, color: '#FFFFFF', fontWeight: '600' }}&gt;Six so far. Six more arrive on page 19 — and only after you have classified these.&lt;/Text&gt;&#10;  &lt;/Box&gt;&#10;&lt;/Slide&gt;&#10;"/>
         <p:cNvGrpSpPr/>
         <p:nvPr/>
       </p:nvGrpSpPr>
@@ -34711,7 +36028,7 @@
       </p:grpSpPr>
       <p:sp>
         <p:nvSpPr>
-          <p:cNvPr id="769" name=""/>
+          <p:cNvPr id="805" name=""/>
           <p:cNvSpPr/>
           <p:nvPr/>
         </p:nvSpPr>
@@ -34735,7 +36052,7 @@
       </p:sp>
       <p:sp>
         <p:nvSpPr>
-          <p:cNvPr id="770" name=""/>
+          <p:cNvPr id="806" name=""/>
           <p:cNvSpPr/>
           <p:nvPr/>
         </p:nvSpPr>
@@ -34759,7 +36076,7 @@
       </p:sp>
       <p:sp>
         <p:nvSpPr>
-          <p:cNvPr id="771" name="" descr="{&quot;isTemplate&quot;:true,&quot;type&quot;:&quot;text&quot;}"/>
+          <p:cNvPr id="807" name="" descr="{&quot;isTemplate&quot;:true,&quot;type&quot;:&quot;text&quot;}"/>
           <p:cNvSpPr txBox="1"/>
           <p:nvPr/>
         </p:nvSpPr>
@@ -34794,7 +36111,7 @@
       </p:sp>
       <p:sp>
         <p:nvSpPr>
-          <p:cNvPr id="772" name="" descr="{&quot;isTemplate&quot;:true,&quot;type&quot;:&quot;text&quot;}"/>
+          <p:cNvPr id="808" name="" descr="{&quot;isTemplate&quot;:true,&quot;type&quot;:&quot;text&quot;}"/>
           <p:cNvSpPr txBox="1"/>
           <p:nvPr/>
         </p:nvSpPr>
@@ -34829,14 +36146,14 @@
       </p:sp>
       <p:sp>
         <p:nvSpPr>
-          <p:cNvPr id="773" name="" descr="{&quot;isTemplate&quot;:true,&quot;type&quot;:&quot;text&quot;}"/>
+          <p:cNvPr id="809" name="" descr="{&quot;isTemplate&quot;:true,&quot;type&quot;:&quot;text&quot;}"/>
           <p:cNvSpPr txBox="1"/>
           <p:nvPr/>
         </p:nvSpPr>
         <p:spPr>
           <a:xfrm rot="0" flipH="0" flipV="0">
             <a:off x="381000" y="809625"/>
-            <a:ext cx="4638675" cy="333375"/>
+            <a:ext cx="6934200" cy="333375"/>
           </a:xfrm>
           <a:prstGeom prst="rect"/>
         </p:spPr>
@@ -34856,15 +36173,15 @@
                 <a:latin typeface="Microsoft YaHei"/>
                 <a:ea typeface="Microsoft YaHei"/>
               </a:rPr>
-              <a:t>Candidate Classes of CampusBites</a:t>
-            </a:r>
-            <a:endParaRPr/>
-          </a:p>
-        </p:txBody>
-      </p:sp>
-      <p:sp>
-        <p:nvSpPr>
-          <p:cNvPr id="774" name="" descr="{&quot;isTemplate&quot;:true,&quot;type&quot;:&quot;text&quot;}"/>
+              <a:t>A Worked Example — Take the Criterion, Not the List</a:t>
+            </a:r>
+            <a:endParaRPr/>
+          </a:p>
+        </p:txBody>
+      </p:sp>
+      <p:sp>
+        <p:nvSpPr>
+          <p:cNvPr id="810" name="" descr="{&quot;isTemplate&quot;:true,&quot;type&quot;:&quot;text&quot;}"/>
           <p:cNvSpPr txBox="1"/>
           <p:nvPr/>
         </p:nvSpPr>
@@ -34891,15 +36208,15 @@
                 <a:latin typeface="Microsoft YaHei"/>
                 <a:ea typeface="Microsoft YaHei"/>
               </a:rPr>
-              <a:t>07 / 38</a:t>
-            </a:r>
-            <a:endParaRPr/>
-          </a:p>
-        </p:txBody>
-      </p:sp>
-      <p:sp>
-        <p:nvSpPr>
-          <p:cNvPr id="775" name=""/>
+              <a:t>07 / 39</a:t>
+            </a:r>
+            <a:endParaRPr/>
+          </a:p>
+        </p:txBody>
+      </p:sp>
+      <p:sp>
+        <p:nvSpPr>
+          <p:cNvPr id="811" name=""/>
           <p:cNvSpPr/>
           <p:nvPr/>
         </p:nvSpPr>
@@ -34930,7 +36247,7 @@
       </p:sp>
       <p:sp>
         <p:nvSpPr>
-          <p:cNvPr id="776" name=""/>
+          <p:cNvPr id="812" name=""/>
           <p:cNvSpPr/>
           <p:nvPr/>
         </p:nvSpPr>
@@ -34956,7 +36273,7 @@
       </p:sp>
       <p:sp>
         <p:nvSpPr>
-          <p:cNvPr id="777" name="" descr="{&quot;isTemplate&quot;:true,&quot;type&quot;:&quot;text&quot;}"/>
+          <p:cNvPr id="813" name="" descr="{&quot;isTemplate&quot;:true,&quot;type&quot;:&quot;text&quot;}"/>
           <p:cNvSpPr txBox="1"/>
           <p:nvPr/>
         </p:nvSpPr>
@@ -34991,7 +36308,7 @@
       </p:sp>
       <p:sp>
         <p:nvSpPr>
-          <p:cNvPr id="778" name="" descr="{&quot;isTemplate&quot;:true,&quot;type&quot;:&quot;text&quot;}"/>
+          <p:cNvPr id="814" name="" descr="{&quot;isTemplate&quot;:true,&quot;type&quot;:&quot;text&quot;}"/>
           <p:cNvSpPr txBox="1"/>
           <p:nvPr/>
         </p:nvSpPr>
@@ -35026,7 +36343,7 @@
       </p:sp>
       <p:sp>
         <p:nvSpPr>
-          <p:cNvPr id="779" name="" descr="{&quot;isTemplate&quot;:true,&quot;type&quot;:&quot;text&quot;}"/>
+          <p:cNvPr id="815" name="" descr="{&quot;isTemplate&quot;:true,&quot;type&quot;:&quot;text&quot;}"/>
           <p:cNvSpPr txBox="1"/>
           <p:nvPr/>
         </p:nvSpPr>
@@ -35061,7 +36378,7 @@
       </p:sp>
       <p:sp>
         <p:nvSpPr>
-          <p:cNvPr id="780" name=""/>
+          <p:cNvPr id="816" name=""/>
           <p:cNvSpPr/>
           <p:nvPr/>
         </p:nvSpPr>
@@ -35092,7 +36409,7 @@
       </p:sp>
       <p:sp>
         <p:nvSpPr>
-          <p:cNvPr id="781" name=""/>
+          <p:cNvPr id="817" name=""/>
           <p:cNvSpPr/>
           <p:nvPr/>
         </p:nvSpPr>
@@ -35118,7 +36435,7 @@
       </p:sp>
       <p:sp>
         <p:nvSpPr>
-          <p:cNvPr id="782" name="" descr="{&quot;isTemplate&quot;:true,&quot;type&quot;:&quot;text&quot;}"/>
+          <p:cNvPr id="818" name="" descr="{&quot;isTemplate&quot;:true,&quot;type&quot;:&quot;text&quot;}"/>
           <p:cNvSpPr txBox="1"/>
           <p:nvPr/>
         </p:nvSpPr>
@@ -35153,7 +36470,7 @@
       </p:sp>
       <p:sp>
         <p:nvSpPr>
-          <p:cNvPr id="783" name="" descr="{&quot;isTemplate&quot;:true,&quot;type&quot;:&quot;text&quot;}"/>
+          <p:cNvPr id="819" name="" descr="{&quot;isTemplate&quot;:true,&quot;type&quot;:&quot;text&quot;}"/>
           <p:cNvSpPr txBox="1"/>
           <p:nvPr/>
         </p:nvSpPr>
@@ -35188,7 +36505,7 @@
       </p:sp>
       <p:sp>
         <p:nvSpPr>
-          <p:cNvPr id="784" name="" descr="{&quot;isTemplate&quot;:true,&quot;type&quot;:&quot;text&quot;}"/>
+          <p:cNvPr id="820" name="" descr="{&quot;isTemplate&quot;:true,&quot;type&quot;:&quot;text&quot;}"/>
           <p:cNvSpPr txBox="1"/>
           <p:nvPr/>
         </p:nvSpPr>
@@ -35223,7 +36540,7 @@
       </p:sp>
       <p:sp>
         <p:nvSpPr>
-          <p:cNvPr id="785" name=""/>
+          <p:cNvPr id="821" name=""/>
           <p:cNvSpPr/>
           <p:nvPr/>
         </p:nvSpPr>
@@ -35254,7 +36571,7 @@
       </p:sp>
       <p:sp>
         <p:nvSpPr>
-          <p:cNvPr id="786" name=""/>
+          <p:cNvPr id="822" name=""/>
           <p:cNvSpPr/>
           <p:nvPr/>
         </p:nvSpPr>
@@ -35280,7 +36597,7 @@
       </p:sp>
       <p:sp>
         <p:nvSpPr>
-          <p:cNvPr id="787" name="" descr="{&quot;isTemplate&quot;:true,&quot;type&quot;:&quot;text&quot;}"/>
+          <p:cNvPr id="823" name="" descr="{&quot;isTemplate&quot;:true,&quot;type&quot;:&quot;text&quot;}"/>
           <p:cNvSpPr txBox="1"/>
           <p:nvPr/>
         </p:nvSpPr>
@@ -35315,7 +36632,7 @@
       </p:sp>
       <p:sp>
         <p:nvSpPr>
-          <p:cNvPr id="788" name="" descr="{&quot;isTemplate&quot;:true,&quot;type&quot;:&quot;text&quot;}"/>
+          <p:cNvPr id="824" name="" descr="{&quot;isTemplate&quot;:true,&quot;type&quot;:&quot;text&quot;}"/>
           <p:cNvSpPr txBox="1"/>
           <p:nvPr/>
         </p:nvSpPr>
@@ -35350,7 +36667,7 @@
       </p:sp>
       <p:sp>
         <p:nvSpPr>
-          <p:cNvPr id="789" name="" descr="{&quot;isTemplate&quot;:true,&quot;type&quot;:&quot;text&quot;}"/>
+          <p:cNvPr id="825" name="" descr="{&quot;isTemplate&quot;:true,&quot;type&quot;:&quot;text&quot;}"/>
           <p:cNvSpPr txBox="1"/>
           <p:nvPr/>
         </p:nvSpPr>
@@ -35385,7 +36702,7 @@
       </p:sp>
       <p:sp>
         <p:nvSpPr>
-          <p:cNvPr id="790" name=""/>
+          <p:cNvPr id="826" name=""/>
           <p:cNvSpPr/>
           <p:nvPr/>
         </p:nvSpPr>
@@ -35416,7 +36733,7 @@
       </p:sp>
       <p:sp>
         <p:nvSpPr>
-          <p:cNvPr id="791" name=""/>
+          <p:cNvPr id="827" name=""/>
           <p:cNvSpPr/>
           <p:nvPr/>
         </p:nvSpPr>
@@ -35442,7 +36759,7 @@
       </p:sp>
       <p:sp>
         <p:nvSpPr>
-          <p:cNvPr id="792" name="" descr="{&quot;isTemplate&quot;:true,&quot;type&quot;:&quot;text&quot;}"/>
+          <p:cNvPr id="828" name="" descr="{&quot;isTemplate&quot;:true,&quot;type&quot;:&quot;text&quot;}"/>
           <p:cNvSpPr txBox="1"/>
           <p:nvPr/>
         </p:nvSpPr>
@@ -35477,7 +36794,7 @@
       </p:sp>
       <p:sp>
         <p:nvSpPr>
-          <p:cNvPr id="793" name="" descr="{&quot;isTemplate&quot;:true,&quot;type&quot;:&quot;text&quot;}"/>
+          <p:cNvPr id="829" name="" descr="{&quot;isTemplate&quot;:true,&quot;type&quot;:&quot;text&quot;}"/>
           <p:cNvSpPr txBox="1"/>
           <p:nvPr/>
         </p:nvSpPr>
@@ -35512,7 +36829,7 @@
       </p:sp>
       <p:sp>
         <p:nvSpPr>
-          <p:cNvPr id="794" name="" descr="{&quot;isTemplate&quot;:true,&quot;type&quot;:&quot;text&quot;}"/>
+          <p:cNvPr id="830" name="" descr="{&quot;isTemplate&quot;:true,&quot;type&quot;:&quot;text&quot;}"/>
           <p:cNvSpPr txBox="1"/>
           <p:nvPr/>
         </p:nvSpPr>
@@ -35547,7 +36864,7 @@
       </p:sp>
       <p:sp>
         <p:nvSpPr>
-          <p:cNvPr id="795" name=""/>
+          <p:cNvPr id="831" name=""/>
           <p:cNvSpPr/>
           <p:nvPr/>
         </p:nvSpPr>
@@ -35578,7 +36895,7 @@
       </p:sp>
       <p:sp>
         <p:nvSpPr>
-          <p:cNvPr id="796" name=""/>
+          <p:cNvPr id="832" name=""/>
           <p:cNvSpPr/>
           <p:nvPr/>
         </p:nvSpPr>
@@ -35604,7 +36921,7 @@
       </p:sp>
       <p:sp>
         <p:nvSpPr>
-          <p:cNvPr id="797" name="" descr="{&quot;isTemplate&quot;:true,&quot;type&quot;:&quot;text&quot;}"/>
+          <p:cNvPr id="833" name="" descr="{&quot;isTemplate&quot;:true,&quot;type&quot;:&quot;text&quot;}"/>
           <p:cNvSpPr txBox="1"/>
           <p:nvPr/>
         </p:nvSpPr>
@@ -35639,7 +36956,7 @@
       </p:sp>
       <p:sp>
         <p:nvSpPr>
-          <p:cNvPr id="798" name="" descr="{&quot;isTemplate&quot;:true,&quot;type&quot;:&quot;text&quot;}"/>
+          <p:cNvPr id="834" name="" descr="{&quot;isTemplate&quot;:true,&quot;type&quot;:&quot;text&quot;}"/>
           <p:cNvSpPr txBox="1"/>
           <p:nvPr/>
         </p:nvSpPr>
@@ -35674,7 +36991,7 @@
       </p:sp>
       <p:sp>
         <p:nvSpPr>
-          <p:cNvPr id="799" name="" descr="{&quot;isTemplate&quot;:true,&quot;type&quot;:&quot;text&quot;}"/>
+          <p:cNvPr id="835" name="" descr="{&quot;isTemplate&quot;:true,&quot;type&quot;:&quot;text&quot;}"/>
           <p:cNvSpPr txBox="1"/>
           <p:nvPr/>
         </p:nvSpPr>
@@ -35709,7 +37026,7 @@
       </p:sp>
       <p:sp>
         <p:nvSpPr>
-          <p:cNvPr id="800" name=""/>
+          <p:cNvPr id="836" name=""/>
           <p:cNvSpPr/>
           <p:nvPr/>
         </p:nvSpPr>
@@ -35740,7 +37057,7 @@
       </p:sp>
       <p:sp>
         <p:nvSpPr>
-          <p:cNvPr id="801" name=""/>
+          <p:cNvPr id="837" name=""/>
           <p:cNvSpPr/>
           <p:nvPr/>
         </p:nvSpPr>
@@ -35766,7 +37083,7 @@
       </p:sp>
       <p:sp>
         <p:nvSpPr>
-          <p:cNvPr id="802" name="" descr="{&quot;isTemplate&quot;:true,&quot;type&quot;:&quot;text&quot;}"/>
+          <p:cNvPr id="838" name="" descr="{&quot;isTemplate&quot;:true,&quot;type&quot;:&quot;text&quot;}"/>
           <p:cNvSpPr txBox="1"/>
           <p:nvPr/>
         </p:nvSpPr>
@@ -35801,7 +37118,7 @@
       </p:sp>
       <p:sp>
         <p:nvSpPr>
-          <p:cNvPr id="803" name="" descr="{&quot;isTemplate&quot;:true,&quot;type&quot;:&quot;text&quot;}"/>
+          <p:cNvPr id="839" name="" descr="{&quot;isTemplate&quot;:true,&quot;type&quot;:&quot;text&quot;}"/>
           <p:cNvSpPr txBox="1"/>
           <p:nvPr/>
         </p:nvSpPr>
@@ -35836,7 +37153,7 @@
       </p:sp>
       <p:sp>
         <p:nvSpPr>
-          <p:cNvPr id="804" name="" descr="{&quot;isTemplate&quot;:true,&quot;type&quot;:&quot;text&quot;}"/>
+          <p:cNvPr id="840" name="" descr="{&quot;isTemplate&quot;:true,&quot;type&quot;:&quot;text&quot;}"/>
           <p:cNvSpPr txBox="1"/>
           <p:nvPr/>
         </p:nvSpPr>
@@ -35871,7 +37188,7 @@
       </p:sp>
       <p:sp>
         <p:nvSpPr>
-          <p:cNvPr id="805" name=""/>
+          <p:cNvPr id="841" name=""/>
           <p:cNvSpPr/>
           <p:nvPr/>
         </p:nvSpPr>
@@ -35895,7 +37212,7 @@
       </p:sp>
       <p:sp>
         <p:nvSpPr>
-          <p:cNvPr id="806" name="" descr="{&quot;isTemplate&quot;:true,&quot;type&quot;:&quot;text&quot;}"/>
+          <p:cNvPr id="842" name="" descr="{&quot;isTemplate&quot;:true,&quot;type&quot;:&quot;text&quot;}"/>
           <p:cNvSpPr txBox="1"/>
           <p:nvPr/>
         </p:nvSpPr>
@@ -35938,7 +37255,7 @@
   <p:cSld>
     <p:spTree>
       <p:nvGrpSpPr>
-        <p:cNvPr id="807" name="" descr="&lt;Slide style={{ background: '#0E3F8C', padding: 0 }}&gt;&#10;  &lt;Box style={{ flexDirection: 'row', height: '100%', position: 'relative' }}&gt;&#10;    &lt;Box style={{ position: 'absolute', top: 0, left: 0, right: 0, height: 8, background: '#1E4FA8' }} /&gt;&#10;    &lt;Box style={{ width: 300, justifyContent: 'center', alignItems: 'center', borderRight: '1px solid #2B5793' }}&gt;&#10;      &lt;Text style={{ fontSize: 220, fontWeight: 'bold', color: '#3D7BD9', fontFamily: 'Georgia, serif', lineHeight: 1 }}&gt;02&lt;/Text&gt;&#10;    &lt;/Box&gt;&#10;    &lt;Box style={{ flex: 1, padding: '70px 64px', flexDirection: 'column', justifyContent: 'center' }}&gt;&#10;      &lt;Text style={{ fontSize: 15, color: '#7FA2D6', letterSpacing: 2, marginBottom: 18 }}&gt;PART 2 · LECTURE&lt;/Text&gt;&#10;      &lt;Text style={{ fontSize: 46, fontWeight: 'bold', color: '#FFFFFF', lineHeight: 1.18 }}&gt;Conceptual vs.&lt;br /&gt;Design Classes&lt;/Text&gt;&#10;      &lt;Box style={{ width: 64, height: 4, background: '#FFC107', marginTop: 26, marginBottom: 26 }} /&gt;&#10;      &lt;Box style={{ flexDirection: 'column', gap: 12 }}&gt;&#10;        {[&#10;          'This week models the problem. W10 models the solution.',&#10;          'Most beginner models are design models wearing an analysis hat',&#10;          'The difference is one question: does this box survive a technology change?'&#10;        ].map((t) =&gt; (&#10;          &lt;Box key={t} style={{ flexDirection: 'row', alignItems: 'center', gap: 12 }}&gt;&#10;            &lt;Box style={{ width: 8, height: 8, borderRadius: 4, background: '#3D7BD9' }} /&gt;&#10;            &lt;Text style={{ fontSize: 20, color: '#C5D4EA' }}&gt;{t}&lt;/Text&gt;&#10;          &lt;/Box&gt;&#10;        ))}&#10;      &lt;/Box&gt;&#10;    &lt;/Box&gt;&#10;  &lt;/Box&gt;&#10;&lt;/Slide&gt;&#10;"/>
+        <p:cNvPr id="843" name="" descr="&lt;Slide style={{ background: '#0E3F8C', padding: 0 }}&gt;&#10;  &lt;Box style={{ flexDirection: 'row', height: '100%', position: 'relative' }}&gt;&#10;    &lt;Box style={{ position: 'absolute', top: 0, left: 0, right: 0, height: 8, background: '#1E4FA8' }} /&gt;&#10;    &lt;Box style={{ width: 300, justifyContent: 'center', alignItems: 'center', borderRight: '1px solid #2B5793' }}&gt;&#10;      &lt;Text style={{ fontSize: 220, fontWeight: 'bold', color: '#3D7BD9', fontFamily: 'Georgia, serif', lineHeight: 1 }}&gt;02&lt;/Text&gt;&#10;    &lt;/Box&gt;&#10;    &lt;Box style={{ flex: 1, padding: '70px 64px', flexDirection: 'column', justifyContent: 'center' }}&gt;&#10;      &lt;Text style={{ fontSize: 15, color: '#7FA2D6', letterSpacing: 2, marginBottom: 18 }}&gt;PART 2 · LECTURE&lt;/Text&gt;&#10;      &lt;Text style={{ fontSize: 46, fontWeight: 'bold', color: '#FFFFFF', lineHeight: 1.18 }}&gt;Conceptual vs.&lt;br /&gt;Design Classes&lt;/Text&gt;&#10;      &lt;Box style={{ width: 64, height: 4, background: '#FFC107', marginTop: 26, marginBottom: 26 }} /&gt;&#10;      &lt;Box style={{ flexDirection: 'column', gap: 12 }}&gt;&#10;        {[&#10;          'This week models the problem. W10 models the solution.',&#10;          'Most beginner models are design models wearing an analysis hat',&#10;          'The difference is one question: does this box survive a technology change?'&#10;        ].map((t) =&gt; (&#10;          &lt;Box key={t} style={{ flexDirection: 'row', alignItems: 'center', gap: 12 }}&gt;&#10;            &lt;Box style={{ width: 8, height: 8, borderRadius: 4, background: '#3D7BD9' }} /&gt;&#10;            &lt;Text style={{ fontSize: 20, color: '#C5D4EA' }}&gt;{t}&lt;/Text&gt;&#10;          &lt;/Box&gt;&#10;        ))}&#10;      &lt;/Box&gt;&#10;    &lt;/Box&gt;&#10;  &lt;/Box&gt;&#10;&lt;/Slide&gt;&#10;"/>
         <p:cNvGrpSpPr/>
         <p:nvPr/>
       </p:nvGrpSpPr>
@@ -35952,7 +37269,7 @@
       </p:grpSpPr>
       <p:sp>
         <p:nvSpPr>
-          <p:cNvPr id="808" name=""/>
+          <p:cNvPr id="844" name=""/>
           <p:cNvSpPr/>
           <p:nvPr/>
         </p:nvSpPr>
@@ -35976,7 +37293,7 @@
       </p:sp>
       <p:sp>
         <p:nvSpPr>
-          <p:cNvPr id="809" name=""/>
+          <p:cNvPr id="845" name=""/>
           <p:cNvSpPr/>
           <p:nvPr/>
         </p:nvSpPr>
@@ -36016,7 +37333,7 @@
       </p:sp>
       <p:sp>
         <p:nvSpPr>
-          <p:cNvPr id="810" name="" descr="{&quot;isTemplate&quot;:true,&quot;type&quot;:&quot;text&quot;}"/>
+          <p:cNvPr id="846" name="" descr="{&quot;isTemplate&quot;:true,&quot;type&quot;:&quot;text&quot;}"/>
           <p:cNvSpPr txBox="1"/>
           <p:nvPr/>
         </p:nvSpPr>
@@ -36051,7 +37368,7 @@
       </p:sp>
       <p:sp>
         <p:nvSpPr>
-          <p:cNvPr id="811" name="" descr="{&quot;isTemplate&quot;:true,&quot;type&quot;:&quot;text&quot;}"/>
+          <p:cNvPr id="847" name="" descr="{&quot;isTemplate&quot;:true,&quot;type&quot;:&quot;text&quot;}"/>
           <p:cNvSpPr txBox="1"/>
           <p:nvPr/>
         </p:nvSpPr>
@@ -36086,7 +37403,7 @@
       </p:sp>
       <p:sp>
         <p:nvSpPr>
-          <p:cNvPr id="812" name="" descr="{&quot;isTemplate&quot;:true,&quot;type&quot;:&quot;text&quot;}"/>
+          <p:cNvPr id="848" name="" descr="{&quot;isTemplate&quot;:true,&quot;type&quot;:&quot;text&quot;}"/>
           <p:cNvSpPr txBox="1"/>
           <p:nvPr/>
         </p:nvSpPr>
@@ -36139,7 +37456,7 @@
       </p:sp>
       <p:sp>
         <p:nvSpPr>
-          <p:cNvPr id="813" name=""/>
+          <p:cNvPr id="849" name=""/>
           <p:cNvSpPr/>
           <p:nvPr/>
         </p:nvSpPr>
@@ -36163,7 +37480,7 @@
       </p:sp>
       <p:sp>
         <p:nvSpPr>
-          <p:cNvPr id="814" name=""/>
+          <p:cNvPr id="850" name=""/>
           <p:cNvSpPr/>
           <p:nvPr/>
         </p:nvSpPr>
@@ -36189,7 +37506,7 @@
       </p:sp>
       <p:sp>
         <p:nvSpPr>
-          <p:cNvPr id="815" name="" descr="{&quot;isTemplate&quot;:true,&quot;type&quot;:&quot;text&quot;}"/>
+          <p:cNvPr id="851" name="" descr="{&quot;isTemplate&quot;:true,&quot;type&quot;:&quot;text&quot;}"/>
           <p:cNvSpPr txBox="1"/>
           <p:nvPr/>
         </p:nvSpPr>
@@ -36224,7 +37541,7 @@
       </p:sp>
       <p:sp>
         <p:nvSpPr>
-          <p:cNvPr id="816" name=""/>
+          <p:cNvPr id="852" name=""/>
           <p:cNvSpPr/>
           <p:nvPr/>
         </p:nvSpPr>
@@ -36250,7 +37567,7 @@
       </p:sp>
       <p:sp>
         <p:nvSpPr>
-          <p:cNvPr id="817" name="" descr="{&quot;isTemplate&quot;:true,&quot;type&quot;:&quot;text&quot;}"/>
+          <p:cNvPr id="853" name="" descr="{&quot;isTemplate&quot;:true,&quot;type&quot;:&quot;text&quot;}"/>
           <p:cNvSpPr txBox="1"/>
           <p:nvPr/>
         </p:nvSpPr>
@@ -36285,7 +37602,7 @@
       </p:sp>
       <p:sp>
         <p:nvSpPr>
-          <p:cNvPr id="818" name=""/>
+          <p:cNvPr id="854" name=""/>
           <p:cNvSpPr/>
           <p:nvPr/>
         </p:nvSpPr>
@@ -36311,7 +37628,7 @@
       </p:sp>
       <p:sp>
         <p:nvSpPr>
-          <p:cNvPr id="819" name="" descr="{&quot;isTemplate&quot;:true,&quot;type&quot;:&quot;text&quot;}"/>
+          <p:cNvPr id="855" name="" descr="{&quot;isTemplate&quot;:true,&quot;type&quot;:&quot;text&quot;}"/>
           <p:cNvSpPr txBox="1"/>
           <p:nvPr/>
         </p:nvSpPr>
@@ -36346,7 +37663,7 @@
       </p:sp>
       <p:sp>
         <p:nvSpPr>
-          <p:cNvPr id="820" name=""/>
+          <p:cNvPr id="856" name=""/>
           <p:cNvSpPr/>
           <p:nvPr/>
         </p:nvSpPr>
@@ -36378,7 +37695,7 @@
   <p:cSld>
     <p:spTree>
       <p:nvGrpSpPr>
-        <p:cNvPr id="821" name="" descr="&lt;Slide style={{ background: '#FFFFFF', padding: 0 }}&gt;&#10;  &lt;Box style={{ height: 72, background: '#1E4FA8', padding: '0 40px', flexDirection: 'row', alignItems: 'center', justifyContent: 'space-between' }}&gt;&#10;    &lt;Text style={{ fontSize: 15, color: '#B9CDF0', letterSpacing: 1 }}&gt;ISAD · INFORMATION SYSTEMS ANALYSIS &amp;amp; DESIGN&lt;/Text&gt;&#10;    &lt;Text style={{ fontSize: 15, color: '#B9CDF0' }}&gt;W06 · CONCEPTUAL VS. DESIGN&lt;/Text&gt;&#10;  &lt;/Box&gt;&#10;  &lt;Box style={{ padding: '13px 40px 0 40px', flexDirection: 'row', alignItems: 'center', justifyContent: 'space-between' }}&gt;&#10;    &lt;Text style={{ fontSize: 29, fontWeight: 'bold', color: '#0E3F8C' }}&gt;Analysis Model vs. Design Model&lt;/Text&gt;&#10;    &lt;Text style={{ fontSize: 14, color: '#1E4FA8', fontWeight: 'bold' }}&gt;09 / 38&lt;/Text&gt;&#10;  &lt;/Box&gt;&#10;  &lt;Box style={{ flex: 1, padding: '10px 40px 0 40px', flexDirection: 'row', gap: 26 }}&gt;&#10;    &lt;Box style={{ flex: 1, flexDirection: 'column', gap: 12 }}&gt;&#10;      &lt;Box style={{ padding: '12px 18px', background: '#F0F5FC', borderRadius: 9 }}&gt;&#10;        &lt;Text style={{ fontSize: 16, fontWeight: 'bold', color: '#0E3F8C' }}&gt;Analysis model — W06 to W09&lt;/Text&gt;&#10;      &lt;/Box&gt;&#10;      {[&#10;        'Models the problem the client described',&#10;        'Classes come from nouns in the specifications',&#10;        'No technology, no framework, no language',&#10;        'Answers: what does the system have to know about?',&#10;        'Reviewed with the client, who does not care about your stack',&#10;        'Changes when the requirements change',&#10;      ].map((t) =&gt; (&#10;        &lt;Box key={t} style={{ flex: 1, padding: '12px 16px', background: '#FFFFFF', borderRadius: 8, border: '1px solid #E5E7EB' }}&gt;&#10;          &lt;Text style={{ fontSize: 14, color: '#4A5568', lineHeight: 1.5 }}&gt;{t}&lt;/Text&gt;&#10;        &lt;/Box&gt;&#10;      ))}&#10;    &lt;/Box&gt;&#10;    &lt;Box style={{ width: 130, justifyContent: 'center', alignItems: 'center' }}&gt;&#10;      &lt;Box style={{ width: 54, height: 54, borderRadius: 27, background: '#1E4FA8', justifyContent: 'center', alignItems: 'center' }}&gt;&#10;        &lt;Text style={{ fontSize: 26, color: '#FFFFFF', fontWeight: 'bold' }}&gt;→&lt;/Text&gt;&#10;      &lt;/Box&gt;&#10;    &lt;/Box&gt;&#10;    &lt;Box style={{ flex: 1, flexDirection: 'column', gap: 12 }}&gt;&#10;      &lt;Box style={{ padding: '12px 18px', background: '#FDF3F3', borderRadius: 9 }}&gt;&#10;        &lt;Text style={{ fontSize: 16, fontWeight: 'bold', color: '#D9534F' }}&gt;Design model — W10 onward&lt;/Text&gt;&#10;      &lt;/Box&gt;&#10;      {[&#10;        'Models the solution the team will build',&#10;        'Classes come from reuse, framework and interfaces',&#10;        'Names end in Service, Controller, Repository, DTO',&#10;        'Answers: how will the machine do it?',&#10;        'Reviewed by the team, who do care about your stack',&#10;        'Changes when the technology changes — much more often',&#10;      ].map((t) =&gt; (&#10;        &lt;Box key={t} style={{ flex: 1, padding: '12px 16px', background: '#FFFFFF', borderRadius: 8, border: '1px solid #E5E7EB' }}&gt;&#10;          &lt;Text style={{ fontSize: 14, color: '#4A5568', lineHeight: 1.5 }}&gt;{t}&lt;/Text&gt;&#10;        &lt;/Box&gt;&#10;      ))}&#10;    &lt;/Box&gt;&#10;  &lt;/Box&gt;&#10;  &lt;Box style={{ height: 46, background: '#0E3F8C', padding: '0 40px', flexDirection: 'row', alignItems: 'center', justifyContent: 'center' }}&gt;&#10;    &lt;Text style={{ fontSize: 16.5, color: '#FFFFFF', fontWeight: '600' }}&gt;If your class diagram would still make sense in a different programming language, you have drawn the right thing.&lt;/Text&gt;&#10;  &lt;/Box&gt;&#10;&lt;/Slide&gt;&#10;"/>
+        <p:cNvPr id="857" name="" descr="&lt;Slide style={{ background: '#FFFFFF', padding: 0 }}&gt;&#10;  &lt;Box style={{ height: 72, background: '#1E4FA8', padding: '0 40px', flexDirection: 'row', alignItems: 'center', justifyContent: 'space-between' }}&gt;&#10;    &lt;Text style={{ fontSize: 15, color: '#B9CDF0', letterSpacing: 1 }}&gt;ISAD · INFORMATION SYSTEMS ANALYSIS &amp;amp; DESIGN&lt;/Text&gt;&#10;    &lt;Text style={{ fontSize: 15, color: '#B9CDF0' }}&gt;W06 · CONCEPTUAL VS. DESIGN&lt;/Text&gt;&#10;  &lt;/Box&gt;&#10;  &lt;Box style={{ padding: '13px 40px 0 40px', flexDirection: 'row', alignItems: 'center', justifyContent: 'space-between' }}&gt;&#10;    &lt;Text style={{ fontSize: 29, fontWeight: 'bold', color: '#0E3F8C' }}&gt;Analysis Model vs. Design Model&lt;/Text&gt;&#10;    &lt;Text style={{ fontSize: 14, color: '#1E4FA8', fontWeight: 'bold' }}&gt;09 / 39&lt;/Text&gt;&#10;  &lt;/Box&gt;&#10;  &lt;Box style={{ flex: 1, padding: '10px 40px 0 40px', flexDirection: 'row', gap: 26 }}&gt;&#10;    &lt;Box style={{ flex: 1, flexDirection: 'column', gap: 12 }}&gt;&#10;      &lt;Box style={{ padding: '12px 18px', background: '#F0F5FC', borderRadius: 9 }}&gt;&#10;        &lt;Text style={{ fontSize: 16, fontWeight: 'bold', color: '#0E3F8C' }}&gt;Analysis model — W06 to W09&lt;/Text&gt;&#10;      &lt;/Box&gt;&#10;      {[&#10;        'Models the problem the client described',&#10;        'Classes come from nouns in the specifications',&#10;        'No technology, no framework, no language',&#10;        'Answers: what does the system have to know about?',&#10;        'Reviewed with the client, who does not care about your stack',&#10;        'Changes when the requirements change',&#10;      ].map((t) =&gt; (&#10;        &lt;Box key={t} style={{ flex: 1, padding: '12px 16px', background: '#FFFFFF', borderRadius: 8, border: '1px solid #E5E7EB' }}&gt;&#10;          &lt;Text style={{ fontSize: 14, color: '#4A5568', lineHeight: 1.5 }}&gt;{t}&lt;/Text&gt;&#10;        &lt;/Box&gt;&#10;      ))}&#10;    &lt;/Box&gt;&#10;    &lt;Box style={{ width: 130, justifyContent: 'center', alignItems: 'center' }}&gt;&#10;      &lt;Box style={{ width: 54, height: 54, borderRadius: 27, background: '#1E4FA8', justifyContent: 'center', alignItems: 'center' }}&gt;&#10;        &lt;Text style={{ fontSize: 26, color: '#FFFFFF', fontWeight: 'bold' }}&gt;→&lt;/Text&gt;&#10;      &lt;/Box&gt;&#10;    &lt;/Box&gt;&#10;    &lt;Box style={{ flex: 1, flexDirection: 'column', gap: 12 }}&gt;&#10;      &lt;Box style={{ padding: '12px 18px', background: '#FDF3F3', borderRadius: 9 }}&gt;&#10;        &lt;Text style={{ fontSize: 16, fontWeight: 'bold', color: '#D9534F' }}&gt;Design model — W10 onward&lt;/Text&gt;&#10;      &lt;/Box&gt;&#10;      {[&#10;        'Models the solution the team will build',&#10;        'Classes come from reuse, framework and interfaces',&#10;        'Names end in Service, Controller, Repository, DTO',&#10;        'Answers: how will the machine do it?',&#10;        'Reviewed by the team, who do care about your stack',&#10;        'Changes when the technology changes — much more often',&#10;      ].map((t) =&gt; (&#10;        &lt;Box key={t} style={{ flex: 1, padding: '12px 16px', background: '#FFFFFF', borderRadius: 8, border: '1px solid #E5E7EB' }}&gt;&#10;          &lt;Text style={{ fontSize: 14, color: '#4A5568', lineHeight: 1.5 }}&gt;{t}&lt;/Text&gt;&#10;        &lt;/Box&gt;&#10;      ))}&#10;    &lt;/Box&gt;&#10;  &lt;/Box&gt;&#10;  &lt;Box style={{ height: 46, background: '#0E3F8C', padding: '0 40px', flexDirection: 'row', alignItems: 'center', justifyContent: 'center' }}&gt;&#10;    &lt;Text style={{ fontSize: 16.5, color: '#FFFFFF', fontWeight: '600' }}&gt;If your class diagram would still make sense in a different programming language, you have drawn the right thing.&lt;/Text&gt;&#10;  &lt;/Box&gt;&#10;&lt;/Slide&gt;&#10;"/>
         <p:cNvGrpSpPr/>
         <p:nvPr/>
       </p:nvGrpSpPr>
@@ -36392,7 +37709,7 @@
       </p:grpSpPr>
       <p:sp>
         <p:nvSpPr>
-          <p:cNvPr id="822" name=""/>
+          <p:cNvPr id="858" name=""/>
           <p:cNvSpPr/>
           <p:nvPr/>
         </p:nvSpPr>
@@ -36416,7 +37733,7 @@
       </p:sp>
       <p:sp>
         <p:nvSpPr>
-          <p:cNvPr id="823" name=""/>
+          <p:cNvPr id="859" name=""/>
           <p:cNvSpPr/>
           <p:nvPr/>
         </p:nvSpPr>
@@ -36440,7 +37757,7 @@
       </p:sp>
       <p:sp>
         <p:nvSpPr>
-          <p:cNvPr id="824" name="" descr="{&quot;isTemplate&quot;:true,&quot;type&quot;:&quot;text&quot;}"/>
+          <p:cNvPr id="860" name="" descr="{&quot;isTemplate&quot;:true,&quot;type&quot;:&quot;text&quot;}"/>
           <p:cNvSpPr txBox="1"/>
           <p:nvPr/>
         </p:nvSpPr>
@@ -36475,7 +37792,7 @@
       </p:sp>
       <p:sp>
         <p:nvSpPr>
-          <p:cNvPr id="825" name="" descr="{&quot;isTemplate&quot;:true,&quot;type&quot;:&quot;text&quot;}"/>
+          <p:cNvPr id="861" name="" descr="{&quot;isTemplate&quot;:true,&quot;type&quot;:&quot;text&quot;}"/>
           <p:cNvSpPr txBox="1"/>
           <p:nvPr/>
         </p:nvSpPr>
@@ -36510,7 +37827,7 @@
       </p:sp>
       <p:sp>
         <p:nvSpPr>
-          <p:cNvPr id="826" name="" descr="{&quot;isTemplate&quot;:true,&quot;type&quot;:&quot;text&quot;}"/>
+          <p:cNvPr id="862" name="" descr="{&quot;isTemplate&quot;:true,&quot;type&quot;:&quot;text&quot;}"/>
           <p:cNvSpPr txBox="1"/>
           <p:nvPr/>
         </p:nvSpPr>
@@ -36545,7 +37862,7 @@
       </p:sp>
       <p:sp>
         <p:nvSpPr>
-          <p:cNvPr id="827" name="" descr="{&quot;isTemplate&quot;:true,&quot;type&quot;:&quot;text&quot;}"/>
+          <p:cNvPr id="863" name="" descr="{&quot;isTemplate&quot;:true,&quot;type&quot;:&quot;text&quot;}"/>
           <p:cNvSpPr txBox="1"/>
           <p:nvPr/>
         </p:nvSpPr>
@@ -36572,15 +37889,15 @@
                 <a:latin typeface="Microsoft YaHei"/>
                 <a:ea typeface="Microsoft YaHei"/>
               </a:rPr>
-              <a:t>09 / 38</a:t>
-            </a:r>
-            <a:endParaRPr/>
-          </a:p>
-        </p:txBody>
-      </p:sp>
-      <p:sp>
-        <p:nvSpPr>
-          <p:cNvPr id="828" name=""/>
+              <a:t>09 / 39</a:t>
+            </a:r>
+            <a:endParaRPr/>
+          </a:p>
+        </p:txBody>
+      </p:sp>
+      <p:sp>
+        <p:nvSpPr>
+          <p:cNvPr id="864" name=""/>
           <p:cNvSpPr/>
           <p:nvPr/>
         </p:nvSpPr>
@@ -36606,7 +37923,7 @@
       </p:sp>
       <p:sp>
         <p:nvSpPr>
-          <p:cNvPr id="829" name="" descr="{&quot;isTemplate&quot;:true,&quot;type&quot;:&quot;text&quot;}"/>
+          <p:cNvPr id="865" name="" descr="{&quot;isTemplate&quot;:true,&quot;type&quot;:&quot;text&quot;}"/>
           <p:cNvSpPr txBox="1"/>
           <p:nvPr/>
         </p:nvSpPr>
@@ -36641,7 +37958,7 @@
       </p:sp>
       <p:sp>
         <p:nvSpPr>
-          <p:cNvPr id="830" name=""/>
+          <p:cNvPr id="866" name=""/>
           <p:cNvSpPr/>
           <p:nvPr/>
         </p:nvSpPr>
@@ -36672,7 +37989,7 @@
       </p:sp>
       <p:sp>
         <p:nvSpPr>
-          <p:cNvPr id="831" name="" descr="{&quot;isTemplate&quot;:true,&quot;type&quot;:&quot;text&quot;}"/>
+          <p:cNvPr id="867" name="" descr="{&quot;isTemplate&quot;:true,&quot;type&quot;:&quot;text&quot;}"/>
           <p:cNvSpPr txBox="1"/>
           <p:nvPr/>
         </p:nvSpPr>
@@ -36707,7 +38024,7 @@
       </p:sp>
       <p:sp>
         <p:nvSpPr>
-          <p:cNvPr id="832" name=""/>
+          <p:cNvPr id="868" name=""/>
           <p:cNvSpPr/>
           <p:nvPr/>
         </p:nvSpPr>
@@ -36738,7 +38055,7 @@
       </p:sp>
       <p:sp>
         <p:nvSpPr>
-          <p:cNvPr id="833" name="" descr="{&quot;isTemplate&quot;:true,&quot;type&quot;:&quot;text&quot;}"/>
+          <p:cNvPr id="869" name="" descr="{&quot;isTemplate&quot;:true,&quot;type&quot;:&quot;text&quot;}"/>
           <p:cNvSpPr txBox="1"/>
           <p:nvPr/>
         </p:nvSpPr>
@@ -36773,7 +38090,7 @@
       </p:sp>
       <p:sp>
         <p:nvSpPr>
-          <p:cNvPr id="834" name=""/>
+          <p:cNvPr id="870" name=""/>
           <p:cNvSpPr/>
           <p:nvPr/>
         </p:nvSpPr>
@@ -36804,7 +38121,7 @@
       </p:sp>
       <p:sp>
         <p:nvSpPr>
-          <p:cNvPr id="835" name="" descr="{&quot;isTemplate&quot;:true,&quot;type&quot;:&quot;text&quot;}"/>
+          <p:cNvPr id="871" name="" descr="{&quot;isTemplate&quot;:true,&quot;type&quot;:&quot;text&quot;}"/>
           <p:cNvSpPr txBox="1"/>
           <p:nvPr/>
         </p:nvSpPr>
@@ -36839,7 +38156,7 @@
       </p:sp>
       <p:sp>
         <p:nvSpPr>
-          <p:cNvPr id="836" name=""/>
+          <p:cNvPr id="872" name=""/>
           <p:cNvSpPr/>
           <p:nvPr/>
         </p:nvSpPr>
@@ -36870,7 +38187,7 @@
       </p:sp>
       <p:sp>
         <p:nvSpPr>
-          <p:cNvPr id="837" name="" descr="{&quot;isTemplate&quot;:true,&quot;type&quot;:&quot;text&quot;}"/>
+          <p:cNvPr id="873" name="" descr="{&quot;isTemplate&quot;:true,&quot;type&quot;:&quot;text&quot;}"/>
           <p:cNvSpPr txBox="1"/>
           <p:nvPr/>
         </p:nvSpPr>
@@ -36905,7 +38222,7 @@
       </p:sp>
       <p:sp>
         <p:nvSpPr>
-          <p:cNvPr id="838" name=""/>
+          <p:cNvPr id="874" name=""/>
           <p:cNvSpPr/>
           <p:nvPr/>
         </p:nvSpPr>
@@ -36936,7 +38253,7 @@
       </p:sp>
       <p:sp>
         <p:nvSpPr>
-          <p:cNvPr id="839" name="" descr="{&quot;isTemplate&quot;:true,&quot;type&quot;:&quot;text&quot;}"/>
+          <p:cNvPr id="875" name="" descr="{&quot;isTemplate&quot;:true,&quot;type&quot;:&quot;text&quot;}"/>
           <p:cNvSpPr txBox="1"/>
           <p:nvPr/>
         </p:nvSpPr>
@@ -36971,7 +38288,7 @@
       </p:sp>
       <p:sp>
         <p:nvSpPr>
-          <p:cNvPr id="840" name=""/>
+          <p:cNvPr id="876" name=""/>
           <p:cNvSpPr/>
           <p:nvPr/>
         </p:nvSpPr>
@@ -37002,7 +38319,7 @@
       </p:sp>
       <p:sp>
         <p:nvSpPr>
-          <p:cNvPr id="841" name="" descr="{&quot;isTemplate&quot;:true,&quot;type&quot;:&quot;text&quot;}"/>
+          <p:cNvPr id="877" name="" descr="{&quot;isTemplate&quot;:true,&quot;type&quot;:&quot;text&quot;}"/>
           <p:cNvSpPr txBox="1"/>
           <p:nvPr/>
         </p:nvSpPr>
@@ -37037,7 +38354,7 @@
       </p:sp>
       <p:sp>
         <p:nvSpPr>
-          <p:cNvPr id="842" name=""/>
+          <p:cNvPr id="878" name=""/>
           <p:cNvSpPr/>
           <p:nvPr/>
         </p:nvSpPr>
@@ -37063,7 +38380,7 @@
       </p:sp>
       <p:sp>
         <p:nvSpPr>
-          <p:cNvPr id="843" name="" descr="{&quot;isTemplate&quot;:true,&quot;type&quot;:&quot;text&quot;}"/>
+          <p:cNvPr id="879" name="" descr="{&quot;isTemplate&quot;:true,&quot;type&quot;:&quot;text&quot;}"/>
           <p:cNvSpPr txBox="1"/>
           <p:nvPr/>
         </p:nvSpPr>
@@ -37098,7 +38415,7 @@
       </p:sp>
       <p:sp>
         <p:nvSpPr>
-          <p:cNvPr id="844" name=""/>
+          <p:cNvPr id="880" name=""/>
           <p:cNvSpPr/>
           <p:nvPr/>
         </p:nvSpPr>
@@ -37124,7 +38441,7 @@
       </p:sp>
       <p:sp>
         <p:nvSpPr>
-          <p:cNvPr id="845" name="" descr="{&quot;isTemplate&quot;:true,&quot;type&quot;:&quot;text&quot;}"/>
+          <p:cNvPr id="881" name="" descr="{&quot;isTemplate&quot;:true,&quot;type&quot;:&quot;text&quot;}"/>
           <p:cNvSpPr txBox="1"/>
           <p:nvPr/>
         </p:nvSpPr>
@@ -37159,7 +38476,7 @@
       </p:sp>
       <p:sp>
         <p:nvSpPr>
-          <p:cNvPr id="846" name=""/>
+          <p:cNvPr id="882" name=""/>
           <p:cNvSpPr/>
           <p:nvPr/>
         </p:nvSpPr>
@@ -37190,7 +38507,7 @@
       </p:sp>
       <p:sp>
         <p:nvSpPr>
-          <p:cNvPr id="847" name="" descr="{&quot;isTemplate&quot;:true,&quot;type&quot;:&quot;text&quot;}"/>
+          <p:cNvPr id="883" name="" descr="{&quot;isTemplate&quot;:true,&quot;type&quot;:&quot;text&quot;}"/>
           <p:cNvSpPr txBox="1"/>
           <p:nvPr/>
         </p:nvSpPr>
@@ -37225,7 +38542,7 @@
       </p:sp>
       <p:sp>
         <p:nvSpPr>
-          <p:cNvPr id="848" name=""/>
+          <p:cNvPr id="884" name=""/>
           <p:cNvSpPr/>
           <p:nvPr/>
         </p:nvSpPr>
@@ -37256,7 +38573,7 @@
       </p:sp>
       <p:sp>
         <p:nvSpPr>
-          <p:cNvPr id="849" name="" descr="{&quot;isTemplate&quot;:true,&quot;type&quot;:&quot;text&quot;}"/>
+          <p:cNvPr id="885" name="" descr="{&quot;isTemplate&quot;:true,&quot;type&quot;:&quot;text&quot;}"/>
           <p:cNvSpPr txBox="1"/>
           <p:nvPr/>
         </p:nvSpPr>
@@ -37291,7 +38608,7 @@
       </p:sp>
       <p:sp>
         <p:nvSpPr>
-          <p:cNvPr id="850" name=""/>
+          <p:cNvPr id="886" name=""/>
           <p:cNvSpPr/>
           <p:nvPr/>
         </p:nvSpPr>
@@ -37322,7 +38639,7 @@
       </p:sp>
       <p:sp>
         <p:nvSpPr>
-          <p:cNvPr id="851" name="" descr="{&quot;isTemplate&quot;:true,&quot;type&quot;:&quot;text&quot;}"/>
+          <p:cNvPr id="887" name="" descr="{&quot;isTemplate&quot;:true,&quot;type&quot;:&quot;text&quot;}"/>
           <p:cNvSpPr txBox="1"/>
           <p:nvPr/>
         </p:nvSpPr>
@@ -37357,7 +38674,7 @@
       </p:sp>
       <p:sp>
         <p:nvSpPr>
-          <p:cNvPr id="852" name=""/>
+          <p:cNvPr id="888" name=""/>
           <p:cNvSpPr/>
           <p:nvPr/>
         </p:nvSpPr>
@@ -37388,7 +38705,7 @@
       </p:sp>
       <p:sp>
         <p:nvSpPr>
-          <p:cNvPr id="853" name="" descr="{&quot;isTemplate&quot;:true,&quot;type&quot;:&quot;text&quot;}"/>
+          <p:cNvPr id="889" name="" descr="{&quot;isTemplate&quot;:true,&quot;type&quot;:&quot;text&quot;}"/>
           <p:cNvSpPr txBox="1"/>
           <p:nvPr/>
         </p:nvSpPr>
@@ -37423,7 +38740,7 @@
       </p:sp>
       <p:sp>
         <p:nvSpPr>
-          <p:cNvPr id="854" name=""/>
+          <p:cNvPr id="890" name=""/>
           <p:cNvSpPr/>
           <p:nvPr/>
         </p:nvSpPr>
@@ -37454,7 +38771,7 @@
       </p:sp>
       <p:sp>
         <p:nvSpPr>
-          <p:cNvPr id="855" name="" descr="{&quot;isTemplate&quot;:true,&quot;type&quot;:&quot;text&quot;}"/>
+          <p:cNvPr id="891" name="" descr="{&quot;isTemplate&quot;:true,&quot;type&quot;:&quot;text&quot;}"/>
           <p:cNvSpPr txBox="1"/>
           <p:nvPr/>
         </p:nvSpPr>
@@ -37489,7 +38806,7 @@
       </p:sp>
       <p:sp>
         <p:nvSpPr>
-          <p:cNvPr id="856" name=""/>
+          <p:cNvPr id="892" name=""/>
           <p:cNvSpPr/>
           <p:nvPr/>
         </p:nvSpPr>
@@ -37520,7 +38837,7 @@
       </p:sp>
       <p:sp>
         <p:nvSpPr>
-          <p:cNvPr id="857" name="" descr="{&quot;isTemplate&quot;:true,&quot;type&quot;:&quot;text&quot;}"/>
+          <p:cNvPr id="893" name="" descr="{&quot;isTemplate&quot;:true,&quot;type&quot;:&quot;text&quot;}"/>
           <p:cNvSpPr txBox="1"/>
           <p:nvPr/>
         </p:nvSpPr>
@@ -37555,7 +38872,7 @@
       </p:sp>
       <p:sp>
         <p:nvSpPr>
-          <p:cNvPr id="858" name=""/>
+          <p:cNvPr id="894" name=""/>
           <p:cNvSpPr/>
           <p:nvPr/>
         </p:nvSpPr>
@@ -37579,7 +38896,7 @@
       </p:sp>
       <p:sp>
         <p:nvSpPr>
-          <p:cNvPr id="859" name="" descr="{&quot;isTemplate&quot;:true,&quot;type&quot;:&quot;text&quot;}"/>
+          <p:cNvPr id="895" name="" descr="{&quot;isTemplate&quot;:true,&quot;type&quot;:&quot;text&quot;}"/>
           <p:cNvSpPr txBox="1"/>
           <p:nvPr/>
         </p:nvSpPr>

--- a/01-slides/W06-Domain-Modeling.pptx
+++ b/01-slides/W06-Domain-Modeling.pptx
@@ -31257,7 +31257,7 @@
   <p:cSld>
     <p:spTree>
       <p:nvGrpSpPr>
-        <p:cNvPr id="689" name="" descr="&lt;Slide style={{ background: '#FFFFFF', padding: 0 }}&gt;&#10;  &lt;Box style={{ height: 72, background: '#1E4FA8', padding: '0 40px', flexDirection: 'row', alignItems: 'center', justifyContent: 'space-between' }}&gt;&#10;    &lt;Text style={{ fontSize: 15, color: '#B9CDF0', letterSpacing: 1 }}&gt;ISAD · INFORMATION SYSTEMS ANALYSIS &amp;amp; DESIGN&lt;/Text&gt;&#10;    &lt;Text style={{ fontSize: 15, color: '#B9CDF0' }}&gt;W06 · TODAY'S CHECKLIST&lt;/Text&gt;&#10;  &lt;/Box&gt;&#10;  &lt;Box style={{ padding: '13px 40px 0 40px', flexDirection: 'row', alignItems: 'center', justifyContent: 'space-between' }}&gt;&#10;    &lt;Text style={{ fontSize: 29, fontWeight: 'bold', color: '#0E3F8C' }}&gt;What You Finish Before You Leave&lt;/Text&gt;&#10;    &lt;Text style={{ fontSize: 14, color: '#1E4FA8', fontWeight: 'bold' }}&gt;39 / 39&lt;/Text&gt;&#10;  &lt;/Box&gt;&#10;  &lt;Box style={{ flex: 1, padding: '8px 40px 0 40px', flexDirection: 'row', gap: 20 }}&gt;&#10;    &lt;Box style={{ flex: 1, background: '#F7F9FC', border: '1px solid #E5E7EB', borderRadius: 10, padding: 16 }}&gt;&#10;      &lt;Box style={{ flexDirection: 'row', alignItems: 'center', gap: 9, marginBottom: 12 }}&gt;&#10;        &lt;Box style={{ width: 26, height: 26, borderRadius: 13, background: '#0E3F8C' }} /&gt;&#10;        &lt;Text style={{ fontSize: 15, color: '#0E3F8C', fontWeight: 'bold' }}&gt;1 · SCAN YOUR OWN NOUNS&lt;/Text&gt;&#10;      &lt;/Box&gt;&#10;      &lt;Text style={{ fontSize: 13.5, color: '#4A5568', lineHeight: 1.55 }}&gt;&#10;        About &lt;Text style={{ fontSize: 13.5, color: '#0E3F8C', fontWeight: 'bold' }}&gt;24 words&lt;/Text&gt; from your own FR-1…FR-12, into four buckets:&#10;      &lt;/Text&gt;&#10;      &lt;Box style={{ flexDirection: 'row', gap: 7, marginTop: 9, marginBottom: 9, flexWrap: 'wrap' }}&gt;&#10;        &lt;Box style={{ background: '#FFFFFF', border: '1px solid #D6DCE5', borderRadius: 4, padding: '4px 9px' }}&gt;&#10;          &lt;Text style={{ fontSize: 12.5, color: '#0E3F8C', fontWeight: 'bold' }}&gt;class&lt;/Text&gt;&#10;        &lt;/Box&gt;&#10;        &lt;Box style={{ background: '#FFFFFF', border: '1px solid #D6DCE5', borderRadius: 4, padding: '4px 9px' }}&gt;&#10;          &lt;Text style={{ fontSize: 12.5, color: '#0E3F8C', fontWeight: 'bold' }}&gt;attribute&lt;/Text&gt;&#10;        &lt;/Box&gt;&#10;        &lt;Box style={{ background: '#FFFFFF', border: '1px solid #D6DCE5', borderRadius: 4, padding: '4px 9px' }}&gt;&#10;          &lt;Text style={{ fontSize: 12.5, color: '#0E3F8C', fontWeight: 'bold' }}&gt;external actor&lt;/Text&gt;&#10;        &lt;/Box&gt;&#10;        &lt;Box style={{ background: '#FFFFFF', border: '1px solid #D6DCE5', borderRadius: 4, padding: '4px 9px' }}&gt;&#10;          &lt;Text style={{ fontSize: 12.5, color: '#0E3F8C', fontWeight: 'bold' }}&gt;discard&lt;/Text&gt;&#10;        &lt;/Box&gt;&#10;      &lt;/Box&gt;&#10;      &lt;Text style={{ fontSize: 13, color: '#4A5568', lineHeight: 1.55 }}&gt;&#10;        Every word needs a reason that &lt;Text style={{ fontSize: 13, color: '#0E3F8C', fontWeight: 'bold' }}&gt;cites a requirement line&lt;/Text&gt; — or says that no&#10;        requirement mentions it.&#10;      &lt;/Text&gt;&#10;      &lt;Text style={{ fontSize: 12, color: '#8B97A8', marginTop: 9 }}&gt;&#10;        → docs/analysis/noun-scan.md&#10;      &lt;/Text&gt;&#10;    &lt;/Box&gt;&#10;    &lt;Box style={{ flex: 1, background: '#F7F9FC', border: '1px solid #E5E7EB', borderRadius: 10, padding: 16 }}&gt;&#10;      &lt;Box style={{ flexDirection: 'row', alignItems: 'center', gap: 9, marginBottom: 12 }}&gt;&#10;        &lt;Box style={{ width: 26, height: 26, borderRadius: 13, background: '#0E3F8C' }} /&gt;&#10;        &lt;Text style={{ fontSize: 15, color: '#0E3F8C', fontWeight: 'bold' }}&gt;2 · CLASSIFY, THEN DRAW&lt;/Text&gt;&#10;      &lt;/Box&gt;&#10;      &lt;Text style={{ fontSize: 13.5, color: '#4A5568', lineHeight: 1.55 }}&gt;&#10;        Mark every class &lt;Text style={{ fontSize: 13.5, color: '#0E3F8C', fontWeight: 'bold' }}&gt;E&lt;/Text&gt;, &lt;Text style={{ fontSize: 13.5, color: '#0E3F8C', fontWeight: 'bold' }}&gt;B&lt;/Text&gt; or &lt;Text style={{ fontSize: 13.5, color: '#0E3F8C', fontWeight: 'bold' }}&gt;C&lt;/Text&gt;, then draw the first domain model.&#10;      &lt;/Text&gt;&#10;      &lt;Text style={{ fontSize: 13, color: '#4A5568', lineHeight: 1.55, marginTop: 8 }}&gt;&#10;        Target &lt;Text style={{ fontSize: 13, color: '#0E3F8C', fontWeight: 'bold' }}&gt;eight classes or more&lt;/Text&gt;. Associations only — no multiplicities, no&#10;        attributes, no methods.&#10;      &lt;/Text&gt;&#10;      &lt;Box style={{ borderLeft: '3px solid #FFC107', paddingLeft: 10, marginTop: 10 }}&gt;&#10;        &lt;Text style={{ fontSize: 12.5, color: '#4A5568', lineHeight: 1.5 }}&gt;&#10;          Two arguments you must write down: &lt;Text style={{ fontSize: 12.5, color: '#0E3F8C', fontWeight: 'bold' }}&gt;Contraindication&lt;/Text&gt; (FR-1 attaches it to&#10;          the client, not to a product) and &lt;Text style={{ fontSize: 12.5, color: '#0E3F8C', fontWeight: 'bold' }}&gt;AllergyHistory&lt;/Text&gt;.&#10;        &lt;/Text&gt;&#10;      &lt;/Box&gt;&#10;      &lt;Text style={{ fontSize: 12, color: '#8B97A8', marginTop: 9 }}&gt;&#10;        → docs/diagrams/domain-model-v1.puml + PNG&#10;      &lt;/Text&gt;&#10;    &lt;/Box&gt;&#10;  &lt;/Box&gt;&#10;  &lt;Box style={{ flex: 1, padding: '16px 40px 0 40px', flexDirection: 'row', gap: 20 }}&gt;&#10;    &lt;Box style={{ flex: 1, background: '#F0F5FC', border: '1px solid #C8D8EE', borderRadius: 10, padding: 16 }}&gt;&#10;      &lt;Box style={{ flexDirection: 'row', alignItems: 'center', gap: 9, marginBottom: 12 }}&gt;&#10;        &lt;Box style={{ width: 26, height: 26, borderRadius: 13, background: '#1E4FA8' }} /&gt;&#10;        &lt;Text style={{ fontSize: 15, color: '#0E3F8C', fontWeight: 'bold' }}&gt;3 · MAKE ONE OPEN DECISION&lt;/Text&gt;&#10;      &lt;/Box&gt;&#10;      &lt;Text style={{ fontSize: 13.5, color: '#4A5568', lineHeight: 1.55 }}&gt;&#10;        Your requirements left &lt;Text style={{ fontSize: 13.5, color: '#0E3F8C', fontWeight: 'bold' }}&gt;six things unspecified&lt;/Text&gt;. Pick one, decide it,&#10;        &lt;Text style={{ fontSize: 13.5, color: '#0E3F8C', fontWeight: 'bold' }}&gt; model it&lt;/Text&gt;, and say why.&#10;      &lt;/Text&gt;&#10;      &lt;Text style={{ fontSize: 13.5, color: '#D9534F', fontWeight: 'bold', marginTop: 9 }}&gt;&#10;        &quot;We haven't decided&quot; is not a model.&#10;      &lt;/Text&gt;&#10;      &lt;Text style={{ fontSize: 12.5, color: '#4A5568', lineHeight: 1.5, marginTop: 6 }}&gt;&#10;        Does the client see findings before review? What happens on a low-confidence finding? Who may&#10;        correct a client's own concern? Segments? Photo retention? What the client sees when an&#10;        analysis is rejected?&#10;      &lt;/Text&gt;&#10;    &lt;/Box&gt;&#10;    &lt;Box style={{ flex: 1, background: '#F0F5FC', border: '1px solid #C8D8EE', borderRadius: 10, padding: 16 }}&gt;&#10;      &lt;Box style={{ flexDirection: 'row', alignItems: 'center', gap: 9, marginBottom: 12 }}&gt;&#10;        &lt;Box style={{ width: 26, height: 26, borderRadius: 13, background: '#D9534F' }} /&gt;&#10;        &lt;Text style={{ fontSize: 15, color: '#0E3F8C', fontWeight: 'bold' }}&gt;4 · CLOSE OUT M0 — TAG `m0`&lt;/Text&gt;&#10;      &lt;/Box&gt;&#10;      &lt;Text style={{ fontSize: 13.5, color: '#4A5568', lineHeight: 1.55 }}&gt;&#10;        Four artefacts, then one tag, then one command whose output you read.&#10;      &lt;/Text&gt;&#10;      &lt;Box style={{ marginTop: 9 }}&gt;&#10;        &lt;Text style={{ fontSize: 12.5, color: '#4A5568', lineHeight: 1.6 }}&gt;· docs/m0/team-charter.md — four names, four roles&lt;/Text&gt;&#10;        &lt;Text style={{ fontSize: 12.5, color: '#4A5568', lineHeight: 1.6 }}&gt;· docs/m0/stakeholders.md — inside or outside&lt;/Text&gt;&#10;        &lt;Text style={{ fontSize: 12.5, color: '#4A5568', lineHeight: 1.6 }}&gt;· docs/m0/vision.md — including the safety boundary&lt;/Text&gt;&#10;      &lt;/Box&gt;&#10;      &lt;Box style={{ background: '#0E3F8C', borderRadius: 5, padding: '8px 10px', marginTop: 9 }}&gt;&#10;        &lt;Text style={{ fontSize: 11, color: '#C5D4EA', fontFamily: 'Menlo, monospace' }}&gt;git tag -a m0 -m &quot;M0: charter, stakeholders, vision&quot;&lt;/Text&gt;&#10;        &lt;Text style={{ fontSize: 11, color: '#C5D4EA', fontFamily: 'Menlo, monospace' }}&gt;git push origin m0&lt;/Text&gt;&#10;        &lt;Text style={{ fontSize: 11, color: '#FFC107', fontFamily: 'Menlo, monospace' }}&gt;git ls-remote --tags origin&lt;/Text&gt;&#10;      &lt;/Box&gt;&#10;      &lt;Text style={{ fontSize: 12, color: '#8B97A8', marginTop: 8 }}&gt;&#10;        You must see refs/tags/m0. No line = not submitted.&#10;      &lt;/Text&gt;&#10;    &lt;/Box&gt;&#10;  &lt;/Box&gt;&#10;  &lt;Box style={{ height: 54, background: '#0E3F8C', padding: '0 40px', flexDirection: 'row', alignItems: 'center', justifyContent: 'space-between', marginTop: 14 }}&gt;&#10;    &lt;Text style={{ fontSize: 15, color: '#FFFFFF' }}&gt;&#10;      Four people, four lines of evidence. The &lt;Text style={{ fontSize: 15, color: '#FFC107', fontWeight: 'bold' }}&gt;.puml&lt;/Text&gt; is owned by the Recorder — every member defends one class.&#10;    &lt;/Text&gt;&#10;    &lt;Text style={{ fontSize: 14, color: '#7FA2D6' }}&gt;M1 due Sun Nov 01&lt;/Text&gt;&#10;  &lt;/Box&gt;&#10;&lt;/Slide&gt;&#10;"/>
+        <p:cNvPr id="689" name="" descr="&lt;Slide style={{ background: '#FFFFFF', padding: 0 }}&gt;&#10;  &lt;Box style={{ height: 72, background: '#1E4FA8', padding: '0 40px', flexDirection: 'row', alignItems: 'center', justifyContent: 'space-between' }}&gt;&#10;    &lt;Text style={{ fontSize: 15, color: '#B9CDF0', letterSpacing: 1 }}&gt;ISAD · INFORMATION SYSTEMS ANALYSIS &amp;amp; DESIGN&lt;/Text&gt;&#10;    &lt;Text style={{ fontSize: 15, color: '#B9CDF0' }}&gt;W06 · TODAY'S CHECKLIST&lt;/Text&gt;&#10;  &lt;/Box&gt;&#10;  &lt;Box style={{ padding: '13px 40px 0 40px', flexDirection: 'row', alignItems: 'center', justifyContent: 'space-between' }}&gt;&#10;    &lt;Text style={{ fontSize: 29, fontWeight: 'bold', color: '#0E3F8C' }}&gt;What You Finish Before You Leave&lt;/Text&gt;&#10;    &lt;Text style={{ fontSize: 14, color: '#1E4FA8', fontWeight: 'bold' }}&gt;39 / 39&lt;/Text&gt;&#10;  &lt;/Box&gt;&#10;  &lt;Box style={{ flex: 1, padding: '8px 40px 0 40px', flexDirection: 'row', gap: 20 }}&gt;&#10;    &lt;Box style={{ flex: 1, background: '#F7F9FC', border: '1px solid #E5E7EB', borderRadius: 10, padding: 16 }}&gt;&#10;      &lt;Box style={{ flexDirection: 'row', alignItems: 'center', gap: 9, marginBottom: 12 }}&gt;&#10;        &lt;Box style={{ width: 26, height: 26, borderRadius: 13, background: '#0E3F8C' }} /&gt;&#10;        &lt;Text style={{ fontSize: 15, color: '#0E3F8C', fontWeight: 'bold' }}&gt;1 · SCAN YOUR OWN NOUNS&lt;/Text&gt;&#10;      &lt;/Box&gt;&#10;      &lt;Text style={{ fontSize: 13.5, color: '#4A5568', lineHeight: 1.55 }}&gt;&#10;        About &lt;Text style={{ fontSize: 13.5, color: '#0E3F8C', fontWeight: 'bold' }}&gt;24 words&lt;/Text&gt; from your own FR-1…FR-12, into four buckets:&#10;      &lt;/Text&gt;&#10;      &lt;Box style={{ flexDirection: 'row', gap: 7, marginTop: 9, marginBottom: 9, flexWrap: 'wrap' }}&gt;&#10;        &lt;Box style={{ background: '#FFFFFF', border: '1px solid #D6DCE5', borderRadius: 4, padding: '4px 9px' }}&gt;&#10;          &lt;Text style={{ fontSize: 12.5, color: '#0E3F8C', fontWeight: 'bold' }}&gt;class&lt;/Text&gt;&#10;        &lt;/Box&gt;&#10;        &lt;Box style={{ background: '#FFFFFF', border: '1px solid #D6DCE5', borderRadius: 4, padding: '4px 9px' }}&gt;&#10;          &lt;Text style={{ fontSize: 12.5, color: '#0E3F8C', fontWeight: 'bold' }}&gt;attribute&lt;/Text&gt;&#10;        &lt;/Box&gt;&#10;        &lt;Box style={{ background: '#FFFFFF', border: '1px solid #D6DCE5', borderRadius: 4, padding: '4px 9px' }}&gt;&#10;          &lt;Text style={{ fontSize: 12.5, color: '#0E3F8C', fontWeight: 'bold' }}&gt;external actor&lt;/Text&gt;&#10;        &lt;/Box&gt;&#10;        &lt;Box style={{ background: '#FFFFFF', border: '1px solid #D6DCE5', borderRadius: 4, padding: '4px 9px' }}&gt;&#10;          &lt;Text style={{ fontSize: 12.5, color: '#0E3F8C', fontWeight: 'bold' }}&gt;discard&lt;/Text&gt;&#10;        &lt;/Box&gt;&#10;      &lt;/Box&gt;&#10;      &lt;Text style={{ fontSize: 13, color: '#4A5568', lineHeight: 1.55 }}&gt;&#10;        Every word needs a reason that &lt;Text style={{ fontSize: 13, color: '#0E3F8C', fontWeight: 'bold' }}&gt;cites a requirement line&lt;/Text&gt; — or says that no&#10;        requirement mentions it.&#10;      &lt;/Text&gt;&#10;      &lt;Text style={{ fontSize: 12, color: '#8B97A8', marginTop: 9 }}&gt;&#10;        → docs/analysis/noun-scan.md&#10;      &lt;/Text&gt;&#10;    &lt;/Box&gt;&#10;    &lt;Box style={{ flex: 1, background: '#F7F9FC', border: '1px solid #E5E7EB', borderRadius: 10, padding: 16 }}&gt;&#10;      &lt;Box style={{ flexDirection: 'row', alignItems: 'center', gap: 9, marginBottom: 12 }}&gt;&#10;        &lt;Box style={{ width: 26, height: 26, borderRadius: 13, background: '#0E3F8C' }} /&gt;&#10;        &lt;Text style={{ fontSize: 15, color: '#0E3F8C', fontWeight: 'bold' }}&gt;2 · CLASSIFY, THEN DRAW&lt;/Text&gt;&#10;      &lt;/Box&gt;&#10;      &lt;Text style={{ fontSize: 13.5, color: '#4A5568', lineHeight: 1.55 }}&gt;&#10;        Mark every class &lt;Text style={{ fontSize: 13.5, color: '#0E3F8C', fontWeight: 'bold' }}&gt;E&lt;/Text&gt;, &lt;Text style={{ fontSize: 13.5, color: '#0E3F8C', fontWeight: 'bold' }}&gt;B&lt;/Text&gt; or &lt;Text style={{ fontSize: 13.5, color: '#0E3F8C', fontWeight: 'bold' }}&gt;C&lt;/Text&gt;, then draw the first domain model.&#10;      &lt;/Text&gt;&#10;      &lt;Text style={{ fontSize: 13, color: '#4A5568', lineHeight: 1.55, marginTop: 8 }}&gt;&#10;        Target &lt;Text style={{ fontSize: 13, color: '#0E3F8C', fontWeight: 'bold' }}&gt;eight classes or more&lt;/Text&gt;. Associations only — no multiplicities, no&#10;        attributes, no methods.&#10;      &lt;/Text&gt;&#10;      &lt;Box style={{ borderLeft: '3px solid #FFC107', paddingLeft: 10, marginTop: 10 }}&gt;&#10;        &lt;Text style={{ fontSize: 12.5, color: '#4A5568', lineHeight: 1.5 }}&gt;&#10;          Two arguments you must write down: &lt;Text style={{ fontSize: 12.5, color: '#0E3F8C', fontWeight: 'bold' }}&gt;Contraindication&lt;/Text&gt; (FR-1 attaches it to&#10;          the client, not to a product) and &lt;Text style={{ fontSize: 12.5, color: '#0E3F8C', fontWeight: 'bold' }}&gt;AllergyHistory&lt;/Text&gt;.&#10;        &lt;/Text&gt;&#10;      &lt;/Box&gt;&#10;      &lt;Text style={{ fontSize: 12, color: '#8B97A8', marginTop: 9 }}&gt;&#10;        → docs/diagrams/domain-model-v1.puml + PNG&#10;      &lt;/Text&gt;&#10;    &lt;/Box&gt;&#10;  &lt;/Box&gt;&#10;  &lt;Box style={{ flex: 1, padding: '16px 40px 0 40px', flexDirection: 'row', gap: 20 }}&gt;&#10;    &lt;Box style={{ flex: 1, background: '#F0F5FC', border: '1px solid #C8D8EE', borderRadius: 10, padding: 16 }}&gt;&#10;      &lt;Box style={{ flexDirection: 'row', alignItems: 'center', gap: 9, marginBottom: 12 }}&gt;&#10;        &lt;Box style={{ width: 26, height: 26, borderRadius: 13, background: '#1E4FA8' }} /&gt;&#10;        &lt;Text style={{ fontSize: 15, color: '#0E3F8C', fontWeight: 'bold' }}&gt;3 · MAKE ONE OPEN DECISION&lt;/Text&gt;&#10;      &lt;/Box&gt;&#10;      &lt;Text style={{ fontSize: 13.5, color: '#4A5568', lineHeight: 1.55 }}&gt;&#10;        Your requirements left &lt;Text style={{ fontSize: 13.5, color: '#0E3F8C', fontWeight: 'bold' }}&gt;six things unspecified&lt;/Text&gt;. Pick one, decide it,&#10;        &lt;Text style={{ fontSize: 13.5, color: '#0E3F8C', fontWeight: 'bold' }}&gt; model it&lt;/Text&gt;, and say why.&#10;      &lt;/Text&gt;&#10;      &lt;Text style={{ fontSize: 13.5, color: '#D9534F', fontWeight: 'bold', marginTop: 9 }}&gt;&#10;        &quot;We haven't decided&quot; is not a model.&#10;      &lt;/Text&gt;&#10;      &lt;Text style={{ fontSize: 12.5, color: '#4A5568', lineHeight: 1.5, marginTop: 6 }}&gt;&#10;        Does the client see findings before review? What happens on a low-confidence finding? Who may&#10;        correct a client's own concern? Segments? Photo retention? What the client sees when an&#10;        analysis is rejected?&#10;      &lt;/Text&gt;&#10;    &lt;/Box&gt;&#10;    &lt;Box style={{ flex: 1, background: '#F0F5FC', border: '1px solid #C8D8EE', borderRadius: 10, padding: 16 }}&gt;&#10;      &lt;Box style={{ flexDirection: 'row', alignItems: 'center', gap: 9, marginBottom: 12 }}&gt;&#10;        &lt;Box style={{ width: 26, height: 26, borderRadius: 13, background: '#D9534F' }} /&gt;&#10;        &lt;Text style={{ fontSize: 15, color: '#0E3F8C', fontWeight: 'bold' }}&gt;4 · CLOSE OUT M0 — TAG `m0`&lt;/Text&gt;&#10;      &lt;/Box&gt;&#10;      &lt;Text style={{ fontSize: 13.5, color: '#4A5568', lineHeight: 1.55 }}&gt;&#10;        Four artefacts, then one tag, then one command whose output you read.&#10;      &lt;/Text&gt;&#10;      &lt;Box style={{ marginTop: 9 }}&gt;&#10;        &lt;Text style={{ fontSize: 12.5, color: '#4A5568', lineHeight: 1.6 }}&gt;· TEAM-CHARTER.md — four names, four roles&lt;/Text&gt;&#10;        &lt;Text style={{ fontSize: 12.5, color: '#4A5568', lineHeight: 1.6 }}&gt;· 01-requirements/stakeholder-list.md — inside or outside&lt;/Text&gt;&#10;        &lt;Text style={{ fontSize: 12.5, color: '#4A5568', lineHeight: 1.6 }}&gt;· 01-requirements/vision.md — including the safety boundary&lt;/Text&gt;&#10;      &lt;/Box&gt;&#10;      &lt;Box style={{ background: '#0E3F8C', borderRadius: 5, padding: '8px 10px', marginTop: 9 }}&gt;&#10;        &lt;Text style={{ fontSize: 11, color: '#C5D4EA', fontFamily: 'Menlo, monospace' }}&gt;git add TEAM-CHARTER.md 01-requirements/ docs/analysis/ docs/diagrams/&#10;git commit -m &quot;M0: charter, stakeholders, vision; domain model v1&quot;&#10;git push origin main&#10;git tag -a m0 -m &quot;M0: charter, stakeholders, vision&quot;&lt;/Text&gt;&#10;        &lt;Text style={{ fontSize: 11, color: '#C5D4EA', fontFamily: 'Menlo, monospace' }}&gt;git push origin m0&lt;/Text&gt;&#10;        &lt;Text style={{ fontSize: 11, color: '#FFC107', fontFamily: 'Menlo, monospace' }}&gt;git ls-remote --tags origin&lt;/Text&gt;&#10;      &lt;/Box&gt;&#10;      &lt;Text style={{ fontSize: 12, color: '#8B97A8', marginTop: 8 }}&gt;&#10;        You must see refs/tags/m0. No line = not submitted.&#10;      &lt;/Text&gt;&#10;    &lt;/Box&gt;&#10;  &lt;/Box&gt;&#10;  &lt;Box style={{ height: 54, background: '#0E3F8C', padding: '0 40px', flexDirection: 'row', alignItems: 'center', justifyContent: 'space-between', marginTop: 14 }}&gt;&#10;    &lt;Text style={{ fontSize: 15, color: '#FFFFFF' }}&gt;&#10;      Four people, four lines of evidence. The &lt;Text style={{ fontSize: 15, color: '#FFC107', fontWeight: 'bold' }}&gt;.puml&lt;/Text&gt; is owned by the Recorder — every member defends one class.&#10;    &lt;/Text&gt;&#10;    &lt;Text style={{ fontSize: 14, color: '#7FA2D6' }}&gt;M1 due Sun Nov 01&lt;/Text&gt;&#10;  &lt;/Box&gt;&#10;&lt;/Slide&gt;&#10;"/>
         <p:cNvGrpSpPr/>
         <p:nvPr/>
       </p:nvGrpSpPr>
@@ -31466,11 +31466,11 @@
         <p:spPr>
           <a:xfrm rot="0" flipH="0" flipV="0">
             <a:off x="381000" y="1219200"/>
-            <a:ext cx="5619750" cy="2152650"/>
+            <a:ext cx="5619750" cy="2028825"/>
           </a:xfrm>
           <a:prstGeom prst="roundRect">
             <a:avLst>
-              <a:gd name="adj" fmla="val 4425"/>
+              <a:gd name="adj" fmla="val 4695"/>
             </a:avLst>
           </a:prstGeom>
           <a:solidFill>
@@ -31969,11 +31969,11 @@
         <p:spPr>
           <a:xfrm rot="0" flipH="0" flipV="0">
             <a:off x="6191250" y="1219200"/>
-            <a:ext cx="5619750" cy="2152650"/>
+            <a:ext cx="5619750" cy="2028825"/>
           </a:xfrm>
           <a:prstGeom prst="roundRect">
             <a:avLst>
-              <a:gd name="adj" fmla="val 4425"/>
+              <a:gd name="adj" fmla="val 4695"/>
             </a:avLst>
           </a:prstGeom>
           <a:solidFill>
@@ -32362,12 +32362,12 @@
         </p:nvSpPr>
         <p:spPr>
           <a:xfrm rot="0" flipH="0" flipV="0">
-            <a:off x="381000" y="3524250"/>
-            <a:ext cx="5619750" cy="2686050"/>
+            <a:off x="381000" y="3400425"/>
+            <a:ext cx="5619750" cy="2809875"/>
           </a:xfrm>
           <a:prstGeom prst="roundRect">
             <a:avLst>
-              <a:gd name="adj" fmla="val 3546"/>
+              <a:gd name="adj" fmla="val 3390"/>
             </a:avLst>
           </a:prstGeom>
           <a:solidFill>
@@ -32393,7 +32393,7 @@
         </p:nvSpPr>
         <p:spPr>
           <a:xfrm rot="0" flipH="0" flipV="0">
-            <a:off x="533400" y="3676650"/>
+            <a:off x="533400" y="3552825"/>
             <a:ext cx="247650" cy="247650"/>
           </a:xfrm>
           <a:prstGeom prst="roundRect">
@@ -32419,7 +32419,7 @@
         </p:nvSpPr>
         <p:spPr>
           <a:xfrm rot="0" flipH="0" flipV="0">
-            <a:off x="866775" y="3714750"/>
+            <a:off x="866775" y="3590925"/>
             <a:ext cx="2152650" cy="171450"/>
           </a:xfrm>
           <a:prstGeom prst="rect"/>
@@ -32454,7 +32454,7 @@
         </p:nvSpPr>
         <p:spPr>
           <a:xfrm rot="0" flipH="0" flipV="0">
-            <a:off x="533400" y="4038600"/>
+            <a:off x="533400" y="3914775"/>
             <a:ext cx="5314950" cy="247650"/>
           </a:xfrm>
           <a:prstGeom prst="rect"/>
@@ -32529,7 +32529,7 @@
         </p:nvSpPr>
         <p:spPr>
           <a:xfrm rot="0" flipH="0" flipV="0">
-            <a:off x="533400" y="4371975"/>
+            <a:off x="533400" y="4248150"/>
             <a:ext cx="5314950" cy="161925"/>
           </a:xfrm>
           <a:prstGeom prst="rect"/>
@@ -32564,7 +32564,7 @@
         </p:nvSpPr>
         <p:spPr>
           <a:xfrm rot="0" flipH="0" flipV="0">
-            <a:off x="533400" y="4591050"/>
+            <a:off x="533400" y="4467225"/>
             <a:ext cx="5314950" cy="647700"/>
           </a:xfrm>
           <a:prstGeom prst="rect"/>
@@ -32601,12 +32601,12 @@
         </p:nvSpPr>
         <p:spPr>
           <a:xfrm rot="0" flipH="0" flipV="0">
-            <a:off x="6191250" y="3524250"/>
-            <a:ext cx="5619750" cy="2686050"/>
+            <a:off x="6191250" y="3400425"/>
+            <a:ext cx="5619750" cy="2809875"/>
           </a:xfrm>
           <a:prstGeom prst="roundRect">
             <a:avLst>
-              <a:gd name="adj" fmla="val 3546"/>
+              <a:gd name="adj" fmla="val 3390"/>
             </a:avLst>
           </a:prstGeom>
           <a:solidFill>
@@ -32632,7 +32632,7 @@
         </p:nvSpPr>
         <p:spPr>
           <a:xfrm rot="0" flipH="0" flipV="0">
-            <a:off x="6343650" y="3676650"/>
+            <a:off x="6343650" y="3552825"/>
             <a:ext cx="247650" cy="247650"/>
           </a:xfrm>
           <a:prstGeom prst="roundRect">
@@ -32658,7 +32658,7 @@
         </p:nvSpPr>
         <p:spPr>
           <a:xfrm rot="0" flipH="0" flipV="0">
-            <a:off x="6677025" y="3714750"/>
+            <a:off x="6677025" y="3590925"/>
             <a:ext cx="2133600" cy="171450"/>
           </a:xfrm>
           <a:prstGeom prst="rect"/>
@@ -32693,7 +32693,7 @@
         </p:nvSpPr>
         <p:spPr>
           <a:xfrm rot="0" flipH="0" flipV="0">
-            <a:off x="6343650" y="4038600"/>
+            <a:off x="6343650" y="3914775"/>
             <a:ext cx="5314950" cy="247650"/>
           </a:xfrm>
           <a:prstGeom prst="rect"/>
@@ -32728,7 +32728,7 @@
         </p:nvSpPr>
         <p:spPr>
           <a:xfrm rot="0" flipH="0" flipV="0">
-            <a:off x="6343650" y="4371975"/>
+            <a:off x="6343650" y="4248150"/>
             <a:ext cx="5314950" cy="228600"/>
           </a:xfrm>
           <a:prstGeom prst="rect"/>
@@ -32749,7 +32749,7 @@
                 <a:latin typeface="Microsoft YaHei"/>
                 <a:ea typeface="Microsoft YaHei"/>
               </a:rPr>
-              <a:t>· docs/m0/team-charter.md — four names, four roles</a:t>
+              <a:t>· TEAM-CHARTER.md — four names, four roles</a:t>
             </a:r>
             <a:endParaRPr/>
           </a:p>
@@ -32763,7 +32763,7 @@
         </p:nvSpPr>
         <p:spPr>
           <a:xfrm rot="0" flipH="0" flipV="0">
-            <a:off x="6343650" y="4600575"/>
+            <a:off x="6343650" y="4476750"/>
             <a:ext cx="5314950" cy="228600"/>
           </a:xfrm>
           <a:prstGeom prst="rect"/>
@@ -32784,7 +32784,7 @@
                 <a:latin typeface="Microsoft YaHei"/>
                 <a:ea typeface="Microsoft YaHei"/>
               </a:rPr>
-              <a:t>· docs/m0/stakeholders.md — inside or outside</a:t>
+              <a:t>· 01-requirements/stakeholder-list.md — inside or outside</a:t>
             </a:r>
             <a:endParaRPr/>
           </a:p>
@@ -32798,7 +32798,7 @@
         </p:nvSpPr>
         <p:spPr>
           <a:xfrm rot="0" flipH="0" flipV="0">
-            <a:off x="6343650" y="4829175"/>
+            <a:off x="6343650" y="4705350"/>
             <a:ext cx="5314950" cy="228600"/>
           </a:xfrm>
           <a:prstGeom prst="rect"/>
@@ -32819,7 +32819,7 @@
                 <a:latin typeface="Microsoft YaHei"/>
                 <a:ea typeface="Microsoft YaHei"/>
               </a:rPr>
-              <a:t>· docs/m0/vision.md — including the safety boundary</a:t>
+              <a:t>· 01-requirements/vision.md — including the safety boundary</a:t>
             </a:r>
             <a:endParaRPr/>
           </a:p>
@@ -32833,12 +32833,12 @@
         </p:nvSpPr>
         <p:spPr>
           <a:xfrm rot="0" flipH="0" flipV="0">
-            <a:off x="6343650" y="5143500"/>
-            <a:ext cx="5314950" cy="552450"/>
+            <a:off x="6343650" y="5019675"/>
+            <a:ext cx="5314950" cy="800100"/>
           </a:xfrm>
           <a:prstGeom prst="roundRect">
             <a:avLst>
-              <a:gd name="adj" fmla="val 8621"/>
+              <a:gd name="adj" fmla="val 5952"/>
             </a:avLst>
           </a:prstGeom>
           <a:solidFill>
@@ -32859,13 +32859,15 @@
         </p:nvSpPr>
         <p:spPr>
           <a:xfrm rot="0" flipH="0" flipV="0">
-            <a:off x="6438900" y="5219700"/>
-            <a:ext cx="5124450" cy="133350"/>
-          </a:xfrm>
-          <a:prstGeom prst="rect"/>
-        </p:spPr>
-        <p:txBody>
-          <a:bodyPr wrap="none" lIns="0" tIns="0" rIns="0" bIns="0"/>
+            <a:off x="6438900" y="5095875"/>
+            <a:ext cx="5124450" cy="381000"/>
+          </a:xfrm>
+          <a:prstGeom prst="rect"/>
+        </p:spPr>
+        <p:txBody>
+          <a:bodyPr wrap="square" lIns="0" tIns="0" rIns="0" bIns="0">
+            <a:normAutofit/>
+          </a:bodyPr>
           <a:p>
             <a:pPr>
               <a:lnSpc>
@@ -32880,7 +32882,7 @@
                 <a:latin typeface="Menlo"/>
                 <a:ea typeface="Menlo"/>
               </a:rPr>
-              <a:t>git tag -a m0 -m "M0: charter, stakeholders, vision"</a:t>
+              <a:t>git add TEAM-CHARTER.md 01-requirements/ docs/analysis/ docs/diagrams/ git commit -m "M0: charter, stakeholders, vision; domain model v1" git push origin main git tag -a m0 -m "M0: charter, stakeholders, vision"</a:t>
             </a:r>
             <a:endParaRPr/>
           </a:p>
@@ -32894,7 +32896,7 @@
         </p:nvSpPr>
         <p:spPr>
           <a:xfrm rot="0" flipH="0" flipV="0">
-            <a:off x="6438900" y="5353050"/>
+            <a:off x="6438900" y="5476875"/>
             <a:ext cx="5124450" cy="133350"/>
           </a:xfrm>
           <a:prstGeom prst="rect"/>
@@ -32929,7 +32931,7 @@
         </p:nvSpPr>
         <p:spPr>
           <a:xfrm rot="0" flipH="0" flipV="0">
-            <a:off x="6438900" y="5486400"/>
+            <a:off x="6438900" y="5610225"/>
             <a:ext cx="5124450" cy="133350"/>
           </a:xfrm>
           <a:prstGeom prst="rect"/>
@@ -32964,7 +32966,7 @@
         </p:nvSpPr>
         <p:spPr>
           <a:xfrm rot="0" flipH="0" flipV="0">
-            <a:off x="6343650" y="5772150"/>
+            <a:off x="6343650" y="5895975"/>
             <a:ext cx="5314950" cy="142875"/>
           </a:xfrm>
           <a:prstGeom prst="rect"/>
